--- a/Clase01/Unidad 1 Transformacion Digital en la Industria 4.0.pptx
+++ b/Clase01/Unidad 1 Transformacion Digital en la Industria 4.0.pptx
@@ -5,31 +5,31 @@
     <p:sldMasterId id="2147483648" r:id="rId1"/>
   </p:sldMasterIdLst>
   <p:notesMasterIdLst>
-    <p:notesMasterId r:id="rId4"/>
+    <p:notesMasterId r:id="rId24"/>
   </p:notesMasterIdLst>
   <p:sldIdLst>
-    <p:sldId id="266" r:id="rId3"/>
-    <p:sldId id="264" r:id="rId5"/>
-    <p:sldId id="265" r:id="rId6"/>
-    <p:sldId id="267" r:id="rId7"/>
-    <p:sldId id="268" r:id="rId8"/>
-    <p:sldId id="260" r:id="rId9"/>
-    <p:sldId id="269" r:id="rId10"/>
-    <p:sldId id="270" r:id="rId11"/>
-    <p:sldId id="286" r:id="rId12"/>
-    <p:sldId id="288" r:id="rId13"/>
-    <p:sldId id="289" r:id="rId14"/>
-    <p:sldId id="262" r:id="rId15"/>
-    <p:sldId id="281" r:id="rId16"/>
-    <p:sldId id="273" r:id="rId17"/>
-    <p:sldId id="274" r:id="rId18"/>
-    <p:sldId id="278" r:id="rId19"/>
-    <p:sldId id="279" r:id="rId20"/>
-    <p:sldId id="280" r:id="rId21"/>
-    <p:sldId id="283" r:id="rId22"/>
-    <p:sldId id="285" r:id="rId23"/>
-    <p:sldId id="284" r:id="rId24"/>
-    <p:sldId id="257" r:id="rId25"/>
+    <p:sldId id="266" r:id="rId2"/>
+    <p:sldId id="264" r:id="rId3"/>
+    <p:sldId id="265" r:id="rId4"/>
+    <p:sldId id="267" r:id="rId5"/>
+    <p:sldId id="268" r:id="rId6"/>
+    <p:sldId id="260" r:id="rId7"/>
+    <p:sldId id="269" r:id="rId8"/>
+    <p:sldId id="270" r:id="rId9"/>
+    <p:sldId id="286" r:id="rId10"/>
+    <p:sldId id="288" r:id="rId11"/>
+    <p:sldId id="289" r:id="rId12"/>
+    <p:sldId id="262" r:id="rId13"/>
+    <p:sldId id="281" r:id="rId14"/>
+    <p:sldId id="273" r:id="rId15"/>
+    <p:sldId id="274" r:id="rId16"/>
+    <p:sldId id="278" r:id="rId17"/>
+    <p:sldId id="279" r:id="rId18"/>
+    <p:sldId id="280" r:id="rId19"/>
+    <p:sldId id="283" r:id="rId20"/>
+    <p:sldId id="285" r:id="rId21"/>
+    <p:sldId id="284" r:id="rId22"/>
+    <p:sldId id="257" r:id="rId23"/>
   </p:sldIdLst>
   <p:sldSz cx="12192000" cy="6858000"/>
   <p:notesSz cx="6858000" cy="9144000"/>
@@ -128,6 +128,11 @@
       </a:defRPr>
     </a:lvl9pPr>
   </p:defaultTextStyle>
+  <p:extLst>
+    <p:ext uri="{EFAFB233-063F-42B5-8137-9DF3F51BA10A}">
+      <p15:sldGuideLst xmlns:p15="http://schemas.microsoft.com/office/powerpoint/2012/main"/>
+    </p:ext>
+  </p:extLst>
 </p:presentation>
 </file>
 
@@ -213,6 +218,7 @@
           <a:p>
             <a:fld id="{3EFD42F7-718C-4B98-AAEC-167E6DDD60A7}" type="datetimeFigureOut">
               <a:rPr lang="en-US" smtClean="0"/>
+              <a:t>6/9/2026</a:t>
             </a:fld>
             <a:endParaRPr lang="en-US"/>
           </a:p>
@@ -279,7 +285,6 @@
               <a:rPr lang="en-US" smtClean="0"/>
               <a:t>Click to edit Master text styles</a:t>
             </a:r>
-            <a:endParaRPr lang="en-US" smtClean="0"/>
           </a:p>
           <a:p>
             <a:pPr lvl="1"/>
@@ -287,7 +292,6 @@
               <a:rPr lang="en-US" smtClean="0"/>
               <a:t>Second level</a:t>
             </a:r>
-            <a:endParaRPr lang="en-US" smtClean="0"/>
           </a:p>
           <a:p>
             <a:pPr lvl="2"/>
@@ -295,7 +299,6 @@
               <a:rPr lang="en-US" smtClean="0"/>
               <a:t>Third level</a:t>
             </a:r>
-            <a:endParaRPr lang="en-US" smtClean="0"/>
           </a:p>
           <a:p>
             <a:pPr lvl="3"/>
@@ -303,7 +306,6 @@
               <a:rPr lang="en-US" smtClean="0"/>
               <a:t>Fourth level</a:t>
             </a:r>
-            <a:endParaRPr lang="en-US" smtClean="0"/>
           </a:p>
           <a:p>
             <a:pPr lvl="4"/>
@@ -375,6 +377,7 @@
           <a:p>
             <a:fld id="{21B2AA4F-B828-4D7C-AFD3-893933DAFCB4}" type="slidenum">
               <a:rPr lang="en-US" smtClean="0"/>
+              <a:t>‹Nº›</a:t>
             </a:fld>
             <a:endParaRPr lang="en-US"/>
           </a:p>
@@ -479,11 +482,11 @@
 </file>
 
 <file path=ppt/notesSlides/notesSlide1.xml><?xml version="1.0" encoding="utf-8"?>
-<p:notes xmlns:a="http://schemas.openxmlformats.org/drawingml/2006/main" xmlns:r="http://schemas.openxmlformats.org/officeDocument/2006/relationships" xmlns:p="http://schemas.openxmlformats.org/presentationml/2006/main" showMasterPhAnim="0" showMasterSp="0">
+<p:notes xmlns:a="http://schemas.openxmlformats.org/drawingml/2006/main" xmlns:r="http://schemas.openxmlformats.org/officeDocument/2006/relationships" xmlns:p="http://schemas.openxmlformats.org/presentationml/2006/main" showMasterSp="0" showMasterPhAnim="0">
   <p:cSld>
     <p:spTree>
       <p:nvGrpSpPr>
-        <p:cNvPr id="264" name="Shape 264"/>
+        <p:cNvPr id="1" name="Shape 264"/>
         <p:cNvGrpSpPr/>
         <p:nvPr/>
       </p:nvGrpSpPr>
@@ -498,14 +501,16 @@
       <p:sp>
         <p:nvSpPr>
           <p:cNvPr id="265" name="Google Shape;265;g3b53643a157_0_244:notes"/>
-          <p:cNvSpPr/>
+          <p:cNvSpPr>
+            <a:spLocks noGrp="1" noRot="1" noChangeAspect="1"/>
+          </p:cNvSpPr>
           <p:nvPr>
             <p:ph type="sldImg" idx="2"/>
           </p:nvPr>
         </p:nvSpPr>
         <p:spPr>
           <a:xfrm>
-            <a:off x="381300" y="685800"/>
+            <a:off x="381000" y="685800"/>
             <a:ext cx="6096000" cy="3429000"/>
           </a:xfrm>
           <a:custGeom>
@@ -537,7 +542,9 @@
       <p:sp>
         <p:nvSpPr>
           <p:cNvPr id="266" name="Google Shape;266;g3b53643a157_0_244:notes"/>
-          <p:cNvSpPr txBox="1"/>
+          <p:cNvSpPr txBox="1">
+            <a:spLocks noGrp="1"/>
+          </p:cNvSpPr>
           <p:nvPr>
             <p:ph type="body" idx="1"/>
           </p:nvPr>
@@ -566,6 +573,7 @@
               </a:spcAft>
               <a:buNone/>
             </a:pPr>
+            <a:endParaRPr/>
           </a:p>
         </p:txBody>
       </p:sp>
@@ -578,11 +586,11 @@
 </file>
 
 <file path=ppt/notesSlides/notesSlide10.xml><?xml version="1.0" encoding="utf-8"?>
-<p:notes xmlns:a="http://schemas.openxmlformats.org/drawingml/2006/main" xmlns:r="http://schemas.openxmlformats.org/officeDocument/2006/relationships" xmlns:p="http://schemas.openxmlformats.org/presentationml/2006/main" showMasterPhAnim="0" showMasterSp="0">
+<p:notes xmlns:a="http://schemas.openxmlformats.org/drawingml/2006/main" xmlns:r="http://schemas.openxmlformats.org/officeDocument/2006/relationships" xmlns:p="http://schemas.openxmlformats.org/presentationml/2006/main" showMasterSp="0" showMasterPhAnim="0">
   <p:cSld>
     <p:spTree>
       <p:nvGrpSpPr>
-        <p:cNvPr id="237" name="Shape 237"/>
+        <p:cNvPr id="1" name="Shape 237"/>
         <p:cNvGrpSpPr/>
         <p:nvPr/>
       </p:nvGrpSpPr>
@@ -597,7 +605,9 @@
       <p:sp>
         <p:nvSpPr>
           <p:cNvPr id="238" name="Google Shape;238;g3b53643a157_0_38:notes"/>
-          <p:cNvSpPr/>
+          <p:cNvSpPr>
+            <a:spLocks noGrp="1" noRot="1" noChangeAspect="1"/>
+          </p:cNvSpPr>
           <p:nvPr>
             <p:ph type="sldImg" idx="2"/>
           </p:nvPr>
@@ -636,7 +646,9 @@
       <p:sp>
         <p:nvSpPr>
           <p:cNvPr id="239" name="Google Shape;239;g3b53643a157_0_38:notes"/>
-          <p:cNvSpPr txBox="1"/>
+          <p:cNvSpPr txBox="1">
+            <a:spLocks noGrp="1"/>
+          </p:cNvSpPr>
           <p:nvPr>
             <p:ph type="body" idx="1"/>
           </p:nvPr>
@@ -665,6 +677,7 @@
               </a:spcAft>
               <a:buNone/>
             </a:pPr>
+            <a:endParaRPr/>
           </a:p>
         </p:txBody>
       </p:sp>
@@ -677,11 +690,11 @@
 </file>
 
 <file path=ppt/notesSlides/notesSlide11.xml><?xml version="1.0" encoding="utf-8"?>
-<p:notes xmlns:a="http://schemas.openxmlformats.org/drawingml/2006/main" xmlns:r="http://schemas.openxmlformats.org/officeDocument/2006/relationships" xmlns:p="http://schemas.openxmlformats.org/presentationml/2006/main" showMasterPhAnim="0" showMasterSp="0">
+<p:notes xmlns:a="http://schemas.openxmlformats.org/drawingml/2006/main" xmlns:r="http://schemas.openxmlformats.org/officeDocument/2006/relationships" xmlns:p="http://schemas.openxmlformats.org/presentationml/2006/main" showMasterSp="0" showMasterPhAnim="0">
   <p:cSld>
     <p:spTree>
       <p:nvGrpSpPr>
-        <p:cNvPr id="237" name="Shape 237"/>
+        <p:cNvPr id="1" name="Shape 237"/>
         <p:cNvGrpSpPr/>
         <p:nvPr/>
       </p:nvGrpSpPr>
@@ -696,7 +709,9 @@
       <p:sp>
         <p:nvSpPr>
           <p:cNvPr id="238" name="Google Shape;238;g3b53643a157_0_38:notes"/>
-          <p:cNvSpPr/>
+          <p:cNvSpPr>
+            <a:spLocks noGrp="1" noRot="1" noChangeAspect="1"/>
+          </p:cNvSpPr>
           <p:nvPr>
             <p:ph type="sldImg" idx="2"/>
           </p:nvPr>
@@ -735,7 +750,9 @@
       <p:sp>
         <p:nvSpPr>
           <p:cNvPr id="239" name="Google Shape;239;g3b53643a157_0_38:notes"/>
-          <p:cNvSpPr txBox="1"/>
+          <p:cNvSpPr txBox="1">
+            <a:spLocks noGrp="1"/>
+          </p:cNvSpPr>
           <p:nvPr>
             <p:ph type="body" idx="1"/>
           </p:nvPr>
@@ -764,6 +781,7 @@
               </a:spcAft>
               <a:buNone/>
             </a:pPr>
+            <a:endParaRPr/>
           </a:p>
         </p:txBody>
       </p:sp>
@@ -776,11 +794,11 @@
 </file>
 
 <file path=ppt/notesSlides/notesSlide12.xml><?xml version="1.0" encoding="utf-8"?>
-<p:notes xmlns:a="http://schemas.openxmlformats.org/drawingml/2006/main" xmlns:r="http://schemas.openxmlformats.org/officeDocument/2006/relationships" xmlns:p="http://schemas.openxmlformats.org/presentationml/2006/main" showMasterPhAnim="0" showMasterSp="0">
+<p:notes xmlns:a="http://schemas.openxmlformats.org/drawingml/2006/main" xmlns:r="http://schemas.openxmlformats.org/officeDocument/2006/relationships" xmlns:p="http://schemas.openxmlformats.org/presentationml/2006/main" showMasterSp="0" showMasterPhAnim="0">
   <p:cSld>
     <p:spTree>
       <p:nvGrpSpPr>
-        <p:cNvPr id="237" name="Shape 237"/>
+        <p:cNvPr id="1" name="Shape 237"/>
         <p:cNvGrpSpPr/>
         <p:nvPr/>
       </p:nvGrpSpPr>
@@ -795,7 +813,9 @@
       <p:sp>
         <p:nvSpPr>
           <p:cNvPr id="238" name="Google Shape;238;g3b53643a157_0_38:notes"/>
-          <p:cNvSpPr/>
+          <p:cNvSpPr>
+            <a:spLocks noGrp="1" noRot="1" noChangeAspect="1"/>
+          </p:cNvSpPr>
           <p:nvPr>
             <p:ph type="sldImg" idx="2"/>
           </p:nvPr>
@@ -834,7 +854,9 @@
       <p:sp>
         <p:nvSpPr>
           <p:cNvPr id="239" name="Google Shape;239;g3b53643a157_0_38:notes"/>
-          <p:cNvSpPr txBox="1"/>
+          <p:cNvSpPr txBox="1">
+            <a:spLocks noGrp="1"/>
+          </p:cNvSpPr>
           <p:nvPr>
             <p:ph type="body" idx="1"/>
           </p:nvPr>
@@ -863,6 +885,7 @@
               </a:spcAft>
               <a:buNone/>
             </a:pPr>
+            <a:endParaRPr/>
           </a:p>
         </p:txBody>
       </p:sp>
@@ -875,11 +898,11 @@
 </file>
 
 <file path=ppt/notesSlides/notesSlide13.xml><?xml version="1.0" encoding="utf-8"?>
-<p:notes xmlns:a="http://schemas.openxmlformats.org/drawingml/2006/main" xmlns:r="http://schemas.openxmlformats.org/officeDocument/2006/relationships" xmlns:p="http://schemas.openxmlformats.org/presentationml/2006/main" showMasterPhAnim="0" showMasterSp="0">
+<p:notes xmlns:a="http://schemas.openxmlformats.org/drawingml/2006/main" xmlns:r="http://schemas.openxmlformats.org/officeDocument/2006/relationships" xmlns:p="http://schemas.openxmlformats.org/presentationml/2006/main" showMasterSp="0" showMasterPhAnim="0">
   <p:cSld>
     <p:spTree>
       <p:nvGrpSpPr>
-        <p:cNvPr id="237" name="Shape 237"/>
+        <p:cNvPr id="1" name="Shape 237"/>
         <p:cNvGrpSpPr/>
         <p:nvPr/>
       </p:nvGrpSpPr>
@@ -894,7 +917,9 @@
       <p:sp>
         <p:nvSpPr>
           <p:cNvPr id="238" name="Google Shape;238;g3b53643a157_0_38:notes"/>
-          <p:cNvSpPr/>
+          <p:cNvSpPr>
+            <a:spLocks noGrp="1" noRot="1" noChangeAspect="1"/>
+          </p:cNvSpPr>
           <p:nvPr>
             <p:ph type="sldImg" idx="2"/>
           </p:nvPr>
@@ -933,7 +958,9 @@
       <p:sp>
         <p:nvSpPr>
           <p:cNvPr id="239" name="Google Shape;239;g3b53643a157_0_38:notes"/>
-          <p:cNvSpPr txBox="1"/>
+          <p:cNvSpPr txBox="1">
+            <a:spLocks noGrp="1"/>
+          </p:cNvSpPr>
           <p:nvPr>
             <p:ph type="body" idx="1"/>
           </p:nvPr>
@@ -962,6 +989,7 @@
               </a:spcAft>
               <a:buNone/>
             </a:pPr>
+            <a:endParaRPr/>
           </a:p>
         </p:txBody>
       </p:sp>
@@ -974,11 +1002,11 @@
 </file>
 
 <file path=ppt/notesSlides/notesSlide14.xml><?xml version="1.0" encoding="utf-8"?>
-<p:notes xmlns:a="http://schemas.openxmlformats.org/drawingml/2006/main" xmlns:r="http://schemas.openxmlformats.org/officeDocument/2006/relationships" xmlns:p="http://schemas.openxmlformats.org/presentationml/2006/main" showMasterPhAnim="0" showMasterSp="0">
+<p:notes xmlns:a="http://schemas.openxmlformats.org/drawingml/2006/main" xmlns:r="http://schemas.openxmlformats.org/officeDocument/2006/relationships" xmlns:p="http://schemas.openxmlformats.org/presentationml/2006/main" showMasterSp="0" showMasterPhAnim="0">
   <p:cSld>
     <p:spTree>
       <p:nvGrpSpPr>
-        <p:cNvPr id="237" name="Shape 237"/>
+        <p:cNvPr id="1" name="Shape 237"/>
         <p:cNvGrpSpPr/>
         <p:nvPr/>
       </p:nvGrpSpPr>
@@ -993,7 +1021,9 @@
       <p:sp>
         <p:nvSpPr>
           <p:cNvPr id="238" name="Google Shape;238;g3b53643a157_0_38:notes"/>
-          <p:cNvSpPr/>
+          <p:cNvSpPr>
+            <a:spLocks noGrp="1" noRot="1" noChangeAspect="1"/>
+          </p:cNvSpPr>
           <p:nvPr>
             <p:ph type="sldImg" idx="2"/>
           </p:nvPr>
@@ -1032,7 +1062,9 @@
       <p:sp>
         <p:nvSpPr>
           <p:cNvPr id="239" name="Google Shape;239;g3b53643a157_0_38:notes"/>
-          <p:cNvSpPr txBox="1"/>
+          <p:cNvSpPr txBox="1">
+            <a:spLocks noGrp="1"/>
+          </p:cNvSpPr>
           <p:nvPr>
             <p:ph type="body" idx="1"/>
           </p:nvPr>
@@ -1061,6 +1093,7 @@
               </a:spcAft>
               <a:buNone/>
             </a:pPr>
+            <a:endParaRPr/>
           </a:p>
         </p:txBody>
       </p:sp>
@@ -1073,11 +1106,11 @@
 </file>
 
 <file path=ppt/notesSlides/notesSlide15.xml><?xml version="1.0" encoding="utf-8"?>
-<p:notes xmlns:a="http://schemas.openxmlformats.org/drawingml/2006/main" xmlns:r="http://schemas.openxmlformats.org/officeDocument/2006/relationships" xmlns:p="http://schemas.openxmlformats.org/presentationml/2006/main" showMasterPhAnim="0" showMasterSp="0">
+<p:notes xmlns:a="http://schemas.openxmlformats.org/drawingml/2006/main" xmlns:r="http://schemas.openxmlformats.org/officeDocument/2006/relationships" xmlns:p="http://schemas.openxmlformats.org/presentationml/2006/main" showMasterSp="0" showMasterPhAnim="0">
   <p:cSld>
     <p:spTree>
       <p:nvGrpSpPr>
-        <p:cNvPr id="237" name="Shape 237"/>
+        <p:cNvPr id="1" name="Shape 237"/>
         <p:cNvGrpSpPr/>
         <p:nvPr/>
       </p:nvGrpSpPr>
@@ -1092,7 +1125,9 @@
       <p:sp>
         <p:nvSpPr>
           <p:cNvPr id="238" name="Google Shape;238;g3b53643a157_0_38:notes"/>
-          <p:cNvSpPr/>
+          <p:cNvSpPr>
+            <a:spLocks noGrp="1" noRot="1" noChangeAspect="1"/>
+          </p:cNvSpPr>
           <p:nvPr>
             <p:ph type="sldImg" idx="2"/>
           </p:nvPr>
@@ -1131,7 +1166,9 @@
       <p:sp>
         <p:nvSpPr>
           <p:cNvPr id="239" name="Google Shape;239;g3b53643a157_0_38:notes"/>
-          <p:cNvSpPr txBox="1"/>
+          <p:cNvSpPr txBox="1">
+            <a:spLocks noGrp="1"/>
+          </p:cNvSpPr>
           <p:nvPr>
             <p:ph type="body" idx="1"/>
           </p:nvPr>
@@ -1160,6 +1197,7 @@
               </a:spcAft>
               <a:buNone/>
             </a:pPr>
+            <a:endParaRPr/>
           </a:p>
         </p:txBody>
       </p:sp>
@@ -1172,11 +1210,11 @@
 </file>
 
 <file path=ppt/notesSlides/notesSlide16.xml><?xml version="1.0" encoding="utf-8"?>
-<p:notes xmlns:a="http://schemas.openxmlformats.org/drawingml/2006/main" xmlns:r="http://schemas.openxmlformats.org/officeDocument/2006/relationships" xmlns:p="http://schemas.openxmlformats.org/presentationml/2006/main" showMasterPhAnim="0" showMasterSp="0">
+<p:notes xmlns:a="http://schemas.openxmlformats.org/drawingml/2006/main" xmlns:r="http://schemas.openxmlformats.org/officeDocument/2006/relationships" xmlns:p="http://schemas.openxmlformats.org/presentationml/2006/main" showMasterSp="0" showMasterPhAnim="0">
   <p:cSld>
     <p:spTree>
       <p:nvGrpSpPr>
-        <p:cNvPr id="237" name="Shape 237"/>
+        <p:cNvPr id="1" name="Shape 237"/>
         <p:cNvGrpSpPr/>
         <p:nvPr/>
       </p:nvGrpSpPr>
@@ -1191,7 +1229,9 @@
       <p:sp>
         <p:nvSpPr>
           <p:cNvPr id="238" name="Google Shape;238;g3b53643a157_0_38:notes"/>
-          <p:cNvSpPr/>
+          <p:cNvSpPr>
+            <a:spLocks noGrp="1" noRot="1" noChangeAspect="1"/>
+          </p:cNvSpPr>
           <p:nvPr>
             <p:ph type="sldImg" idx="2"/>
           </p:nvPr>
@@ -1230,7 +1270,9 @@
       <p:sp>
         <p:nvSpPr>
           <p:cNvPr id="239" name="Google Shape;239;g3b53643a157_0_38:notes"/>
-          <p:cNvSpPr txBox="1"/>
+          <p:cNvSpPr txBox="1">
+            <a:spLocks noGrp="1"/>
+          </p:cNvSpPr>
           <p:nvPr>
             <p:ph type="body" idx="1"/>
           </p:nvPr>
@@ -1259,6 +1301,7 @@
               </a:spcAft>
               <a:buNone/>
             </a:pPr>
+            <a:endParaRPr/>
           </a:p>
         </p:txBody>
       </p:sp>
@@ -1271,11 +1314,11 @@
 </file>
 
 <file path=ppt/notesSlides/notesSlide17.xml><?xml version="1.0" encoding="utf-8"?>
-<p:notes xmlns:a="http://schemas.openxmlformats.org/drawingml/2006/main" xmlns:r="http://schemas.openxmlformats.org/officeDocument/2006/relationships" xmlns:p="http://schemas.openxmlformats.org/presentationml/2006/main" showMasterPhAnim="0" showMasterSp="0">
+<p:notes xmlns:a="http://schemas.openxmlformats.org/drawingml/2006/main" xmlns:r="http://schemas.openxmlformats.org/officeDocument/2006/relationships" xmlns:p="http://schemas.openxmlformats.org/presentationml/2006/main" showMasterSp="0" showMasterPhAnim="0">
   <p:cSld>
     <p:spTree>
       <p:nvGrpSpPr>
-        <p:cNvPr id="237" name="Shape 237"/>
+        <p:cNvPr id="1" name="Shape 237"/>
         <p:cNvGrpSpPr/>
         <p:nvPr/>
       </p:nvGrpSpPr>
@@ -1290,7 +1333,9 @@
       <p:sp>
         <p:nvSpPr>
           <p:cNvPr id="238" name="Google Shape;238;g3b53643a157_0_38:notes"/>
-          <p:cNvSpPr/>
+          <p:cNvSpPr>
+            <a:spLocks noGrp="1" noRot="1" noChangeAspect="1"/>
+          </p:cNvSpPr>
           <p:nvPr>
             <p:ph type="sldImg" idx="2"/>
           </p:nvPr>
@@ -1329,7 +1374,9 @@
       <p:sp>
         <p:nvSpPr>
           <p:cNvPr id="239" name="Google Shape;239;g3b53643a157_0_38:notes"/>
-          <p:cNvSpPr txBox="1"/>
+          <p:cNvSpPr txBox="1">
+            <a:spLocks noGrp="1"/>
+          </p:cNvSpPr>
           <p:nvPr>
             <p:ph type="body" idx="1"/>
           </p:nvPr>
@@ -1358,6 +1405,7 @@
               </a:spcAft>
               <a:buNone/>
             </a:pPr>
+            <a:endParaRPr/>
           </a:p>
         </p:txBody>
       </p:sp>
@@ -1370,11 +1418,11 @@
 </file>
 
 <file path=ppt/notesSlides/notesSlide18.xml><?xml version="1.0" encoding="utf-8"?>
-<p:notes xmlns:a="http://schemas.openxmlformats.org/drawingml/2006/main" xmlns:r="http://schemas.openxmlformats.org/officeDocument/2006/relationships" xmlns:p="http://schemas.openxmlformats.org/presentationml/2006/main" showMasterPhAnim="0" showMasterSp="0">
+<p:notes xmlns:a="http://schemas.openxmlformats.org/drawingml/2006/main" xmlns:r="http://schemas.openxmlformats.org/officeDocument/2006/relationships" xmlns:p="http://schemas.openxmlformats.org/presentationml/2006/main" showMasterSp="0" showMasterPhAnim="0">
   <p:cSld>
     <p:spTree>
       <p:nvGrpSpPr>
-        <p:cNvPr id="481" name="Shape 481"/>
+        <p:cNvPr id="1" name="Shape 481"/>
         <p:cNvGrpSpPr/>
         <p:nvPr/>
       </p:nvGrpSpPr>
@@ -1389,7 +1437,9 @@
       <p:sp>
         <p:nvSpPr>
           <p:cNvPr id="482" name="Google Shape;482;g3b53643a157_0_369:notes"/>
-          <p:cNvSpPr/>
+          <p:cNvSpPr>
+            <a:spLocks noGrp="1" noRot="1" noChangeAspect="1"/>
+          </p:cNvSpPr>
           <p:nvPr>
             <p:ph type="sldImg" idx="2"/>
           </p:nvPr>
@@ -1428,7 +1478,9 @@
       <p:sp>
         <p:nvSpPr>
           <p:cNvPr id="483" name="Google Shape;483;g3b53643a157_0_369:notes"/>
-          <p:cNvSpPr txBox="1"/>
+          <p:cNvSpPr txBox="1">
+            <a:spLocks noGrp="1"/>
+          </p:cNvSpPr>
           <p:nvPr>
             <p:ph type="body" idx="1"/>
           </p:nvPr>
@@ -1457,6 +1509,7 @@
               </a:spcAft>
               <a:buNone/>
             </a:pPr>
+            <a:endParaRPr/>
           </a:p>
         </p:txBody>
       </p:sp>
@@ -1469,11 +1522,11 @@
 </file>
 
 <file path=ppt/notesSlides/notesSlide2.xml><?xml version="1.0" encoding="utf-8"?>
-<p:notes xmlns:a="http://schemas.openxmlformats.org/drawingml/2006/main" xmlns:r="http://schemas.openxmlformats.org/officeDocument/2006/relationships" xmlns:p="http://schemas.openxmlformats.org/presentationml/2006/main" showMasterPhAnim="0" showMasterSp="0">
+<p:notes xmlns:a="http://schemas.openxmlformats.org/drawingml/2006/main" xmlns:r="http://schemas.openxmlformats.org/officeDocument/2006/relationships" xmlns:p="http://schemas.openxmlformats.org/presentationml/2006/main" showMasterSp="0" showMasterPhAnim="0">
   <p:cSld>
     <p:spTree>
       <p:nvGrpSpPr>
-        <p:cNvPr id="270" name="Shape 270"/>
+        <p:cNvPr id="1" name="Shape 270"/>
         <p:cNvGrpSpPr/>
         <p:nvPr/>
       </p:nvGrpSpPr>
@@ -1488,14 +1541,16 @@
       <p:sp>
         <p:nvSpPr>
           <p:cNvPr id="271" name="Google Shape;271;g3b53643a157_0_189:notes"/>
-          <p:cNvSpPr/>
+          <p:cNvSpPr>
+            <a:spLocks noGrp="1" noRot="1" noChangeAspect="1"/>
+          </p:cNvSpPr>
           <p:nvPr>
             <p:ph type="sldImg" idx="2"/>
           </p:nvPr>
         </p:nvSpPr>
         <p:spPr>
           <a:xfrm>
-            <a:off x="381300" y="685800"/>
+            <a:off x="381000" y="685800"/>
             <a:ext cx="6096000" cy="3429000"/>
           </a:xfrm>
           <a:custGeom>
@@ -1527,7 +1582,9 @@
       <p:sp>
         <p:nvSpPr>
           <p:cNvPr id="272" name="Google Shape;272;g3b53643a157_0_189:notes"/>
-          <p:cNvSpPr txBox="1"/>
+          <p:cNvSpPr txBox="1">
+            <a:spLocks noGrp="1"/>
+          </p:cNvSpPr>
           <p:nvPr>
             <p:ph type="body" idx="1"/>
           </p:nvPr>
@@ -1556,6 +1613,7 @@
               </a:spcAft>
               <a:buNone/>
             </a:pPr>
+            <a:endParaRPr/>
           </a:p>
         </p:txBody>
       </p:sp>
@@ -1568,11 +1626,11 @@
 </file>
 
 <file path=ppt/notesSlides/notesSlide3.xml><?xml version="1.0" encoding="utf-8"?>
-<p:notes xmlns:a="http://schemas.openxmlformats.org/drawingml/2006/main" xmlns:r="http://schemas.openxmlformats.org/officeDocument/2006/relationships" xmlns:p="http://schemas.openxmlformats.org/presentationml/2006/main" showMasterPhAnim="0" showMasterSp="0">
+<p:notes xmlns:a="http://schemas.openxmlformats.org/drawingml/2006/main" xmlns:r="http://schemas.openxmlformats.org/officeDocument/2006/relationships" xmlns:p="http://schemas.openxmlformats.org/presentationml/2006/main" showMasterSp="0" showMasterPhAnim="0">
   <p:cSld>
     <p:spTree>
       <p:nvGrpSpPr>
-        <p:cNvPr id="188" name="Shape 188"/>
+        <p:cNvPr id="1" name="Shape 188"/>
         <p:cNvGrpSpPr/>
         <p:nvPr/>
       </p:nvGrpSpPr>
@@ -1587,7 +1645,9 @@
       <p:sp>
         <p:nvSpPr>
           <p:cNvPr id="189" name="Google Shape;189;g3b53643a157_0_15:notes"/>
-          <p:cNvSpPr/>
+          <p:cNvSpPr>
+            <a:spLocks noGrp="1" noRot="1" noChangeAspect="1"/>
+          </p:cNvSpPr>
           <p:nvPr>
             <p:ph type="sldImg" idx="2"/>
           </p:nvPr>
@@ -1626,7 +1686,9 @@
       <p:sp>
         <p:nvSpPr>
           <p:cNvPr id="190" name="Google Shape;190;g3b53643a157_0_15:notes"/>
-          <p:cNvSpPr txBox="1"/>
+          <p:cNvSpPr txBox="1">
+            <a:spLocks noGrp="1"/>
+          </p:cNvSpPr>
           <p:nvPr>
             <p:ph type="body" idx="1"/>
           </p:nvPr>
@@ -1655,6 +1717,7 @@
               </a:spcAft>
               <a:buNone/>
             </a:pPr>
+            <a:endParaRPr/>
           </a:p>
         </p:txBody>
       </p:sp>
@@ -1667,11 +1730,11 @@
 </file>
 
 <file path=ppt/notesSlides/notesSlide4.xml><?xml version="1.0" encoding="utf-8"?>
-<p:notes xmlns:a="http://schemas.openxmlformats.org/drawingml/2006/main" xmlns:r="http://schemas.openxmlformats.org/officeDocument/2006/relationships" xmlns:p="http://schemas.openxmlformats.org/presentationml/2006/main" showMasterPhAnim="0" showMasterSp="0">
+<p:notes xmlns:a="http://schemas.openxmlformats.org/drawingml/2006/main" xmlns:r="http://schemas.openxmlformats.org/officeDocument/2006/relationships" xmlns:p="http://schemas.openxmlformats.org/presentationml/2006/main" showMasterSp="0" showMasterPhAnim="0">
   <p:cSld>
     <p:spTree>
       <p:nvGrpSpPr>
-        <p:cNvPr id="237" name="Shape 237"/>
+        <p:cNvPr id="1" name="Shape 237"/>
         <p:cNvGrpSpPr/>
         <p:nvPr/>
       </p:nvGrpSpPr>
@@ -1686,7 +1749,9 @@
       <p:sp>
         <p:nvSpPr>
           <p:cNvPr id="238" name="Google Shape;238;g3b53643a157_0_38:notes"/>
-          <p:cNvSpPr/>
+          <p:cNvSpPr>
+            <a:spLocks noGrp="1" noRot="1" noChangeAspect="1"/>
+          </p:cNvSpPr>
           <p:nvPr>
             <p:ph type="sldImg" idx="2"/>
           </p:nvPr>
@@ -1725,7 +1790,9 @@
       <p:sp>
         <p:nvSpPr>
           <p:cNvPr id="239" name="Google Shape;239;g3b53643a157_0_38:notes"/>
-          <p:cNvSpPr txBox="1"/>
+          <p:cNvSpPr txBox="1">
+            <a:spLocks noGrp="1"/>
+          </p:cNvSpPr>
           <p:nvPr>
             <p:ph type="body" idx="1"/>
           </p:nvPr>
@@ -1754,6 +1821,7 @@
               </a:spcAft>
               <a:buNone/>
             </a:pPr>
+            <a:endParaRPr/>
           </a:p>
         </p:txBody>
       </p:sp>
@@ -1766,11 +1834,11 @@
 </file>
 
 <file path=ppt/notesSlides/notesSlide5.xml><?xml version="1.0" encoding="utf-8"?>
-<p:notes xmlns:a="http://schemas.openxmlformats.org/drawingml/2006/main" xmlns:r="http://schemas.openxmlformats.org/officeDocument/2006/relationships" xmlns:p="http://schemas.openxmlformats.org/presentationml/2006/main" showMasterPhAnim="0" showMasterSp="0">
+<p:notes xmlns:a="http://schemas.openxmlformats.org/drawingml/2006/main" xmlns:r="http://schemas.openxmlformats.org/officeDocument/2006/relationships" xmlns:p="http://schemas.openxmlformats.org/presentationml/2006/main" showMasterSp="0" showMasterPhAnim="0">
   <p:cSld>
     <p:spTree>
       <p:nvGrpSpPr>
-        <p:cNvPr id="237" name="Shape 237"/>
+        <p:cNvPr id="1" name="Shape 237"/>
         <p:cNvGrpSpPr/>
         <p:nvPr/>
       </p:nvGrpSpPr>
@@ -1785,7 +1853,9 @@
       <p:sp>
         <p:nvSpPr>
           <p:cNvPr id="238" name="Google Shape;238;g3b53643a157_0_38:notes"/>
-          <p:cNvSpPr/>
+          <p:cNvSpPr>
+            <a:spLocks noGrp="1" noRot="1" noChangeAspect="1"/>
+          </p:cNvSpPr>
           <p:nvPr>
             <p:ph type="sldImg" idx="2"/>
           </p:nvPr>
@@ -1824,7 +1894,9 @@
       <p:sp>
         <p:nvSpPr>
           <p:cNvPr id="239" name="Google Shape;239;g3b53643a157_0_38:notes"/>
-          <p:cNvSpPr txBox="1"/>
+          <p:cNvSpPr txBox="1">
+            <a:spLocks noGrp="1"/>
+          </p:cNvSpPr>
           <p:nvPr>
             <p:ph type="body" idx="1"/>
           </p:nvPr>
@@ -1853,6 +1925,7 @@
               </a:spcAft>
               <a:buNone/>
             </a:pPr>
+            <a:endParaRPr/>
           </a:p>
         </p:txBody>
       </p:sp>
@@ -1865,11 +1938,11 @@
 </file>
 
 <file path=ppt/notesSlides/notesSlide6.xml><?xml version="1.0" encoding="utf-8"?>
-<p:notes xmlns:a="http://schemas.openxmlformats.org/drawingml/2006/main" xmlns:r="http://schemas.openxmlformats.org/officeDocument/2006/relationships" xmlns:p="http://schemas.openxmlformats.org/presentationml/2006/main" showMasterPhAnim="0" showMasterSp="0">
+<p:notes xmlns:a="http://schemas.openxmlformats.org/drawingml/2006/main" xmlns:r="http://schemas.openxmlformats.org/officeDocument/2006/relationships" xmlns:p="http://schemas.openxmlformats.org/presentationml/2006/main" showMasterSp="0" showMasterPhAnim="0">
   <p:cSld>
     <p:spTree>
       <p:nvGrpSpPr>
-        <p:cNvPr id="225" name="Shape 225"/>
+        <p:cNvPr id="1" name="Shape 225"/>
         <p:cNvGrpSpPr/>
         <p:nvPr/>
       </p:nvGrpSpPr>
@@ -1884,7 +1957,9 @@
       <p:sp>
         <p:nvSpPr>
           <p:cNvPr id="226" name="Google Shape;226;g3bb91f55cac_0_2:notes"/>
-          <p:cNvSpPr/>
+          <p:cNvSpPr>
+            <a:spLocks noGrp="1" noRot="1" noChangeAspect="1"/>
+          </p:cNvSpPr>
           <p:nvPr>
             <p:ph type="sldImg" idx="2"/>
           </p:nvPr>
@@ -1923,7 +1998,9 @@
       <p:sp>
         <p:nvSpPr>
           <p:cNvPr id="227" name="Google Shape;227;g3bb91f55cac_0_2:notes"/>
-          <p:cNvSpPr txBox="1"/>
+          <p:cNvSpPr txBox="1">
+            <a:spLocks noGrp="1"/>
+          </p:cNvSpPr>
           <p:nvPr>
             <p:ph type="body" idx="1"/>
           </p:nvPr>
@@ -1952,6 +2029,7 @@
               </a:spcAft>
               <a:buNone/>
             </a:pPr>
+            <a:endParaRPr/>
           </a:p>
         </p:txBody>
       </p:sp>
@@ -1964,11 +2042,11 @@
 </file>
 
 <file path=ppt/notesSlides/notesSlide7.xml><?xml version="1.0" encoding="utf-8"?>
-<p:notes xmlns:a="http://schemas.openxmlformats.org/drawingml/2006/main" xmlns:r="http://schemas.openxmlformats.org/officeDocument/2006/relationships" xmlns:p="http://schemas.openxmlformats.org/presentationml/2006/main" showMasterPhAnim="0" showMasterSp="0">
+<p:notes xmlns:a="http://schemas.openxmlformats.org/drawingml/2006/main" xmlns:r="http://schemas.openxmlformats.org/officeDocument/2006/relationships" xmlns:p="http://schemas.openxmlformats.org/presentationml/2006/main" showMasterSp="0" showMasterPhAnim="0">
   <p:cSld>
     <p:spTree>
       <p:nvGrpSpPr>
-        <p:cNvPr id="237" name="Shape 237"/>
+        <p:cNvPr id="1" name="Shape 237"/>
         <p:cNvGrpSpPr/>
         <p:nvPr/>
       </p:nvGrpSpPr>
@@ -1983,7 +2061,9 @@
       <p:sp>
         <p:nvSpPr>
           <p:cNvPr id="238" name="Google Shape;238;g3b53643a157_0_38:notes"/>
-          <p:cNvSpPr/>
+          <p:cNvSpPr>
+            <a:spLocks noGrp="1" noRot="1" noChangeAspect="1"/>
+          </p:cNvSpPr>
           <p:nvPr>
             <p:ph type="sldImg" idx="2"/>
           </p:nvPr>
@@ -2022,7 +2102,9 @@
       <p:sp>
         <p:nvSpPr>
           <p:cNvPr id="239" name="Google Shape;239;g3b53643a157_0_38:notes"/>
-          <p:cNvSpPr txBox="1"/>
+          <p:cNvSpPr txBox="1">
+            <a:spLocks noGrp="1"/>
+          </p:cNvSpPr>
           <p:nvPr>
             <p:ph type="body" idx="1"/>
           </p:nvPr>
@@ -2051,6 +2133,7 @@
               </a:spcAft>
               <a:buNone/>
             </a:pPr>
+            <a:endParaRPr/>
           </a:p>
         </p:txBody>
       </p:sp>
@@ -2063,11 +2146,11 @@
 </file>
 
 <file path=ppt/notesSlides/notesSlide8.xml><?xml version="1.0" encoding="utf-8"?>
-<p:notes xmlns:a="http://schemas.openxmlformats.org/drawingml/2006/main" xmlns:r="http://schemas.openxmlformats.org/officeDocument/2006/relationships" xmlns:p="http://schemas.openxmlformats.org/presentationml/2006/main" showMasterPhAnim="0" showMasterSp="0">
+<p:notes xmlns:a="http://schemas.openxmlformats.org/drawingml/2006/main" xmlns:r="http://schemas.openxmlformats.org/officeDocument/2006/relationships" xmlns:p="http://schemas.openxmlformats.org/presentationml/2006/main" showMasterSp="0" showMasterPhAnim="0">
   <p:cSld>
     <p:spTree>
       <p:nvGrpSpPr>
-        <p:cNvPr id="237" name="Shape 237"/>
+        <p:cNvPr id="1" name="Shape 237"/>
         <p:cNvGrpSpPr/>
         <p:nvPr/>
       </p:nvGrpSpPr>
@@ -2082,7 +2165,9 @@
       <p:sp>
         <p:nvSpPr>
           <p:cNvPr id="238" name="Google Shape;238;g3b53643a157_0_38:notes"/>
-          <p:cNvSpPr/>
+          <p:cNvSpPr>
+            <a:spLocks noGrp="1" noRot="1" noChangeAspect="1"/>
+          </p:cNvSpPr>
           <p:nvPr>
             <p:ph type="sldImg" idx="2"/>
           </p:nvPr>
@@ -2121,7 +2206,9 @@
       <p:sp>
         <p:nvSpPr>
           <p:cNvPr id="239" name="Google Shape;239;g3b53643a157_0_38:notes"/>
-          <p:cNvSpPr txBox="1"/>
+          <p:cNvSpPr txBox="1">
+            <a:spLocks noGrp="1"/>
+          </p:cNvSpPr>
           <p:nvPr>
             <p:ph type="body" idx="1"/>
           </p:nvPr>
@@ -2150,6 +2237,7 @@
               </a:spcAft>
               <a:buNone/>
             </a:pPr>
+            <a:endParaRPr/>
           </a:p>
         </p:txBody>
       </p:sp>
@@ -2162,11 +2250,11 @@
 </file>
 
 <file path=ppt/notesSlides/notesSlide9.xml><?xml version="1.0" encoding="utf-8"?>
-<p:notes xmlns:a="http://schemas.openxmlformats.org/drawingml/2006/main" xmlns:r="http://schemas.openxmlformats.org/officeDocument/2006/relationships" xmlns:p="http://schemas.openxmlformats.org/presentationml/2006/main" showMasterPhAnim="0" showMasterSp="0">
+<p:notes xmlns:a="http://schemas.openxmlformats.org/drawingml/2006/main" xmlns:r="http://schemas.openxmlformats.org/officeDocument/2006/relationships" xmlns:p="http://schemas.openxmlformats.org/presentationml/2006/main" showMasterSp="0" showMasterPhAnim="0">
   <p:cSld>
     <p:spTree>
       <p:nvGrpSpPr>
-        <p:cNvPr id="244" name="Shape 244"/>
+        <p:cNvPr id="1" name="Shape 244"/>
         <p:cNvGrpSpPr/>
         <p:nvPr/>
       </p:nvGrpSpPr>
@@ -2181,7 +2269,9 @@
       <p:sp>
         <p:nvSpPr>
           <p:cNvPr id="245" name="Google Shape;245;g3b53643a157_0_59:notes"/>
-          <p:cNvSpPr/>
+          <p:cNvSpPr>
+            <a:spLocks noGrp="1" noRot="1" noChangeAspect="1"/>
+          </p:cNvSpPr>
           <p:nvPr>
             <p:ph type="sldImg" idx="2"/>
           </p:nvPr>
@@ -2220,7 +2310,9 @@
       <p:sp>
         <p:nvSpPr>
           <p:cNvPr id="246" name="Google Shape;246;g3b53643a157_0_59:notes"/>
-          <p:cNvSpPr txBox="1"/>
+          <p:cNvSpPr txBox="1">
+            <a:spLocks noGrp="1"/>
+          </p:cNvSpPr>
           <p:nvPr>
             <p:ph type="body" idx="1"/>
           </p:nvPr>
@@ -2249,6 +2341,7 @@
               </a:spcAft>
               <a:buNone/>
             </a:pPr>
+            <a:endParaRPr/>
           </a:p>
         </p:txBody>
       </p:sp>
@@ -2391,6 +2484,7 @@
           <a:p>
             <a:fld id="{63A1C593-65D0-4073-BCC9-577B9352EA97}" type="datetimeFigureOut">
               <a:rPr lang="en-US" smtClean="0"/>
+              <a:t>6/9/2026</a:t>
             </a:fld>
             <a:endParaRPr lang="en-US"/>
           </a:p>
@@ -2432,6 +2526,7 @@
           <a:p>
             <a:fld id="{9B618960-8005-486C-9A75-10CB2AAC16F9}" type="slidenum">
               <a:rPr lang="en-US" smtClean="0"/>
+              <a:t>‹Nº›</a:t>
             </a:fld>
             <a:endParaRPr lang="en-US"/>
           </a:p>
@@ -2505,7 +2600,6 @@
               <a:rPr lang="en-US" smtClean="0"/>
               <a:t>Click to edit Master text styles</a:t>
             </a:r>
-            <a:endParaRPr lang="en-US" smtClean="0"/>
           </a:p>
           <a:p>
             <a:pPr lvl="1"/>
@@ -2513,7 +2607,6 @@
               <a:rPr lang="en-US" smtClean="0"/>
               <a:t>Second level</a:t>
             </a:r>
-            <a:endParaRPr lang="en-US" smtClean="0"/>
           </a:p>
           <a:p>
             <a:pPr lvl="2"/>
@@ -2521,7 +2614,6 @@
               <a:rPr lang="en-US" smtClean="0"/>
               <a:t>Third level</a:t>
             </a:r>
-            <a:endParaRPr lang="en-US" smtClean="0"/>
           </a:p>
           <a:p>
             <a:pPr lvl="3"/>
@@ -2529,7 +2621,6 @@
               <a:rPr lang="en-US" smtClean="0"/>
               <a:t>Fourth level</a:t>
             </a:r>
-            <a:endParaRPr lang="en-US" smtClean="0"/>
           </a:p>
           <a:p>
             <a:pPr lvl="4"/>
@@ -2558,6 +2649,7 @@
           <a:p>
             <a:fld id="{63A1C593-65D0-4073-BCC9-577B9352EA97}" type="datetimeFigureOut">
               <a:rPr lang="en-US" smtClean="0"/>
+              <a:t>6/9/2026</a:t>
             </a:fld>
             <a:endParaRPr lang="en-US"/>
           </a:p>
@@ -2599,6 +2691,7 @@
           <a:p>
             <a:fld id="{9B618960-8005-486C-9A75-10CB2AAC16F9}" type="slidenum">
               <a:rPr lang="en-US" smtClean="0"/>
+              <a:t>‹Nº›</a:t>
             </a:fld>
             <a:endParaRPr lang="en-US"/>
           </a:p>
@@ -2682,7 +2775,6 @@
               <a:rPr lang="en-US" smtClean="0"/>
               <a:t>Click to edit Master text styles</a:t>
             </a:r>
-            <a:endParaRPr lang="en-US" smtClean="0"/>
           </a:p>
           <a:p>
             <a:pPr lvl="1"/>
@@ -2690,7 +2782,6 @@
               <a:rPr lang="en-US" smtClean="0"/>
               <a:t>Second level</a:t>
             </a:r>
-            <a:endParaRPr lang="en-US" smtClean="0"/>
           </a:p>
           <a:p>
             <a:pPr lvl="2"/>
@@ -2698,7 +2789,6 @@
               <a:rPr lang="en-US" smtClean="0"/>
               <a:t>Third level</a:t>
             </a:r>
-            <a:endParaRPr lang="en-US" smtClean="0"/>
           </a:p>
           <a:p>
             <a:pPr lvl="3"/>
@@ -2706,7 +2796,6 @@
               <a:rPr lang="en-US" smtClean="0"/>
               <a:t>Fourth level</a:t>
             </a:r>
-            <a:endParaRPr lang="en-US" smtClean="0"/>
           </a:p>
           <a:p>
             <a:pPr lvl="4"/>
@@ -2735,6 +2824,7 @@
           <a:p>
             <a:fld id="{63A1C593-65D0-4073-BCC9-577B9352EA97}" type="datetimeFigureOut">
               <a:rPr lang="en-US" smtClean="0"/>
+              <a:t>6/9/2026</a:t>
             </a:fld>
             <a:endParaRPr lang="en-US"/>
           </a:p>
@@ -2776,6 +2866,7 @@
           <a:p>
             <a:fld id="{9B618960-8005-486C-9A75-10CB2AAC16F9}" type="slidenum">
               <a:rPr lang="en-US" smtClean="0"/>
+              <a:t>‹Nº›</a:t>
             </a:fld>
             <a:endParaRPr lang="en-US"/>
           </a:p>
@@ -2802,7 +2893,7 @@
     </p:bg>
     <p:spTree>
       <p:nvGrpSpPr>
-        <p:cNvPr id="50" name="Shape 50"/>
+        <p:cNvPr id="1" name="Shape 50"/>
         <p:cNvGrpSpPr/>
         <p:nvPr/>
       </p:nvGrpSpPr>
@@ -2817,7 +2908,9 @@
       <p:sp>
         <p:nvSpPr>
           <p:cNvPr id="51" name="Google Shape;51;p13"/>
-          <p:cNvSpPr txBox="1"/>
+          <p:cNvSpPr txBox="1">
+            <a:spLocks noGrp="1"/>
+          </p:cNvSpPr>
           <p:nvPr>
             <p:ph type="sldNum" idx="12"/>
           </p:nvPr>
@@ -2885,6 +2978,7 @@
             </a:pPr>
             <a:fld id="{00000000-1234-1234-1234-123412341234}" type="slidenum">
               <a:rPr lang="en-US"/>
+              <a:t>‹Nº›</a:t>
             </a:fld>
             <a:endParaRPr lang="en-US"/>
           </a:p>
@@ -2937,7 +3031,7 @@
     </p:bg>
     <p:spTree>
       <p:nvGrpSpPr>
-        <p:cNvPr id="81" name="Shape 81"/>
+        <p:cNvPr id="1" name="Shape 81"/>
         <p:cNvGrpSpPr/>
         <p:nvPr/>
       </p:nvGrpSpPr>
@@ -2952,7 +3046,9 @@
       <p:sp>
         <p:nvSpPr>
           <p:cNvPr id="82" name="Google Shape;82;p20"/>
-          <p:cNvSpPr txBox="1"/>
+          <p:cNvSpPr txBox="1">
+            <a:spLocks noGrp="1"/>
+          </p:cNvSpPr>
           <p:nvPr>
             <p:ph type="sldNum" idx="12"/>
           </p:nvPr>
@@ -3020,6 +3116,7 @@
             </a:pPr>
             <a:fld id="{00000000-1234-1234-1234-123412341234}" type="slidenum">
               <a:rPr lang="en-US"/>
+              <a:t>‹Nº›</a:t>
             </a:fld>
             <a:endParaRPr lang="en-US"/>
           </a:p>
@@ -3046,7 +3143,7 @@
     </p:bg>
     <p:spTree>
       <p:nvGrpSpPr>
-        <p:cNvPr id="83" name="Shape 83"/>
+        <p:cNvPr id="1" name="Shape 83"/>
         <p:cNvGrpSpPr/>
         <p:nvPr/>
       </p:nvGrpSpPr>
@@ -3061,7 +3158,9 @@
       <p:sp>
         <p:nvSpPr>
           <p:cNvPr id="84" name="Google Shape;84;p21"/>
-          <p:cNvSpPr txBox="1"/>
+          <p:cNvSpPr txBox="1">
+            <a:spLocks noGrp="1"/>
+          </p:cNvSpPr>
           <p:nvPr>
             <p:ph type="sldNum" idx="12"/>
           </p:nvPr>
@@ -3129,6 +3228,7 @@
             </a:pPr>
             <a:fld id="{00000000-1234-1234-1234-123412341234}" type="slidenum">
               <a:rPr lang="en-US"/>
+              <a:t>‹Nº›</a:t>
             </a:fld>
             <a:endParaRPr lang="en-US"/>
           </a:p>
@@ -3155,7 +3255,7 @@
     </p:bg>
     <p:spTree>
       <p:nvGrpSpPr>
-        <p:cNvPr id="79" name="Shape 79"/>
+        <p:cNvPr id="1" name="Shape 79"/>
         <p:cNvGrpSpPr/>
         <p:nvPr/>
       </p:nvGrpSpPr>
@@ -3170,7 +3270,9 @@
       <p:sp>
         <p:nvSpPr>
           <p:cNvPr id="80" name="Google Shape;80;p19"/>
-          <p:cNvSpPr txBox="1"/>
+          <p:cNvSpPr txBox="1">
+            <a:spLocks noGrp="1"/>
+          </p:cNvSpPr>
           <p:nvPr>
             <p:ph type="sldNum" idx="12"/>
           </p:nvPr>
@@ -3238,6 +3340,7 @@
             </a:pPr>
             <a:fld id="{00000000-1234-1234-1234-123412341234}" type="slidenum">
               <a:rPr lang="en-US"/>
+              <a:t>‹Nº›</a:t>
             </a:fld>
             <a:endParaRPr lang="en-US"/>
           </a:p>
@@ -3264,7 +3367,7 @@
     </p:bg>
     <p:spTree>
       <p:nvGrpSpPr>
-        <p:cNvPr id="53" name="Shape 53"/>
+        <p:cNvPr id="1" name="Shape 53"/>
         <p:cNvGrpSpPr/>
         <p:nvPr/>
       </p:nvGrpSpPr>
@@ -3279,7 +3382,9 @@
       <p:sp>
         <p:nvSpPr>
           <p:cNvPr id="54" name="Google Shape;54;p14"/>
-          <p:cNvSpPr txBox="1"/>
+          <p:cNvSpPr txBox="1">
+            <a:spLocks noGrp="1"/>
+          </p:cNvSpPr>
           <p:nvPr>
             <p:ph type="sldNum" idx="12"/>
           </p:nvPr>
@@ -3347,6 +3452,7 @@
             </a:pPr>
             <a:fld id="{00000000-1234-1234-1234-123412341234}" type="slidenum">
               <a:rPr lang="en-US"/>
+              <a:t>‹Nº›</a:t>
             </a:fld>
             <a:endParaRPr lang="en-US"/>
           </a:p>
@@ -3582,6 +3688,7 @@
                 <a:cs typeface="Plus Jakarta Sans"/>
                 <a:sym typeface="Plus Jakarta Sans"/>
               </a:rPr>
+              <a:t>‹Nº›</a:t>
             </a:fld>
             <a:endParaRPr sz="665">
               <a:solidFill>
@@ -3616,7 +3723,7 @@
     </p:bg>
     <p:spTree>
       <p:nvGrpSpPr>
-        <p:cNvPr id="71" name="Shape 71"/>
+        <p:cNvPr id="1" name="Shape 71"/>
         <p:cNvGrpSpPr/>
         <p:nvPr/>
       </p:nvGrpSpPr>
@@ -3885,6 +3992,7 @@
                 <a:cs typeface="Plus Jakarta Sans"/>
                 <a:sym typeface="Plus Jakarta Sans"/>
               </a:rPr>
+              <a:t>‹Nº›</a:t>
             </a:fld>
             <a:endParaRPr sz="665">
               <a:solidFill>
@@ -3966,7 +4074,6 @@
               <a:rPr lang="en-US" smtClean="0"/>
               <a:t>Click to edit Master text styles</a:t>
             </a:r>
-            <a:endParaRPr lang="en-US" smtClean="0"/>
           </a:p>
           <a:p>
             <a:pPr lvl="1"/>
@@ -3974,7 +4081,6 @@
               <a:rPr lang="en-US" smtClean="0"/>
               <a:t>Second level</a:t>
             </a:r>
-            <a:endParaRPr lang="en-US" smtClean="0"/>
           </a:p>
           <a:p>
             <a:pPr lvl="2"/>
@@ -3982,7 +4088,6 @@
               <a:rPr lang="en-US" smtClean="0"/>
               <a:t>Third level</a:t>
             </a:r>
-            <a:endParaRPr lang="en-US" smtClean="0"/>
           </a:p>
           <a:p>
             <a:pPr lvl="3"/>
@@ -3990,7 +4095,6 @@
               <a:rPr lang="en-US" smtClean="0"/>
               <a:t>Fourth level</a:t>
             </a:r>
-            <a:endParaRPr lang="en-US" smtClean="0"/>
           </a:p>
           <a:p>
             <a:pPr lvl="4"/>
@@ -4019,6 +4123,7 @@
           <a:p>
             <a:fld id="{63A1C593-65D0-4073-BCC9-577B9352EA97}" type="datetimeFigureOut">
               <a:rPr lang="en-US" smtClean="0"/>
+              <a:t>6/9/2026</a:t>
             </a:fld>
             <a:endParaRPr lang="en-US"/>
           </a:p>
@@ -4060,6 +4165,7 @@
           <a:p>
             <a:fld id="{9B618960-8005-486C-9A75-10CB2AAC16F9}" type="slidenum">
               <a:rPr lang="en-US" smtClean="0"/>
+              <a:t>‹Nº›</a:t>
             </a:fld>
             <a:endParaRPr lang="en-US"/>
           </a:p>
@@ -4238,7 +4344,6 @@
               <a:rPr lang="en-US" smtClean="0"/>
               <a:t>Click to edit Master text styles</a:t>
             </a:r>
-            <a:endParaRPr lang="en-US" smtClean="0"/>
           </a:p>
         </p:txBody>
       </p:sp>
@@ -4259,6 +4364,7 @@
           <a:p>
             <a:fld id="{63A1C593-65D0-4073-BCC9-577B9352EA97}" type="datetimeFigureOut">
               <a:rPr lang="en-US" smtClean="0"/>
+              <a:t>6/9/2026</a:t>
             </a:fld>
             <a:endParaRPr lang="en-US"/>
           </a:p>
@@ -4300,6 +4406,7 @@
           <a:p>
             <a:fld id="{9B618960-8005-486C-9A75-10CB2AAC16F9}" type="slidenum">
               <a:rPr lang="en-US" smtClean="0"/>
+              <a:t>‹Nº›</a:t>
             </a:fld>
             <a:endParaRPr lang="en-US"/>
           </a:p>
@@ -4378,7 +4485,6 @@
               <a:rPr lang="en-US" smtClean="0"/>
               <a:t>Click to edit Master text styles</a:t>
             </a:r>
-            <a:endParaRPr lang="en-US" smtClean="0"/>
           </a:p>
           <a:p>
             <a:pPr lvl="1"/>
@@ -4386,7 +4492,6 @@
               <a:rPr lang="en-US" smtClean="0"/>
               <a:t>Second level</a:t>
             </a:r>
-            <a:endParaRPr lang="en-US" smtClean="0"/>
           </a:p>
           <a:p>
             <a:pPr lvl="2"/>
@@ -4394,7 +4499,6 @@
               <a:rPr lang="en-US" smtClean="0"/>
               <a:t>Third level</a:t>
             </a:r>
-            <a:endParaRPr lang="en-US" smtClean="0"/>
           </a:p>
           <a:p>
             <a:pPr lvl="3"/>
@@ -4402,7 +4506,6 @@
               <a:rPr lang="en-US" smtClean="0"/>
               <a:t>Fourth level</a:t>
             </a:r>
-            <a:endParaRPr lang="en-US" smtClean="0"/>
           </a:p>
           <a:p>
             <a:pPr lvl="4"/>
@@ -4439,7 +4542,6 @@
               <a:rPr lang="en-US" smtClean="0"/>
               <a:t>Click to edit Master text styles</a:t>
             </a:r>
-            <a:endParaRPr lang="en-US" smtClean="0"/>
           </a:p>
           <a:p>
             <a:pPr lvl="1"/>
@@ -4447,7 +4549,6 @@
               <a:rPr lang="en-US" smtClean="0"/>
               <a:t>Second level</a:t>
             </a:r>
-            <a:endParaRPr lang="en-US" smtClean="0"/>
           </a:p>
           <a:p>
             <a:pPr lvl="2"/>
@@ -4455,7 +4556,6 @@
               <a:rPr lang="en-US" smtClean="0"/>
               <a:t>Third level</a:t>
             </a:r>
-            <a:endParaRPr lang="en-US" smtClean="0"/>
           </a:p>
           <a:p>
             <a:pPr lvl="3"/>
@@ -4463,7 +4563,6 @@
               <a:rPr lang="en-US" smtClean="0"/>
               <a:t>Fourth level</a:t>
             </a:r>
-            <a:endParaRPr lang="en-US" smtClean="0"/>
           </a:p>
           <a:p>
             <a:pPr lvl="4"/>
@@ -4492,6 +4591,7 @@
           <a:p>
             <a:fld id="{63A1C593-65D0-4073-BCC9-577B9352EA97}" type="datetimeFigureOut">
               <a:rPr lang="en-US" smtClean="0"/>
+              <a:t>6/9/2026</a:t>
             </a:fld>
             <a:endParaRPr lang="en-US"/>
           </a:p>
@@ -4533,6 +4633,7 @@
           <a:p>
             <a:fld id="{9B618960-8005-486C-9A75-10CB2AAC16F9}" type="slidenum">
               <a:rPr lang="en-US" smtClean="0"/>
+              <a:t>‹Nº›</a:t>
             </a:fld>
             <a:endParaRPr lang="en-US"/>
           </a:p>
@@ -4653,7 +4754,6 @@
               <a:rPr lang="en-US" smtClean="0"/>
               <a:t>Click to edit Master text styles</a:t>
             </a:r>
-            <a:endParaRPr lang="en-US" smtClean="0"/>
           </a:p>
         </p:txBody>
       </p:sp>
@@ -4682,7 +4782,6 @@
               <a:rPr lang="en-US" smtClean="0"/>
               <a:t>Click to edit Master text styles</a:t>
             </a:r>
-            <a:endParaRPr lang="en-US" smtClean="0"/>
           </a:p>
           <a:p>
             <a:pPr lvl="1"/>
@@ -4690,7 +4789,6 @@
               <a:rPr lang="en-US" smtClean="0"/>
               <a:t>Second level</a:t>
             </a:r>
-            <a:endParaRPr lang="en-US" smtClean="0"/>
           </a:p>
           <a:p>
             <a:pPr lvl="2"/>
@@ -4698,7 +4796,6 @@
               <a:rPr lang="en-US" smtClean="0"/>
               <a:t>Third level</a:t>
             </a:r>
-            <a:endParaRPr lang="en-US" smtClean="0"/>
           </a:p>
           <a:p>
             <a:pPr lvl="3"/>
@@ -4706,7 +4803,6 @@
               <a:rPr lang="en-US" smtClean="0"/>
               <a:t>Fourth level</a:t>
             </a:r>
-            <a:endParaRPr lang="en-US" smtClean="0"/>
           </a:p>
           <a:p>
             <a:pPr lvl="4"/>
@@ -4780,7 +4876,6 @@
               <a:rPr lang="en-US" smtClean="0"/>
               <a:t>Click to edit Master text styles</a:t>
             </a:r>
-            <a:endParaRPr lang="en-US" smtClean="0"/>
           </a:p>
         </p:txBody>
       </p:sp>
@@ -4809,7 +4904,6 @@
               <a:rPr lang="en-US" smtClean="0"/>
               <a:t>Click to edit Master text styles</a:t>
             </a:r>
-            <a:endParaRPr lang="en-US" smtClean="0"/>
           </a:p>
           <a:p>
             <a:pPr lvl="1"/>
@@ -4817,7 +4911,6 @@
               <a:rPr lang="en-US" smtClean="0"/>
               <a:t>Second level</a:t>
             </a:r>
-            <a:endParaRPr lang="en-US" smtClean="0"/>
           </a:p>
           <a:p>
             <a:pPr lvl="2"/>
@@ -4825,7 +4918,6 @@
               <a:rPr lang="en-US" smtClean="0"/>
               <a:t>Third level</a:t>
             </a:r>
-            <a:endParaRPr lang="en-US" smtClean="0"/>
           </a:p>
           <a:p>
             <a:pPr lvl="3"/>
@@ -4833,7 +4925,6 @@
               <a:rPr lang="en-US" smtClean="0"/>
               <a:t>Fourth level</a:t>
             </a:r>
-            <a:endParaRPr lang="en-US" smtClean="0"/>
           </a:p>
           <a:p>
             <a:pPr lvl="4"/>
@@ -4862,6 +4953,7 @@
           <a:p>
             <a:fld id="{63A1C593-65D0-4073-BCC9-577B9352EA97}" type="datetimeFigureOut">
               <a:rPr lang="en-US" smtClean="0"/>
+              <a:t>6/9/2026</a:t>
             </a:fld>
             <a:endParaRPr lang="en-US"/>
           </a:p>
@@ -4903,6 +4995,7 @@
           <a:p>
             <a:fld id="{9B618960-8005-486C-9A75-10CB2AAC16F9}" type="slidenum">
               <a:rPr lang="en-US" smtClean="0"/>
+              <a:t>‹Nº›</a:t>
             </a:fld>
             <a:endParaRPr lang="en-US"/>
           </a:p>
@@ -4973,6 +5066,7 @@
           <a:p>
             <a:fld id="{63A1C593-65D0-4073-BCC9-577B9352EA97}" type="datetimeFigureOut">
               <a:rPr lang="en-US" smtClean="0"/>
+              <a:t>6/9/2026</a:t>
             </a:fld>
             <a:endParaRPr lang="en-US"/>
           </a:p>
@@ -5014,6 +5108,7 @@
           <a:p>
             <a:fld id="{9B618960-8005-486C-9A75-10CB2AAC16F9}" type="slidenum">
               <a:rPr lang="en-US" smtClean="0"/>
+              <a:t>‹Nº›</a:t>
             </a:fld>
             <a:endParaRPr lang="en-US"/>
           </a:p>
@@ -5061,6 +5156,7 @@
           <a:p>
             <a:fld id="{63A1C593-65D0-4073-BCC9-577B9352EA97}" type="datetimeFigureOut">
               <a:rPr lang="en-US" smtClean="0"/>
+              <a:t>6/9/2026</a:t>
             </a:fld>
             <a:endParaRPr lang="en-US"/>
           </a:p>
@@ -5102,6 +5198,7 @@
           <a:p>
             <a:fld id="{9B618960-8005-486C-9A75-10CB2AAC16F9}" type="slidenum">
               <a:rPr lang="en-US" smtClean="0"/>
+              <a:t>‹Nº›</a:t>
             </a:fld>
             <a:endParaRPr lang="en-US"/>
           </a:p>
@@ -5217,7 +5314,6 @@
               <a:rPr lang="en-US" smtClean="0"/>
               <a:t>Click to edit Master text styles</a:t>
             </a:r>
-            <a:endParaRPr lang="en-US" smtClean="0"/>
           </a:p>
           <a:p>
             <a:pPr lvl="1"/>
@@ -5225,7 +5321,6 @@
               <a:rPr lang="en-US" smtClean="0"/>
               <a:t>Second level</a:t>
             </a:r>
-            <a:endParaRPr lang="en-US" smtClean="0"/>
           </a:p>
           <a:p>
             <a:pPr lvl="2"/>
@@ -5233,7 +5328,6 @@
               <a:rPr lang="en-US" smtClean="0"/>
               <a:t>Third level</a:t>
             </a:r>
-            <a:endParaRPr lang="en-US" smtClean="0"/>
           </a:p>
           <a:p>
             <a:pPr lvl="3"/>
@@ -5241,7 +5335,6 @@
               <a:rPr lang="en-US" smtClean="0"/>
               <a:t>Fourth level</a:t>
             </a:r>
-            <a:endParaRPr lang="en-US" smtClean="0"/>
           </a:p>
           <a:p>
             <a:pPr lvl="4"/>
@@ -5315,7 +5408,6 @@
               <a:rPr lang="en-US" smtClean="0"/>
               <a:t>Click to edit Master text styles</a:t>
             </a:r>
-            <a:endParaRPr lang="en-US" smtClean="0"/>
           </a:p>
         </p:txBody>
       </p:sp>
@@ -5336,6 +5428,7 @@
           <a:p>
             <a:fld id="{63A1C593-65D0-4073-BCC9-577B9352EA97}" type="datetimeFigureOut">
               <a:rPr lang="en-US" smtClean="0"/>
+              <a:t>6/9/2026</a:t>
             </a:fld>
             <a:endParaRPr lang="en-US"/>
           </a:p>
@@ -5377,6 +5470,7 @@
           <a:p>
             <a:fld id="{9B618960-8005-486C-9A75-10CB2AAC16F9}" type="slidenum">
               <a:rPr lang="en-US" smtClean="0"/>
+              <a:t>‹Nº›</a:t>
             </a:fld>
             <a:endParaRPr lang="en-US"/>
           </a:p>
@@ -5562,7 +5656,6 @@
               <a:rPr lang="en-US" smtClean="0"/>
               <a:t>Click to edit Master text styles</a:t>
             </a:r>
-            <a:endParaRPr lang="en-US" smtClean="0"/>
           </a:p>
         </p:txBody>
       </p:sp>
@@ -5583,6 +5676,7 @@
           <a:p>
             <a:fld id="{63A1C593-65D0-4073-BCC9-577B9352EA97}" type="datetimeFigureOut">
               <a:rPr lang="en-US" smtClean="0"/>
+              <a:t>6/9/2026</a:t>
             </a:fld>
             <a:endParaRPr lang="en-US"/>
           </a:p>
@@ -5624,6 +5718,7 @@
           <a:p>
             <a:fld id="{9B618960-8005-486C-9A75-10CB2AAC16F9}" type="slidenum">
               <a:rPr lang="en-US" smtClean="0"/>
+              <a:t>‹Nº›</a:t>
             </a:fld>
             <a:endParaRPr lang="en-US"/>
           </a:p>
@@ -5722,7 +5817,6 @@
               <a:rPr lang="en-US" smtClean="0"/>
               <a:t>Click to edit Master text styles</a:t>
             </a:r>
-            <a:endParaRPr lang="en-US" smtClean="0"/>
           </a:p>
           <a:p>
             <a:pPr lvl="1"/>
@@ -5730,7 +5824,6 @@
               <a:rPr lang="en-US" smtClean="0"/>
               <a:t>Second level</a:t>
             </a:r>
-            <a:endParaRPr lang="en-US" smtClean="0"/>
           </a:p>
           <a:p>
             <a:pPr lvl="2"/>
@@ -5738,7 +5831,6 @@
               <a:rPr lang="en-US" smtClean="0"/>
               <a:t>Third level</a:t>
             </a:r>
-            <a:endParaRPr lang="en-US" smtClean="0"/>
           </a:p>
           <a:p>
             <a:pPr lvl="3"/>
@@ -5746,7 +5838,6 @@
               <a:rPr lang="en-US" smtClean="0"/>
               <a:t>Fourth level</a:t>
             </a:r>
-            <a:endParaRPr lang="en-US" smtClean="0"/>
           </a:p>
           <a:p>
             <a:pPr lvl="4"/>
@@ -5793,6 +5884,7 @@
           <a:p>
             <a:fld id="{63A1C593-65D0-4073-BCC9-577B9352EA97}" type="datetimeFigureOut">
               <a:rPr lang="en-US" smtClean="0"/>
+              <a:t>6/9/2026</a:t>
             </a:fld>
             <a:endParaRPr lang="en-US"/>
           </a:p>
@@ -5870,6 +5962,7 @@
           <a:p>
             <a:fld id="{9B618960-8005-486C-9A75-10CB2AAC16F9}" type="slidenum">
               <a:rPr lang="en-US" smtClean="0"/>
+              <a:t>‹Nº›</a:t>
             </a:fld>
             <a:endParaRPr lang="en-US"/>
           </a:p>
@@ -6185,7 +6278,7 @@
   <p:cSld>
     <p:spTree>
       <p:nvGrpSpPr>
-        <p:cNvPr id="267" name="Shape 267"/>
+        <p:cNvPr id="1" name="Shape 267"/>
         <p:cNvGrpSpPr/>
         <p:nvPr/>
       </p:nvGrpSpPr>
@@ -6246,15 +6339,6 @@
               </a:rPr>
               <a:t>En Breve comenzamos!!!!</a:t>
             </a:r>
-            <a:endParaRPr lang="es-AR" altLang="en-US" sz="1600">
-              <a:solidFill>
-                <a:srgbClr val="F8F2E8"/>
-              </a:solidFill>
-              <a:latin typeface="Plus Jakarta Sans Light"/>
-              <a:ea typeface="Plus Jakarta Sans Light"/>
-              <a:cs typeface="Plus Jakarta Sans Light"/>
-              <a:sym typeface="Plus Jakarta Sans Light"/>
-            </a:endParaRPr>
           </a:p>
         </p:txBody>
       </p:sp>
@@ -6296,7 +6380,7 @@
               <a:buNone/>
             </a:pPr>
             <a:r>
-              <a:rPr lang="es-AR" altLang="en-US" sz="6400">
+              <a:rPr lang="es-AR" altLang="en-US" sz="6400" dirty="0" smtClean="0">
                 <a:solidFill>
                   <a:srgbClr val="F8F2E8"/>
                 </a:solidFill>
@@ -6305,9 +6389,21 @@
                 <a:cs typeface="Plus Jakarta Sans ExtraBold"/>
                 <a:sym typeface="Plus Jakarta Sans ExtraBold"/>
               </a:rPr>
-              <a:t>Tu eres el capitan de tu destino!</a:t>
-            </a:r>
-            <a:endParaRPr lang="es-AR" altLang="en-US" sz="6400">
+              <a:t>Bienvenidos a Data </a:t>
+            </a:r>
+            <a:r>
+              <a:rPr lang="es-AR" altLang="en-US" sz="6400" dirty="0" err="1" smtClean="0">
+                <a:solidFill>
+                  <a:srgbClr val="F8F2E8"/>
+                </a:solidFill>
+                <a:latin typeface="Plus Jakarta Sans ExtraBold"/>
+                <a:ea typeface="Plus Jakarta Sans ExtraBold"/>
+                <a:cs typeface="Plus Jakarta Sans ExtraBold"/>
+                <a:sym typeface="Plus Jakarta Sans ExtraBold"/>
+              </a:rPr>
+              <a:t>Science</a:t>
+            </a:r>
+            <a:endParaRPr lang="es-AR" altLang="en-US" sz="6400" dirty="0">
               <a:solidFill>
                 <a:srgbClr val="F8F2E8"/>
               </a:solidFill>
@@ -6336,7 +6432,14 @@
         <p:cNvGrpSpPr/>
         <p:nvPr/>
       </p:nvGrpSpPr>
-      <p:grpSpPr/>
+      <p:grpSpPr>
+        <a:xfrm>
+          <a:off x="0" y="0"/>
+          <a:ext cx="0" cy="0"/>
+          <a:chOff x="0" y="0"/>
+          <a:chExt cx="0" cy="0"/>
+        </a:xfrm>
+      </p:grpSpPr>
       <p:sp>
         <p:nvSpPr>
           <p:cNvPr id="242" name="Google Shape;242;p38"/>
@@ -6360,6 +6463,7 @@
           <a:bodyPr spcFirstLastPara="1" wrap="square" lIns="121900" tIns="121900" rIns="121900" bIns="121900" anchor="t" anchorCtr="0">
             <a:noAutofit/>
           </a:bodyPr>
+          <a:lstStyle/>
           <a:p>
             <a:pPr marL="0" lvl="0" indent="0" algn="l" rtl="0">
               <a:spcBef>
@@ -6382,15 +6486,6 @@
               </a:rPr>
               <a:t>Ejemplos Salud</a:t>
             </a:r>
-            <a:endParaRPr lang="es-AR" altLang="en-US" sz="6400">
-              <a:solidFill>
-                <a:srgbClr val="FF632B"/>
-              </a:solidFill>
-              <a:latin typeface="Plus Jakarta Sans ExtraBold"/>
-              <a:ea typeface="Plus Jakarta Sans ExtraBold"/>
-              <a:cs typeface="Plus Jakarta Sans ExtraBold"/>
-              <a:sym typeface="Plus Jakarta Sans ExtraBold"/>
-            </a:endParaRPr>
           </a:p>
         </p:txBody>
       </p:sp>
@@ -6401,7 +6496,7 @@
           <p:nvPr/>
         </p:nvPicPr>
         <p:blipFill>
-          <a:blip r:embed="rId1"/>
+          <a:blip r:embed="rId2"/>
           <a:stretch>
             <a:fillRect/>
           </a:stretch>
@@ -6423,7 +6518,7 @@
           <p:nvPr/>
         </p:nvPicPr>
         <p:blipFill>
-          <a:blip r:embed="rId2"/>
+          <a:blip r:embed="rId3"/>
           <a:stretch>
             <a:fillRect/>
           </a:stretch>
@@ -6455,7 +6550,14 @@
         <p:cNvGrpSpPr/>
         <p:nvPr/>
       </p:nvGrpSpPr>
-      <p:grpSpPr/>
+      <p:grpSpPr>
+        <a:xfrm>
+          <a:off x="0" y="0"/>
+          <a:ext cx="0" cy="0"/>
+          <a:chOff x="0" y="0"/>
+          <a:chExt cx="0" cy="0"/>
+        </a:xfrm>
+      </p:grpSpPr>
       <p:sp>
         <p:nvSpPr>
           <p:cNvPr id="242" name="Google Shape;242;p38"/>
@@ -6479,6 +6581,7 @@
           <a:bodyPr spcFirstLastPara="1" wrap="square" lIns="121900" tIns="121900" rIns="121900" bIns="121900" anchor="t" anchorCtr="0">
             <a:noAutofit/>
           </a:bodyPr>
+          <a:lstStyle/>
           <a:p>
             <a:pPr marL="0" lvl="0" indent="0" algn="l" rtl="0">
               <a:spcBef>
@@ -6501,15 +6604,6 @@
               </a:rPr>
               <a:t>Ejemplos industria</a:t>
             </a:r>
-            <a:endParaRPr lang="es-AR" altLang="en-US" sz="6400">
-              <a:solidFill>
-                <a:srgbClr val="FF632B"/>
-              </a:solidFill>
-              <a:latin typeface="Plus Jakarta Sans ExtraBold"/>
-              <a:ea typeface="Plus Jakarta Sans ExtraBold"/>
-              <a:cs typeface="Plus Jakarta Sans ExtraBold"/>
-              <a:sym typeface="Plus Jakarta Sans ExtraBold"/>
-            </a:endParaRPr>
           </a:p>
         </p:txBody>
       </p:sp>
@@ -6533,6 +6627,7 @@
           <a:bodyPr wrap="square" rtlCol="0" anchor="t">
             <a:spAutoFit/>
           </a:bodyPr>
+          <a:lstStyle/>
           <a:p>
             <a:r>
               <a:rPr lang="es-AR" altLang="en-US"/>
@@ -6545,7 +6640,6 @@
               <a:rPr lang="en-US" altLang="en-US"/>
               <a:t>https://www.youtube.com/watch?v=JIqs3uQlg3w</a:t>
             </a:r>
-            <a:endParaRPr lang="en-US" altLang="en-US"/>
           </a:p>
           <a:p>
             <a:endParaRPr lang="en-US"/>
@@ -6562,7 +6656,6 @@
               <a:rPr lang="en-US" altLang="en-US"/>
               <a:t>https://www.youtube.com/watch?v=t2MuKqlnnpU</a:t>
             </a:r>
-            <a:endParaRPr lang="en-US" altLang="en-US"/>
           </a:p>
         </p:txBody>
       </p:sp>
@@ -6579,7 +6672,7 @@
   <p:cSld>
     <p:spTree>
       <p:nvGrpSpPr>
-        <p:cNvPr id="247" name="Shape 247"/>
+        <p:cNvPr id="1" name="Shape 247"/>
         <p:cNvGrpSpPr/>
         <p:nvPr/>
       </p:nvGrpSpPr>
@@ -6640,15 +6733,6 @@
               </a:rPr>
               <a:t>Big Data / Analítica.</a:t>
             </a:r>
-            <a:endParaRPr lang="en-US" altLang="en-US" sz="1600">
-              <a:solidFill>
-                <a:srgbClr val="171717"/>
-              </a:solidFill>
-              <a:latin typeface="Plus Jakarta Sans Light"/>
-              <a:ea typeface="Plus Jakarta Sans Light"/>
-              <a:cs typeface="Plus Jakarta Sans Light"/>
-              <a:sym typeface="Plus Jakarta Sans Light"/>
-            </a:endParaRPr>
           </a:p>
           <a:p>
             <a:pPr marL="342900" lvl="0" indent="-342900" algn="l" rtl="0">
@@ -6698,15 +6782,6 @@
               </a:rPr>
               <a:t>Robots Autónomos.</a:t>
             </a:r>
-            <a:endParaRPr lang="en-US" altLang="en-US" sz="1600">
-              <a:solidFill>
-                <a:srgbClr val="171717"/>
-              </a:solidFill>
-              <a:latin typeface="Plus Jakarta Sans Light"/>
-              <a:ea typeface="Plus Jakarta Sans Light"/>
-              <a:cs typeface="Plus Jakarta Sans Light"/>
-              <a:sym typeface="Plus Jakarta Sans Light"/>
-            </a:endParaRPr>
           </a:p>
           <a:p>
             <a:pPr marL="342900" lvl="0" indent="-342900" algn="l" rtl="0">
@@ -6756,15 +6831,6 @@
               </a:rPr>
               <a:t>Simulación (Digital Twins).</a:t>
             </a:r>
-            <a:endParaRPr lang="en-US" altLang="en-US" sz="1600">
-              <a:solidFill>
-                <a:srgbClr val="171717"/>
-              </a:solidFill>
-              <a:latin typeface="Plus Jakarta Sans Light"/>
-              <a:ea typeface="Plus Jakarta Sans Light"/>
-              <a:cs typeface="Plus Jakarta Sans Light"/>
-              <a:sym typeface="Plus Jakarta Sans Light"/>
-            </a:endParaRPr>
           </a:p>
           <a:p>
             <a:pPr marL="342900" lvl="0" indent="-342900" algn="l" rtl="0">
@@ -6814,15 +6880,6 @@
               </a:rPr>
               <a:t>Sistemas de Integración (Horizontal/Vertical).</a:t>
             </a:r>
-            <a:endParaRPr lang="en-US" altLang="en-US" sz="1600">
-              <a:solidFill>
-                <a:srgbClr val="171717"/>
-              </a:solidFill>
-              <a:latin typeface="Plus Jakarta Sans Light"/>
-              <a:ea typeface="Plus Jakarta Sans Light"/>
-              <a:cs typeface="Plus Jakarta Sans Light"/>
-              <a:sym typeface="Plus Jakarta Sans Light"/>
-            </a:endParaRPr>
           </a:p>
           <a:p>
             <a:pPr marL="342900" lvl="0" indent="-342900" algn="l" rtl="0">
@@ -6872,15 +6929,6 @@
               </a:rPr>
               <a:t>IoT (Internet de las Cosas).</a:t>
             </a:r>
-            <a:endParaRPr lang="en-US" altLang="en-US" sz="1600">
-              <a:solidFill>
-                <a:srgbClr val="171717"/>
-              </a:solidFill>
-              <a:latin typeface="Plus Jakarta Sans Light"/>
-              <a:ea typeface="Plus Jakarta Sans Light"/>
-              <a:cs typeface="Plus Jakarta Sans Light"/>
-              <a:sym typeface="Plus Jakarta Sans Light"/>
-            </a:endParaRPr>
           </a:p>
           <a:p>
             <a:pPr marL="342900" lvl="0" indent="-342900" algn="l" rtl="0">
@@ -6930,15 +6978,6 @@
               </a:rPr>
               <a:t>Ciberseguridad.</a:t>
             </a:r>
-            <a:endParaRPr lang="en-US" altLang="en-US" sz="1600">
-              <a:solidFill>
-                <a:srgbClr val="171717"/>
-              </a:solidFill>
-              <a:latin typeface="Plus Jakarta Sans Light"/>
-              <a:ea typeface="Plus Jakarta Sans Light"/>
-              <a:cs typeface="Plus Jakarta Sans Light"/>
-              <a:sym typeface="Plus Jakarta Sans Light"/>
-            </a:endParaRPr>
           </a:p>
           <a:p>
             <a:pPr marL="342900" lvl="0" indent="-342900" algn="l" rtl="0">
@@ -6988,15 +7027,6 @@
               </a:rPr>
               <a:t>Cloud Computing.</a:t>
             </a:r>
-            <a:endParaRPr lang="en-US" altLang="en-US" sz="1600">
-              <a:solidFill>
-                <a:srgbClr val="171717"/>
-              </a:solidFill>
-              <a:latin typeface="Plus Jakarta Sans Light"/>
-              <a:ea typeface="Plus Jakarta Sans Light"/>
-              <a:cs typeface="Plus Jakarta Sans Light"/>
-              <a:sym typeface="Plus Jakarta Sans Light"/>
-            </a:endParaRPr>
           </a:p>
           <a:p>
             <a:pPr marL="342900" lvl="0" indent="-342900" algn="l" rtl="0">
@@ -7046,15 +7076,6 @@
               </a:rPr>
               <a:t>Manufactura Aditiva (3D).</a:t>
             </a:r>
-            <a:endParaRPr lang="en-US" altLang="en-US" sz="1600">
-              <a:solidFill>
-                <a:srgbClr val="171717"/>
-              </a:solidFill>
-              <a:latin typeface="Plus Jakarta Sans Light"/>
-              <a:ea typeface="Plus Jakarta Sans Light"/>
-              <a:cs typeface="Plus Jakarta Sans Light"/>
-              <a:sym typeface="Plus Jakarta Sans Light"/>
-            </a:endParaRPr>
           </a:p>
           <a:p>
             <a:pPr marL="342900" lvl="0" indent="-342900" algn="l" rtl="0">
@@ -7162,15 +7183,6 @@
               </a:rPr>
               <a:t>Los 9 Pilares Tecnológicos</a:t>
             </a:r>
-            <a:endParaRPr lang="en-US" altLang="en-US" sz="4000">
-              <a:solidFill>
-                <a:srgbClr val="FF632B"/>
-              </a:solidFill>
-              <a:latin typeface="Plus Jakarta Sans ExtraBold"/>
-              <a:ea typeface="Plus Jakarta Sans ExtraBold"/>
-              <a:cs typeface="Plus Jakarta Sans ExtraBold"/>
-              <a:sym typeface="Plus Jakarta Sans ExtraBold"/>
-            </a:endParaRPr>
           </a:p>
         </p:txBody>
       </p:sp>
@@ -7214,7 +7226,6 @@
               <a:rPr lang="en-US" sz="2400"/>
               <a:t>ESPACIO PARA IMAGEN</a:t>
             </a:r>
-            <a:endParaRPr lang="en-US" sz="2400"/>
           </a:p>
         </p:txBody>
       </p:sp>
@@ -7225,7 +7236,7 @@
           <p:nvPr/>
         </p:nvPicPr>
         <p:blipFill>
-          <a:blip r:embed="rId1"/>
+          <a:blip r:embed="rId3"/>
           <a:stretch>
             <a:fillRect/>
           </a:stretch>
@@ -7253,7 +7264,7 @@
   <p:cSld>
     <p:spTree>
       <p:nvGrpSpPr>
-        <p:cNvPr id="240" name="Shape 240"/>
+        <p:cNvPr id="1" name="Shape 240"/>
         <p:cNvGrpSpPr/>
         <p:nvPr/>
       </p:nvGrpSpPr>
@@ -7311,6 +7322,17 @@
               </a:rPr>
               <a:t>Actividad 1: Discusión sobre Revoluciones Industriales</a:t>
             </a:r>
+          </a:p>
+          <a:p>
+            <a:pPr marL="0" lvl="0" indent="0" algn="l" rtl="0">
+              <a:spcBef>
+                <a:spcPts val="0"/>
+              </a:spcBef>
+              <a:spcAft>
+                <a:spcPts val="0"/>
+              </a:spcAft>
+              <a:buNone/>
+            </a:pPr>
             <a:endParaRPr lang="en-US" altLang="en-US" sz="4400">
               <a:solidFill>
                 <a:srgbClr val="FF632B"/>
@@ -7321,26 +7343,6 @@
               <a:sym typeface="Plus Jakarta Sans ExtraBold"/>
             </a:endParaRPr>
           </a:p>
-          <a:p>
-            <a:pPr marL="0" lvl="0" indent="0" algn="l" rtl="0">
-              <a:spcBef>
-                <a:spcPts val="0"/>
-              </a:spcBef>
-              <a:spcAft>
-                <a:spcPts val="0"/>
-              </a:spcAft>
-              <a:buNone/>
-            </a:pPr>
-            <a:endParaRPr lang="en-US" altLang="en-US" sz="4400">
-              <a:solidFill>
-                <a:srgbClr val="FF632B"/>
-              </a:solidFill>
-              <a:latin typeface="Plus Jakarta Sans ExtraBold"/>
-              <a:ea typeface="Plus Jakarta Sans ExtraBold"/>
-              <a:cs typeface="Plus Jakarta Sans ExtraBold"/>
-              <a:sym typeface="Plus Jakarta Sans ExtraBold"/>
-            </a:endParaRPr>
-          </a:p>
         </p:txBody>
       </p:sp>
       <p:sp>
@@ -7366,6 +7368,7 @@
           <a:bodyPr spcFirstLastPara="1" wrap="square" lIns="121900" tIns="121900" rIns="121900" bIns="121900" anchor="t" anchorCtr="0">
             <a:noAutofit/>
           </a:bodyPr>
+          <a:lstStyle/>
           <a:p>
             <a:pPr marL="0" lvl="0" indent="0" algn="l" rtl="0">
               <a:lnSpc>
@@ -7391,15 +7394,6 @@
               </a:rPr>
               <a:t>Actividad 1: Discusión sobre Revoluciones Industriales</a:t>
             </a:r>
-            <a:endParaRPr lang="en-US" altLang="en-US" sz="1600">
-              <a:solidFill>
-                <a:srgbClr val="171717"/>
-              </a:solidFill>
-              <a:latin typeface="Plus Jakarta Sans Light"/>
-              <a:ea typeface="Plus Jakarta Sans Light"/>
-              <a:cs typeface="Plus Jakarta Sans Light"/>
-              <a:sym typeface="Plus Jakarta Sans Light"/>
-            </a:endParaRPr>
           </a:p>
           <a:p>
             <a:pPr marL="0" lvl="0" indent="0" algn="l" rtl="0">
@@ -7426,15 +7420,6 @@
               </a:rPr>
               <a:t>Objetivo: Identificar el cambio de paradigma.</a:t>
             </a:r>
-            <a:endParaRPr lang="en-US" altLang="en-US" sz="1600">
-              <a:solidFill>
-                <a:srgbClr val="171717"/>
-              </a:solidFill>
-              <a:latin typeface="Plus Jakarta Sans Light"/>
-              <a:ea typeface="Plus Jakarta Sans Light"/>
-              <a:cs typeface="Plus Jakarta Sans Light"/>
-              <a:sym typeface="Plus Jakarta Sans Light"/>
-            </a:endParaRPr>
           </a:p>
           <a:p>
             <a:pPr marL="0" lvl="0" indent="0" algn="l" rtl="0">
@@ -7507,15 +7492,6 @@
               </a:rPr>
               <a:t>1ra (Vapor): </a:t>
             </a:r>
-            <a:endParaRPr lang="en-US" altLang="en-US" sz="1600">
-              <a:solidFill>
-                <a:srgbClr val="171717"/>
-              </a:solidFill>
-              <a:latin typeface="Plus Jakarta Sans Light"/>
-              <a:ea typeface="Plus Jakarta Sans Light"/>
-              <a:cs typeface="Plus Jakarta Sans Light"/>
-              <a:sym typeface="Plus Jakarta Sans Light"/>
-            </a:endParaRPr>
           </a:p>
           <a:p>
             <a:pPr marL="0" lvl="0" indent="0" algn="l" rtl="0">
@@ -7565,15 +7541,6 @@
               </a:rPr>
               <a:t>2da (Electricidad): </a:t>
             </a:r>
-            <a:endParaRPr lang="en-US" altLang="en-US" sz="1600">
-              <a:solidFill>
-                <a:srgbClr val="171717"/>
-              </a:solidFill>
-              <a:latin typeface="Plus Jakarta Sans Light"/>
-              <a:ea typeface="Plus Jakarta Sans Light"/>
-              <a:cs typeface="Plus Jakarta Sans Light"/>
-              <a:sym typeface="Plus Jakarta Sans Light"/>
-            </a:endParaRPr>
           </a:p>
           <a:p>
             <a:pPr marL="0" lvl="0" indent="0" algn="l" rtl="0">
@@ -7623,15 +7590,6 @@
               </a:rPr>
               <a:t>3ra (Informática):</a:t>
             </a:r>
-            <a:endParaRPr lang="en-US" altLang="en-US" sz="1600">
-              <a:solidFill>
-                <a:srgbClr val="171717"/>
-              </a:solidFill>
-              <a:latin typeface="Plus Jakarta Sans Light"/>
-              <a:ea typeface="Plus Jakarta Sans Light"/>
-              <a:cs typeface="Plus Jakarta Sans Light"/>
-              <a:sym typeface="Plus Jakarta Sans Light"/>
-            </a:endParaRPr>
           </a:p>
           <a:p>
             <a:pPr marL="0" lvl="0" indent="0" algn="l" rtl="0">
@@ -7658,15 +7616,6 @@
               </a:rPr>
               <a:t> </a:t>
             </a:r>
-            <a:endParaRPr lang="en-US" altLang="en-US" sz="1600">
-              <a:solidFill>
-                <a:srgbClr val="171717"/>
-              </a:solidFill>
-              <a:latin typeface="Plus Jakarta Sans Light"/>
-              <a:ea typeface="Plus Jakarta Sans Light"/>
-              <a:cs typeface="Plus Jakarta Sans Light"/>
-              <a:sym typeface="Plus Jakarta Sans Light"/>
-            </a:endParaRPr>
           </a:p>
           <a:p>
             <a:pPr marL="0" lvl="0" indent="0" algn="l" rtl="0">
@@ -7693,15 +7642,6 @@
               </a:rPr>
               <a:t>4ta (Digital): </a:t>
             </a:r>
-            <a:endParaRPr lang="en-US" altLang="en-US" sz="1600">
-              <a:solidFill>
-                <a:srgbClr val="171717"/>
-              </a:solidFill>
-              <a:latin typeface="Plus Jakarta Sans Light"/>
-              <a:ea typeface="Plus Jakarta Sans Light"/>
-              <a:cs typeface="Plus Jakarta Sans Light"/>
-              <a:sym typeface="Plus Jakarta Sans Light"/>
-            </a:endParaRPr>
           </a:p>
         </p:txBody>
       </p:sp>
@@ -7718,7 +7658,7 @@
   <p:cSld>
     <p:spTree>
       <p:nvGrpSpPr>
-        <p:cNvPr id="240" name="Shape 240"/>
+        <p:cNvPr id="1" name="Shape 240"/>
         <p:cNvGrpSpPr/>
         <p:nvPr/>
       </p:nvGrpSpPr>
@@ -7779,15 +7719,6 @@
               </a:rPr>
               <a:t>"Los datos son el nuevo petróleo, pero la analítica es el motor que los procesa"</a:t>
             </a:r>
-            <a:endParaRPr lang="en-US" altLang="en-US" sz="2000">
-              <a:solidFill>
-                <a:srgbClr val="171717"/>
-              </a:solidFill>
-              <a:latin typeface="Plus Jakarta Sans Light"/>
-              <a:ea typeface="Plus Jakarta Sans Light"/>
-              <a:cs typeface="Plus Jakarta Sans Light"/>
-              <a:sym typeface="Plus Jakarta Sans Light"/>
-            </a:endParaRPr>
           </a:p>
         </p:txBody>
       </p:sp>
@@ -7837,15 +7768,6 @@
               </a:rPr>
               <a:t>El Corazón del Cambio: Datos e IoT</a:t>
             </a:r>
-            <a:endParaRPr lang="en-US" altLang="en-US" sz="4800">
-              <a:solidFill>
-                <a:srgbClr val="FF632B"/>
-              </a:solidFill>
-              <a:latin typeface="Plus Jakarta Sans ExtraBold"/>
-              <a:ea typeface="Plus Jakarta Sans ExtraBold"/>
-              <a:cs typeface="Plus Jakarta Sans ExtraBold"/>
-              <a:sym typeface="Plus Jakarta Sans ExtraBold"/>
-            </a:endParaRPr>
           </a:p>
         </p:txBody>
       </p:sp>
@@ -7856,7 +7778,7 @@
           <p:nvPr/>
         </p:nvPicPr>
         <p:blipFill>
-          <a:blip r:embed="rId1"/>
+          <a:blip r:embed="rId3"/>
           <a:stretch>
             <a:fillRect/>
           </a:stretch>
@@ -7908,6 +7830,7 @@
         </p:style>
         <p:txBody>
           <a:bodyPr rtlCol="0" anchor="ctr"/>
+          <a:lstStyle/>
           <a:p>
             <a:pPr algn="ctr"/>
             <a:endParaRPr lang="en-US"/>
@@ -7927,7 +7850,7 @@
   <p:cSld>
     <p:spTree>
       <p:nvGrpSpPr>
-        <p:cNvPr id="240" name="Shape 240"/>
+        <p:cNvPr id="1" name="Shape 240"/>
         <p:cNvGrpSpPr/>
         <p:nvPr/>
       </p:nvGrpSpPr>
@@ -7988,15 +7911,6 @@
               </a:rPr>
               <a:t>¿Cómo impactan estas tecnologías en tu entorno laboral actual?</a:t>
             </a:r>
-            <a:endParaRPr lang="en-US" altLang="en-US" sz="2400">
-              <a:solidFill>
-                <a:srgbClr val="171717"/>
-              </a:solidFill>
-              <a:latin typeface="Plus Jakarta Sans Light"/>
-              <a:ea typeface="Plus Jakarta Sans Light"/>
-              <a:cs typeface="Plus Jakarta Sans Light"/>
-              <a:sym typeface="Plus Jakarta Sans Light"/>
-            </a:endParaRPr>
           </a:p>
         </p:txBody>
       </p:sp>
@@ -8046,15 +7960,6 @@
               </a:rPr>
               <a:t>Pausa Activa y Reflexión</a:t>
             </a:r>
-            <a:endParaRPr lang="en-US" altLang="en-US" sz="4800">
-              <a:solidFill>
-                <a:srgbClr val="FF632B"/>
-              </a:solidFill>
-              <a:latin typeface="Plus Jakarta Sans ExtraBold"/>
-              <a:ea typeface="Plus Jakarta Sans ExtraBold"/>
-              <a:cs typeface="Plus Jakarta Sans ExtraBold"/>
-              <a:sym typeface="Plus Jakarta Sans ExtraBold"/>
-            </a:endParaRPr>
           </a:p>
         </p:txBody>
       </p:sp>
@@ -8067,7 +7972,7 @@
           <p:nvPr/>
         </p:nvPicPr>
         <p:blipFill>
-          <a:blip r:embed="rId1"/>
+          <a:blip r:embed="rId3"/>
           <a:stretch>
             <a:fillRect/>
           </a:stretch>
@@ -8091,7 +7996,7 @@
           <p:nvPr/>
         </p:nvPicPr>
         <p:blipFill>
-          <a:blip r:embed="rId2"/>
+          <a:blip r:embed="rId4"/>
           <a:stretch>
             <a:fillRect/>
           </a:stretch>
@@ -8149,7 +8054,7 @@
   <p:cSld>
     <p:spTree>
       <p:nvGrpSpPr>
-        <p:cNvPr id="240" name="Shape 240"/>
+        <p:cNvPr id="1" name="Shape 240"/>
         <p:cNvGrpSpPr/>
         <p:nvPr/>
       </p:nvGrpSpPr>
@@ -8210,15 +8115,6 @@
               </a:rPr>
               <a:t>Título del Caso: Optimización mediante IoT y Mantenimiento Predictivo.</a:t>
             </a:r>
-            <a:endParaRPr lang="en-US" altLang="en-US" sz="2400">
-              <a:solidFill>
-                <a:srgbClr val="171717"/>
-              </a:solidFill>
-              <a:latin typeface="Plus Jakarta Sans Light"/>
-              <a:ea typeface="Plus Jakarta Sans Light"/>
-              <a:cs typeface="Plus Jakarta Sans Light"/>
-              <a:sym typeface="Plus Jakarta Sans Light"/>
-            </a:endParaRPr>
           </a:p>
           <a:p>
             <a:pPr marL="0" lvl="0" indent="0" algn="l" rtl="0">
@@ -8268,15 +8164,6 @@
               </a:rPr>
               <a:t>Problema: Tiempos muertos en producción.</a:t>
             </a:r>
-            <a:endParaRPr lang="en-US" altLang="en-US" sz="2400">
-              <a:solidFill>
-                <a:srgbClr val="171717"/>
-              </a:solidFill>
-              <a:latin typeface="Plus Jakarta Sans Light"/>
-              <a:ea typeface="Plus Jakarta Sans Light"/>
-              <a:cs typeface="Plus Jakarta Sans Light"/>
-              <a:sym typeface="Plus Jakarta Sans Light"/>
-            </a:endParaRPr>
           </a:p>
           <a:p>
             <a:pPr marL="0" lvl="0" indent="0" algn="l" rtl="0">
@@ -8326,15 +8213,6 @@
               </a:rPr>
               <a:t>Solución: Sensores en tiempo real y modelos de predicción.</a:t>
             </a:r>
-            <a:endParaRPr lang="en-US" altLang="en-US" sz="2400">
-              <a:solidFill>
-                <a:srgbClr val="171717"/>
-              </a:solidFill>
-              <a:latin typeface="Plus Jakarta Sans Light"/>
-              <a:ea typeface="Plus Jakarta Sans Light"/>
-              <a:cs typeface="Plus Jakarta Sans Light"/>
-              <a:sym typeface="Plus Jakarta Sans Light"/>
-            </a:endParaRPr>
           </a:p>
           <a:p>
             <a:pPr marL="0" lvl="0" indent="0" algn="l" rtl="0">
@@ -8384,15 +8262,6 @@
               </a:rPr>
               <a:t>Resultado: Reducción de costos operativos y eficiencia energética.</a:t>
             </a:r>
-            <a:endParaRPr lang="en-US" altLang="en-US" sz="2400">
-              <a:solidFill>
-                <a:srgbClr val="171717"/>
-              </a:solidFill>
-              <a:latin typeface="Plus Jakarta Sans Light"/>
-              <a:ea typeface="Plus Jakarta Sans Light"/>
-              <a:cs typeface="Plus Jakarta Sans Light"/>
-              <a:sym typeface="Plus Jakarta Sans Light"/>
-            </a:endParaRPr>
           </a:p>
         </p:txBody>
       </p:sp>
@@ -8442,15 +8311,6 @@
               </a:rPr>
               <a:t>Análisis de Caso Real (Práctica)</a:t>
             </a:r>
-            <a:endParaRPr lang="en-US" altLang="en-US" sz="4800">
-              <a:solidFill>
-                <a:srgbClr val="FF632B"/>
-              </a:solidFill>
-              <a:latin typeface="Plus Jakarta Sans ExtraBold"/>
-              <a:ea typeface="Plus Jakarta Sans ExtraBold"/>
-              <a:cs typeface="Plus Jakarta Sans ExtraBold"/>
-              <a:sym typeface="Plus Jakarta Sans ExtraBold"/>
-            </a:endParaRPr>
           </a:p>
         </p:txBody>
       </p:sp>
@@ -8467,7 +8327,7 @@
   <p:cSld>
     <p:spTree>
       <p:nvGrpSpPr>
-        <p:cNvPr id="240" name="Shape 240"/>
+        <p:cNvPr id="1" name="Shape 240"/>
         <p:cNvGrpSpPr/>
         <p:nvPr/>
       </p:nvGrpSpPr>
@@ -8528,15 +8388,6 @@
               </a:rPr>
               <a:t>Escenario: Una planta embotelladora pierde 15% de su producción por paradas inesperadas en la cinta transportadora.</a:t>
             </a:r>
-            <a:endParaRPr lang="en-US" altLang="en-US" sz="2000">
-              <a:solidFill>
-                <a:srgbClr val="171717"/>
-              </a:solidFill>
-              <a:latin typeface="Plus Jakarta Sans Light"/>
-              <a:ea typeface="Plus Jakarta Sans Light"/>
-              <a:cs typeface="Plus Jakarta Sans Light"/>
-              <a:sym typeface="Plus Jakarta Sans Light"/>
-            </a:endParaRPr>
           </a:p>
           <a:p>
             <a:pPr marL="0" lvl="0" indent="0" algn="l" rtl="0">
@@ -8586,15 +8437,6 @@
               </a:rPr>
               <a:t>Solución IoT: Instalación de sensores de vibración y temperatura en los motores.</a:t>
             </a:r>
-            <a:endParaRPr lang="en-US" altLang="en-US" sz="2000">
-              <a:solidFill>
-                <a:srgbClr val="171717"/>
-              </a:solidFill>
-              <a:latin typeface="Plus Jakarta Sans Light"/>
-              <a:ea typeface="Plus Jakarta Sans Light"/>
-              <a:cs typeface="Plus Jakarta Sans Light"/>
-              <a:sym typeface="Plus Jakarta Sans Light"/>
-            </a:endParaRPr>
           </a:p>
           <a:p>
             <a:pPr marL="0" lvl="0" indent="0" algn="l" rtl="0">
@@ -8644,15 +8486,6 @@
               </a:rPr>
               <a:t>Uso de Datos: Los datos se envían a la nube (Cloud) y un algoritmo de IA predice fallos 48 horas antes de que ocurran.</a:t>
             </a:r>
-            <a:endParaRPr lang="en-US" altLang="en-US" sz="2000">
-              <a:solidFill>
-                <a:srgbClr val="171717"/>
-              </a:solidFill>
-              <a:latin typeface="Plus Jakarta Sans Light"/>
-              <a:ea typeface="Plus Jakarta Sans Light"/>
-              <a:cs typeface="Plus Jakarta Sans Light"/>
-              <a:sym typeface="Plus Jakarta Sans Light"/>
-            </a:endParaRPr>
           </a:p>
           <a:p>
             <a:pPr marL="0" lvl="0" indent="0" algn="l" rtl="0">
@@ -8702,15 +8535,6 @@
               </a:rPr>
               <a:t>¿Qué es más barato: cambiar un rodamiento de $50 hoy o detener la planta 5 horas mañana?</a:t>
             </a:r>
-            <a:endParaRPr lang="en-US" altLang="en-US" sz="2000">
-              <a:solidFill>
-                <a:srgbClr val="171717"/>
-              </a:solidFill>
-              <a:latin typeface="Plus Jakarta Sans Light"/>
-              <a:ea typeface="Plus Jakarta Sans Light"/>
-              <a:cs typeface="Plus Jakarta Sans Light"/>
-              <a:sym typeface="Plus Jakarta Sans Light"/>
-            </a:endParaRPr>
           </a:p>
         </p:txBody>
       </p:sp>
@@ -8772,15 +8596,6 @@
               </a:rPr>
               <a:t> Caso Real (Práctica)</a:t>
             </a:r>
-            <a:endParaRPr lang="en-US" altLang="en-US" sz="4800">
-              <a:solidFill>
-                <a:srgbClr val="FF632B"/>
-              </a:solidFill>
-              <a:latin typeface="Plus Jakarta Sans ExtraBold"/>
-              <a:ea typeface="Plus Jakarta Sans ExtraBold"/>
-              <a:cs typeface="Plus Jakarta Sans ExtraBold"/>
-              <a:sym typeface="Plus Jakarta Sans ExtraBold"/>
-            </a:endParaRPr>
           </a:p>
         </p:txBody>
       </p:sp>
@@ -8797,7 +8612,7 @@
   <p:cSld>
     <p:spTree>
       <p:nvGrpSpPr>
-        <p:cNvPr id="240" name="Shape 240"/>
+        <p:cNvPr id="1" name="Shape 240"/>
         <p:cNvGrpSpPr/>
         <p:nvPr/>
       </p:nvGrpSpPr>
@@ -8858,15 +8673,6 @@
               </a:rPr>
               <a:t>Instrucciones:</a:t>
             </a:r>
-            <a:endParaRPr lang="en-US" altLang="en-US">
-              <a:solidFill>
-                <a:srgbClr val="171717"/>
-              </a:solidFill>
-              <a:latin typeface="Plus Jakarta Sans Light"/>
-              <a:ea typeface="Plus Jakarta Sans Light"/>
-              <a:cs typeface="Plus Jakarta Sans Light"/>
-              <a:sym typeface="Plus Jakarta Sans Light"/>
-            </a:endParaRPr>
           </a:p>
           <a:p>
             <a:pPr marL="0" lvl="0" indent="0" algn="l" rtl="0">
@@ -8916,15 +8722,6 @@
               </a:rPr>
               <a:t>Identificar un proceso ineficiente.</a:t>
             </a:r>
-            <a:endParaRPr lang="en-US" altLang="en-US">
-              <a:solidFill>
-                <a:srgbClr val="171717"/>
-              </a:solidFill>
-              <a:latin typeface="Plus Jakarta Sans Light"/>
-              <a:ea typeface="Plus Jakarta Sans Light"/>
-              <a:cs typeface="Plus Jakarta Sans Light"/>
-              <a:sym typeface="Plus Jakarta Sans Light"/>
-            </a:endParaRPr>
           </a:p>
           <a:p>
             <a:pPr marL="0" lvl="0" indent="0" algn="l" rtl="0">
@@ -8998,15 +8795,6 @@
               </a:rPr>
               <a:t>.</a:t>
             </a:r>
-            <a:endParaRPr lang="en-US" altLang="en-US">
-              <a:solidFill>
-                <a:srgbClr val="171717"/>
-              </a:solidFill>
-              <a:latin typeface="Plus Jakarta Sans Light"/>
-              <a:ea typeface="Plus Jakarta Sans Light"/>
-              <a:cs typeface="Plus Jakarta Sans Light"/>
-              <a:sym typeface="Plus Jakarta Sans Light"/>
-            </a:endParaRPr>
           </a:p>
           <a:p>
             <a:pPr marL="0" lvl="0" indent="0" algn="l" rtl="0">
@@ -9056,15 +8844,6 @@
               </a:rPr>
               <a:t>Definir el KPI (métrica) que se va a mejorar con datos.</a:t>
             </a:r>
-            <a:endParaRPr lang="en-US" altLang="en-US">
-              <a:solidFill>
-                <a:srgbClr val="171717"/>
-              </a:solidFill>
-              <a:latin typeface="Plus Jakarta Sans Light"/>
-              <a:ea typeface="Plus Jakarta Sans Light"/>
-              <a:cs typeface="Plus Jakarta Sans Light"/>
-              <a:sym typeface="Plus Jakarta Sans Light"/>
-            </a:endParaRPr>
           </a:p>
           <a:p>
             <a:pPr marL="0" lvl="0" indent="0" algn="l" rtl="0">
@@ -9114,15 +8893,6 @@
               </a:rPr>
               <a:t>Recurso: "Utilicen la plantilla proporcionada".</a:t>
             </a:r>
-            <a:endParaRPr lang="en-US" altLang="en-US">
-              <a:solidFill>
-                <a:srgbClr val="171717"/>
-              </a:solidFill>
-              <a:latin typeface="Plus Jakarta Sans Light"/>
-              <a:ea typeface="Plus Jakarta Sans Light"/>
-              <a:cs typeface="Plus Jakarta Sans Light"/>
-              <a:sym typeface="Plus Jakarta Sans Light"/>
-            </a:endParaRPr>
           </a:p>
         </p:txBody>
       </p:sp>
@@ -9172,15 +8942,6 @@
               </a:rPr>
               <a:t>Actividad Grupal: </a:t>
             </a:r>
-            <a:endParaRPr lang="en-US" altLang="en-US" sz="4800">
-              <a:solidFill>
-                <a:srgbClr val="FF632B"/>
-              </a:solidFill>
-              <a:latin typeface="Plus Jakarta Sans ExtraBold"/>
-              <a:ea typeface="Plus Jakarta Sans ExtraBold"/>
-              <a:cs typeface="Plus Jakarta Sans ExtraBold"/>
-              <a:sym typeface="Plus Jakarta Sans ExtraBold"/>
-            </a:endParaRPr>
           </a:p>
           <a:p>
             <a:pPr marL="0" lvl="0" indent="0" algn="l" rtl="0">
@@ -9204,15 +8965,6 @@
               </a:rPr>
               <a:t>Diseño de Plan Ejecutivo</a:t>
             </a:r>
-            <a:endParaRPr lang="en-US" altLang="en-US" sz="4800">
-              <a:solidFill>
-                <a:srgbClr val="FF632B"/>
-              </a:solidFill>
-              <a:latin typeface="Plus Jakarta Sans ExtraBold"/>
-              <a:ea typeface="Plus Jakarta Sans ExtraBold"/>
-              <a:cs typeface="Plus Jakarta Sans ExtraBold"/>
-              <a:sym typeface="Plus Jakarta Sans ExtraBold"/>
-            </a:endParaRPr>
           </a:p>
         </p:txBody>
       </p:sp>
@@ -9235,13 +8987,26 @@
             <a:tbl>
               <a:tblPr/>
               <a:tblGrid>
-                <a:gridCol w="2263140"/>
-                <a:gridCol w="6959600"/>
+                <a:gridCol w="2263140">
+                  <a:extLst>
+                    <a:ext uri="{9D8B030D-6E8A-4147-A177-3AD203B41FA5}">
+                      <a16:colId xmlns:a16="http://schemas.microsoft.com/office/drawing/2014/main" val="20000"/>
+                    </a:ext>
+                  </a:extLst>
+                </a:gridCol>
+                <a:gridCol w="6959600">
+                  <a:extLst>
+                    <a:ext uri="{9D8B030D-6E8A-4147-A177-3AD203B41FA5}">
+                      <a16:colId xmlns:a16="http://schemas.microsoft.com/office/drawing/2014/main" val="20001"/>
+                    </a:ext>
+                  </a:extLst>
+                </a:gridCol>
               </a:tblGrid>
               <a:tr h="247015">
                 <a:tc>
                   <a:txBody>
                     <a:bodyPr/>
+                    <a:lstStyle/>
                     <a:p>
                       <a:pPr>
                         <a:spcBef>
@@ -9258,13 +9023,9 @@
                         </a:rPr>
                         <a:t>Sección</a:t>
                       </a:r>
-                      <a:endParaRPr sz="1100">
-                        <a:latin typeface="Google Sans Text"/>
-                        <a:ea typeface="Google Sans Text"/>
-                      </a:endParaRPr>
                     </a:p>
                   </a:txBody>
-                  <a:tcPr marL="0" marR="0" marT="0" marB="0" anchor="ctr" anchorCtr="0">
+                  <a:tcPr marL="0" marR="0" marT="0" marB="0" anchor="ctr">
                     <a:lnL w="7620" cap="flat" cmpd="sng">
                       <a:solidFill>
                         <a:srgbClr val="000000"/>
@@ -9303,6 +9064,7 @@
                 <a:tc>
                   <a:txBody>
                     <a:bodyPr/>
+                    <a:lstStyle/>
                     <a:p>
                       <a:pPr>
                         <a:spcBef>
@@ -9319,13 +9081,9 @@
                         </a:rPr>
                         <a:t>Contenido Sugerido</a:t>
                       </a:r>
-                      <a:endParaRPr sz="1100">
-                        <a:latin typeface="Google Sans Text"/>
-                        <a:ea typeface="Google Sans Text"/>
-                      </a:endParaRPr>
                     </a:p>
                   </a:txBody>
-                  <a:tcPr marL="0" marR="0" marT="0" marB="0" anchor="ctr" anchorCtr="0">
+                  <a:tcPr marL="0" marR="0" marT="0" marB="0" anchor="ctr">
                     <a:lnL w="7620" cap="flat" cmpd="sng">
                       <a:solidFill>
                         <a:srgbClr val="000000"/>
@@ -9361,11 +9119,17 @@
                     <a:noFill/>
                   </a:tcPr>
                 </a:tc>
+                <a:extLst>
+                  <a:ext uri="{0D108BD9-81ED-4DB2-BD59-A6C34878D82A}">
+                    <a16:rowId xmlns:a16="http://schemas.microsoft.com/office/drawing/2014/main" val="10000"/>
+                  </a:ext>
+                </a:extLst>
               </a:tr>
               <a:tr h="247015">
                 <a:tc>
                   <a:txBody>
                     <a:bodyPr/>
+                    <a:lstStyle/>
                     <a:p>
                       <a:pPr>
                         <a:spcBef>
@@ -9379,13 +9143,9 @@
                         </a:rPr>
                         <a:t>Problema</a:t>
                       </a:r>
-                      <a:endParaRPr sz="1100" b="1">
-                        <a:latin typeface="Google Sans Text"/>
-                        <a:ea typeface="Google Sans Text"/>
-                      </a:endParaRPr>
                     </a:p>
                   </a:txBody>
-                  <a:tcPr marL="0" marR="0" marT="0" marB="0" anchor="ctr" anchorCtr="0">
+                  <a:tcPr marL="0" marR="0" marT="0" marB="0" anchor="ctr">
                     <a:lnL w="7620" cap="flat" cmpd="sng">
                       <a:solidFill>
                         <a:srgbClr val="000000"/>
@@ -9424,6 +9184,7 @@
                 <a:tc>
                   <a:txBody>
                     <a:bodyPr/>
+                    <a:lstStyle/>
                     <a:p>
                       <a:pPr>
                         <a:spcBef>
@@ -9437,13 +9198,9 @@
                         </a:rPr>
                         <a:t>¿Qué proceso es ineficiente hoy? (ej. Logística, Calidad).</a:t>
                       </a:r>
-                      <a:endParaRPr sz="1100">
-                        <a:latin typeface="Google Sans Text"/>
-                        <a:ea typeface="Google Sans Text"/>
-                      </a:endParaRPr>
                     </a:p>
                   </a:txBody>
-                  <a:tcPr marL="0" marR="0" marT="0" marB="0" anchor="ctr" anchorCtr="0">
+                  <a:tcPr marL="0" marR="0" marT="0" marB="0" anchor="ctr">
                     <a:lnL w="7620" cap="flat" cmpd="sng">
                       <a:solidFill>
                         <a:srgbClr val="000000"/>
@@ -9479,11 +9236,17 @@
                     <a:noFill/>
                   </a:tcPr>
                 </a:tc>
+                <a:extLst>
+                  <a:ext uri="{0D108BD9-81ED-4DB2-BD59-A6C34878D82A}">
+                    <a16:rowId xmlns:a16="http://schemas.microsoft.com/office/drawing/2014/main" val="10001"/>
+                  </a:ext>
+                </a:extLst>
               </a:tr>
               <a:tr h="246380">
                 <a:tc>
                   <a:txBody>
                     <a:bodyPr/>
+                    <a:lstStyle/>
                     <a:p>
                       <a:pPr>
                         <a:spcBef>
@@ -9497,13 +9260,9 @@
                         </a:rPr>
                         <a:t>Tecnología 4.0</a:t>
                       </a:r>
-                      <a:endParaRPr sz="1100" b="1">
-                        <a:latin typeface="Google Sans Text"/>
-                        <a:ea typeface="Google Sans Text"/>
-                      </a:endParaRPr>
                     </a:p>
                   </a:txBody>
-                  <a:tcPr marL="0" marR="0" marT="0" marB="0" anchor="ctr" anchorCtr="0">
+                  <a:tcPr marL="0" marR="0" marT="0" marB="0" anchor="ctr">
                     <a:lnL w="7620" cap="flat" cmpd="sng">
                       <a:solidFill>
                         <a:srgbClr val="000000"/>
@@ -9542,6 +9301,7 @@
                 <a:tc>
                   <a:txBody>
                     <a:bodyPr/>
+                    <a:lstStyle/>
                     <a:p>
                       <a:pPr>
                         <a:spcBef>
@@ -9555,13 +9315,9 @@
                         </a:rPr>
                         <a:t>¿Qué usaremos? (ej. Sensores IoT + Dashboard en Power BI).</a:t>
                       </a:r>
-                      <a:endParaRPr sz="1100">
-                        <a:latin typeface="Google Sans Text"/>
-                        <a:ea typeface="Google Sans Text"/>
-                      </a:endParaRPr>
                     </a:p>
                   </a:txBody>
-                  <a:tcPr marL="0" marR="0" marT="0" marB="0" anchor="ctr" anchorCtr="0">
+                  <a:tcPr marL="0" marR="0" marT="0" marB="0" anchor="ctr">
                     <a:lnL w="7620" cap="flat" cmpd="sng">
                       <a:solidFill>
                         <a:srgbClr val="000000"/>
@@ -9597,11 +9353,17 @@
                     <a:noFill/>
                   </a:tcPr>
                 </a:tc>
+                <a:extLst>
+                  <a:ext uri="{0D108BD9-81ED-4DB2-BD59-A6C34878D82A}">
+                    <a16:rowId xmlns:a16="http://schemas.microsoft.com/office/drawing/2014/main" val="10002"/>
+                  </a:ext>
+                </a:extLst>
               </a:tr>
               <a:tr h="389255">
                 <a:tc>
                   <a:txBody>
                     <a:bodyPr/>
+                    <a:lstStyle/>
                     <a:p>
                       <a:pPr>
                         <a:spcBef>
@@ -9615,13 +9377,9 @@
                         </a:rPr>
                         <a:t>Dato Crítico</a:t>
                       </a:r>
-                      <a:endParaRPr sz="1100" b="1">
-                        <a:latin typeface="Google Sans Text"/>
-                        <a:ea typeface="Google Sans Text"/>
-                      </a:endParaRPr>
                     </a:p>
                   </a:txBody>
-                  <a:tcPr marL="0" marR="0" marT="0" marB="0" anchor="ctr" anchorCtr="0">
+                  <a:tcPr marL="0" marR="0" marT="0" marB="0" anchor="ctr">
                     <a:lnL w="7620" cap="flat" cmpd="sng">
                       <a:solidFill>
                         <a:srgbClr val="000000"/>
@@ -9660,6 +9418,7 @@
                 <a:tc>
                   <a:txBody>
                     <a:bodyPr/>
+                    <a:lstStyle/>
                     <a:p>
                       <a:pPr>
                         <a:spcBef>
@@ -9673,13 +9432,9 @@
                         </a:rPr>
                         <a:t>¿Qué métrica específica queremos mejorar? (ej. Reducir scrap en 10%).</a:t>
                       </a:r>
-                      <a:endParaRPr sz="1100">
-                        <a:latin typeface="Google Sans Text"/>
-                        <a:ea typeface="Google Sans Text"/>
-                      </a:endParaRPr>
                     </a:p>
                   </a:txBody>
-                  <a:tcPr marL="0" marR="0" marT="0" marB="0" anchor="ctr" anchorCtr="0">
+                  <a:tcPr marL="0" marR="0" marT="0" marB="0" anchor="ctr">
                     <a:lnL w="7620" cap="flat" cmpd="sng">
                       <a:solidFill>
                         <a:srgbClr val="000000"/>
@@ -9715,11 +9470,17 @@
                     <a:noFill/>
                   </a:tcPr>
                 </a:tc>
+                <a:extLst>
+                  <a:ext uri="{0D108BD9-81ED-4DB2-BD59-A6C34878D82A}">
+                    <a16:rowId xmlns:a16="http://schemas.microsoft.com/office/drawing/2014/main" val="10003"/>
+                  </a:ext>
+                </a:extLst>
               </a:tr>
               <a:tr h="247015">
                 <a:tc>
                   <a:txBody>
                     <a:bodyPr/>
+                    <a:lstStyle/>
                     <a:p>
                       <a:pPr>
                         <a:spcBef>
@@ -9733,13 +9494,9 @@
                         </a:rPr>
                         <a:t>Impacto</a:t>
                       </a:r>
-                      <a:endParaRPr sz="1100" b="1">
-                        <a:latin typeface="Google Sans Text"/>
-                        <a:ea typeface="Google Sans Text"/>
-                      </a:endParaRPr>
                     </a:p>
                   </a:txBody>
-                  <a:tcPr marL="0" marR="0" marT="0" marB="0" anchor="ctr" anchorCtr="0">
+                  <a:tcPr marL="0" marR="0" marT="0" marB="0" anchor="ctr">
                     <a:lnL w="7620" cap="flat" cmpd="sng">
                       <a:solidFill>
                         <a:srgbClr val="000000"/>
@@ -9778,6 +9535,7 @@
                 <a:tc>
                   <a:txBody>
                     <a:bodyPr/>
+                    <a:lstStyle/>
                     <a:p>
                       <a:pPr>
                         <a:spcBef>
@@ -9791,13 +9549,9 @@
                         </a:rPr>
                         <a:t>¿Cómo ayuda esto al negocio?</a:t>
                       </a:r>
-                      <a:endParaRPr sz="1100">
-                        <a:latin typeface="Google Sans Text"/>
-                        <a:ea typeface="Google Sans Text"/>
-                      </a:endParaRPr>
                     </a:p>
                   </a:txBody>
-                  <a:tcPr marL="0" marR="0" marT="0" marB="0" anchor="ctr" anchorCtr="0">
+                  <a:tcPr marL="0" marR="0" marT="0" marB="0" anchor="ctr">
                     <a:lnL w="7620" cap="flat" cmpd="sng">
                       <a:solidFill>
                         <a:srgbClr val="000000"/>
@@ -9833,6 +9587,11 @@
                     <a:noFill/>
                   </a:tcPr>
                 </a:tc>
+                <a:extLst>
+                  <a:ext uri="{0D108BD9-81ED-4DB2-BD59-A6C34878D82A}">
+                    <a16:rowId xmlns:a16="http://schemas.microsoft.com/office/drawing/2014/main" val="10004"/>
+                  </a:ext>
+                </a:extLst>
               </a:tr>
             </a:tbl>
           </a:graphicData>
@@ -9851,7 +9610,7 @@
   <p:cSld>
     <p:spTree>
       <p:nvGrpSpPr>
-        <p:cNvPr id="240" name="Shape 240"/>
+        <p:cNvPr id="1" name="Shape 240"/>
         <p:cNvGrpSpPr/>
         <p:nvPr/>
       </p:nvGrpSpPr>
@@ -9912,15 +9671,6 @@
               </a:rPr>
               <a:t>Proyecto: Control de calidad inteligente.</a:t>
             </a:r>
-            <a:endParaRPr lang="en-US" altLang="en-US">
-              <a:solidFill>
-                <a:srgbClr val="171717"/>
-              </a:solidFill>
-              <a:latin typeface="Plus Jakarta Sans Light"/>
-              <a:ea typeface="Plus Jakarta Sans Light"/>
-              <a:cs typeface="Plus Jakarta Sans Light"/>
-              <a:sym typeface="Plus Jakarta Sans Light"/>
-            </a:endParaRPr>
           </a:p>
           <a:p>
             <a:pPr marL="0" lvl="0" indent="0" algn="l" rtl="0">
@@ -9970,15 +9720,6 @@
               </a:rPr>
               <a:t>Tecnología: Visión artificial + IA.</a:t>
             </a:r>
-            <a:endParaRPr lang="en-US" altLang="en-US">
-              <a:solidFill>
-                <a:srgbClr val="171717"/>
-              </a:solidFill>
-              <a:latin typeface="Plus Jakarta Sans Light"/>
-              <a:ea typeface="Plus Jakarta Sans Light"/>
-              <a:cs typeface="Plus Jakarta Sans Light"/>
-              <a:sym typeface="Plus Jakarta Sans Light"/>
-            </a:endParaRPr>
           </a:p>
           <a:p>
             <a:pPr marL="0" lvl="0" indent="0" algn="l" rtl="0">
@@ -10098,15 +9839,6 @@
               </a:rPr>
               <a:t>Valor: Reducción de devoluciones en un 20%.</a:t>
             </a:r>
-            <a:endParaRPr lang="en-US" altLang="en-US">
-              <a:solidFill>
-                <a:srgbClr val="171717"/>
-              </a:solidFill>
-              <a:latin typeface="Plus Jakarta Sans Light"/>
-              <a:ea typeface="Plus Jakarta Sans Light"/>
-              <a:cs typeface="Plus Jakarta Sans Light"/>
-              <a:sym typeface="Plus Jakarta Sans Light"/>
-            </a:endParaRPr>
           </a:p>
         </p:txBody>
       </p:sp>
@@ -10156,15 +9888,6 @@
               </a:rPr>
               <a:t>Ejemplo de Plan Data-Driven (Guía)</a:t>
             </a:r>
-            <a:endParaRPr lang="en-US" altLang="en-US" sz="4800">
-              <a:solidFill>
-                <a:srgbClr val="FF632B"/>
-              </a:solidFill>
-              <a:latin typeface="Plus Jakarta Sans ExtraBold"/>
-              <a:ea typeface="Plus Jakarta Sans ExtraBold"/>
-              <a:cs typeface="Plus Jakarta Sans ExtraBold"/>
-              <a:sym typeface="Plus Jakarta Sans ExtraBold"/>
-            </a:endParaRPr>
           </a:p>
         </p:txBody>
       </p:sp>
@@ -10181,7 +9904,7 @@
   <p:cSld>
     <p:spTree>
       <p:nvGrpSpPr>
-        <p:cNvPr id="273" name="Shape 273"/>
+        <p:cNvPr id="1" name="Shape 273"/>
         <p:cNvGrpSpPr/>
         <p:nvPr/>
       </p:nvGrpSpPr>
@@ -10228,7 +9951,7 @@
               <a:buNone/>
             </a:pPr>
             <a:r>
-              <a:rPr lang="en-US" sz="3735">
+              <a:rPr lang="en-US" sz="3735" dirty="0" err="1">
                 <a:solidFill>
                   <a:srgbClr val="260700"/>
                 </a:solidFill>
@@ -10239,7 +9962,7 @@
               </a:rPr>
               <a:t>Presentación</a:t>
             </a:r>
-            <a:endParaRPr sz="3735">
+            <a:endParaRPr sz="3735" dirty="0">
               <a:solidFill>
                 <a:srgbClr val="260700"/>
               </a:solidFill>
@@ -10260,7 +9983,7 @@
               <a:buNone/>
             </a:pPr>
             <a:r>
-              <a:rPr lang="en-US" sz="3735">
+              <a:rPr lang="en-US" sz="3735" dirty="0">
                 <a:solidFill>
                   <a:srgbClr val="260700"/>
                 </a:solidFill>
@@ -10272,7 +9995,7 @@
               <a:t>del </a:t>
             </a:r>
             <a:r>
-              <a:rPr lang="en-US" sz="3735">
+              <a:rPr lang="en-US" sz="3735" dirty="0" err="1">
                 <a:solidFill>
                   <a:srgbClr val="260700"/>
                 </a:solidFill>
@@ -10287,7 +10010,7 @@
               <a:t>equipo</a:t>
             </a:r>
             <a:r>
-              <a:rPr lang="en-US" sz="3735">
+              <a:rPr lang="en-US" sz="3735" dirty="0">
                 <a:solidFill>
                   <a:srgbClr val="260700"/>
                 </a:solidFill>
@@ -10298,7 +10021,7 @@
               </a:rPr>
               <a:t>:</a:t>
             </a:r>
-            <a:endParaRPr sz="3735">
+            <a:endParaRPr sz="3735" dirty="0">
               <a:solidFill>
                 <a:srgbClr val="260700"/>
               </a:solidFill>
@@ -10318,7 +10041,7 @@
         </p:nvSpPr>
         <p:spPr>
           <a:xfrm>
-            <a:off x="426720" y="3546475"/>
+            <a:off x="426720" y="3387449"/>
             <a:ext cx="11338560" cy="984250"/>
           </a:xfrm>
           <a:prstGeom prst="round2SameRect">
@@ -10340,17 +10063,9 @@
           </a:bodyPr>
           <a:lstStyle/>
           <a:p>
-            <a:pPr marL="165100" lvl="0" indent="0" algn="l" rtl="0">
-              <a:spcBef>
-                <a:spcPts val="0"/>
-              </a:spcBef>
-              <a:spcAft>
-                <a:spcPts val="0"/>
-              </a:spcAft>
-              <a:buNone/>
-            </a:pPr>
-            <a:r>
-              <a:rPr lang="en-US" sz="2800" b="1">
+            <a:pPr marL="165100" lvl="0"/>
+            <a:r>
+              <a:rPr lang="en-US" sz="2800" b="1" dirty="0" err="1">
                 <a:solidFill>
                   <a:srgbClr val="F8F2E8"/>
                 </a:solidFill>
@@ -10359,10 +10074,10 @@
                 <a:cs typeface="Plus Jakarta Sans"/>
                 <a:sym typeface="Plus Jakarta Sans"/>
               </a:rPr>
-              <a:t>Profesor:</a:t>
-            </a:r>
-            <a:r>
-              <a:rPr lang="es-AR" altLang="en-US" sz="2800" b="1">
+              <a:t>Profesor</a:t>
+            </a:r>
+            <a:r>
+              <a:rPr lang="en-US" sz="2800" b="1" dirty="0" smtClean="0">
                 <a:solidFill>
                   <a:srgbClr val="F8F2E8"/>
                 </a:solidFill>
@@ -10371,10 +10086,10 @@
                 <a:cs typeface="Plus Jakarta Sans"/>
                 <a:sym typeface="Plus Jakarta Sans"/>
               </a:rPr>
-              <a:t> </a:t>
-            </a:r>
-            <a:r>
-              <a:rPr lang="es-AR" altLang="en-US" b="1">
+              <a:t>: </a:t>
+            </a:r>
+            <a:r>
+              <a:rPr lang="es-AR" altLang="en-US" b="1" dirty="0">
                 <a:solidFill>
                   <a:srgbClr val="F8F2E8"/>
                 </a:solidFill>
@@ -10383,9 +10098,33 @@
                 <a:cs typeface="Plus Jakarta Sans"/>
                 <a:sym typeface="Plus Jakarta Sans"/>
               </a:rPr>
-              <a:t>Luciano Martingasté  | Trabajo actualmente como Data AI Engineer en EY</a:t>
-            </a:r>
-            <a:endParaRPr lang="es-AR" altLang="en-US" b="1">
+              <a:t>Arturo </a:t>
+            </a:r>
+            <a:r>
+              <a:rPr lang="es-AR" altLang="en-US" b="1" dirty="0" err="1">
+                <a:solidFill>
+                  <a:srgbClr val="F8F2E8"/>
+                </a:solidFill>
+                <a:latin typeface="Plus Jakarta Sans"/>
+                <a:ea typeface="Plus Jakarta Sans"/>
+                <a:cs typeface="Plus Jakarta Sans"/>
+                <a:sym typeface="Plus Jakarta Sans"/>
+              </a:rPr>
+              <a:t>Grottoli</a:t>
+            </a:r>
+            <a:r>
+              <a:rPr lang="en-US" b="1" dirty="0">
+                <a:solidFill>
+                  <a:srgbClr val="F8F2E8"/>
+                </a:solidFill>
+                <a:latin typeface="Plus Jakarta Sans"/>
+                <a:ea typeface="Plus Jakarta Sans"/>
+                <a:cs typeface="Plus Jakarta Sans"/>
+                <a:sym typeface="Plus Jakarta Sans"/>
+              </a:rPr>
+              <a:t>  </a:t>
+            </a:r>
+            <a:endParaRPr lang="es-AR" altLang="en-US" b="1" dirty="0">
               <a:solidFill>
                 <a:srgbClr val="F8F2E8"/>
               </a:solidFill>
@@ -10460,21 +10199,12 @@
               </a:rPr>
               <a:t>95315</a:t>
             </a:r>
-            <a:endParaRPr lang="es-AR" altLang="en-US" sz="935">
-              <a:solidFill>
-                <a:srgbClr val="F8F2E8"/>
-              </a:solidFill>
-              <a:latin typeface="Plus Jakarta Sans"/>
-              <a:ea typeface="Plus Jakarta Sans"/>
-              <a:cs typeface="Plus Jakarta Sans"/>
-              <a:sym typeface="Plus Jakarta Sans"/>
-            </a:endParaRPr>
-          </a:p>
-        </p:txBody>
-      </p:sp>
-      <p:sp>
-        <p:nvSpPr>
-          <p:cNvPr id="1" name="Google Shape;277;p43"/>
+          </a:p>
+        </p:txBody>
+      </p:sp>
+      <p:sp>
+        <p:nvSpPr>
+          <p:cNvPr id="2" name="Google Shape;277;p43"/>
           <p:cNvSpPr/>
           <p:nvPr/>
         </p:nvSpPr>
@@ -10500,6 +10230,7 @@
           <a:bodyPr spcFirstLastPara="1" wrap="square" lIns="121900" tIns="121900" rIns="121900" bIns="121900" anchor="ctr" anchorCtr="0">
             <a:noAutofit/>
           </a:bodyPr>
+          <a:lstStyle/>
           <a:p>
             <a:pPr marL="165100" lvl="0" indent="0" algn="l" rtl="0">
               <a:spcBef>
@@ -10511,7 +10242,7 @@
               <a:buNone/>
             </a:pPr>
             <a:r>
-              <a:rPr lang="en-US" sz="2800" b="1">
+              <a:rPr lang="en-US" sz="2800" b="1" dirty="0" err="1">
                 <a:solidFill>
                   <a:srgbClr val="F8F2E8"/>
                 </a:solidFill>
@@ -10520,10 +10251,22 @@
                 <a:cs typeface="Plus Jakarta Sans"/>
                 <a:sym typeface="Plus Jakarta Sans"/>
               </a:rPr>
-              <a:t>Profesor:</a:t>
-            </a:r>
-            <a:r>
-              <a:rPr lang="es-AR" altLang="en-US" sz="2800" b="1">
+              <a:t>Profesor</a:t>
+            </a:r>
+            <a:r>
+              <a:rPr lang="en-US" sz="2800" b="1" dirty="0">
+                <a:solidFill>
+                  <a:srgbClr val="F8F2E8"/>
+                </a:solidFill>
+                <a:latin typeface="Plus Jakarta Sans"/>
+                <a:ea typeface="Plus Jakarta Sans"/>
+                <a:cs typeface="Plus Jakarta Sans"/>
+                <a:sym typeface="Plus Jakarta Sans"/>
+              </a:rPr>
+              <a:t>:</a:t>
+            </a:r>
+            <a:r>
+              <a:rPr lang="es-AR" altLang="en-US" sz="2800" b="1" dirty="0">
                 <a:solidFill>
                   <a:srgbClr val="F8F2E8"/>
                 </a:solidFill>
@@ -10535,7 +10278,7 @@
               <a:t> </a:t>
             </a:r>
             <a:r>
-              <a:rPr lang="es-AR" altLang="en-US" b="1">
+              <a:rPr lang="es-AR" altLang="en-US" b="1" dirty="0" smtClean="0">
                 <a:solidFill>
                   <a:srgbClr val="F8F2E8"/>
                 </a:solidFill>
@@ -10544,9 +10287,9 @@
                 <a:cs typeface="Plus Jakarta Sans"/>
                 <a:sym typeface="Plus Jakarta Sans"/>
               </a:rPr>
-              <a:t>Arturo Grottoli        | </a:t>
-            </a:r>
-            <a:endParaRPr lang="es-AR" altLang="en-US" b="1">
+              <a:t>Arturo</a:t>
+            </a:r>
+            <a:endParaRPr lang="es-AR" altLang="en-US" b="1" dirty="0">
               <a:solidFill>
                 <a:srgbClr val="F8F2E8"/>
               </a:solidFill>
@@ -10575,7 +10318,14 @@
         <p:cNvGrpSpPr/>
         <p:nvPr/>
       </p:nvGrpSpPr>
-      <p:grpSpPr/>
+      <p:grpSpPr>
+        <a:xfrm>
+          <a:off x="0" y="0"/>
+          <a:ext cx="0" cy="0"/>
+          <a:chOff x="0" y="0"/>
+          <a:chExt cx="0" cy="0"/>
+        </a:xfrm>
+      </p:grpSpPr>
       <p:sp>
         <p:nvSpPr>
           <p:cNvPr id="2" name="Text Box 1"/>
@@ -10596,6 +10346,7 @@
           <a:bodyPr wrap="square" rtlCol="0" anchor="t">
             <a:spAutoFit/>
           </a:bodyPr>
+          <a:lstStyle/>
           <a:p>
             <a:pPr marL="0" lvl="0" indent="0" algn="l" rtl="0">
               <a:spcBef>
@@ -10618,15 +10369,6 @@
               </a:rPr>
               <a:t>Fallo sensor</a:t>
             </a:r>
-            <a:endParaRPr lang="es-AR" sz="4800">
-              <a:solidFill>
-                <a:srgbClr val="FF632B"/>
-              </a:solidFill>
-              <a:latin typeface="Plus Jakarta Sans ExtraBold"/>
-              <a:ea typeface="Plus Jakarta Sans ExtraBold"/>
-              <a:cs typeface="Plus Jakarta Sans ExtraBold"/>
-              <a:sym typeface="Plus Jakarta Sans ExtraBold"/>
-            </a:endParaRPr>
           </a:p>
         </p:txBody>
       </p:sp>
@@ -10639,7 +10381,7 @@
           <p:nvPr/>
         </p:nvPicPr>
         <p:blipFill>
-          <a:blip r:embed="rId1"/>
+          <a:blip r:embed="rId2"/>
           <a:stretch>
             <a:fillRect/>
           </a:stretch>
@@ -10667,7 +10409,7 @@
   <p:cSld>
     <p:spTree>
       <p:nvGrpSpPr>
-        <p:cNvPr id="240" name="Shape 240"/>
+        <p:cNvPr id="1" name="Shape 240"/>
         <p:cNvGrpSpPr/>
         <p:nvPr/>
       </p:nvGrpSpPr>
@@ -10751,15 +10493,6 @@
               </a:rPr>
               <a:t>La evolución es constante.</a:t>
             </a:r>
-            <a:endParaRPr lang="en-US" altLang="en-US">
-              <a:solidFill>
-                <a:srgbClr val="171717"/>
-              </a:solidFill>
-              <a:latin typeface="Plus Jakarta Sans Light"/>
-              <a:ea typeface="Plus Jakarta Sans Light"/>
-              <a:cs typeface="Plus Jakarta Sans Light"/>
-              <a:sym typeface="Plus Jakarta Sans Light"/>
-            </a:endParaRPr>
           </a:p>
           <a:p>
             <a:pPr marL="0" lvl="0" indent="0" algn="l" rtl="0">
@@ -10809,15 +10542,6 @@
               </a:rPr>
               <a:t>La conectividad es la base de la 4.0.</a:t>
             </a:r>
-            <a:endParaRPr lang="en-US" altLang="en-US">
-              <a:solidFill>
-                <a:srgbClr val="171717"/>
-              </a:solidFill>
-              <a:latin typeface="Plus Jakarta Sans Light"/>
-              <a:ea typeface="Plus Jakarta Sans Light"/>
-              <a:cs typeface="Plus Jakarta Sans Light"/>
-              <a:sym typeface="Plus Jakarta Sans Light"/>
-            </a:endParaRPr>
           </a:p>
           <a:p>
             <a:pPr marL="0" lvl="0" indent="0" algn="l" rtl="0">
@@ -10867,15 +10591,6 @@
               </a:rPr>
               <a:t>La cultura data-driven es necesaria para la transformación digital.</a:t>
             </a:r>
-            <a:endParaRPr lang="en-US" altLang="en-US">
-              <a:solidFill>
-                <a:srgbClr val="171717"/>
-              </a:solidFill>
-              <a:latin typeface="Plus Jakarta Sans Light"/>
-              <a:ea typeface="Plus Jakarta Sans Light"/>
-              <a:cs typeface="Plus Jakarta Sans Light"/>
-              <a:sym typeface="Plus Jakarta Sans Light"/>
-            </a:endParaRPr>
           </a:p>
           <a:p>
             <a:pPr marL="0" lvl="0" indent="0" algn="l" rtl="0">
@@ -10925,15 +10640,6 @@
               </a:rPr>
               <a:t>Algo Mas de IA:</a:t>
             </a:r>
-            <a:endParaRPr lang="es-AR" altLang="en-US">
-              <a:solidFill>
-                <a:srgbClr val="171717"/>
-              </a:solidFill>
-              <a:latin typeface="Plus Jakarta Sans Light"/>
-              <a:ea typeface="Plus Jakarta Sans Light"/>
-              <a:cs typeface="Plus Jakarta Sans Light"/>
-              <a:sym typeface="Plus Jakarta Sans Light"/>
-            </a:endParaRPr>
           </a:p>
           <a:p>
             <a:pPr marL="0" lvl="0" indent="0" algn="l" rtl="0">
@@ -10960,15 +10666,6 @@
               </a:rPr>
               <a:t>https://www.youtube.com/shorts/pv_I4k4y8Z4</a:t>
             </a:r>
-            <a:endParaRPr lang="en-US" altLang="en-US">
-              <a:solidFill>
-                <a:srgbClr val="171717"/>
-              </a:solidFill>
-              <a:latin typeface="Plus Jakarta Sans Light"/>
-              <a:ea typeface="Plus Jakarta Sans Light"/>
-              <a:cs typeface="Plus Jakarta Sans Light"/>
-              <a:sym typeface="Plus Jakarta Sans Light"/>
-            </a:endParaRPr>
           </a:p>
           <a:p>
             <a:pPr marL="0" lvl="0" indent="0" algn="l" rtl="0">
@@ -11064,15 +10761,6 @@
               </a:rPr>
               <a:t>Resumen:</a:t>
             </a:r>
-            <a:endParaRPr lang="en-US" altLang="en-US" sz="4800">
-              <a:solidFill>
-                <a:srgbClr val="FF632B"/>
-              </a:solidFill>
-              <a:latin typeface="Plus Jakarta Sans ExtraBold"/>
-              <a:ea typeface="Plus Jakarta Sans ExtraBold"/>
-              <a:cs typeface="Plus Jakarta Sans ExtraBold"/>
-              <a:sym typeface="Plus Jakarta Sans ExtraBold"/>
-            </a:endParaRPr>
           </a:p>
           <a:p>
             <a:pPr marL="0" lvl="0" indent="0" algn="l" rtl="0">
@@ -11109,7 +10797,7 @@
   <p:cSld>
     <p:spTree>
       <p:nvGrpSpPr>
-        <p:cNvPr id="484" name="Shape 484"/>
+        <p:cNvPr id="1" name="Shape 484"/>
         <p:cNvGrpSpPr/>
         <p:nvPr/>
       </p:nvGrpSpPr>
@@ -11334,7 +11022,7 @@
           <p:nvPr/>
         </p:nvPicPr>
         <p:blipFill>
-          <a:blip r:embed="rId1"/>
+          <a:blip r:embed="rId3"/>
           <a:stretch>
             <a:fillRect/>
           </a:stretch>
@@ -11366,7 +11054,7 @@
   <p:cSld>
     <p:spTree>
       <p:nvGrpSpPr>
-        <p:cNvPr id="191" name="Shape 191"/>
+        <p:cNvPr id="1" name="Shape 191"/>
         <p:cNvGrpSpPr/>
         <p:nvPr/>
       </p:nvGrpSpPr>
@@ -11490,15 +11178,6 @@
               </a:rPr>
               <a:t>Semana 1: La Transformación Digital en la Industria 4.0</a:t>
             </a:r>
-            <a:endParaRPr lang="en-US" altLang="en-US" sz="1600">
-              <a:solidFill>
-                <a:srgbClr val="171717"/>
-              </a:solidFill>
-              <a:latin typeface="Plus Jakarta Sans Light"/>
-              <a:ea typeface="Plus Jakarta Sans Light"/>
-              <a:cs typeface="Plus Jakarta Sans Light"/>
-              <a:sym typeface="Plus Jakarta Sans Light"/>
-            </a:endParaRPr>
           </a:p>
           <a:p>
             <a:pPr marL="457200" lvl="0" indent="-304800" algn="l" rtl="0">
@@ -11530,15 +11209,6 @@
               </a:rPr>
               <a:t>Semana 2: Fundamentos de Python</a:t>
             </a:r>
-            <a:endParaRPr lang="en-US" altLang="en-US" sz="1600">
-              <a:solidFill>
-                <a:srgbClr val="171717"/>
-              </a:solidFill>
-              <a:latin typeface="Plus Jakarta Sans Light"/>
-              <a:ea typeface="Plus Jakarta Sans Light"/>
-              <a:cs typeface="Plus Jakarta Sans Light"/>
-              <a:sym typeface="Plus Jakarta Sans Light"/>
-            </a:endParaRPr>
           </a:p>
           <a:p>
             <a:pPr marL="457200" lvl="0" indent="-304800" algn="l" rtl="0">
@@ -11570,15 +11240,6 @@
               </a:rPr>
               <a:t>Semana 3: NumPy y Pandas</a:t>
             </a:r>
-            <a:endParaRPr lang="en-US" altLang="en-US" sz="1600">
-              <a:solidFill>
-                <a:srgbClr val="171717"/>
-              </a:solidFill>
-              <a:latin typeface="Plus Jakarta Sans Light"/>
-              <a:ea typeface="Plus Jakarta Sans Light"/>
-              <a:cs typeface="Plus Jakarta Sans Light"/>
-              <a:sym typeface="Plus Jakarta Sans Light"/>
-            </a:endParaRPr>
           </a:p>
           <a:p>
             <a:pPr marL="457200" lvl="0" indent="-304800" algn="l" rtl="0">
@@ -11610,15 +11271,6 @@
               </a:rPr>
               <a:t>Semana 4: Manipulación de Datos: Pandas</a:t>
             </a:r>
-            <a:endParaRPr lang="en-US" altLang="en-US" sz="1600">
-              <a:solidFill>
-                <a:srgbClr val="171717"/>
-              </a:solidFill>
-              <a:latin typeface="Plus Jakarta Sans Light"/>
-              <a:ea typeface="Plus Jakarta Sans Light"/>
-              <a:cs typeface="Plus Jakarta Sans Light"/>
-              <a:sym typeface="Plus Jakarta Sans Light"/>
-            </a:endParaRPr>
           </a:p>
           <a:p>
             <a:pPr marL="457200" lvl="0" indent="-304800" algn="l" rtl="0">
@@ -11650,15 +11302,6 @@
               </a:rPr>
               <a:t>Semana 5: Visualizaciones Avanzadas en Data Science</a:t>
             </a:r>
-            <a:endParaRPr lang="en-US" altLang="en-US" sz="1600">
-              <a:solidFill>
-                <a:srgbClr val="171717"/>
-              </a:solidFill>
-              <a:latin typeface="Plus Jakarta Sans Light"/>
-              <a:ea typeface="Plus Jakarta Sans Light"/>
-              <a:cs typeface="Plus Jakarta Sans Light"/>
-              <a:sym typeface="Plus Jakarta Sans Light"/>
-            </a:endParaRPr>
           </a:p>
           <a:p>
             <a:pPr marL="457200" lvl="0" indent="-304800" algn="l" rtl="0">
@@ -11690,15 +11333,6 @@
               </a:rPr>
               <a:t>Semana 6: Estadística y Preprocesamiento</a:t>
             </a:r>
-            <a:endParaRPr lang="en-US" altLang="en-US" sz="1600">
-              <a:solidFill>
-                <a:srgbClr val="171717"/>
-              </a:solidFill>
-              <a:latin typeface="Plus Jakarta Sans Light"/>
-              <a:ea typeface="Plus Jakarta Sans Light"/>
-              <a:cs typeface="Plus Jakarta Sans Light"/>
-              <a:sym typeface="Plus Jakarta Sans Light"/>
-            </a:endParaRPr>
           </a:p>
           <a:p>
             <a:pPr marL="457200" lvl="0" indent="-304800" algn="l" rtl="0">
@@ -11730,15 +11364,6 @@
               </a:rPr>
               <a:t>Semana 7: Aplicaciones Prácticas de ML</a:t>
             </a:r>
-            <a:endParaRPr lang="en-US" altLang="en-US" sz="1600">
-              <a:solidFill>
-                <a:srgbClr val="171717"/>
-              </a:solidFill>
-              <a:latin typeface="Plus Jakarta Sans Light"/>
-              <a:ea typeface="Plus Jakarta Sans Light"/>
-              <a:cs typeface="Plus Jakarta Sans Light"/>
-              <a:sym typeface="Plus Jakarta Sans Light"/>
-            </a:endParaRPr>
           </a:p>
           <a:p>
             <a:pPr marL="457200" lvl="0" indent="-304800" algn="l" rtl="0">
@@ -11770,15 +11395,6 @@
               </a:rPr>
               <a:t>Semana 8: Aprendizaje Supervisado en Ciencia de Datos</a:t>
             </a:r>
-            <a:endParaRPr lang="en-US" altLang="en-US" sz="1600">
-              <a:solidFill>
-                <a:srgbClr val="171717"/>
-              </a:solidFill>
-              <a:latin typeface="Plus Jakarta Sans Light"/>
-              <a:ea typeface="Plus Jakarta Sans Light"/>
-              <a:cs typeface="Plus Jakarta Sans Light"/>
-              <a:sym typeface="Plus Jakarta Sans Light"/>
-            </a:endParaRPr>
           </a:p>
           <a:p>
             <a:pPr marL="457200" lvl="0" indent="-304800" algn="l" rtl="0">
@@ -11810,15 +11426,6 @@
               </a:rPr>
               <a:t>Semana 9: Aprendizaje No Supervisado</a:t>
             </a:r>
-            <a:endParaRPr lang="en-US" altLang="en-US" sz="1600">
-              <a:solidFill>
-                <a:srgbClr val="171717"/>
-              </a:solidFill>
-              <a:latin typeface="Plus Jakarta Sans Light"/>
-              <a:ea typeface="Plus Jakarta Sans Light"/>
-              <a:cs typeface="Plus Jakarta Sans Light"/>
-              <a:sym typeface="Plus Jakarta Sans Light"/>
-            </a:endParaRPr>
           </a:p>
           <a:p>
             <a:pPr marL="457200" lvl="0" indent="-304800" algn="l" rtl="0">
@@ -11850,15 +11457,6 @@
               </a:rPr>
               <a:t>Semana 10: Fundamentos de IA y Machine Learning</a:t>
             </a:r>
-            <a:endParaRPr lang="en-US" altLang="en-US" sz="1600">
-              <a:solidFill>
-                <a:srgbClr val="171717"/>
-              </a:solidFill>
-              <a:latin typeface="Plus Jakarta Sans Light"/>
-              <a:ea typeface="Plus Jakarta Sans Light"/>
-              <a:cs typeface="Plus Jakarta Sans Light"/>
-              <a:sym typeface="Plus Jakarta Sans Light"/>
-            </a:endParaRPr>
           </a:p>
           <a:p>
             <a:pPr marL="457200" lvl="0" indent="-304800" algn="l" rtl="0">
@@ -11890,15 +11488,6 @@
               </a:rPr>
               <a:t>Semana 11: Entrega de Proyecto Final</a:t>
             </a:r>
-            <a:endParaRPr lang="en-US" altLang="en-US" sz="1600">
-              <a:solidFill>
-                <a:srgbClr val="171717"/>
-              </a:solidFill>
-              <a:latin typeface="Plus Jakarta Sans Light"/>
-              <a:ea typeface="Plus Jakarta Sans Light"/>
-              <a:cs typeface="Plus Jakarta Sans Light"/>
-              <a:sym typeface="Plus Jakarta Sans Light"/>
-            </a:endParaRPr>
           </a:p>
         </p:txBody>
       </p:sp>
@@ -11915,7 +11504,7 @@
   <p:cSld>
     <p:spTree>
       <p:nvGrpSpPr>
-        <p:cNvPr id="240" name="Shape 240"/>
+        <p:cNvPr id="1" name="Shape 240"/>
         <p:cNvGrpSpPr/>
         <p:nvPr/>
       </p:nvGrpSpPr>
@@ -11973,15 +11562,6 @@
               </a:rPr>
               <a:t>Evolución Industrial y Fundamentos de Industria 4.0</a:t>
             </a:r>
-            <a:endParaRPr lang="en-US" altLang="en-US" sz="4800">
-              <a:solidFill>
-                <a:srgbClr val="FF632B"/>
-              </a:solidFill>
-              <a:latin typeface="Plus Jakarta Sans ExtraBold"/>
-              <a:ea typeface="Plus Jakarta Sans ExtraBold"/>
-              <a:cs typeface="Plus Jakarta Sans ExtraBold"/>
-              <a:sym typeface="Plus Jakarta Sans ExtraBold"/>
-            </a:endParaRPr>
           </a:p>
         </p:txBody>
       </p:sp>
@@ -12031,15 +11611,6 @@
               </a:rPr>
               <a:t>De la mecanización a la toma de decisiones basada en datos.</a:t>
             </a:r>
-            <a:endParaRPr lang="en-US" altLang="en-US" sz="2400">
-              <a:solidFill>
-                <a:srgbClr val="171717"/>
-              </a:solidFill>
-              <a:latin typeface="Plus Jakarta Sans"/>
-              <a:ea typeface="Plus Jakarta Sans"/>
-              <a:cs typeface="Plus Jakarta Sans"/>
-              <a:sym typeface="Plus Jakarta Sans"/>
-            </a:endParaRPr>
           </a:p>
         </p:txBody>
       </p:sp>
@@ -12050,7 +11621,7 @@
           <p:nvPr/>
         </p:nvPicPr>
         <p:blipFill>
-          <a:blip r:embed="rId1"/>
+          <a:blip r:embed="rId3"/>
           <a:stretch>
             <a:fillRect/>
           </a:stretch>
@@ -12078,7 +11649,7 @@
   <p:cSld>
     <p:spTree>
       <p:nvGrpSpPr>
-        <p:cNvPr id="240" name="Shape 240"/>
+        <p:cNvPr id="1" name="Shape 240"/>
         <p:cNvGrpSpPr/>
         <p:nvPr/>
       </p:nvGrpSpPr>
@@ -12139,15 +11710,6 @@
               </a:rPr>
               <a:t>Puntos clave:</a:t>
             </a:r>
-            <a:endParaRPr lang="en-US" altLang="en-US" sz="2400">
-              <a:solidFill>
-                <a:srgbClr val="171717"/>
-              </a:solidFill>
-              <a:latin typeface="Plus Jakarta Sans Light"/>
-              <a:ea typeface="Plus Jakarta Sans Light"/>
-              <a:cs typeface="Plus Jakarta Sans Light"/>
-              <a:sym typeface="Plus Jakarta Sans Light"/>
-            </a:endParaRPr>
           </a:p>
           <a:p>
             <a:pPr marL="0" lvl="0" indent="0" algn="l" rtl="0">
@@ -12198,15 +11760,6 @@
               </a:rPr>
               <a:t>Comprender la evolución de las revoluciones industriales.</a:t>
             </a:r>
-            <a:endParaRPr lang="en-US" altLang="en-US" sz="1600">
-              <a:solidFill>
-                <a:srgbClr val="171717"/>
-              </a:solidFill>
-              <a:latin typeface="Plus Jakarta Sans Light"/>
-              <a:ea typeface="Plus Jakarta Sans Light"/>
-              <a:cs typeface="Plus Jakarta Sans Light"/>
-              <a:sym typeface="Plus Jakarta Sans Light"/>
-            </a:endParaRPr>
           </a:p>
           <a:p>
             <a:pPr marL="285750" lvl="0" indent="-285750" algn="l" rtl="0">
@@ -12258,15 +11811,6 @@
               </a:rPr>
               <a:t>Identificar los 9 pilares de la Industria 4.0.</a:t>
             </a:r>
-            <a:endParaRPr lang="en-US" altLang="en-US" sz="1600">
-              <a:solidFill>
-                <a:srgbClr val="171717"/>
-              </a:solidFill>
-              <a:latin typeface="Plus Jakarta Sans Light"/>
-              <a:ea typeface="Plus Jakarta Sans Light"/>
-              <a:cs typeface="Plus Jakarta Sans Light"/>
-              <a:sym typeface="Plus Jakarta Sans Light"/>
-            </a:endParaRPr>
           </a:p>
           <a:p>
             <a:pPr marL="285750" lvl="0" indent="-285750" algn="l" rtl="0">
@@ -12318,15 +11862,6 @@
               </a:rPr>
               <a:t>Analizar el impacto de IoT y Big Data.</a:t>
             </a:r>
-            <a:endParaRPr lang="en-US" altLang="en-US" sz="1600">
-              <a:solidFill>
-                <a:srgbClr val="171717"/>
-              </a:solidFill>
-              <a:latin typeface="Plus Jakarta Sans Light"/>
-              <a:ea typeface="Plus Jakarta Sans Light"/>
-              <a:cs typeface="Plus Jakarta Sans Light"/>
-              <a:sym typeface="Plus Jakarta Sans Light"/>
-            </a:endParaRPr>
           </a:p>
           <a:p>
             <a:pPr marL="285750" lvl="0" indent="-285750" algn="l" rtl="0">
@@ -12378,15 +11913,6 @@
               </a:rPr>
               <a:t>Diseñar un plan ejecutivo data-driven.</a:t>
             </a:r>
-            <a:endParaRPr lang="en-US" altLang="en-US" sz="1600">
-              <a:solidFill>
-                <a:srgbClr val="171717"/>
-              </a:solidFill>
-              <a:latin typeface="Plus Jakarta Sans Light"/>
-              <a:ea typeface="Plus Jakarta Sans Light"/>
-              <a:cs typeface="Plus Jakarta Sans Light"/>
-              <a:sym typeface="Plus Jakarta Sans Light"/>
-            </a:endParaRPr>
           </a:p>
           <a:p>
             <a:pPr marL="285750" lvl="0" indent="-285750" algn="l" rtl="0">
@@ -12438,15 +11964,6 @@
               </a:rPr>
               <a:t>Desarrollar algunas actividades grupales</a:t>
             </a:r>
-            <a:endParaRPr lang="es-AR" altLang="en-US" sz="1600">
-              <a:solidFill>
-                <a:srgbClr val="171717"/>
-              </a:solidFill>
-              <a:latin typeface="Plus Jakarta Sans Light"/>
-              <a:ea typeface="Plus Jakarta Sans Light"/>
-              <a:cs typeface="Plus Jakarta Sans Light"/>
-              <a:sym typeface="Plus Jakarta Sans Light"/>
-            </a:endParaRPr>
           </a:p>
         </p:txBody>
       </p:sp>
@@ -12496,15 +12013,6 @@
               </a:rPr>
               <a:t>Objetivos de la Sesión</a:t>
             </a:r>
-            <a:endParaRPr lang="en-US" altLang="en-US" sz="6400">
-              <a:solidFill>
-                <a:srgbClr val="FF632B"/>
-              </a:solidFill>
-              <a:latin typeface="Plus Jakarta Sans ExtraBold"/>
-              <a:ea typeface="Plus Jakarta Sans ExtraBold"/>
-              <a:cs typeface="Plus Jakarta Sans ExtraBold"/>
-              <a:sym typeface="Plus Jakarta Sans ExtraBold"/>
-            </a:endParaRPr>
           </a:p>
         </p:txBody>
       </p:sp>
@@ -12521,7 +12029,7 @@
   <p:cSld>
     <p:spTree>
       <p:nvGrpSpPr>
-        <p:cNvPr id="228" name="Shape 228"/>
+        <p:cNvPr id="1" name="Shape 228"/>
         <p:cNvGrpSpPr/>
         <p:nvPr/>
       </p:nvGrpSpPr>
@@ -12579,15 +12087,6 @@
               </a:rPr>
               <a:t>La Línea del Tiempo (Evolución)</a:t>
             </a:r>
-            <a:endParaRPr lang="en-US" altLang="en-US" sz="4800">
-              <a:solidFill>
-                <a:srgbClr val="F8F2E8"/>
-              </a:solidFill>
-              <a:latin typeface="Plus Jakarta Sans ExtraBold"/>
-              <a:ea typeface="Plus Jakarta Sans ExtraBold"/>
-              <a:cs typeface="Plus Jakarta Sans ExtraBold"/>
-              <a:sym typeface="Plus Jakarta Sans ExtraBold"/>
-            </a:endParaRPr>
           </a:p>
         </p:txBody>
       </p:sp>
@@ -12604,7 +12103,7 @@
   <p:cSld>
     <p:spTree>
       <p:nvGrpSpPr>
-        <p:cNvPr id="240" name="Shape 240"/>
+        <p:cNvPr id="1" name="Shape 240"/>
         <p:cNvGrpSpPr/>
         <p:nvPr/>
       </p:nvGrpSpPr>
@@ -12662,15 +12161,6 @@
               </a:rPr>
               <a:t>Linea del tiempo</a:t>
             </a:r>
-            <a:endParaRPr lang="es-AR" altLang="en-US" sz="6400">
-              <a:solidFill>
-                <a:srgbClr val="FF632B"/>
-              </a:solidFill>
-              <a:latin typeface="Plus Jakarta Sans ExtraBold"/>
-              <a:ea typeface="Plus Jakarta Sans ExtraBold"/>
-              <a:cs typeface="Plus Jakarta Sans ExtraBold"/>
-              <a:sym typeface="Plus Jakarta Sans ExtraBold"/>
-            </a:endParaRPr>
           </a:p>
         </p:txBody>
       </p:sp>
@@ -12681,7 +12171,7 @@
           <p:nvPr/>
         </p:nvPicPr>
         <p:blipFill>
-          <a:blip r:embed="rId1"/>
+          <a:blip r:embed="rId3"/>
           <a:stretch>
             <a:fillRect/>
           </a:stretch>
@@ -12698,7 +12188,7 @@
       </p:pic>
       <p:sp>
         <p:nvSpPr>
-          <p:cNvPr id="1" name="Text Box 0"/>
+          <p:cNvPr id="3" name="Text Box 0"/>
           <p:cNvSpPr txBox="1"/>
           <p:nvPr/>
         </p:nvSpPr>
@@ -12716,6 +12206,7 @@
           <a:bodyPr wrap="square" rtlCol="0" anchor="t">
             <a:spAutoFit/>
           </a:bodyPr>
+          <a:lstStyle/>
           <a:p>
             <a:r>
               <a:rPr lang="en-US" altLang="en-US"/>
@@ -12738,7 +12229,7 @@
   <p:cSld>
     <p:spTree>
       <p:nvGrpSpPr>
-        <p:cNvPr id="240" name="Shape 240"/>
+        <p:cNvPr id="1" name="Shape 240"/>
         <p:cNvGrpSpPr/>
         <p:nvPr/>
       </p:nvGrpSpPr>
@@ -12796,15 +12287,6 @@
               </a:rPr>
               <a:t>¿Qué es realmente Industria 4.0?</a:t>
             </a:r>
-            <a:endParaRPr lang="en-US" altLang="en-US" sz="6400">
-              <a:solidFill>
-                <a:srgbClr val="FF632B"/>
-              </a:solidFill>
-              <a:latin typeface="Plus Jakarta Sans ExtraBold"/>
-              <a:ea typeface="Plus Jakarta Sans ExtraBold"/>
-              <a:cs typeface="Plus Jakarta Sans ExtraBold"/>
-              <a:sym typeface="Plus Jakarta Sans ExtraBold"/>
-            </a:endParaRPr>
           </a:p>
         </p:txBody>
       </p:sp>
@@ -12831,6 +12313,7 @@
           <a:bodyPr spcFirstLastPara="1" wrap="square" lIns="121900" tIns="121900" rIns="121900" bIns="121900" anchor="t" anchorCtr="0">
             <a:noAutofit/>
           </a:bodyPr>
+          <a:lstStyle/>
           <a:p>
             <a:pPr marL="0" lvl="0" indent="0" algn="l" rtl="0">
               <a:lnSpc>
@@ -12856,15 +12339,6 @@
               </a:rPr>
               <a:t>Concepto Central:</a:t>
             </a:r>
-            <a:endParaRPr lang="en-US" altLang="en-US" sz="1600" b="1">
-              <a:solidFill>
-                <a:srgbClr val="171717"/>
-              </a:solidFill>
-              <a:latin typeface="Plus Jakarta Sans Light"/>
-              <a:ea typeface="Plus Jakarta Sans Light"/>
-              <a:cs typeface="Plus Jakarta Sans Light"/>
-              <a:sym typeface="Plus Jakarta Sans Light"/>
-            </a:endParaRPr>
           </a:p>
           <a:p>
             <a:pPr marL="0" lvl="0" indent="0" algn="l" rtl="0">
@@ -12891,15 +12365,6 @@
               </a:rPr>
               <a:t>No es solo tecnología, es la integración de datos para crear valor.</a:t>
             </a:r>
-            <a:endParaRPr lang="en-US" altLang="en-US" sz="1600">
-              <a:solidFill>
-                <a:srgbClr val="171717"/>
-              </a:solidFill>
-              <a:latin typeface="Plus Jakarta Sans Light"/>
-              <a:ea typeface="Plus Jakarta Sans Light"/>
-              <a:cs typeface="Plus Jakarta Sans Light"/>
-              <a:sym typeface="Plus Jakarta Sans Light"/>
-            </a:endParaRPr>
           </a:p>
           <a:p>
             <a:pPr marL="0" lvl="0" indent="0" algn="l" rtl="0">
@@ -12949,15 +12414,6 @@
               </a:rPr>
               <a:t>Definición: </a:t>
             </a:r>
-            <a:endParaRPr lang="en-US" altLang="en-US" sz="1600" b="1">
-              <a:solidFill>
-                <a:srgbClr val="171717"/>
-              </a:solidFill>
-              <a:latin typeface="Plus Jakarta Sans Light"/>
-              <a:ea typeface="Plus Jakarta Sans Light"/>
-              <a:cs typeface="Plus Jakarta Sans Light"/>
-              <a:sym typeface="Plus Jakarta Sans Light"/>
-            </a:endParaRPr>
           </a:p>
           <a:p>
             <a:pPr marL="0" lvl="0" indent="0" algn="l" rtl="0">
@@ -12984,15 +12440,6 @@
               </a:rPr>
               <a:t>Sistemas donde el mundo físico y el digital convergen (Sistemas Ciberfísicos).</a:t>
             </a:r>
-            <a:endParaRPr lang="en-US" altLang="en-US" sz="1600">
-              <a:solidFill>
-                <a:srgbClr val="171717"/>
-              </a:solidFill>
-              <a:latin typeface="Plus Jakarta Sans Light"/>
-              <a:ea typeface="Plus Jakarta Sans Light"/>
-              <a:cs typeface="Plus Jakarta Sans Light"/>
-              <a:sym typeface="Plus Jakarta Sans Light"/>
-            </a:endParaRPr>
           </a:p>
         </p:txBody>
       </p:sp>
@@ -13003,7 +12450,7 @@
           <p:nvPr/>
         </p:nvPicPr>
         <p:blipFill>
-          <a:blip r:embed="rId1"/>
+          <a:blip r:embed="rId3"/>
           <a:stretch>
             <a:fillRect/>
           </a:stretch>
@@ -13025,7 +12472,7 @@
           <p:nvPr/>
         </p:nvPicPr>
         <p:blipFill>
-          <a:blip r:embed="rId2"/>
+          <a:blip r:embed="rId4"/>
           <a:stretch>
             <a:fillRect/>
           </a:stretch>
@@ -13047,7 +12494,7 @@
           <p:nvPr/>
         </p:nvPicPr>
         <p:blipFill>
-          <a:blip r:embed="rId3"/>
+          <a:blip r:embed="rId5"/>
           <a:stretch>
             <a:fillRect/>
           </a:stretch>
@@ -13079,7 +12526,14 @@
         <p:cNvGrpSpPr/>
         <p:nvPr/>
       </p:nvGrpSpPr>
-      <p:grpSpPr/>
+      <p:grpSpPr>
+        <a:xfrm>
+          <a:off x="0" y="0"/>
+          <a:ext cx="0" cy="0"/>
+          <a:chOff x="0" y="0"/>
+          <a:chExt cx="0" cy="0"/>
+        </a:xfrm>
+      </p:grpSpPr>
       <p:pic>
         <p:nvPicPr>
           <p:cNvPr id="2" name="Picture 1"/>
@@ -13087,7 +12541,7 @@
           <p:nvPr/>
         </p:nvPicPr>
         <p:blipFill>
-          <a:blip r:embed="rId1"/>
+          <a:blip r:embed="rId2"/>
           <a:stretch>
             <a:fillRect/>
           </a:stretch>
@@ -13125,6 +12579,7 @@
           <a:bodyPr spcFirstLastPara="1" wrap="square" lIns="121900" tIns="121900" rIns="121900" bIns="121900" anchor="t" anchorCtr="0">
             <a:noAutofit/>
           </a:bodyPr>
+          <a:lstStyle/>
           <a:p>
             <a:pPr marL="0" lvl="0" indent="0" algn="l" rtl="0">
               <a:spcBef>
@@ -13147,15 +12602,6 @@
               </a:rPr>
               <a:t>Ejemplos Peajes </a:t>
             </a:r>
-            <a:endParaRPr lang="es-AR" altLang="en-US" sz="6400">
-              <a:solidFill>
-                <a:srgbClr val="FF632B"/>
-              </a:solidFill>
-              <a:latin typeface="Plus Jakarta Sans ExtraBold"/>
-              <a:ea typeface="Plus Jakarta Sans ExtraBold"/>
-              <a:cs typeface="Plus Jakarta Sans ExtraBold"/>
-              <a:sym typeface="Plus Jakarta Sans ExtraBold"/>
-            </a:endParaRPr>
           </a:p>
         </p:txBody>
       </p:sp>
@@ -13166,7 +12612,7 @@
           <p:nvPr/>
         </p:nvPicPr>
         <p:blipFill>
-          <a:blip r:embed="rId2"/>
+          <a:blip r:embed="rId3"/>
           <a:stretch>
             <a:fillRect/>
           </a:stretch>
@@ -13190,7 +12636,7 @@
 </file>
 
 <file path=ppt/tags/tag1.xml><?xml version="1.0" encoding="utf-8"?>
-<p:tagLst xmlns:p="http://schemas.openxmlformats.org/presentationml/2006/main">
+<p:tagLst xmlns:a="http://schemas.openxmlformats.org/drawingml/2006/main" xmlns:r="http://schemas.openxmlformats.org/officeDocument/2006/relationships" xmlns:p="http://schemas.openxmlformats.org/presentationml/2006/main">
   <p:tag name="TABLE_ENDDRAG_ORIGIN_RECT" val="726*108"/>
   <p:tag name="TABLE_ENDDRAG_RECT" val="105*407*726*108"/>
 </p:tagLst>
@@ -13447,6 +12893,8 @@
       </a:bgFillStyleLst>
     </a:fmtScheme>
   </a:themeElements>
+  <a:objectDefaults/>
+  <a:extraClrSchemeLst/>
   <a:extLst>
     <a:ext uri="{05A4C25C-085E-4340-85A3-A5531E510DB2}">
       <thm15:themeFamily xmlns:thm15="http://schemas.microsoft.com/office/thememl/2012/main" name="Office Theme" id="{62F939B6-93AF-4DB8-9C6B-D6C7DFDC589F}" vid="{4A3C46E8-61CC-4603-A589-7422A47A8E4A}"/>
@@ -13706,6 +13154,8 @@
       </a:bgFillStyleLst>
     </a:fmtScheme>
   </a:themeElements>
+  <a:objectDefaults/>
+  <a:extraClrSchemeLst/>
   <a:extLst>
     <a:ext uri="{05A4C25C-085E-4340-85A3-A5531E510DB2}">
       <thm15:themeFamily xmlns:thm15="http://schemas.microsoft.com/office/thememl/2012/main" name="Office Theme" id="{62F939B6-93AF-4DB8-9C6B-D6C7DFDC589F}" vid="{4A3C46E8-61CC-4603-A589-7422A47A8E4A}"/>

--- a/Clase01/Unidad 1 Transformacion Digital en la Industria 4.0.pptx
+++ b/Clase01/Unidad 1 Transformacion Digital en la Industria 4.0.pptx
@@ -5,31 +5,33 @@
     <p:sldMasterId id="2147483648" r:id="rId1"/>
   </p:sldMasterIdLst>
   <p:notesMasterIdLst>
-    <p:notesMasterId r:id="rId24"/>
+    <p:notesMasterId r:id="rId26"/>
   </p:notesMasterIdLst>
   <p:sldIdLst>
-    <p:sldId id="266" r:id="rId2"/>
-    <p:sldId id="264" r:id="rId3"/>
-    <p:sldId id="265" r:id="rId4"/>
-    <p:sldId id="267" r:id="rId5"/>
-    <p:sldId id="268" r:id="rId6"/>
-    <p:sldId id="260" r:id="rId7"/>
-    <p:sldId id="269" r:id="rId8"/>
-    <p:sldId id="270" r:id="rId9"/>
-    <p:sldId id="286" r:id="rId10"/>
-    <p:sldId id="288" r:id="rId11"/>
-    <p:sldId id="289" r:id="rId12"/>
-    <p:sldId id="262" r:id="rId13"/>
-    <p:sldId id="281" r:id="rId14"/>
-    <p:sldId id="273" r:id="rId15"/>
-    <p:sldId id="274" r:id="rId16"/>
-    <p:sldId id="278" r:id="rId17"/>
-    <p:sldId id="279" r:id="rId18"/>
-    <p:sldId id="280" r:id="rId19"/>
-    <p:sldId id="283" r:id="rId20"/>
-    <p:sldId id="285" r:id="rId21"/>
-    <p:sldId id="284" r:id="rId22"/>
-    <p:sldId id="257" r:id="rId23"/>
+    <p:sldId id="290" r:id="rId2"/>
+    <p:sldId id="291" r:id="rId3"/>
+    <p:sldId id="292" r:id="rId4"/>
+    <p:sldId id="264" r:id="rId5"/>
+    <p:sldId id="265" r:id="rId6"/>
+    <p:sldId id="267" r:id="rId7"/>
+    <p:sldId id="268" r:id="rId8"/>
+    <p:sldId id="260" r:id="rId9"/>
+    <p:sldId id="269" r:id="rId10"/>
+    <p:sldId id="270" r:id="rId11"/>
+    <p:sldId id="286" r:id="rId12"/>
+    <p:sldId id="288" r:id="rId13"/>
+    <p:sldId id="289" r:id="rId14"/>
+    <p:sldId id="262" r:id="rId15"/>
+    <p:sldId id="281" r:id="rId16"/>
+    <p:sldId id="273" r:id="rId17"/>
+    <p:sldId id="274" r:id="rId18"/>
+    <p:sldId id="278" r:id="rId19"/>
+    <p:sldId id="279" r:id="rId20"/>
+    <p:sldId id="280" r:id="rId21"/>
+    <p:sldId id="283" r:id="rId22"/>
+    <p:sldId id="285" r:id="rId23"/>
+    <p:sldId id="284" r:id="rId24"/>
+    <p:sldId id="257" r:id="rId25"/>
   </p:sldIdLst>
   <p:sldSz cx="12192000" cy="6858000"/>
   <p:notesSz cx="6858000" cy="9144000"/>
@@ -486,7 +488,7 @@
   <p:cSld>
     <p:spTree>
       <p:nvGrpSpPr>
-        <p:cNvPr id="1" name="Shape 264"/>
+        <p:cNvPr id="1" name="Shape 87"/>
         <p:cNvGrpSpPr/>
         <p:nvPr/>
       </p:nvGrpSpPr>
@@ -500,7 +502,7 @@
       </p:grpSpPr>
       <p:sp>
         <p:nvSpPr>
-          <p:cNvPr id="265" name="Google Shape;265;g3b53643a157_0_244:notes"/>
+          <p:cNvPr id="88" name="Google Shape;88;p:notes"/>
           <p:cNvSpPr>
             <a:spLocks noGrp="1" noRot="1" noChangeAspect="1"/>
           </p:cNvSpPr>
@@ -541,7 +543,7 @@
       </p:sp>
       <p:sp>
         <p:nvSpPr>
-          <p:cNvPr id="266" name="Google Shape;266;g3b53643a157_0_244:notes"/>
+          <p:cNvPr id="89" name="Google Shape;89;p:notes"/>
           <p:cNvSpPr txBox="1">
             <a:spLocks noGrp="1"/>
           </p:cNvSpPr>
@@ -578,6 +580,11 @@
         </p:txBody>
       </p:sp>
     </p:spTree>
+    <p:extLst>
+      <p:ext uri="{BB962C8B-B14F-4D97-AF65-F5344CB8AC3E}">
+        <p14:creationId xmlns:p14="http://schemas.microsoft.com/office/powerpoint/2010/main" val="2932852075"/>
+      </p:ext>
+    </p:extLst>
   </p:cSld>
   <p:clrMapOvr>
     <a:masterClrMapping/>
@@ -694,7 +701,7 @@
   <p:cSld>
     <p:spTree>
       <p:nvGrpSpPr>
-        <p:cNvPr id="1" name="Shape 237"/>
+        <p:cNvPr id="1" name="Shape 244"/>
         <p:cNvGrpSpPr/>
         <p:nvPr/>
       </p:nvGrpSpPr>
@@ -708,7 +715,7 @@
       </p:grpSpPr>
       <p:sp>
         <p:nvSpPr>
-          <p:cNvPr id="238" name="Google Shape;238;g3b53643a157_0_38:notes"/>
+          <p:cNvPr id="245" name="Google Shape;245;g3b53643a157_0_59:notes"/>
           <p:cNvSpPr>
             <a:spLocks noGrp="1" noRot="1" noChangeAspect="1"/>
           </p:cNvSpPr>
@@ -749,7 +756,7 @@
       </p:sp>
       <p:sp>
         <p:nvSpPr>
-          <p:cNvPr id="239" name="Google Shape;239;g3b53643a157_0_38:notes"/>
+          <p:cNvPr id="246" name="Google Shape;246;g3b53643a157_0_59:notes"/>
           <p:cNvSpPr txBox="1">
             <a:spLocks noGrp="1"/>
           </p:cNvSpPr>
@@ -1422,7 +1429,7 @@
   <p:cSld>
     <p:spTree>
       <p:nvGrpSpPr>
-        <p:cNvPr id="1" name="Shape 481"/>
+        <p:cNvPr id="1" name="Shape 237"/>
         <p:cNvGrpSpPr/>
         <p:nvPr/>
       </p:nvGrpSpPr>
@@ -1436,7 +1443,7 @@
       </p:grpSpPr>
       <p:sp>
         <p:nvSpPr>
-          <p:cNvPr id="482" name="Google Shape;482;g3b53643a157_0_369:notes"/>
+          <p:cNvPr id="238" name="Google Shape;238;g3b53643a157_0_38:notes"/>
           <p:cNvSpPr>
             <a:spLocks noGrp="1" noRot="1" noChangeAspect="1"/>
           </p:cNvSpPr>
@@ -1477,7 +1484,7 @@
       </p:sp>
       <p:sp>
         <p:nvSpPr>
-          <p:cNvPr id="483" name="Google Shape;483;g3b53643a157_0_369:notes"/>
+          <p:cNvPr id="239" name="Google Shape;239;g3b53643a157_0_38:notes"/>
           <p:cNvSpPr txBox="1">
             <a:spLocks noGrp="1"/>
           </p:cNvSpPr>
@@ -1521,12 +1528,12 @@
 </p:notes>
 </file>
 
-<file path=ppt/notesSlides/notesSlide2.xml><?xml version="1.0" encoding="utf-8"?>
+<file path=ppt/notesSlides/notesSlide19.xml><?xml version="1.0" encoding="utf-8"?>
 <p:notes xmlns:a="http://schemas.openxmlformats.org/drawingml/2006/main" xmlns:r="http://schemas.openxmlformats.org/officeDocument/2006/relationships" xmlns:p="http://schemas.openxmlformats.org/presentationml/2006/main" showMasterSp="0" showMasterPhAnim="0">
   <p:cSld>
     <p:spTree>
       <p:nvGrpSpPr>
-        <p:cNvPr id="1" name="Shape 270"/>
+        <p:cNvPr id="1" name="Shape 237"/>
         <p:cNvGrpSpPr/>
         <p:nvPr/>
       </p:nvGrpSpPr>
@@ -1540,7 +1547,7 @@
       </p:grpSpPr>
       <p:sp>
         <p:nvSpPr>
-          <p:cNvPr id="271" name="Google Shape;271;g3b53643a157_0_189:notes"/>
+          <p:cNvPr id="238" name="Google Shape;238;g3b53643a157_0_38:notes"/>
           <p:cNvSpPr>
             <a:spLocks noGrp="1" noRot="1" noChangeAspect="1"/>
           </p:cNvSpPr>
@@ -1550,7 +1557,7 @@
         </p:nvSpPr>
         <p:spPr>
           <a:xfrm>
-            <a:off x="381000" y="685800"/>
+            <a:off x="381300" y="685800"/>
             <a:ext cx="6096000" cy="3429000"/>
           </a:xfrm>
           <a:custGeom>
@@ -1581,7 +1588,7 @@
       </p:sp>
       <p:sp>
         <p:nvSpPr>
-          <p:cNvPr id="272" name="Google Shape;272;g3b53643a157_0_189:notes"/>
+          <p:cNvPr id="239" name="Google Shape;239;g3b53643a157_0_38:notes"/>
           <p:cNvSpPr txBox="1">
             <a:spLocks noGrp="1"/>
           </p:cNvSpPr>
@@ -1625,12 +1632,12 @@
 </p:notes>
 </file>
 
-<file path=ppt/notesSlides/notesSlide3.xml><?xml version="1.0" encoding="utf-8"?>
+<file path=ppt/notesSlides/notesSlide2.xml><?xml version="1.0" encoding="utf-8"?>
 <p:notes xmlns:a="http://schemas.openxmlformats.org/drawingml/2006/main" xmlns:r="http://schemas.openxmlformats.org/officeDocument/2006/relationships" xmlns:p="http://schemas.openxmlformats.org/presentationml/2006/main" showMasterSp="0" showMasterPhAnim="0">
   <p:cSld>
     <p:spTree>
       <p:nvGrpSpPr>
-        <p:cNvPr id="1" name="Shape 188"/>
+        <p:cNvPr id="1" name="Shape 468"/>
         <p:cNvGrpSpPr/>
         <p:nvPr/>
       </p:nvGrpSpPr>
@@ -1644,7 +1651,7 @@
       </p:grpSpPr>
       <p:sp>
         <p:nvSpPr>
-          <p:cNvPr id="189" name="Google Shape;189;g3b53643a157_0_15:notes"/>
+          <p:cNvPr id="469" name="Google Shape;469;g3bb91f55cac_0_320:notes"/>
           <p:cNvSpPr>
             <a:spLocks noGrp="1" noRot="1" noChangeAspect="1"/>
           </p:cNvSpPr>
@@ -1654,7 +1661,7 @@
         </p:nvSpPr>
         <p:spPr>
           <a:xfrm>
-            <a:off x="381300" y="685800"/>
+            <a:off x="381000" y="685800"/>
             <a:ext cx="6096000" cy="3429000"/>
           </a:xfrm>
           <a:custGeom>
@@ -1685,7 +1692,7 @@
       </p:sp>
       <p:sp>
         <p:nvSpPr>
-          <p:cNvPr id="190" name="Google Shape;190;g3b53643a157_0_15:notes"/>
+          <p:cNvPr id="470" name="Google Shape;470;g3bb91f55cac_0_320:notes"/>
           <p:cNvSpPr txBox="1">
             <a:spLocks noGrp="1"/>
           </p:cNvSpPr>
@@ -1722,6 +1729,11 @@
         </p:txBody>
       </p:sp>
     </p:spTree>
+    <p:extLst>
+      <p:ext uri="{BB962C8B-B14F-4D97-AF65-F5344CB8AC3E}">
+        <p14:creationId xmlns:p14="http://schemas.microsoft.com/office/powerpoint/2010/main" val="221635323"/>
+      </p:ext>
+    </p:extLst>
   </p:cSld>
   <p:clrMapOvr>
     <a:masterClrMapping/>
@@ -1729,12 +1741,12 @@
 </p:notes>
 </file>
 
-<file path=ppt/notesSlides/notesSlide4.xml><?xml version="1.0" encoding="utf-8"?>
+<file path=ppt/notesSlides/notesSlide20.xml><?xml version="1.0" encoding="utf-8"?>
 <p:notes xmlns:a="http://schemas.openxmlformats.org/drawingml/2006/main" xmlns:r="http://schemas.openxmlformats.org/officeDocument/2006/relationships" xmlns:p="http://schemas.openxmlformats.org/presentationml/2006/main" showMasterSp="0" showMasterPhAnim="0">
   <p:cSld>
     <p:spTree>
       <p:nvGrpSpPr>
-        <p:cNvPr id="1" name="Shape 237"/>
+        <p:cNvPr id="1" name="Shape 481"/>
         <p:cNvGrpSpPr/>
         <p:nvPr/>
       </p:nvGrpSpPr>
@@ -1748,7 +1760,7 @@
       </p:grpSpPr>
       <p:sp>
         <p:nvSpPr>
-          <p:cNvPr id="238" name="Google Shape;238;g3b53643a157_0_38:notes"/>
+          <p:cNvPr id="482" name="Google Shape;482;g3b53643a157_0_369:notes"/>
           <p:cNvSpPr>
             <a:spLocks noGrp="1" noRot="1" noChangeAspect="1"/>
           </p:cNvSpPr>
@@ -1789,7 +1801,7 @@
       </p:sp>
       <p:sp>
         <p:nvSpPr>
-          <p:cNvPr id="239" name="Google Shape;239;g3b53643a157_0_38:notes"/>
+          <p:cNvPr id="483" name="Google Shape;483;g3b53643a157_0_369:notes"/>
           <p:cNvSpPr txBox="1">
             <a:spLocks noGrp="1"/>
           </p:cNvSpPr>
@@ -1833,12 +1845,12 @@
 </p:notes>
 </file>
 
-<file path=ppt/notesSlides/notesSlide5.xml><?xml version="1.0" encoding="utf-8"?>
+<file path=ppt/notesSlides/notesSlide3.xml><?xml version="1.0" encoding="utf-8"?>
 <p:notes xmlns:a="http://schemas.openxmlformats.org/drawingml/2006/main" xmlns:r="http://schemas.openxmlformats.org/officeDocument/2006/relationships" xmlns:p="http://schemas.openxmlformats.org/presentationml/2006/main" showMasterSp="0" showMasterPhAnim="0">
   <p:cSld>
     <p:spTree>
       <p:nvGrpSpPr>
-        <p:cNvPr id="1" name="Shape 237"/>
+        <p:cNvPr id="1" name="Shape 87"/>
         <p:cNvGrpSpPr/>
         <p:nvPr/>
       </p:nvGrpSpPr>
@@ -1852,7 +1864,7 @@
       </p:grpSpPr>
       <p:sp>
         <p:nvSpPr>
-          <p:cNvPr id="238" name="Google Shape;238;g3b53643a157_0_38:notes"/>
+          <p:cNvPr id="88" name="Google Shape;88;p:notes"/>
           <p:cNvSpPr>
             <a:spLocks noGrp="1" noRot="1" noChangeAspect="1"/>
           </p:cNvSpPr>
@@ -1862,7 +1874,7 @@
         </p:nvSpPr>
         <p:spPr>
           <a:xfrm>
-            <a:off x="381300" y="685800"/>
+            <a:off x="381000" y="685800"/>
             <a:ext cx="6096000" cy="3429000"/>
           </a:xfrm>
           <a:custGeom>
@@ -1893,7 +1905,7 @@
       </p:sp>
       <p:sp>
         <p:nvSpPr>
-          <p:cNvPr id="239" name="Google Shape;239;g3b53643a157_0_38:notes"/>
+          <p:cNvPr id="89" name="Google Shape;89;p:notes"/>
           <p:cNvSpPr txBox="1">
             <a:spLocks noGrp="1"/>
           </p:cNvSpPr>
@@ -1930,6 +1942,11 @@
         </p:txBody>
       </p:sp>
     </p:spTree>
+    <p:extLst>
+      <p:ext uri="{BB962C8B-B14F-4D97-AF65-F5344CB8AC3E}">
+        <p14:creationId xmlns:p14="http://schemas.microsoft.com/office/powerpoint/2010/main" val="2559847791"/>
+      </p:ext>
+    </p:extLst>
   </p:cSld>
   <p:clrMapOvr>
     <a:masterClrMapping/>
@@ -1937,12 +1954,12 @@
 </p:notes>
 </file>
 
-<file path=ppt/notesSlides/notesSlide6.xml><?xml version="1.0" encoding="utf-8"?>
+<file path=ppt/notesSlides/notesSlide4.xml><?xml version="1.0" encoding="utf-8"?>
 <p:notes xmlns:a="http://schemas.openxmlformats.org/drawingml/2006/main" xmlns:r="http://schemas.openxmlformats.org/officeDocument/2006/relationships" xmlns:p="http://schemas.openxmlformats.org/presentationml/2006/main" showMasterSp="0" showMasterPhAnim="0">
   <p:cSld>
     <p:spTree>
       <p:nvGrpSpPr>
-        <p:cNvPr id="1" name="Shape 225"/>
+        <p:cNvPr id="1" name="Shape 270"/>
         <p:cNvGrpSpPr/>
         <p:nvPr/>
       </p:nvGrpSpPr>
@@ -1956,7 +1973,7 @@
       </p:grpSpPr>
       <p:sp>
         <p:nvSpPr>
-          <p:cNvPr id="226" name="Google Shape;226;g3bb91f55cac_0_2:notes"/>
+          <p:cNvPr id="271" name="Google Shape;271;g3b53643a157_0_189:notes"/>
           <p:cNvSpPr>
             <a:spLocks noGrp="1" noRot="1" noChangeAspect="1"/>
           </p:cNvSpPr>
@@ -1966,7 +1983,7 @@
         </p:nvSpPr>
         <p:spPr>
           <a:xfrm>
-            <a:off x="381300" y="685800"/>
+            <a:off x="381000" y="685800"/>
             <a:ext cx="6096000" cy="3429000"/>
           </a:xfrm>
           <a:custGeom>
@@ -1997,7 +2014,215 @@
       </p:sp>
       <p:sp>
         <p:nvSpPr>
-          <p:cNvPr id="227" name="Google Shape;227;g3bb91f55cac_0_2:notes"/>
+          <p:cNvPr id="272" name="Google Shape;272;g3b53643a157_0_189:notes"/>
+          <p:cNvSpPr txBox="1">
+            <a:spLocks noGrp="1"/>
+          </p:cNvSpPr>
+          <p:nvPr>
+            <p:ph type="body" idx="1"/>
+          </p:nvPr>
+        </p:nvSpPr>
+        <p:spPr>
+          <a:xfrm>
+            <a:off x="685800" y="4343400"/>
+            <a:ext cx="5486400" cy="4114800"/>
+          </a:xfrm>
+          <a:prstGeom prst="rect">
+            <a:avLst/>
+          </a:prstGeom>
+        </p:spPr>
+        <p:txBody>
+          <a:bodyPr spcFirstLastPara="1" wrap="square" lIns="91425" tIns="91425" rIns="91425" bIns="91425" anchor="t" anchorCtr="0">
+            <a:noAutofit/>
+          </a:bodyPr>
+          <a:lstStyle/>
+          <a:p>
+            <a:pPr marL="0" lvl="0" indent="0" algn="l" rtl="0">
+              <a:spcBef>
+                <a:spcPts val="0"/>
+              </a:spcBef>
+              <a:spcAft>
+                <a:spcPts val="0"/>
+              </a:spcAft>
+              <a:buNone/>
+            </a:pPr>
+            <a:endParaRPr/>
+          </a:p>
+        </p:txBody>
+      </p:sp>
+    </p:spTree>
+  </p:cSld>
+  <p:clrMapOvr>
+    <a:masterClrMapping/>
+  </p:clrMapOvr>
+</p:notes>
+</file>
+
+<file path=ppt/notesSlides/notesSlide5.xml><?xml version="1.0" encoding="utf-8"?>
+<p:notes xmlns:a="http://schemas.openxmlformats.org/drawingml/2006/main" xmlns:r="http://schemas.openxmlformats.org/officeDocument/2006/relationships" xmlns:p="http://schemas.openxmlformats.org/presentationml/2006/main" showMasterSp="0" showMasterPhAnim="0">
+  <p:cSld>
+    <p:spTree>
+      <p:nvGrpSpPr>
+        <p:cNvPr id="1" name="Shape 188"/>
+        <p:cNvGrpSpPr/>
+        <p:nvPr/>
+      </p:nvGrpSpPr>
+      <p:grpSpPr>
+        <a:xfrm>
+          <a:off x="0" y="0"/>
+          <a:ext cx="0" cy="0"/>
+          <a:chOff x="0" y="0"/>
+          <a:chExt cx="0" cy="0"/>
+        </a:xfrm>
+      </p:grpSpPr>
+      <p:sp>
+        <p:nvSpPr>
+          <p:cNvPr id="189" name="Google Shape;189;g3b53643a157_0_15:notes"/>
+          <p:cNvSpPr>
+            <a:spLocks noGrp="1" noRot="1" noChangeAspect="1"/>
+          </p:cNvSpPr>
+          <p:nvPr>
+            <p:ph type="sldImg" idx="2"/>
+          </p:nvPr>
+        </p:nvSpPr>
+        <p:spPr>
+          <a:xfrm>
+            <a:off x="381300" y="685800"/>
+            <a:ext cx="6096000" cy="3429000"/>
+          </a:xfrm>
+          <a:custGeom>
+            <a:avLst/>
+            <a:gdLst/>
+            <a:ahLst/>
+            <a:cxnLst/>
+            <a:rect l="l" t="t" r="r" b="b"/>
+            <a:pathLst>
+              <a:path w="120000" h="120000" extrusionOk="0">
+                <a:moveTo>
+                  <a:pt x="0" y="0"/>
+                </a:moveTo>
+                <a:lnTo>
+                  <a:pt x="120000" y="0"/>
+                </a:lnTo>
+                <a:lnTo>
+                  <a:pt x="120000" y="120000"/>
+                </a:lnTo>
+                <a:lnTo>
+                  <a:pt x="0" y="120000"/>
+                </a:lnTo>
+                <a:close/>
+              </a:path>
+            </a:pathLst>
+          </a:custGeom>
+        </p:spPr>
+      </p:sp>
+      <p:sp>
+        <p:nvSpPr>
+          <p:cNvPr id="190" name="Google Shape;190;g3b53643a157_0_15:notes"/>
+          <p:cNvSpPr txBox="1">
+            <a:spLocks noGrp="1"/>
+          </p:cNvSpPr>
+          <p:nvPr>
+            <p:ph type="body" idx="1"/>
+          </p:nvPr>
+        </p:nvSpPr>
+        <p:spPr>
+          <a:xfrm>
+            <a:off x="685800" y="4343400"/>
+            <a:ext cx="5486400" cy="4114800"/>
+          </a:xfrm>
+          <a:prstGeom prst="rect">
+            <a:avLst/>
+          </a:prstGeom>
+        </p:spPr>
+        <p:txBody>
+          <a:bodyPr spcFirstLastPara="1" wrap="square" lIns="91425" tIns="91425" rIns="91425" bIns="91425" anchor="t" anchorCtr="0">
+            <a:noAutofit/>
+          </a:bodyPr>
+          <a:lstStyle/>
+          <a:p>
+            <a:pPr marL="0" lvl="0" indent="0" algn="l" rtl="0">
+              <a:spcBef>
+                <a:spcPts val="0"/>
+              </a:spcBef>
+              <a:spcAft>
+                <a:spcPts val="0"/>
+              </a:spcAft>
+              <a:buNone/>
+            </a:pPr>
+            <a:endParaRPr/>
+          </a:p>
+        </p:txBody>
+      </p:sp>
+    </p:spTree>
+  </p:cSld>
+  <p:clrMapOvr>
+    <a:masterClrMapping/>
+  </p:clrMapOvr>
+</p:notes>
+</file>
+
+<file path=ppt/notesSlides/notesSlide6.xml><?xml version="1.0" encoding="utf-8"?>
+<p:notes xmlns:a="http://schemas.openxmlformats.org/drawingml/2006/main" xmlns:r="http://schemas.openxmlformats.org/officeDocument/2006/relationships" xmlns:p="http://schemas.openxmlformats.org/presentationml/2006/main" showMasterSp="0" showMasterPhAnim="0">
+  <p:cSld>
+    <p:spTree>
+      <p:nvGrpSpPr>
+        <p:cNvPr id="1" name="Shape 237"/>
+        <p:cNvGrpSpPr/>
+        <p:nvPr/>
+      </p:nvGrpSpPr>
+      <p:grpSpPr>
+        <a:xfrm>
+          <a:off x="0" y="0"/>
+          <a:ext cx="0" cy="0"/>
+          <a:chOff x="0" y="0"/>
+          <a:chExt cx="0" cy="0"/>
+        </a:xfrm>
+      </p:grpSpPr>
+      <p:sp>
+        <p:nvSpPr>
+          <p:cNvPr id="238" name="Google Shape;238;g3b53643a157_0_38:notes"/>
+          <p:cNvSpPr>
+            <a:spLocks noGrp="1" noRot="1" noChangeAspect="1"/>
+          </p:cNvSpPr>
+          <p:nvPr>
+            <p:ph type="sldImg" idx="2"/>
+          </p:nvPr>
+        </p:nvSpPr>
+        <p:spPr>
+          <a:xfrm>
+            <a:off x="381300" y="685800"/>
+            <a:ext cx="6096000" cy="3429000"/>
+          </a:xfrm>
+          <a:custGeom>
+            <a:avLst/>
+            <a:gdLst/>
+            <a:ahLst/>
+            <a:cxnLst/>
+            <a:rect l="l" t="t" r="r" b="b"/>
+            <a:pathLst>
+              <a:path w="120000" h="120000" extrusionOk="0">
+                <a:moveTo>
+                  <a:pt x="0" y="0"/>
+                </a:moveTo>
+                <a:lnTo>
+                  <a:pt x="120000" y="0"/>
+                </a:lnTo>
+                <a:lnTo>
+                  <a:pt x="120000" y="120000"/>
+                </a:lnTo>
+                <a:lnTo>
+                  <a:pt x="0" y="120000"/>
+                </a:lnTo>
+                <a:close/>
+              </a:path>
+            </a:pathLst>
+          </a:custGeom>
+        </p:spPr>
+      </p:sp>
+      <p:sp>
+        <p:nvSpPr>
+          <p:cNvPr id="239" name="Google Shape;239;g3b53643a157_0_38:notes"/>
           <p:cNvSpPr txBox="1">
             <a:spLocks noGrp="1"/>
           </p:cNvSpPr>
@@ -2150,7 +2375,7 @@
   <p:cSld>
     <p:spTree>
       <p:nvGrpSpPr>
-        <p:cNvPr id="1" name="Shape 237"/>
+        <p:cNvPr id="1" name="Shape 225"/>
         <p:cNvGrpSpPr/>
         <p:nvPr/>
       </p:nvGrpSpPr>
@@ -2164,7 +2389,7 @@
       </p:grpSpPr>
       <p:sp>
         <p:nvSpPr>
-          <p:cNvPr id="238" name="Google Shape;238;g3b53643a157_0_38:notes"/>
+          <p:cNvPr id="226" name="Google Shape;226;g3bb91f55cac_0_2:notes"/>
           <p:cNvSpPr>
             <a:spLocks noGrp="1" noRot="1" noChangeAspect="1"/>
           </p:cNvSpPr>
@@ -2205,7 +2430,7 @@
       </p:sp>
       <p:sp>
         <p:nvSpPr>
-          <p:cNvPr id="239" name="Google Shape;239;g3b53643a157_0_38:notes"/>
+          <p:cNvPr id="227" name="Google Shape;227;g3bb91f55cac_0_2:notes"/>
           <p:cNvSpPr txBox="1">
             <a:spLocks noGrp="1"/>
           </p:cNvSpPr>
@@ -2254,7 +2479,7 @@
   <p:cSld>
     <p:spTree>
       <p:nvGrpSpPr>
-        <p:cNvPr id="1" name="Shape 244"/>
+        <p:cNvPr id="1" name="Shape 237"/>
         <p:cNvGrpSpPr/>
         <p:nvPr/>
       </p:nvGrpSpPr>
@@ -2268,7 +2493,7 @@
       </p:grpSpPr>
       <p:sp>
         <p:nvSpPr>
-          <p:cNvPr id="245" name="Google Shape;245;g3b53643a157_0_59:notes"/>
+          <p:cNvPr id="238" name="Google Shape;238;g3b53643a157_0_38:notes"/>
           <p:cNvSpPr>
             <a:spLocks noGrp="1" noRot="1" noChangeAspect="1"/>
           </p:cNvSpPr>
@@ -2309,7 +2534,7 @@
       </p:sp>
       <p:sp>
         <p:nvSpPr>
-          <p:cNvPr id="246" name="Google Shape;246;g3b53643a157_0_59:notes"/>
+          <p:cNvPr id="239" name="Google Shape;239;g3b53643a157_0_38:notes"/>
           <p:cNvSpPr txBox="1">
             <a:spLocks noGrp="1"/>
           </p:cNvSpPr>
@@ -3711,19 +3936,11 @@
 </file>
 
 <file path=ppt/slideLayouts/slideLayout17.xml><?xml version="1.0" encoding="utf-8"?>
-<p:sldLayout xmlns:a="http://schemas.openxmlformats.org/drawingml/2006/main" xmlns:r="http://schemas.openxmlformats.org/officeDocument/2006/relationships" xmlns:p="http://schemas.openxmlformats.org/presentationml/2006/main" matchingName="Imagen 1 1">
-  <p:cSld name="BLANK_3_1_1_1">
-    <p:bg>
-      <p:bgPr>
-        <a:solidFill>
-          <a:schemeClr val="lt1"/>
-        </a:solidFill>
-        <a:effectLst/>
-      </p:bgPr>
-    </p:bg>
+<p:sldLayout xmlns:a="http://schemas.openxmlformats.org/drawingml/2006/main" xmlns:r="http://schemas.openxmlformats.org/officeDocument/2006/relationships" xmlns:p="http://schemas.openxmlformats.org/presentationml/2006/main" matchingName="Gradiente">
+  <p:cSld name="Gradiente">
     <p:spTree>
       <p:nvGrpSpPr>
-        <p:cNvPr id="1" name="Shape 71"/>
+        <p:cNvPr id="1" name="Shape 85"/>
         <p:cNvGrpSpPr/>
         <p:nvPr/>
       </p:nvGrpSpPr>
@@ -3737,21 +3954,22 @@
       </p:grpSpPr>
       <p:pic>
         <p:nvPicPr>
-          <p:cNvPr id="72" name="Google Shape;72;p17" title="4d917f2d-7c08-49ef-b177-326a60a5c815.png"/>
+          <p:cNvPr id="86" name="Google Shape;86;p22" title="Coder Facebook (6).png"/>
           <p:cNvPicPr preferRelativeResize="0"/>
           <p:nvPr/>
         </p:nvPicPr>
-        <p:blipFill rotWithShape="1">
-          <a:blip r:embed="rId2"/>
-          <a:srcRect t="34388" b="23542"/>
+        <p:blipFill>
+          <a:blip r:embed="rId2">
+            <a:alphaModFix/>
+          </a:blip>
           <a:stretch>
             <a:fillRect/>
           </a:stretch>
         </p:blipFill>
         <p:spPr>
           <a:xfrm>
-            <a:off x="-61167" y="-49467"/>
-            <a:ext cx="12314337" cy="6907467"/>
+            <a:off x="-148966" y="1"/>
+            <a:ext cx="12340967" cy="6941801"/>
           </a:xfrm>
           <a:prstGeom prst="rect">
             <a:avLst/>
@@ -3762,251 +3980,12 @@
           </a:ln>
         </p:spPr>
       </p:pic>
-      <p:sp>
-        <p:nvSpPr>
-          <p:cNvPr id="73" name="Google Shape;73;p17"/>
-          <p:cNvSpPr txBox="1"/>
-          <p:nvPr/>
-        </p:nvSpPr>
-        <p:spPr>
-          <a:xfrm>
-            <a:off x="634833" y="220035"/>
-            <a:ext cx="859200" cy="251200"/>
-          </a:xfrm>
-          <a:prstGeom prst="rect">
-            <a:avLst/>
-          </a:prstGeom>
-          <a:noFill/>
-          <a:ln>
-            <a:noFill/>
-          </a:ln>
-        </p:spPr>
-        <p:txBody>
-          <a:bodyPr spcFirstLastPara="1" wrap="square" lIns="121900" tIns="121900" rIns="121900" bIns="121900" anchor="ctr" anchorCtr="0">
-            <a:noAutofit/>
-          </a:bodyPr>
-          <a:lstStyle/>
-          <a:p>
-            <a:pPr marL="0" lvl="0" indent="0" algn="l" rtl="0">
-              <a:lnSpc>
-                <a:spcPct val="100000"/>
-              </a:lnSpc>
-              <a:spcBef>
-                <a:spcPts val="0"/>
-              </a:spcBef>
-              <a:spcAft>
-                <a:spcPts val="0"/>
-              </a:spcAft>
-              <a:buNone/>
-            </a:pPr>
-            <a:r>
-              <a:rPr lang="en-US" sz="665">
-                <a:solidFill>
-                  <a:srgbClr val="F8F2E8"/>
-                </a:solidFill>
-                <a:latin typeface="Plus Jakarta Sans"/>
-                <a:ea typeface="Plus Jakarta Sans"/>
-                <a:cs typeface="Plus Jakarta Sans"/>
-                <a:sym typeface="Plus Jakarta Sans"/>
-              </a:rPr>
-              <a:t>Coderhouse</a:t>
-            </a:r>
-            <a:endParaRPr sz="665">
-              <a:solidFill>
-                <a:srgbClr val="F8F2E8"/>
-              </a:solidFill>
-              <a:latin typeface="Plus Jakarta Sans"/>
-              <a:ea typeface="Plus Jakarta Sans"/>
-              <a:cs typeface="Plus Jakarta Sans"/>
-              <a:sym typeface="Plus Jakarta Sans"/>
-            </a:endParaRPr>
-          </a:p>
-        </p:txBody>
-      </p:sp>
-      <p:sp>
-        <p:nvSpPr>
-          <p:cNvPr id="74" name="Google Shape;74;p17"/>
-          <p:cNvSpPr txBox="1"/>
-          <p:nvPr/>
-        </p:nvSpPr>
-        <p:spPr>
-          <a:xfrm>
-            <a:off x="9230685" y="220035"/>
-            <a:ext cx="1584800" cy="251200"/>
-          </a:xfrm>
-          <a:prstGeom prst="rect">
-            <a:avLst/>
-          </a:prstGeom>
-          <a:noFill/>
-          <a:ln>
-            <a:noFill/>
-          </a:ln>
-        </p:spPr>
-        <p:txBody>
-          <a:bodyPr spcFirstLastPara="1" wrap="square" lIns="121900" tIns="121900" rIns="121900" bIns="121900" anchor="ctr" anchorCtr="0">
-            <a:noAutofit/>
-          </a:bodyPr>
-          <a:lstStyle/>
-          <a:p>
-            <a:pPr marL="0" lvl="0" indent="0" algn="r" rtl="0">
-              <a:lnSpc>
-                <a:spcPct val="100000"/>
-              </a:lnSpc>
-              <a:spcBef>
-                <a:spcPts val="0"/>
-              </a:spcBef>
-              <a:spcAft>
-                <a:spcPts val="0"/>
-              </a:spcAft>
-              <a:buNone/>
-            </a:pPr>
-            <a:r>
-              <a:rPr lang="en-US" sz="665">
-                <a:solidFill>
-                  <a:srgbClr val="F8F2E8"/>
-                </a:solidFill>
-                <a:latin typeface="Plus Jakarta Sans"/>
-                <a:ea typeface="Plus Jakarta Sans"/>
-                <a:cs typeface="Plus Jakarta Sans"/>
-                <a:sym typeface="Plus Jakarta Sans"/>
-              </a:rPr>
-              <a:t>Internal  Presentation</a:t>
-            </a:r>
-            <a:endParaRPr sz="665">
-              <a:solidFill>
-                <a:srgbClr val="F8F2E8"/>
-              </a:solidFill>
-              <a:latin typeface="Plus Jakarta Sans"/>
-              <a:ea typeface="Plus Jakarta Sans"/>
-              <a:cs typeface="Plus Jakarta Sans"/>
-              <a:sym typeface="Plus Jakarta Sans"/>
-            </a:endParaRPr>
-          </a:p>
-        </p:txBody>
-      </p:sp>
-      <p:sp>
-        <p:nvSpPr>
-          <p:cNvPr id="75" name="Google Shape;75;p17"/>
-          <p:cNvSpPr txBox="1"/>
-          <p:nvPr/>
-        </p:nvSpPr>
-        <p:spPr>
-          <a:xfrm>
-            <a:off x="2928743" y="220035"/>
-            <a:ext cx="1656000" cy="251200"/>
-          </a:xfrm>
-          <a:prstGeom prst="rect">
-            <a:avLst/>
-          </a:prstGeom>
-          <a:noFill/>
-          <a:ln>
-            <a:noFill/>
-          </a:ln>
-        </p:spPr>
-        <p:txBody>
-          <a:bodyPr spcFirstLastPara="1" wrap="square" lIns="121900" tIns="121900" rIns="121900" bIns="121900" anchor="ctr" anchorCtr="0">
-            <a:noAutofit/>
-          </a:bodyPr>
-          <a:lstStyle/>
-          <a:p>
-            <a:pPr marL="0" lvl="0" indent="0" algn="l" rtl="0">
-              <a:lnSpc>
-                <a:spcPct val="100000"/>
-              </a:lnSpc>
-              <a:spcBef>
-                <a:spcPts val="0"/>
-              </a:spcBef>
-              <a:spcAft>
-                <a:spcPts val="0"/>
-              </a:spcAft>
-              <a:buNone/>
-            </a:pPr>
-            <a:r>
-              <a:rPr lang="en-US" sz="665">
-                <a:solidFill>
-                  <a:srgbClr val="F8F2E8"/>
-                </a:solidFill>
-                <a:latin typeface="Plus Jakarta Sans"/>
-                <a:ea typeface="Plus Jakarta Sans"/>
-                <a:cs typeface="Plus Jakarta Sans"/>
-                <a:sym typeface="Plus Jakarta Sans"/>
-              </a:rPr>
-              <a:t>2026</a:t>
-            </a:r>
-            <a:endParaRPr sz="665">
-              <a:solidFill>
-                <a:srgbClr val="F8F2E8"/>
-              </a:solidFill>
-              <a:latin typeface="Plus Jakarta Sans"/>
-              <a:ea typeface="Plus Jakarta Sans"/>
-              <a:cs typeface="Plus Jakarta Sans"/>
-              <a:sym typeface="Plus Jakarta Sans"/>
-            </a:endParaRPr>
-          </a:p>
-        </p:txBody>
-      </p:sp>
-      <p:sp>
-        <p:nvSpPr>
-          <p:cNvPr id="76" name="Google Shape;76;p17"/>
-          <p:cNvSpPr txBox="1"/>
-          <p:nvPr/>
-        </p:nvSpPr>
-        <p:spPr>
-          <a:xfrm>
-            <a:off x="11164700" y="120865"/>
-            <a:ext cx="492800" cy="449600"/>
-          </a:xfrm>
-          <a:prstGeom prst="rect">
-            <a:avLst/>
-          </a:prstGeom>
-          <a:noFill/>
-          <a:ln>
-            <a:noFill/>
-          </a:ln>
-        </p:spPr>
-        <p:txBody>
-          <a:bodyPr spcFirstLastPara="1" wrap="square" lIns="117966" tIns="117966" rIns="117966" bIns="117966" anchor="ctr" anchorCtr="0">
-            <a:noAutofit/>
-          </a:bodyPr>
-          <a:lstStyle/>
-          <a:p>
-            <a:pPr marL="0" lvl="0" indent="0" algn="ctr" rtl="0">
-              <a:lnSpc>
-                <a:spcPct val="100000"/>
-              </a:lnSpc>
-              <a:spcBef>
-                <a:spcPts val="0"/>
-              </a:spcBef>
-              <a:spcAft>
-                <a:spcPts val="0"/>
-              </a:spcAft>
-              <a:buNone/>
-            </a:pPr>
-            <a:fld id="{00000000-1234-1234-1234-123412341234}" type="slidenum">
-              <a:rPr lang="en-US" sz="665">
-                <a:solidFill>
-                  <a:srgbClr val="F8F2E8"/>
-                </a:solidFill>
-                <a:latin typeface="Plus Jakarta Sans"/>
-                <a:ea typeface="Plus Jakarta Sans"/>
-                <a:cs typeface="Plus Jakarta Sans"/>
-                <a:sym typeface="Plus Jakarta Sans"/>
-              </a:rPr>
-              <a:t>‹Nº›</a:t>
-            </a:fld>
-            <a:endParaRPr sz="665">
-              <a:solidFill>
-                <a:srgbClr val="F8F2E8"/>
-              </a:solidFill>
-              <a:latin typeface="Plus Jakarta Sans"/>
-              <a:ea typeface="Plus Jakarta Sans"/>
-              <a:cs typeface="Plus Jakarta Sans"/>
-              <a:sym typeface="Plus Jakarta Sans"/>
-            </a:endParaRPr>
-          </a:p>
-        </p:txBody>
-      </p:sp>
     </p:spTree>
+    <p:extLst>
+      <p:ext uri="{BB962C8B-B14F-4D97-AF65-F5344CB8AC3E}">
+        <p14:creationId xmlns:p14="http://schemas.microsoft.com/office/powerpoint/2010/main" val="2824454032"/>
+      </p:ext>
+    </p:extLst>
   </p:cSld>
   <p:clrMapOvr>
     <a:masterClrMapping/>
@@ -6278,7 +6257,7 @@
   <p:cSld>
     <p:spTree>
       <p:nvGrpSpPr>
-        <p:cNvPr id="1" name="Shape 267"/>
+        <p:cNvPr id="1" name="Shape 90"/>
         <p:cNvGrpSpPr/>
         <p:nvPr/>
       </p:nvGrpSpPr>
@@ -6290,16 +6269,24 @@
           <a:chExt cx="0" cy="0"/>
         </a:xfrm>
       </p:grpSpPr>
-      <p:sp>
-        <p:nvSpPr>
-          <p:cNvPr id="268" name="Google Shape;268;p42"/>
-          <p:cNvSpPr txBox="1"/>
+      <p:pic>
+        <p:nvPicPr>
+          <p:cNvPr id="93" name="Google Shape;93;p23" title="logo gradient 1.png"/>
+          <p:cNvPicPr preferRelativeResize="0"/>
           <p:nvPr/>
-        </p:nvSpPr>
-        <p:spPr>
-          <a:xfrm>
-            <a:off x="985433" y="4680301"/>
-            <a:ext cx="10420800" cy="366400"/>
+        </p:nvPicPr>
+        <p:blipFill>
+          <a:blip r:embed="rId3">
+            <a:alphaModFix/>
+          </a:blip>
+          <a:stretch>
+            <a:fillRect/>
+          </a:stretch>
+        </p:blipFill>
+        <p:spPr>
+          <a:xfrm>
+            <a:off x="5107738" y="6030867"/>
+            <a:ext cx="2063933" cy="603000"/>
           </a:xfrm>
           <a:prstGeom prst="rect">
             <a:avLst/>
@@ -6309,49 +6296,17 @@
             <a:noFill/>
           </a:ln>
         </p:spPr>
-        <p:txBody>
-          <a:bodyPr spcFirstLastPara="1" wrap="square" lIns="121900" tIns="121900" rIns="121900" bIns="121900" anchor="t" anchorCtr="0">
-            <a:noAutofit/>
-          </a:bodyPr>
-          <a:lstStyle/>
-          <a:p>
-            <a:pPr marL="0" lvl="0" indent="0" algn="ctr" rtl="0">
-              <a:lnSpc>
-                <a:spcPct val="115000"/>
-              </a:lnSpc>
-              <a:spcBef>
-                <a:spcPts val="0"/>
-              </a:spcBef>
-              <a:spcAft>
-                <a:spcPts val="0"/>
-              </a:spcAft>
-              <a:buNone/>
-            </a:pPr>
-            <a:r>
-              <a:rPr lang="es-AR" altLang="en-US" sz="1600">
-                <a:solidFill>
-                  <a:srgbClr val="F8F2E8"/>
-                </a:solidFill>
-                <a:latin typeface="Plus Jakarta Sans Light"/>
-                <a:ea typeface="Plus Jakarta Sans Light"/>
-                <a:cs typeface="Plus Jakarta Sans Light"/>
-                <a:sym typeface="Plus Jakarta Sans Light"/>
-              </a:rPr>
-              <a:t>En Breve comenzamos!!!!</a:t>
-            </a:r>
-          </a:p>
-        </p:txBody>
-      </p:sp>
-      <p:sp>
-        <p:nvSpPr>
-          <p:cNvPr id="269" name="Google Shape;269;p42"/>
+      </p:pic>
+      <p:sp>
+        <p:nvSpPr>
+          <p:cNvPr id="6" name="Google Shape;118;p41"/>
           <p:cNvSpPr txBox="1"/>
           <p:nvPr/>
         </p:nvSpPr>
         <p:spPr>
           <a:xfrm>
-            <a:off x="1887233" y="3161901"/>
-            <a:ext cx="8617200" cy="1518400"/>
+            <a:off x="1992100" y="1534533"/>
+            <a:ext cx="8295200" cy="615513"/>
           </a:xfrm>
           <a:prstGeom prst="rect">
             <a:avLst/>
@@ -6363,59 +6318,168 @@
         </p:spPr>
         <p:txBody>
           <a:bodyPr spcFirstLastPara="1" wrap="square" lIns="121900" tIns="121900" rIns="121900" bIns="121900" anchor="t" anchorCtr="0">
-            <a:noAutofit/>
+            <a:spAutoFit/>
           </a:bodyPr>
           <a:lstStyle/>
           <a:p>
-            <a:pPr marL="0" lvl="0" indent="0" algn="ctr" rtl="0">
+            <a:pPr algn="ctr">
+              <a:buClr>
+                <a:srgbClr val="000000"/>
+              </a:buClr>
+              <a:buSzPts val="1800"/>
+            </a:pPr>
+            <a:r>
+              <a:rPr lang="es" sz="2400" b="1" dirty="0">
+                <a:solidFill>
+                  <a:schemeClr val="lt1"/>
+                </a:solidFill>
+                <a:latin typeface="Plus Jakarta Sans"/>
+                <a:ea typeface="Plus Jakarta Sans"/>
+                <a:cs typeface="Plus Jakarta Sans"/>
+                <a:sym typeface="Plus Jakarta Sans"/>
+              </a:rPr>
+              <a:t>UNIDAD </a:t>
+            </a:r>
+            <a:r>
+              <a:rPr lang="es" sz="2400" b="1" dirty="0" smtClean="0">
+                <a:solidFill>
+                  <a:schemeClr val="lt1"/>
+                </a:solidFill>
+                <a:latin typeface="Plus Jakarta Sans"/>
+                <a:ea typeface="Plus Jakarta Sans"/>
+                <a:cs typeface="Plus Jakarta Sans"/>
+                <a:sym typeface="Plus Jakarta Sans"/>
+              </a:rPr>
+              <a:t>1 </a:t>
+            </a:r>
+            <a:r>
+              <a:rPr lang="es" sz="2400" b="1" dirty="0">
+                <a:solidFill>
+                  <a:schemeClr val="lt1"/>
+                </a:solidFill>
+                <a:latin typeface="Plus Jakarta Sans"/>
+                <a:ea typeface="Plus Jakarta Sans"/>
+                <a:cs typeface="Plus Jakarta Sans"/>
+                <a:sym typeface="Plus Jakarta Sans"/>
+              </a:rPr>
+              <a:t>-  DATA SCIENCE I</a:t>
+            </a:r>
+            <a:endParaRPr sz="2133" b="1" dirty="0">
+              <a:solidFill>
+                <a:schemeClr val="lt1"/>
+              </a:solidFill>
+              <a:latin typeface="Plus Jakarta Sans"/>
+              <a:ea typeface="Plus Jakarta Sans"/>
+              <a:cs typeface="Plus Jakarta Sans"/>
+              <a:sym typeface="Plus Jakarta Sans"/>
+            </a:endParaRPr>
+          </a:p>
+        </p:txBody>
+      </p:sp>
+      <p:sp>
+        <p:nvSpPr>
+          <p:cNvPr id="7" name="Google Shape;117;p41"/>
+          <p:cNvSpPr txBox="1"/>
+          <p:nvPr/>
+        </p:nvSpPr>
+        <p:spPr>
+          <a:xfrm>
+            <a:off x="1948400" y="3003967"/>
+            <a:ext cx="8295200" cy="3200579"/>
+          </a:xfrm>
+          <a:prstGeom prst="rect">
+            <a:avLst/>
+          </a:prstGeom>
+          <a:noFill/>
+          <a:ln>
+            <a:noFill/>
+          </a:ln>
+        </p:spPr>
+        <p:txBody>
+          <a:bodyPr spcFirstLastPara="1" wrap="square" lIns="121900" tIns="121900" rIns="121900" bIns="121900" anchor="t" anchorCtr="0">
+            <a:spAutoFit/>
+          </a:bodyPr>
+          <a:lstStyle/>
+          <a:p>
+            <a:pPr algn="ctr">
               <a:lnSpc>
-                <a:spcPct val="70000"/>
+                <a:spcPct val="90000"/>
               </a:lnSpc>
-              <a:spcBef>
-                <a:spcPts val="0"/>
-              </a:spcBef>
-              <a:spcAft>
-                <a:spcPts val="0"/>
-              </a:spcAft>
-              <a:buNone/>
-            </a:pPr>
-            <a:r>
-              <a:rPr lang="es-AR" altLang="en-US" sz="6400" dirty="0" smtClean="0">
+              <a:buClr>
+                <a:schemeClr val="dk1"/>
+              </a:buClr>
+              <a:buSzPts val="1100"/>
+            </a:pPr>
+            <a:r>
+              <a:rPr lang="es-MX" sz="5333" b="1" dirty="0" smtClean="0">
                 <a:solidFill>
-                  <a:srgbClr val="F8F2E8"/>
+                  <a:schemeClr val="bg1"/>
                 </a:solidFill>
-                <a:latin typeface="Plus Jakarta Sans ExtraBold"/>
-                <a:ea typeface="Plus Jakarta Sans ExtraBold"/>
-                <a:cs typeface="Plus Jakarta Sans ExtraBold"/>
-                <a:sym typeface="Plus Jakarta Sans ExtraBold"/>
+                <a:latin typeface="Plus Jakarta Sans"/>
+                <a:ea typeface="Plus Jakarta Sans"/>
+                <a:cs typeface="Plus Jakarta Sans"/>
+                <a:sym typeface="Plus Jakarta Sans"/>
               </a:rPr>
-              <a:t>Bienvenidos a Data </a:t>
-            </a:r>
-            <a:r>
-              <a:rPr lang="es-AR" altLang="en-US" sz="6400" dirty="0" err="1" smtClean="0">
-                <a:solidFill>
-                  <a:srgbClr val="F8F2E8"/>
-                </a:solidFill>
-                <a:latin typeface="Plus Jakarta Sans ExtraBold"/>
-                <a:ea typeface="Plus Jakarta Sans ExtraBold"/>
-                <a:cs typeface="Plus Jakarta Sans ExtraBold"/>
-                <a:sym typeface="Plus Jakarta Sans ExtraBold"/>
-              </a:rPr>
-              <a:t>Science</a:t>
-            </a:r>
-            <a:endParaRPr lang="es-AR" altLang="en-US" sz="6400" dirty="0">
+              <a:t>Transformación digital en la industria 4.0</a:t>
+            </a:r>
+            <a:endParaRPr sz="5333" b="1" dirty="0">
               <a:solidFill>
-                <a:srgbClr val="F8F2E8"/>
+                <a:schemeClr val="bg1"/>
               </a:solidFill>
-              <a:latin typeface="Plus Jakarta Sans ExtraBold"/>
-              <a:ea typeface="Plus Jakarta Sans ExtraBold"/>
-              <a:cs typeface="Plus Jakarta Sans ExtraBold"/>
-              <a:sym typeface="Plus Jakarta Sans ExtraBold"/>
+              <a:latin typeface="Plus Jakarta Sans"/>
+              <a:ea typeface="Plus Jakarta Sans"/>
+              <a:cs typeface="Plus Jakarta Sans"/>
+              <a:sym typeface="Plus Jakarta Sans"/>
             </a:endParaRPr>
           </a:p>
+          <a:p>
+            <a:pPr algn="ctr">
+              <a:lnSpc>
+                <a:spcPct val="90000"/>
+              </a:lnSpc>
+              <a:buClr>
+                <a:schemeClr val="dk1"/>
+              </a:buClr>
+              <a:buSzPts val="1100"/>
+            </a:pPr>
+            <a:endParaRPr sz="5333" b="1" dirty="0">
+              <a:solidFill>
+                <a:srgbClr val="FF632B"/>
+              </a:solidFill>
+              <a:latin typeface="Plus Jakarta Sans"/>
+              <a:ea typeface="Plus Jakarta Sans"/>
+              <a:cs typeface="Plus Jakarta Sans"/>
+              <a:sym typeface="Plus Jakarta Sans"/>
+            </a:endParaRPr>
+          </a:p>
+          <a:p>
+            <a:pPr algn="ctr">
+              <a:lnSpc>
+                <a:spcPct val="90000"/>
+              </a:lnSpc>
+              <a:buClr>
+                <a:srgbClr val="000000"/>
+              </a:buClr>
+              <a:buSzPts val="4000"/>
+            </a:pPr>
+            <a:endParaRPr sz="5333" b="1" dirty="0">
+              <a:solidFill>
+                <a:srgbClr val="FF632B"/>
+              </a:solidFill>
+              <a:latin typeface="Plus Jakarta Sans"/>
+              <a:ea typeface="Plus Jakarta Sans"/>
+              <a:cs typeface="Plus Jakarta Sans"/>
+              <a:sym typeface="Plus Jakarta Sans"/>
+            </a:endParaRPr>
+          </a:p>
         </p:txBody>
       </p:sp>
     </p:spTree>
+    <p:extLst>
+      <p:ext uri="{BB962C8B-B14F-4D97-AF65-F5344CB8AC3E}">
+        <p14:creationId xmlns:p14="http://schemas.microsoft.com/office/powerpoint/2010/main" val="3935225804"/>
+      </p:ext>
+    </p:extLst>
   </p:cSld>
   <p:clrMapOvr>
     <a:masterClrMapping/>
@@ -6428,7 +6492,7 @@
   <p:cSld>
     <p:spTree>
       <p:nvGrpSpPr>
-        <p:cNvPr id="1" name=""/>
+        <p:cNvPr id="1" name="Shape 240"/>
         <p:cNvGrpSpPr/>
         <p:nvPr/>
       </p:nvGrpSpPr>
@@ -6475,7 +6539,7 @@
               <a:buNone/>
             </a:pPr>
             <a:r>
-              <a:rPr lang="es-AR" altLang="en-US" sz="6400">
+              <a:rPr lang="en-US" altLang="en-US" sz="6400">
                 <a:solidFill>
                   <a:srgbClr val="FF632B"/>
                 </a:solidFill>
@@ -6484,36 +6548,167 @@
                 <a:cs typeface="Plus Jakarta Sans ExtraBold"/>
                 <a:sym typeface="Plus Jakarta Sans ExtraBold"/>
               </a:rPr>
-              <a:t>Ejemplos Salud</a:t>
-            </a:r>
-          </a:p>
-        </p:txBody>
-      </p:sp>
-      <p:pic>
-        <p:nvPicPr>
-          <p:cNvPr id="4" name="Picture 3"/>
-          <p:cNvPicPr/>
+              <a:t>¿Qué es realmente Industria 4.0?</a:t>
+            </a:r>
+          </a:p>
+        </p:txBody>
+      </p:sp>
+      <p:sp>
+        <p:nvSpPr>
+          <p:cNvPr id="241" name="Google Shape;241;p38"/>
+          <p:cNvSpPr txBox="1"/>
           <p:nvPr/>
-        </p:nvPicPr>
-        <p:blipFill>
-          <a:blip r:embed="rId2"/>
-          <a:stretch>
-            <a:fillRect/>
-          </a:stretch>
-        </p:blipFill>
-        <p:spPr>
-          <a:xfrm>
-            <a:off x="353695" y="1906270"/>
-            <a:ext cx="5681980" cy="3545840"/>
+        </p:nvSpPr>
+        <p:spPr>
+          <a:xfrm>
+            <a:off x="985433" y="3308567"/>
+            <a:ext cx="10420800" cy="3026000"/>
           </a:xfrm>
           <a:prstGeom prst="rect">
             <a:avLst/>
           </a:prstGeom>
-        </p:spPr>
-      </p:pic>
+          <a:noFill/>
+          <a:ln>
+            <a:noFill/>
+          </a:ln>
+        </p:spPr>
+        <p:txBody>
+          <a:bodyPr spcFirstLastPara="1" wrap="square" lIns="121900" tIns="121900" rIns="121900" bIns="121900" anchor="t" anchorCtr="0">
+            <a:noAutofit/>
+          </a:bodyPr>
+          <a:lstStyle/>
+          <a:p>
+            <a:pPr marL="0" lvl="0" indent="0" algn="l" rtl="0">
+              <a:lnSpc>
+                <a:spcPct val="115000"/>
+              </a:lnSpc>
+              <a:spcBef>
+                <a:spcPts val="0"/>
+              </a:spcBef>
+              <a:spcAft>
+                <a:spcPts val="0"/>
+              </a:spcAft>
+              <a:buNone/>
+            </a:pPr>
+            <a:r>
+              <a:rPr lang="en-US" altLang="en-US" sz="1600" b="1">
+                <a:solidFill>
+                  <a:srgbClr val="171717"/>
+                </a:solidFill>
+                <a:latin typeface="Plus Jakarta Sans Light"/>
+                <a:ea typeface="Plus Jakarta Sans Light"/>
+                <a:cs typeface="Plus Jakarta Sans Light"/>
+                <a:sym typeface="Plus Jakarta Sans Light"/>
+              </a:rPr>
+              <a:t>Concepto Central:</a:t>
+            </a:r>
+          </a:p>
+          <a:p>
+            <a:pPr marL="0" lvl="0" indent="0" algn="l" rtl="0">
+              <a:lnSpc>
+                <a:spcPct val="115000"/>
+              </a:lnSpc>
+              <a:spcBef>
+                <a:spcPts val="0"/>
+              </a:spcBef>
+              <a:spcAft>
+                <a:spcPts val="0"/>
+              </a:spcAft>
+              <a:buNone/>
+            </a:pPr>
+            <a:r>
+              <a:rPr lang="en-US" altLang="en-US" sz="1600">
+                <a:solidFill>
+                  <a:srgbClr val="171717"/>
+                </a:solidFill>
+                <a:latin typeface="Plus Jakarta Sans Light"/>
+                <a:ea typeface="Plus Jakarta Sans Light"/>
+                <a:cs typeface="Plus Jakarta Sans Light"/>
+                <a:sym typeface="Plus Jakarta Sans Light"/>
+              </a:rPr>
+              <a:t>No es solo tecnología, es la integración de datos para crear valor.</a:t>
+            </a:r>
+          </a:p>
+          <a:p>
+            <a:pPr marL="0" lvl="0" indent="0" algn="l" rtl="0">
+              <a:lnSpc>
+                <a:spcPct val="115000"/>
+              </a:lnSpc>
+              <a:spcBef>
+                <a:spcPts val="0"/>
+              </a:spcBef>
+              <a:spcAft>
+                <a:spcPts val="0"/>
+              </a:spcAft>
+              <a:buNone/>
+            </a:pPr>
+            <a:endParaRPr lang="en-US" altLang="en-US" sz="1600">
+              <a:solidFill>
+                <a:srgbClr val="171717"/>
+              </a:solidFill>
+              <a:latin typeface="Plus Jakarta Sans Light"/>
+              <a:ea typeface="Plus Jakarta Sans Light"/>
+              <a:cs typeface="Plus Jakarta Sans Light"/>
+              <a:sym typeface="Plus Jakarta Sans Light"/>
+            </a:endParaRPr>
+          </a:p>
+          <a:p>
+            <a:pPr marL="0" lvl="0" indent="0" algn="l" rtl="0">
+              <a:lnSpc>
+                <a:spcPct val="115000"/>
+              </a:lnSpc>
+              <a:spcBef>
+                <a:spcPts val="0"/>
+              </a:spcBef>
+              <a:spcAft>
+                <a:spcPts val="0"/>
+              </a:spcAft>
+              <a:buNone/>
+            </a:pPr>
+            <a:r>
+              <a:rPr lang="en-US" altLang="en-US" sz="1600" b="1">
+                <a:solidFill>
+                  <a:srgbClr val="171717"/>
+                </a:solidFill>
+                <a:latin typeface="Plus Jakarta Sans Light"/>
+                <a:ea typeface="Plus Jakarta Sans Light"/>
+                <a:cs typeface="Plus Jakarta Sans Light"/>
+                <a:sym typeface="Plus Jakarta Sans Light"/>
+              </a:rPr>
+              <a:t>Definición: </a:t>
+            </a:r>
+          </a:p>
+          <a:p>
+            <a:pPr marL="0" lvl="0" indent="0" algn="l" rtl="0">
+              <a:lnSpc>
+                <a:spcPct val="115000"/>
+              </a:lnSpc>
+              <a:spcBef>
+                <a:spcPts val="0"/>
+              </a:spcBef>
+              <a:spcAft>
+                <a:spcPts val="0"/>
+              </a:spcAft>
+              <a:buNone/>
+            </a:pPr>
+            <a:r>
+              <a:rPr lang="en-US" altLang="en-US" sz="1600">
+                <a:solidFill>
+                  <a:srgbClr val="171717"/>
+                </a:solidFill>
+                <a:latin typeface="Plus Jakarta Sans Light"/>
+                <a:ea typeface="Plus Jakarta Sans Light"/>
+                <a:cs typeface="Plus Jakarta Sans Light"/>
+                <a:sym typeface="Plus Jakarta Sans Light"/>
+              </a:rPr>
+              <a:t>Sistemas donde el mundo físico y el digital convergen (Sistemas Ciberfísicos).</a:t>
+            </a:r>
+          </a:p>
+        </p:txBody>
+      </p:sp>
       <p:pic>
         <p:nvPicPr>
-          <p:cNvPr id="7" name="Picture 6"/>
+          <p:cNvPr id="2" name="Picture 1"/>
           <p:cNvPicPr/>
           <p:nvPr/>
         </p:nvPicPr>
@@ -6525,8 +6720,52 @@
         </p:blipFill>
         <p:spPr>
           <a:xfrm>
-            <a:off x="6475095" y="2010410"/>
-            <a:ext cx="5332730" cy="3336925"/>
+            <a:off x="9051925" y="4335780"/>
+            <a:ext cx="2354580" cy="1242060"/>
+          </a:xfrm>
+          <a:prstGeom prst="rect">
+            <a:avLst/>
+          </a:prstGeom>
+        </p:spPr>
+      </p:pic>
+      <p:pic>
+        <p:nvPicPr>
+          <p:cNvPr id="3" name="Picture 2"/>
+          <p:cNvPicPr/>
+          <p:nvPr/>
+        </p:nvPicPr>
+        <p:blipFill>
+          <a:blip r:embed="rId4"/>
+          <a:stretch>
+            <a:fillRect/>
+          </a:stretch>
+        </p:blipFill>
+        <p:spPr>
+          <a:xfrm>
+            <a:off x="4623435" y="5172710"/>
+            <a:ext cx="2095499" cy="1394460"/>
+          </a:xfrm>
+          <a:prstGeom prst="rect">
+            <a:avLst/>
+          </a:prstGeom>
+        </p:spPr>
+      </p:pic>
+      <p:pic>
+        <p:nvPicPr>
+          <p:cNvPr id="4" name="Picture 3"/>
+          <p:cNvPicPr/>
+          <p:nvPr/>
+        </p:nvPicPr>
+        <p:blipFill>
+          <a:blip r:embed="rId5"/>
+          <a:stretch>
+            <a:fillRect/>
+          </a:stretch>
+        </p:blipFill>
+        <p:spPr>
+          <a:xfrm>
+            <a:off x="8899525" y="1965960"/>
+            <a:ext cx="2658745" cy="2160270"/>
           </a:xfrm>
           <a:prstGeom prst="rect">
             <a:avLst/>
@@ -6558,6 +6797,242 @@
           <a:chExt cx="0" cy="0"/>
         </a:xfrm>
       </p:grpSpPr>
+      <p:pic>
+        <p:nvPicPr>
+          <p:cNvPr id="2" name="Picture 1"/>
+          <p:cNvPicPr/>
+          <p:nvPr/>
+        </p:nvPicPr>
+        <p:blipFill>
+          <a:blip r:embed="rId2"/>
+          <a:stretch>
+            <a:fillRect/>
+          </a:stretch>
+        </p:blipFill>
+        <p:spPr>
+          <a:xfrm>
+            <a:off x="378460" y="1927225"/>
+            <a:ext cx="4148455" cy="3003550"/>
+          </a:xfrm>
+          <a:prstGeom prst="rect">
+            <a:avLst/>
+          </a:prstGeom>
+        </p:spPr>
+      </p:pic>
+      <p:sp>
+        <p:nvSpPr>
+          <p:cNvPr id="242" name="Google Shape;242;p38"/>
+          <p:cNvSpPr txBox="1"/>
+          <p:nvPr/>
+        </p:nvSpPr>
+        <p:spPr>
+          <a:xfrm>
+            <a:off x="803200" y="614037"/>
+            <a:ext cx="8617200" cy="1120400"/>
+          </a:xfrm>
+          <a:prstGeom prst="rect">
+            <a:avLst/>
+          </a:prstGeom>
+          <a:noFill/>
+          <a:ln>
+            <a:noFill/>
+          </a:ln>
+        </p:spPr>
+        <p:txBody>
+          <a:bodyPr spcFirstLastPara="1" wrap="square" lIns="121900" tIns="121900" rIns="121900" bIns="121900" anchor="t" anchorCtr="0">
+            <a:noAutofit/>
+          </a:bodyPr>
+          <a:lstStyle/>
+          <a:p>
+            <a:pPr marL="0" lvl="0" indent="0" algn="l" rtl="0">
+              <a:spcBef>
+                <a:spcPts val="0"/>
+              </a:spcBef>
+              <a:spcAft>
+                <a:spcPts val="0"/>
+              </a:spcAft>
+              <a:buNone/>
+            </a:pPr>
+            <a:r>
+              <a:rPr lang="es-AR" altLang="en-US" sz="6400">
+                <a:solidFill>
+                  <a:srgbClr val="FF632B"/>
+                </a:solidFill>
+                <a:latin typeface="Plus Jakarta Sans ExtraBold"/>
+                <a:ea typeface="Plus Jakarta Sans ExtraBold"/>
+                <a:cs typeface="Plus Jakarta Sans ExtraBold"/>
+                <a:sym typeface="Plus Jakarta Sans ExtraBold"/>
+              </a:rPr>
+              <a:t>Ejemplos Peajes </a:t>
+            </a:r>
+          </a:p>
+        </p:txBody>
+      </p:sp>
+      <p:pic>
+        <p:nvPicPr>
+          <p:cNvPr id="3" name="Picture 2"/>
+          <p:cNvPicPr/>
+          <p:nvPr/>
+        </p:nvPicPr>
+        <p:blipFill>
+          <a:blip r:embed="rId3"/>
+          <a:stretch>
+            <a:fillRect/>
+          </a:stretch>
+        </p:blipFill>
+        <p:spPr>
+          <a:xfrm>
+            <a:off x="5893435" y="1864995"/>
+            <a:ext cx="4728845" cy="3065780"/>
+          </a:xfrm>
+          <a:prstGeom prst="rect">
+            <a:avLst/>
+          </a:prstGeom>
+        </p:spPr>
+      </p:pic>
+    </p:spTree>
+  </p:cSld>
+  <p:clrMapOvr>
+    <a:masterClrMapping/>
+  </p:clrMapOvr>
+</p:sld>
+</file>
+
+<file path=ppt/slides/slide12.xml><?xml version="1.0" encoding="utf-8"?>
+<p:sld xmlns:a="http://schemas.openxmlformats.org/drawingml/2006/main" xmlns:r="http://schemas.openxmlformats.org/officeDocument/2006/relationships" xmlns:p="http://schemas.openxmlformats.org/presentationml/2006/main">
+  <p:cSld>
+    <p:spTree>
+      <p:nvGrpSpPr>
+        <p:cNvPr id="1" name=""/>
+        <p:cNvGrpSpPr/>
+        <p:nvPr/>
+      </p:nvGrpSpPr>
+      <p:grpSpPr>
+        <a:xfrm>
+          <a:off x="0" y="0"/>
+          <a:ext cx="0" cy="0"/>
+          <a:chOff x="0" y="0"/>
+          <a:chExt cx="0" cy="0"/>
+        </a:xfrm>
+      </p:grpSpPr>
+      <p:sp>
+        <p:nvSpPr>
+          <p:cNvPr id="242" name="Google Shape;242;p38"/>
+          <p:cNvSpPr txBox="1"/>
+          <p:nvPr/>
+        </p:nvSpPr>
+        <p:spPr>
+          <a:xfrm>
+            <a:off x="803200" y="614037"/>
+            <a:ext cx="8617200" cy="1120400"/>
+          </a:xfrm>
+          <a:prstGeom prst="rect">
+            <a:avLst/>
+          </a:prstGeom>
+          <a:noFill/>
+          <a:ln>
+            <a:noFill/>
+          </a:ln>
+        </p:spPr>
+        <p:txBody>
+          <a:bodyPr spcFirstLastPara="1" wrap="square" lIns="121900" tIns="121900" rIns="121900" bIns="121900" anchor="t" anchorCtr="0">
+            <a:noAutofit/>
+          </a:bodyPr>
+          <a:lstStyle/>
+          <a:p>
+            <a:pPr marL="0" lvl="0" indent="0" algn="l" rtl="0">
+              <a:spcBef>
+                <a:spcPts val="0"/>
+              </a:spcBef>
+              <a:spcAft>
+                <a:spcPts val="0"/>
+              </a:spcAft>
+              <a:buNone/>
+            </a:pPr>
+            <a:r>
+              <a:rPr lang="es-AR" altLang="en-US" sz="6400">
+                <a:solidFill>
+                  <a:srgbClr val="FF632B"/>
+                </a:solidFill>
+                <a:latin typeface="Plus Jakarta Sans ExtraBold"/>
+                <a:ea typeface="Plus Jakarta Sans ExtraBold"/>
+                <a:cs typeface="Plus Jakarta Sans ExtraBold"/>
+                <a:sym typeface="Plus Jakarta Sans ExtraBold"/>
+              </a:rPr>
+              <a:t>Ejemplos Salud</a:t>
+            </a:r>
+          </a:p>
+        </p:txBody>
+      </p:sp>
+      <p:pic>
+        <p:nvPicPr>
+          <p:cNvPr id="4" name="Picture 3"/>
+          <p:cNvPicPr/>
+          <p:nvPr/>
+        </p:nvPicPr>
+        <p:blipFill>
+          <a:blip r:embed="rId2"/>
+          <a:stretch>
+            <a:fillRect/>
+          </a:stretch>
+        </p:blipFill>
+        <p:spPr>
+          <a:xfrm>
+            <a:off x="353695" y="1906270"/>
+            <a:ext cx="5681980" cy="3545840"/>
+          </a:xfrm>
+          <a:prstGeom prst="rect">
+            <a:avLst/>
+          </a:prstGeom>
+        </p:spPr>
+      </p:pic>
+      <p:pic>
+        <p:nvPicPr>
+          <p:cNvPr id="7" name="Picture 6"/>
+          <p:cNvPicPr/>
+          <p:nvPr/>
+        </p:nvPicPr>
+        <p:blipFill>
+          <a:blip r:embed="rId3"/>
+          <a:stretch>
+            <a:fillRect/>
+          </a:stretch>
+        </p:blipFill>
+        <p:spPr>
+          <a:xfrm>
+            <a:off x="6475095" y="2010410"/>
+            <a:ext cx="5332730" cy="3336925"/>
+          </a:xfrm>
+          <a:prstGeom prst="rect">
+            <a:avLst/>
+          </a:prstGeom>
+        </p:spPr>
+      </p:pic>
+    </p:spTree>
+  </p:cSld>
+  <p:clrMapOvr>
+    <a:masterClrMapping/>
+  </p:clrMapOvr>
+</p:sld>
+</file>
+
+<file path=ppt/slides/slide13.xml><?xml version="1.0" encoding="utf-8"?>
+<p:sld xmlns:a="http://schemas.openxmlformats.org/drawingml/2006/main" xmlns:r="http://schemas.openxmlformats.org/officeDocument/2006/relationships" xmlns:p="http://schemas.openxmlformats.org/presentationml/2006/main">
+  <p:cSld>
+    <p:spTree>
+      <p:nvGrpSpPr>
+        <p:cNvPr id="1" name=""/>
+        <p:cNvGrpSpPr/>
+        <p:nvPr/>
+      </p:nvGrpSpPr>
+      <p:grpSpPr>
+        <a:xfrm>
+          <a:off x="0" y="0"/>
+          <a:ext cx="0" cy="0"/>
+          <a:chOff x="0" y="0"/>
+          <a:chExt cx="0" cy="0"/>
+        </a:xfrm>
+      </p:grpSpPr>
       <p:sp>
         <p:nvSpPr>
           <p:cNvPr id="242" name="Google Shape;242;p38"/>
@@ -6667,7 +7142,7 @@
 </p:sld>
 </file>
 
-<file path=ppt/slides/slide12.xml><?xml version="1.0" encoding="utf-8"?>
+<file path=ppt/slides/slide14.xml><?xml version="1.0" encoding="utf-8"?>
 <p:sld xmlns:a="http://schemas.openxmlformats.org/drawingml/2006/main" xmlns:r="http://schemas.openxmlformats.org/officeDocument/2006/relationships" xmlns:p="http://schemas.openxmlformats.org/presentationml/2006/main">
   <p:cSld>
     <p:spTree>
@@ -7251,592 +7726,6 @@
           </a:prstGeom>
         </p:spPr>
       </p:pic>
-    </p:spTree>
-  </p:cSld>
-  <p:clrMapOvr>
-    <a:masterClrMapping/>
-  </p:clrMapOvr>
-</p:sld>
-</file>
-
-<file path=ppt/slides/slide13.xml><?xml version="1.0" encoding="utf-8"?>
-<p:sld xmlns:a="http://schemas.openxmlformats.org/drawingml/2006/main" xmlns:r="http://schemas.openxmlformats.org/officeDocument/2006/relationships" xmlns:p="http://schemas.openxmlformats.org/presentationml/2006/main">
-  <p:cSld>
-    <p:spTree>
-      <p:nvGrpSpPr>
-        <p:cNvPr id="1" name="Shape 240"/>
-        <p:cNvGrpSpPr/>
-        <p:nvPr/>
-      </p:nvGrpSpPr>
-      <p:grpSpPr>
-        <a:xfrm>
-          <a:off x="0" y="0"/>
-          <a:ext cx="0" cy="0"/>
-          <a:chOff x="0" y="0"/>
-          <a:chExt cx="0" cy="0"/>
-        </a:xfrm>
-      </p:grpSpPr>
-      <p:sp>
-        <p:nvSpPr>
-          <p:cNvPr id="242" name="Google Shape;242;p38"/>
-          <p:cNvSpPr txBox="1"/>
-          <p:nvPr/>
-        </p:nvSpPr>
-        <p:spPr>
-          <a:xfrm>
-            <a:off x="803200" y="614037"/>
-            <a:ext cx="8617200" cy="1120400"/>
-          </a:xfrm>
-          <a:prstGeom prst="rect">
-            <a:avLst/>
-          </a:prstGeom>
-          <a:noFill/>
-          <a:ln>
-            <a:noFill/>
-          </a:ln>
-        </p:spPr>
-        <p:txBody>
-          <a:bodyPr spcFirstLastPara="1" wrap="square" lIns="121900" tIns="121900" rIns="121900" bIns="121900" anchor="t" anchorCtr="0">
-            <a:noAutofit/>
-          </a:bodyPr>
-          <a:lstStyle/>
-          <a:p>
-            <a:pPr marL="0" lvl="0" indent="0" algn="l" rtl="0">
-              <a:spcBef>
-                <a:spcPts val="0"/>
-              </a:spcBef>
-              <a:spcAft>
-                <a:spcPts val="0"/>
-              </a:spcAft>
-              <a:buNone/>
-            </a:pPr>
-            <a:r>
-              <a:rPr lang="en-US" altLang="en-US" sz="4400">
-                <a:solidFill>
-                  <a:srgbClr val="FF632B"/>
-                </a:solidFill>
-                <a:latin typeface="Plus Jakarta Sans ExtraBold"/>
-                <a:ea typeface="Plus Jakarta Sans ExtraBold"/>
-                <a:cs typeface="Plus Jakarta Sans ExtraBold"/>
-                <a:sym typeface="Plus Jakarta Sans ExtraBold"/>
-              </a:rPr>
-              <a:t>Actividad 1: Discusión sobre Revoluciones Industriales</a:t>
-            </a:r>
-          </a:p>
-          <a:p>
-            <a:pPr marL="0" lvl="0" indent="0" algn="l" rtl="0">
-              <a:spcBef>
-                <a:spcPts val="0"/>
-              </a:spcBef>
-              <a:spcAft>
-                <a:spcPts val="0"/>
-              </a:spcAft>
-              <a:buNone/>
-            </a:pPr>
-            <a:endParaRPr lang="en-US" altLang="en-US" sz="4400">
-              <a:solidFill>
-                <a:srgbClr val="FF632B"/>
-              </a:solidFill>
-              <a:latin typeface="Plus Jakarta Sans ExtraBold"/>
-              <a:ea typeface="Plus Jakarta Sans ExtraBold"/>
-              <a:cs typeface="Plus Jakarta Sans ExtraBold"/>
-              <a:sym typeface="Plus Jakarta Sans ExtraBold"/>
-            </a:endParaRPr>
-          </a:p>
-        </p:txBody>
-      </p:sp>
-      <p:sp>
-        <p:nvSpPr>
-          <p:cNvPr id="241" name="Google Shape;241;p38"/>
-          <p:cNvSpPr txBox="1"/>
-          <p:nvPr/>
-        </p:nvSpPr>
-        <p:spPr>
-          <a:xfrm>
-            <a:off x="803188" y="2077937"/>
-            <a:ext cx="10420800" cy="3026000"/>
-          </a:xfrm>
-          <a:prstGeom prst="rect">
-            <a:avLst/>
-          </a:prstGeom>
-          <a:noFill/>
-          <a:ln>
-            <a:noFill/>
-          </a:ln>
-        </p:spPr>
-        <p:txBody>
-          <a:bodyPr spcFirstLastPara="1" wrap="square" lIns="121900" tIns="121900" rIns="121900" bIns="121900" anchor="t" anchorCtr="0">
-            <a:noAutofit/>
-          </a:bodyPr>
-          <a:lstStyle/>
-          <a:p>
-            <a:pPr marL="0" lvl="0" indent="0" algn="l" rtl="0">
-              <a:lnSpc>
-                <a:spcPct val="115000"/>
-              </a:lnSpc>
-              <a:spcBef>
-                <a:spcPts val="0"/>
-              </a:spcBef>
-              <a:spcAft>
-                <a:spcPts val="0"/>
-              </a:spcAft>
-              <a:buNone/>
-            </a:pPr>
-            <a:r>
-              <a:rPr lang="en-US" altLang="en-US" sz="1600">
-                <a:solidFill>
-                  <a:srgbClr val="171717"/>
-                </a:solidFill>
-                <a:latin typeface="Plus Jakarta Sans Light"/>
-                <a:ea typeface="Plus Jakarta Sans Light"/>
-                <a:cs typeface="Plus Jakarta Sans Light"/>
-                <a:sym typeface="Plus Jakarta Sans Light"/>
-              </a:rPr>
-              <a:t>Actividad 1: Discusión sobre Revoluciones Industriales</a:t>
-            </a:r>
-          </a:p>
-          <a:p>
-            <a:pPr marL="0" lvl="0" indent="0" algn="l" rtl="0">
-              <a:lnSpc>
-                <a:spcPct val="115000"/>
-              </a:lnSpc>
-              <a:spcBef>
-                <a:spcPts val="0"/>
-              </a:spcBef>
-              <a:spcAft>
-                <a:spcPts val="0"/>
-              </a:spcAft>
-              <a:buNone/>
-            </a:pPr>
-            <a:r>
-              <a:rPr lang="en-US" altLang="en-US" sz="1600">
-                <a:solidFill>
-                  <a:srgbClr val="171717"/>
-                </a:solidFill>
-                <a:latin typeface="Plus Jakarta Sans Light"/>
-                <a:ea typeface="Plus Jakarta Sans Light"/>
-                <a:cs typeface="Plus Jakarta Sans Light"/>
-                <a:sym typeface="Plus Jakarta Sans Light"/>
-              </a:rPr>
-              <a:t>Objetivo: Identificar el cambio de paradigma.</a:t>
-            </a:r>
-          </a:p>
-          <a:p>
-            <a:pPr marL="0" lvl="0" indent="0" algn="l" rtl="0">
-              <a:lnSpc>
-                <a:spcPct val="115000"/>
-              </a:lnSpc>
-              <a:spcBef>
-                <a:spcPts val="0"/>
-              </a:spcBef>
-              <a:spcAft>
-                <a:spcPts val="0"/>
-              </a:spcAft>
-              <a:buNone/>
-            </a:pPr>
-            <a:endParaRPr lang="en-US" altLang="en-US" sz="1600">
-              <a:solidFill>
-                <a:srgbClr val="171717"/>
-              </a:solidFill>
-              <a:latin typeface="Plus Jakarta Sans Light"/>
-              <a:ea typeface="Plus Jakarta Sans Light"/>
-              <a:cs typeface="Plus Jakarta Sans Light"/>
-              <a:sym typeface="Plus Jakarta Sans Light"/>
-            </a:endParaRPr>
-          </a:p>
-          <a:p>
-            <a:pPr marL="0" lvl="0" indent="0" algn="l" rtl="0">
-              <a:lnSpc>
-                <a:spcPct val="115000"/>
-              </a:lnSpc>
-              <a:spcBef>
-                <a:spcPts val="0"/>
-              </a:spcBef>
-              <a:spcAft>
-                <a:spcPts val="0"/>
-              </a:spcAft>
-              <a:buNone/>
-            </a:pPr>
-            <a:endParaRPr lang="en-US" altLang="en-US" sz="1600">
-              <a:solidFill>
-                <a:srgbClr val="171717"/>
-              </a:solidFill>
-              <a:latin typeface="Plus Jakarta Sans Light"/>
-              <a:ea typeface="Plus Jakarta Sans Light"/>
-              <a:cs typeface="Plus Jakarta Sans Light"/>
-              <a:sym typeface="Plus Jakarta Sans Light"/>
-            </a:endParaRPr>
-          </a:p>
-          <a:p>
-            <a:pPr marL="0" lvl="0" indent="0" algn="l" rtl="0">
-              <a:lnSpc>
-                <a:spcPct val="115000"/>
-              </a:lnSpc>
-              <a:spcBef>
-                <a:spcPts val="0"/>
-              </a:spcBef>
-              <a:spcAft>
-                <a:spcPts val="0"/>
-              </a:spcAft>
-              <a:buNone/>
-            </a:pPr>
-            <a:r>
-              <a:rPr lang="en-US" altLang="en-US" sz="1600">
-                <a:solidFill>
-                  <a:srgbClr val="171717"/>
-                </a:solidFill>
-                <a:latin typeface="Plus Jakarta Sans Light"/>
-                <a:ea typeface="Plus Jakarta Sans Light"/>
-                <a:cs typeface="Plus Jakarta Sans Light"/>
-                <a:sym typeface="Plus Jakarta Sans Light"/>
-              </a:rPr>
-              <a:t>1ra (Vapor): </a:t>
-            </a:r>
-          </a:p>
-          <a:p>
-            <a:pPr marL="0" lvl="0" indent="0" algn="l" rtl="0">
-              <a:lnSpc>
-                <a:spcPct val="115000"/>
-              </a:lnSpc>
-              <a:spcBef>
-                <a:spcPts val="0"/>
-              </a:spcBef>
-              <a:spcAft>
-                <a:spcPts val="0"/>
-              </a:spcAft>
-              <a:buNone/>
-            </a:pPr>
-            <a:endParaRPr lang="en-US" altLang="en-US" sz="1600">
-              <a:solidFill>
-                <a:srgbClr val="171717"/>
-              </a:solidFill>
-              <a:latin typeface="Plus Jakarta Sans Light"/>
-              <a:ea typeface="Plus Jakarta Sans Light"/>
-              <a:cs typeface="Plus Jakarta Sans Light"/>
-              <a:sym typeface="Plus Jakarta Sans Light"/>
-            </a:endParaRPr>
-          </a:p>
-          <a:p>
-            <a:pPr marL="0" lvl="0" indent="0" algn="l" rtl="0">
-              <a:lnSpc>
-                <a:spcPct val="115000"/>
-              </a:lnSpc>
-              <a:spcBef>
-                <a:spcPts val="0"/>
-              </a:spcBef>
-              <a:spcAft>
-                <a:spcPts val="0"/>
-              </a:spcAft>
-              <a:buNone/>
-            </a:pPr>
-            <a:r>
-              <a:rPr lang="en-US" altLang="en-US" sz="1600">
-                <a:solidFill>
-                  <a:srgbClr val="171717"/>
-                </a:solidFill>
-                <a:latin typeface="Plus Jakarta Sans Light"/>
-                <a:ea typeface="Plus Jakarta Sans Light"/>
-                <a:cs typeface="Plus Jakarta Sans Light"/>
-                <a:sym typeface="Plus Jakarta Sans Light"/>
-              </a:rPr>
-              <a:t>2da (Electricidad): </a:t>
-            </a:r>
-          </a:p>
-          <a:p>
-            <a:pPr marL="0" lvl="0" indent="0" algn="l" rtl="0">
-              <a:lnSpc>
-                <a:spcPct val="115000"/>
-              </a:lnSpc>
-              <a:spcBef>
-                <a:spcPts val="0"/>
-              </a:spcBef>
-              <a:spcAft>
-                <a:spcPts val="0"/>
-              </a:spcAft>
-              <a:buNone/>
-            </a:pPr>
-            <a:endParaRPr lang="en-US" altLang="en-US" sz="1600">
-              <a:solidFill>
-                <a:srgbClr val="171717"/>
-              </a:solidFill>
-              <a:latin typeface="Plus Jakarta Sans Light"/>
-              <a:ea typeface="Plus Jakarta Sans Light"/>
-              <a:cs typeface="Plus Jakarta Sans Light"/>
-              <a:sym typeface="Plus Jakarta Sans Light"/>
-            </a:endParaRPr>
-          </a:p>
-          <a:p>
-            <a:pPr marL="0" lvl="0" indent="0" algn="l" rtl="0">
-              <a:lnSpc>
-                <a:spcPct val="115000"/>
-              </a:lnSpc>
-              <a:spcBef>
-                <a:spcPts val="0"/>
-              </a:spcBef>
-              <a:spcAft>
-                <a:spcPts val="0"/>
-              </a:spcAft>
-              <a:buNone/>
-            </a:pPr>
-            <a:r>
-              <a:rPr lang="en-US" altLang="en-US" sz="1600">
-                <a:solidFill>
-                  <a:srgbClr val="171717"/>
-                </a:solidFill>
-                <a:latin typeface="Plus Jakarta Sans Light"/>
-                <a:ea typeface="Plus Jakarta Sans Light"/>
-                <a:cs typeface="Plus Jakarta Sans Light"/>
-                <a:sym typeface="Plus Jakarta Sans Light"/>
-              </a:rPr>
-              <a:t>3ra (Informática):</a:t>
-            </a:r>
-          </a:p>
-          <a:p>
-            <a:pPr marL="0" lvl="0" indent="0" algn="l" rtl="0">
-              <a:lnSpc>
-                <a:spcPct val="115000"/>
-              </a:lnSpc>
-              <a:spcBef>
-                <a:spcPts val="0"/>
-              </a:spcBef>
-              <a:spcAft>
-                <a:spcPts val="0"/>
-              </a:spcAft>
-              <a:buNone/>
-            </a:pPr>
-            <a:r>
-              <a:rPr lang="en-US" altLang="en-US" sz="1600">
-                <a:solidFill>
-                  <a:srgbClr val="171717"/>
-                </a:solidFill>
-                <a:latin typeface="Plus Jakarta Sans Light"/>
-                <a:ea typeface="Plus Jakarta Sans Light"/>
-                <a:cs typeface="Plus Jakarta Sans Light"/>
-                <a:sym typeface="Plus Jakarta Sans Light"/>
-              </a:rPr>
-              <a:t> </a:t>
-            </a:r>
-          </a:p>
-          <a:p>
-            <a:pPr marL="0" lvl="0" indent="0" algn="l" rtl="0">
-              <a:lnSpc>
-                <a:spcPct val="115000"/>
-              </a:lnSpc>
-              <a:spcBef>
-                <a:spcPts val="0"/>
-              </a:spcBef>
-              <a:spcAft>
-                <a:spcPts val="0"/>
-              </a:spcAft>
-              <a:buNone/>
-            </a:pPr>
-            <a:r>
-              <a:rPr lang="en-US" altLang="en-US" sz="1600">
-                <a:solidFill>
-                  <a:srgbClr val="171717"/>
-                </a:solidFill>
-                <a:latin typeface="Plus Jakarta Sans Light"/>
-                <a:ea typeface="Plus Jakarta Sans Light"/>
-                <a:cs typeface="Plus Jakarta Sans Light"/>
-                <a:sym typeface="Plus Jakarta Sans Light"/>
-              </a:rPr>
-              <a:t>4ta (Digital): </a:t>
-            </a:r>
-          </a:p>
-        </p:txBody>
-      </p:sp>
-    </p:spTree>
-  </p:cSld>
-  <p:clrMapOvr>
-    <a:masterClrMapping/>
-  </p:clrMapOvr>
-</p:sld>
-</file>
-
-<file path=ppt/slides/slide14.xml><?xml version="1.0" encoding="utf-8"?>
-<p:sld xmlns:a="http://schemas.openxmlformats.org/drawingml/2006/main" xmlns:r="http://schemas.openxmlformats.org/officeDocument/2006/relationships" xmlns:p="http://schemas.openxmlformats.org/presentationml/2006/main">
-  <p:cSld>
-    <p:spTree>
-      <p:nvGrpSpPr>
-        <p:cNvPr id="1" name="Shape 240"/>
-        <p:cNvGrpSpPr/>
-        <p:nvPr/>
-      </p:nvGrpSpPr>
-      <p:grpSpPr>
-        <a:xfrm>
-          <a:off x="0" y="0"/>
-          <a:ext cx="0" cy="0"/>
-          <a:chOff x="0" y="0"/>
-          <a:chExt cx="0" cy="0"/>
-        </a:xfrm>
-      </p:grpSpPr>
-      <p:sp>
-        <p:nvSpPr>
-          <p:cNvPr id="241" name="Google Shape;241;p38"/>
-          <p:cNvSpPr txBox="1"/>
-          <p:nvPr/>
-        </p:nvSpPr>
-        <p:spPr>
-          <a:xfrm>
-            <a:off x="985520" y="5430520"/>
-            <a:ext cx="10420985" cy="1455420"/>
-          </a:xfrm>
-          <a:prstGeom prst="rect">
-            <a:avLst/>
-          </a:prstGeom>
-          <a:noFill/>
-          <a:ln>
-            <a:noFill/>
-          </a:ln>
-        </p:spPr>
-        <p:txBody>
-          <a:bodyPr spcFirstLastPara="1" wrap="square" lIns="121900" tIns="121900" rIns="121900" bIns="121900" anchor="t" anchorCtr="0">
-            <a:noAutofit/>
-          </a:bodyPr>
-          <a:lstStyle/>
-          <a:p>
-            <a:pPr marL="0" lvl="0" indent="0" algn="l" rtl="0">
-              <a:lnSpc>
-                <a:spcPct val="115000"/>
-              </a:lnSpc>
-              <a:spcBef>
-                <a:spcPts val="0"/>
-              </a:spcBef>
-              <a:spcAft>
-                <a:spcPts val="0"/>
-              </a:spcAft>
-              <a:buNone/>
-            </a:pPr>
-            <a:r>
-              <a:rPr lang="en-US" altLang="en-US" sz="2000">
-                <a:solidFill>
-                  <a:srgbClr val="171717"/>
-                </a:solidFill>
-                <a:latin typeface="Plus Jakarta Sans Light"/>
-                <a:ea typeface="Plus Jakarta Sans Light"/>
-                <a:cs typeface="Plus Jakarta Sans Light"/>
-                <a:sym typeface="Plus Jakarta Sans Light"/>
-              </a:rPr>
-              <a:t>"Los datos son el nuevo petróleo, pero la analítica es el motor que los procesa"</a:t>
-            </a:r>
-          </a:p>
-        </p:txBody>
-      </p:sp>
-      <p:sp>
-        <p:nvSpPr>
-          <p:cNvPr id="242" name="Google Shape;242;p38"/>
-          <p:cNvSpPr txBox="1"/>
-          <p:nvPr/>
-        </p:nvSpPr>
-        <p:spPr>
-          <a:xfrm>
-            <a:off x="803200" y="879467"/>
-            <a:ext cx="8617200" cy="1120400"/>
-          </a:xfrm>
-          <a:prstGeom prst="rect">
-            <a:avLst/>
-          </a:prstGeom>
-          <a:noFill/>
-          <a:ln>
-            <a:noFill/>
-          </a:ln>
-        </p:spPr>
-        <p:txBody>
-          <a:bodyPr spcFirstLastPara="1" wrap="square" lIns="121900" tIns="121900" rIns="121900" bIns="121900" anchor="t" anchorCtr="0">
-            <a:noAutofit/>
-          </a:bodyPr>
-          <a:lstStyle/>
-          <a:p>
-            <a:pPr marL="0" lvl="0" indent="0" algn="l" rtl="0">
-              <a:spcBef>
-                <a:spcPts val="0"/>
-              </a:spcBef>
-              <a:spcAft>
-                <a:spcPts val="0"/>
-              </a:spcAft>
-              <a:buNone/>
-            </a:pPr>
-            <a:r>
-              <a:rPr lang="en-US" altLang="en-US" sz="4800">
-                <a:solidFill>
-                  <a:srgbClr val="FF632B"/>
-                </a:solidFill>
-                <a:latin typeface="Plus Jakarta Sans ExtraBold"/>
-                <a:ea typeface="Plus Jakarta Sans ExtraBold"/>
-                <a:cs typeface="Plus Jakarta Sans ExtraBold"/>
-                <a:sym typeface="Plus Jakarta Sans ExtraBold"/>
-              </a:rPr>
-              <a:t>El Corazón del Cambio: Datos e IoT</a:t>
-            </a:r>
-          </a:p>
-        </p:txBody>
-      </p:sp>
-      <p:pic>
-        <p:nvPicPr>
-          <p:cNvPr id="4" name="Picture 3"/>
-          <p:cNvPicPr/>
-          <p:nvPr/>
-        </p:nvPicPr>
-        <p:blipFill>
-          <a:blip r:embed="rId3"/>
-          <a:stretch>
-            <a:fillRect/>
-          </a:stretch>
-        </p:blipFill>
-        <p:spPr>
-          <a:xfrm>
-            <a:off x="2522855" y="2472055"/>
-            <a:ext cx="6427470" cy="2958465"/>
-          </a:xfrm>
-          <a:prstGeom prst="rect">
-            <a:avLst/>
-          </a:prstGeom>
-        </p:spPr>
-      </p:pic>
-      <p:sp>
-        <p:nvSpPr>
-          <p:cNvPr id="5" name="Rectangles 4"/>
-          <p:cNvSpPr/>
-          <p:nvPr/>
-        </p:nvSpPr>
-        <p:spPr>
-          <a:xfrm>
-            <a:off x="5336540" y="2534920"/>
-            <a:ext cx="1273175" cy="573405"/>
-          </a:xfrm>
-          <a:prstGeom prst="rect">
-            <a:avLst/>
-          </a:prstGeom>
-          <a:solidFill>
-            <a:schemeClr val="bg1"/>
-          </a:solidFill>
-          <a:ln>
-            <a:noFill/>
-          </a:ln>
-        </p:spPr>
-        <p:style>
-          <a:lnRef idx="2">
-            <a:schemeClr val="accent1"/>
-          </a:lnRef>
-          <a:fillRef idx="0">
-            <a:srgbClr val="FFFFFF"/>
-          </a:fillRef>
-          <a:effectRef idx="0">
-            <a:srgbClr val="FFFFFF"/>
-          </a:effectRef>
-          <a:fontRef idx="minor">
-            <a:schemeClr val="tx1"/>
-          </a:fontRef>
-        </p:style>
-        <p:txBody>
-          <a:bodyPr rtlCol="0" anchor="ctr"/>
-          <a:lstStyle/>
-          <a:p>
-            <a:pPr algn="ctr"/>
-            <a:endParaRPr lang="en-US"/>
-          </a:p>
-        </p:txBody>
-      </p:sp>
     </p:spTree>
   </p:cSld>
   <p:clrMapOvr>
@@ -7864,14 +7753,14 @@
       </p:grpSpPr>
       <p:sp>
         <p:nvSpPr>
-          <p:cNvPr id="241" name="Google Shape;241;p38"/>
+          <p:cNvPr id="242" name="Google Shape;242;p38"/>
           <p:cNvSpPr txBox="1"/>
           <p:nvPr/>
         </p:nvSpPr>
         <p:spPr>
           <a:xfrm>
-            <a:off x="985520" y="2775585"/>
-            <a:ext cx="10420985" cy="1455420"/>
+            <a:off x="803200" y="614037"/>
+            <a:ext cx="8617200" cy="1120400"/>
           </a:xfrm>
           <a:prstGeom prst="rect">
             <a:avLst/>
@@ -7888,6 +7777,75 @@
           <a:lstStyle/>
           <a:p>
             <a:pPr marL="0" lvl="0" indent="0" algn="l" rtl="0">
+              <a:spcBef>
+                <a:spcPts val="0"/>
+              </a:spcBef>
+              <a:spcAft>
+                <a:spcPts val="0"/>
+              </a:spcAft>
+              <a:buNone/>
+            </a:pPr>
+            <a:r>
+              <a:rPr lang="en-US" altLang="en-US" sz="4400">
+                <a:solidFill>
+                  <a:srgbClr val="FF632B"/>
+                </a:solidFill>
+                <a:latin typeface="Plus Jakarta Sans ExtraBold"/>
+                <a:ea typeface="Plus Jakarta Sans ExtraBold"/>
+                <a:cs typeface="Plus Jakarta Sans ExtraBold"/>
+                <a:sym typeface="Plus Jakarta Sans ExtraBold"/>
+              </a:rPr>
+              <a:t>Actividad 1: Discusión sobre Revoluciones Industriales</a:t>
+            </a:r>
+          </a:p>
+          <a:p>
+            <a:pPr marL="0" lvl="0" indent="0" algn="l" rtl="0">
+              <a:spcBef>
+                <a:spcPts val="0"/>
+              </a:spcBef>
+              <a:spcAft>
+                <a:spcPts val="0"/>
+              </a:spcAft>
+              <a:buNone/>
+            </a:pPr>
+            <a:endParaRPr lang="en-US" altLang="en-US" sz="4400">
+              <a:solidFill>
+                <a:srgbClr val="FF632B"/>
+              </a:solidFill>
+              <a:latin typeface="Plus Jakarta Sans ExtraBold"/>
+              <a:ea typeface="Plus Jakarta Sans ExtraBold"/>
+              <a:cs typeface="Plus Jakarta Sans ExtraBold"/>
+              <a:sym typeface="Plus Jakarta Sans ExtraBold"/>
+            </a:endParaRPr>
+          </a:p>
+        </p:txBody>
+      </p:sp>
+      <p:sp>
+        <p:nvSpPr>
+          <p:cNvPr id="241" name="Google Shape;241;p38"/>
+          <p:cNvSpPr txBox="1"/>
+          <p:nvPr/>
+        </p:nvSpPr>
+        <p:spPr>
+          <a:xfrm>
+            <a:off x="803188" y="2077937"/>
+            <a:ext cx="10420800" cy="3026000"/>
+          </a:xfrm>
+          <a:prstGeom prst="rect">
+            <a:avLst/>
+          </a:prstGeom>
+          <a:noFill/>
+          <a:ln>
+            <a:noFill/>
+          </a:ln>
+        </p:spPr>
+        <p:txBody>
+          <a:bodyPr spcFirstLastPara="1" wrap="square" lIns="121900" tIns="121900" rIns="121900" bIns="121900" anchor="t" anchorCtr="0">
+            <a:noAutofit/>
+          </a:bodyPr>
+          <a:lstStyle/>
+          <a:p>
+            <a:pPr marL="0" lvl="0" indent="0" algn="l" rtl="0">
               <a:lnSpc>
                 <a:spcPct val="115000"/>
               </a:lnSpc>
@@ -7900,7 +7858,7 @@
               <a:buNone/>
             </a:pPr>
             <a:r>
-              <a:rPr lang="en-US" altLang="en-US" sz="2400">
+              <a:rPr lang="en-US" altLang="en-US" sz="1600">
                 <a:solidFill>
                   <a:srgbClr val="171717"/>
                 </a:solidFill>
@@ -7909,138 +7867,259 @@
                 <a:cs typeface="Plus Jakarta Sans Light"/>
                 <a:sym typeface="Plus Jakarta Sans Light"/>
               </a:rPr>
-              <a:t>¿Cómo impactan estas tecnologías en tu entorno laboral actual?</a:t>
-            </a:r>
-          </a:p>
-        </p:txBody>
-      </p:sp>
-      <p:sp>
-        <p:nvSpPr>
-          <p:cNvPr id="242" name="Google Shape;242;p38"/>
-          <p:cNvSpPr txBox="1"/>
-          <p:nvPr/>
-        </p:nvSpPr>
-        <p:spPr>
-          <a:xfrm>
-            <a:off x="803200" y="879467"/>
-            <a:ext cx="8617200" cy="1120400"/>
-          </a:xfrm>
-          <a:prstGeom prst="rect">
-            <a:avLst/>
-          </a:prstGeom>
-          <a:noFill/>
-          <a:ln>
-            <a:noFill/>
-          </a:ln>
-        </p:spPr>
-        <p:txBody>
-          <a:bodyPr spcFirstLastPara="1" wrap="square" lIns="121900" tIns="121900" rIns="121900" bIns="121900" anchor="t" anchorCtr="0">
-            <a:noAutofit/>
-          </a:bodyPr>
-          <a:lstStyle/>
+              <a:t>Actividad 1: Discusión sobre Revoluciones Industriales</a:t>
+            </a:r>
+          </a:p>
           <a:p>
             <a:pPr marL="0" lvl="0" indent="0" algn="l" rtl="0">
-              <a:spcBef>
-                <a:spcPts val="0"/>
-              </a:spcBef>
-              <a:spcAft>
-                <a:spcPts val="0"/>
-              </a:spcAft>
-              <a:buNone/>
-            </a:pPr>
-            <a:r>
-              <a:rPr lang="en-US" altLang="en-US" sz="4800">
+              <a:lnSpc>
+                <a:spcPct val="115000"/>
+              </a:lnSpc>
+              <a:spcBef>
+                <a:spcPts val="0"/>
+              </a:spcBef>
+              <a:spcAft>
+                <a:spcPts val="0"/>
+              </a:spcAft>
+              <a:buNone/>
+            </a:pPr>
+            <a:r>
+              <a:rPr lang="en-US" altLang="en-US" sz="1600">
                 <a:solidFill>
-                  <a:srgbClr val="FF632B"/>
+                  <a:srgbClr val="171717"/>
                 </a:solidFill>
-                <a:latin typeface="Plus Jakarta Sans ExtraBold"/>
-                <a:ea typeface="Plus Jakarta Sans ExtraBold"/>
-                <a:cs typeface="Plus Jakarta Sans ExtraBold"/>
-                <a:sym typeface="Plus Jakarta Sans ExtraBold"/>
+                <a:latin typeface="Plus Jakarta Sans Light"/>
+                <a:ea typeface="Plus Jakarta Sans Light"/>
+                <a:cs typeface="Plus Jakarta Sans Light"/>
+                <a:sym typeface="Plus Jakarta Sans Light"/>
               </a:rPr>
-              <a:t>Pausa Activa y Reflexión</a:t>
-            </a:r>
-          </a:p>
-        </p:txBody>
-      </p:sp>
-      <p:pic>
-        <p:nvPicPr>
-          <p:cNvPr id="2" name="Picture 1"/>
-          <p:cNvPicPr>
-            <a:picLocks noChangeAspect="1"/>
-          </p:cNvPicPr>
-          <p:nvPr/>
-        </p:nvPicPr>
-        <p:blipFill>
-          <a:blip r:embed="rId3"/>
-          <a:stretch>
-            <a:fillRect/>
-          </a:stretch>
-        </p:blipFill>
-        <p:spPr>
-          <a:xfrm>
-            <a:off x="3925570" y="4655820"/>
-            <a:ext cx="824230" cy="824230"/>
-          </a:xfrm>
-          <a:prstGeom prst="rect">
-            <a:avLst/>
-          </a:prstGeom>
-        </p:spPr>
-      </p:pic>
-      <p:pic>
-        <p:nvPicPr>
-          <p:cNvPr id="3" name="Picture 2"/>
-          <p:cNvPicPr>
-            <a:picLocks noChangeAspect="1"/>
-          </p:cNvPicPr>
-          <p:nvPr/>
-        </p:nvPicPr>
-        <p:blipFill>
-          <a:blip r:embed="rId4"/>
-          <a:stretch>
-            <a:fillRect/>
-          </a:stretch>
-        </p:blipFill>
-        <p:spPr>
-          <a:xfrm>
-            <a:off x="6669405" y="4581525"/>
-            <a:ext cx="898525" cy="898525"/>
-          </a:xfrm>
-          <a:prstGeom prst="rect">
-            <a:avLst/>
-          </a:prstGeom>
-        </p:spPr>
-      </p:pic>
-      <p:cxnSp>
-        <p:nvCxnSpPr>
-          <p:cNvPr id="6" name="Straight Connector 5"/>
-          <p:cNvCxnSpPr/>
-          <p:nvPr/>
-        </p:nvCxnSpPr>
-        <p:spPr>
-          <a:xfrm>
-            <a:off x="5728970" y="4155440"/>
-            <a:ext cx="0" cy="1612900"/>
-          </a:xfrm>
-          <a:prstGeom prst="line">
-            <a:avLst/>
-          </a:prstGeom>
-        </p:spPr>
-        <p:style>
-          <a:lnRef idx="2">
-            <a:schemeClr val="accent1"/>
-          </a:lnRef>
-          <a:fillRef idx="0">
-            <a:srgbClr val="FFFFFF"/>
-          </a:fillRef>
-          <a:effectRef idx="0">
-            <a:srgbClr val="FFFFFF"/>
-          </a:effectRef>
-          <a:fontRef idx="minor">
-            <a:schemeClr val="tx1"/>
-          </a:fontRef>
-        </p:style>
-      </p:cxnSp>
+              <a:t>Objetivo: Identificar el cambio de paradigma.</a:t>
+            </a:r>
+          </a:p>
+          <a:p>
+            <a:pPr marL="0" lvl="0" indent="0" algn="l" rtl="0">
+              <a:lnSpc>
+                <a:spcPct val="115000"/>
+              </a:lnSpc>
+              <a:spcBef>
+                <a:spcPts val="0"/>
+              </a:spcBef>
+              <a:spcAft>
+                <a:spcPts val="0"/>
+              </a:spcAft>
+              <a:buNone/>
+            </a:pPr>
+            <a:endParaRPr lang="en-US" altLang="en-US" sz="1600">
+              <a:solidFill>
+                <a:srgbClr val="171717"/>
+              </a:solidFill>
+              <a:latin typeface="Plus Jakarta Sans Light"/>
+              <a:ea typeface="Plus Jakarta Sans Light"/>
+              <a:cs typeface="Plus Jakarta Sans Light"/>
+              <a:sym typeface="Plus Jakarta Sans Light"/>
+            </a:endParaRPr>
+          </a:p>
+          <a:p>
+            <a:pPr marL="0" lvl="0" indent="0" algn="l" rtl="0">
+              <a:lnSpc>
+                <a:spcPct val="115000"/>
+              </a:lnSpc>
+              <a:spcBef>
+                <a:spcPts val="0"/>
+              </a:spcBef>
+              <a:spcAft>
+                <a:spcPts val="0"/>
+              </a:spcAft>
+              <a:buNone/>
+            </a:pPr>
+            <a:endParaRPr lang="en-US" altLang="en-US" sz="1600">
+              <a:solidFill>
+                <a:srgbClr val="171717"/>
+              </a:solidFill>
+              <a:latin typeface="Plus Jakarta Sans Light"/>
+              <a:ea typeface="Plus Jakarta Sans Light"/>
+              <a:cs typeface="Plus Jakarta Sans Light"/>
+              <a:sym typeface="Plus Jakarta Sans Light"/>
+            </a:endParaRPr>
+          </a:p>
+          <a:p>
+            <a:pPr marL="0" lvl="0" indent="0" algn="l" rtl="0">
+              <a:lnSpc>
+                <a:spcPct val="115000"/>
+              </a:lnSpc>
+              <a:spcBef>
+                <a:spcPts val="0"/>
+              </a:spcBef>
+              <a:spcAft>
+                <a:spcPts val="0"/>
+              </a:spcAft>
+              <a:buNone/>
+            </a:pPr>
+            <a:r>
+              <a:rPr lang="en-US" altLang="en-US" sz="1600">
+                <a:solidFill>
+                  <a:srgbClr val="171717"/>
+                </a:solidFill>
+                <a:latin typeface="Plus Jakarta Sans Light"/>
+                <a:ea typeface="Plus Jakarta Sans Light"/>
+                <a:cs typeface="Plus Jakarta Sans Light"/>
+                <a:sym typeface="Plus Jakarta Sans Light"/>
+              </a:rPr>
+              <a:t>1ra (Vapor): </a:t>
+            </a:r>
+          </a:p>
+          <a:p>
+            <a:pPr marL="0" lvl="0" indent="0" algn="l" rtl="0">
+              <a:lnSpc>
+                <a:spcPct val="115000"/>
+              </a:lnSpc>
+              <a:spcBef>
+                <a:spcPts val="0"/>
+              </a:spcBef>
+              <a:spcAft>
+                <a:spcPts val="0"/>
+              </a:spcAft>
+              <a:buNone/>
+            </a:pPr>
+            <a:endParaRPr lang="en-US" altLang="en-US" sz="1600">
+              <a:solidFill>
+                <a:srgbClr val="171717"/>
+              </a:solidFill>
+              <a:latin typeface="Plus Jakarta Sans Light"/>
+              <a:ea typeface="Plus Jakarta Sans Light"/>
+              <a:cs typeface="Plus Jakarta Sans Light"/>
+              <a:sym typeface="Plus Jakarta Sans Light"/>
+            </a:endParaRPr>
+          </a:p>
+          <a:p>
+            <a:pPr marL="0" lvl="0" indent="0" algn="l" rtl="0">
+              <a:lnSpc>
+                <a:spcPct val="115000"/>
+              </a:lnSpc>
+              <a:spcBef>
+                <a:spcPts val="0"/>
+              </a:spcBef>
+              <a:spcAft>
+                <a:spcPts val="0"/>
+              </a:spcAft>
+              <a:buNone/>
+            </a:pPr>
+            <a:r>
+              <a:rPr lang="en-US" altLang="en-US" sz="1600">
+                <a:solidFill>
+                  <a:srgbClr val="171717"/>
+                </a:solidFill>
+                <a:latin typeface="Plus Jakarta Sans Light"/>
+                <a:ea typeface="Plus Jakarta Sans Light"/>
+                <a:cs typeface="Plus Jakarta Sans Light"/>
+                <a:sym typeface="Plus Jakarta Sans Light"/>
+              </a:rPr>
+              <a:t>2da (Electricidad): </a:t>
+            </a:r>
+          </a:p>
+          <a:p>
+            <a:pPr marL="0" lvl="0" indent="0" algn="l" rtl="0">
+              <a:lnSpc>
+                <a:spcPct val="115000"/>
+              </a:lnSpc>
+              <a:spcBef>
+                <a:spcPts val="0"/>
+              </a:spcBef>
+              <a:spcAft>
+                <a:spcPts val="0"/>
+              </a:spcAft>
+              <a:buNone/>
+            </a:pPr>
+            <a:endParaRPr lang="en-US" altLang="en-US" sz="1600">
+              <a:solidFill>
+                <a:srgbClr val="171717"/>
+              </a:solidFill>
+              <a:latin typeface="Plus Jakarta Sans Light"/>
+              <a:ea typeface="Plus Jakarta Sans Light"/>
+              <a:cs typeface="Plus Jakarta Sans Light"/>
+              <a:sym typeface="Plus Jakarta Sans Light"/>
+            </a:endParaRPr>
+          </a:p>
+          <a:p>
+            <a:pPr marL="0" lvl="0" indent="0" algn="l" rtl="0">
+              <a:lnSpc>
+                <a:spcPct val="115000"/>
+              </a:lnSpc>
+              <a:spcBef>
+                <a:spcPts val="0"/>
+              </a:spcBef>
+              <a:spcAft>
+                <a:spcPts val="0"/>
+              </a:spcAft>
+              <a:buNone/>
+            </a:pPr>
+            <a:r>
+              <a:rPr lang="en-US" altLang="en-US" sz="1600">
+                <a:solidFill>
+                  <a:srgbClr val="171717"/>
+                </a:solidFill>
+                <a:latin typeface="Plus Jakarta Sans Light"/>
+                <a:ea typeface="Plus Jakarta Sans Light"/>
+                <a:cs typeface="Plus Jakarta Sans Light"/>
+                <a:sym typeface="Plus Jakarta Sans Light"/>
+              </a:rPr>
+              <a:t>3ra (Informática):</a:t>
+            </a:r>
+          </a:p>
+          <a:p>
+            <a:pPr marL="0" lvl="0" indent="0" algn="l" rtl="0">
+              <a:lnSpc>
+                <a:spcPct val="115000"/>
+              </a:lnSpc>
+              <a:spcBef>
+                <a:spcPts val="0"/>
+              </a:spcBef>
+              <a:spcAft>
+                <a:spcPts val="0"/>
+              </a:spcAft>
+              <a:buNone/>
+            </a:pPr>
+            <a:r>
+              <a:rPr lang="en-US" altLang="en-US" sz="1600">
+                <a:solidFill>
+                  <a:srgbClr val="171717"/>
+                </a:solidFill>
+                <a:latin typeface="Plus Jakarta Sans Light"/>
+                <a:ea typeface="Plus Jakarta Sans Light"/>
+                <a:cs typeface="Plus Jakarta Sans Light"/>
+                <a:sym typeface="Plus Jakarta Sans Light"/>
+              </a:rPr>
+              <a:t> </a:t>
+            </a:r>
+          </a:p>
+          <a:p>
+            <a:pPr marL="0" lvl="0" indent="0" algn="l" rtl="0">
+              <a:lnSpc>
+                <a:spcPct val="115000"/>
+              </a:lnSpc>
+              <a:spcBef>
+                <a:spcPts val="0"/>
+              </a:spcBef>
+              <a:spcAft>
+                <a:spcPts val="0"/>
+              </a:spcAft>
+              <a:buNone/>
+            </a:pPr>
+            <a:r>
+              <a:rPr lang="en-US" altLang="en-US" sz="1600">
+                <a:solidFill>
+                  <a:srgbClr val="171717"/>
+                </a:solidFill>
+                <a:latin typeface="Plus Jakarta Sans Light"/>
+                <a:ea typeface="Plus Jakarta Sans Light"/>
+                <a:cs typeface="Plus Jakarta Sans Light"/>
+                <a:sym typeface="Plus Jakarta Sans Light"/>
+              </a:rPr>
+              <a:t>4ta (Digital): </a:t>
+            </a:r>
+          </a:p>
+        </p:txBody>
+      </p:sp>
     </p:spTree>
   </p:cSld>
   <p:clrMapOvr>
@@ -8074,7 +8153,7 @@
         </p:nvSpPr>
         <p:spPr>
           <a:xfrm>
-            <a:off x="985520" y="2775585"/>
+            <a:off x="985520" y="5430520"/>
             <a:ext cx="10420985" cy="1455420"/>
           </a:xfrm>
           <a:prstGeom prst="rect">
@@ -8104,7 +8183,7 @@
               <a:buNone/>
             </a:pPr>
             <a:r>
-              <a:rPr lang="en-US" altLang="en-US" sz="2400">
+              <a:rPr lang="en-US" altLang="en-US" sz="2000">
                 <a:solidFill>
                   <a:srgbClr val="171717"/>
                 </a:solidFill>
@@ -8113,154 +8192,7 @@
                 <a:cs typeface="Plus Jakarta Sans Light"/>
                 <a:sym typeface="Plus Jakarta Sans Light"/>
               </a:rPr>
-              <a:t>Título del Caso: Optimización mediante IoT y Mantenimiento Predictivo.</a:t>
-            </a:r>
-          </a:p>
-          <a:p>
-            <a:pPr marL="0" lvl="0" indent="0" algn="l" rtl="0">
-              <a:lnSpc>
-                <a:spcPct val="115000"/>
-              </a:lnSpc>
-              <a:spcBef>
-                <a:spcPts val="0"/>
-              </a:spcBef>
-              <a:spcAft>
-                <a:spcPts val="0"/>
-              </a:spcAft>
-              <a:buNone/>
-            </a:pPr>
-            <a:endParaRPr lang="en-US" altLang="en-US" sz="2400">
-              <a:solidFill>
-                <a:srgbClr val="171717"/>
-              </a:solidFill>
-              <a:latin typeface="Plus Jakarta Sans Light"/>
-              <a:ea typeface="Plus Jakarta Sans Light"/>
-              <a:cs typeface="Plus Jakarta Sans Light"/>
-              <a:sym typeface="Plus Jakarta Sans Light"/>
-            </a:endParaRPr>
-          </a:p>
-          <a:p>
-            <a:pPr marL="0" lvl="0" indent="0" algn="l" rtl="0">
-              <a:lnSpc>
-                <a:spcPct val="115000"/>
-              </a:lnSpc>
-              <a:spcBef>
-                <a:spcPts val="0"/>
-              </a:spcBef>
-              <a:spcAft>
-                <a:spcPts val="0"/>
-              </a:spcAft>
-              <a:buNone/>
-            </a:pPr>
-            <a:r>
-              <a:rPr lang="en-US" altLang="en-US" sz="2400">
-                <a:solidFill>
-                  <a:srgbClr val="171717"/>
-                </a:solidFill>
-                <a:latin typeface="Plus Jakarta Sans Light"/>
-                <a:ea typeface="Plus Jakarta Sans Light"/>
-                <a:cs typeface="Plus Jakarta Sans Light"/>
-                <a:sym typeface="Plus Jakarta Sans Light"/>
-              </a:rPr>
-              <a:t>Problema: Tiempos muertos en producción.</a:t>
-            </a:r>
-          </a:p>
-          <a:p>
-            <a:pPr marL="0" lvl="0" indent="0" algn="l" rtl="0">
-              <a:lnSpc>
-                <a:spcPct val="115000"/>
-              </a:lnSpc>
-              <a:spcBef>
-                <a:spcPts val="0"/>
-              </a:spcBef>
-              <a:spcAft>
-                <a:spcPts val="0"/>
-              </a:spcAft>
-              <a:buNone/>
-            </a:pPr>
-            <a:endParaRPr lang="en-US" altLang="en-US" sz="2400">
-              <a:solidFill>
-                <a:srgbClr val="171717"/>
-              </a:solidFill>
-              <a:latin typeface="Plus Jakarta Sans Light"/>
-              <a:ea typeface="Plus Jakarta Sans Light"/>
-              <a:cs typeface="Plus Jakarta Sans Light"/>
-              <a:sym typeface="Plus Jakarta Sans Light"/>
-            </a:endParaRPr>
-          </a:p>
-          <a:p>
-            <a:pPr marL="0" lvl="0" indent="0" algn="l" rtl="0">
-              <a:lnSpc>
-                <a:spcPct val="115000"/>
-              </a:lnSpc>
-              <a:spcBef>
-                <a:spcPts val="0"/>
-              </a:spcBef>
-              <a:spcAft>
-                <a:spcPts val="0"/>
-              </a:spcAft>
-              <a:buNone/>
-            </a:pPr>
-            <a:r>
-              <a:rPr lang="en-US" altLang="en-US" sz="2400">
-                <a:solidFill>
-                  <a:srgbClr val="171717"/>
-                </a:solidFill>
-                <a:latin typeface="Plus Jakarta Sans Light"/>
-                <a:ea typeface="Plus Jakarta Sans Light"/>
-                <a:cs typeface="Plus Jakarta Sans Light"/>
-                <a:sym typeface="Plus Jakarta Sans Light"/>
-              </a:rPr>
-              <a:t>Solución: Sensores en tiempo real y modelos de predicción.</a:t>
-            </a:r>
-          </a:p>
-          <a:p>
-            <a:pPr marL="0" lvl="0" indent="0" algn="l" rtl="0">
-              <a:lnSpc>
-                <a:spcPct val="115000"/>
-              </a:lnSpc>
-              <a:spcBef>
-                <a:spcPts val="0"/>
-              </a:spcBef>
-              <a:spcAft>
-                <a:spcPts val="0"/>
-              </a:spcAft>
-              <a:buNone/>
-            </a:pPr>
-            <a:endParaRPr lang="en-US" altLang="en-US" sz="2400">
-              <a:solidFill>
-                <a:srgbClr val="171717"/>
-              </a:solidFill>
-              <a:latin typeface="Plus Jakarta Sans Light"/>
-              <a:ea typeface="Plus Jakarta Sans Light"/>
-              <a:cs typeface="Plus Jakarta Sans Light"/>
-              <a:sym typeface="Plus Jakarta Sans Light"/>
-            </a:endParaRPr>
-          </a:p>
-          <a:p>
-            <a:pPr marL="0" lvl="0" indent="0" algn="l" rtl="0">
-              <a:lnSpc>
-                <a:spcPct val="115000"/>
-              </a:lnSpc>
-              <a:spcBef>
-                <a:spcPts val="0"/>
-              </a:spcBef>
-              <a:spcAft>
-                <a:spcPts val="0"/>
-              </a:spcAft>
-              <a:buNone/>
-            </a:pPr>
-            <a:r>
-              <a:rPr lang="en-US" altLang="en-US" sz="2400">
-                <a:solidFill>
-                  <a:srgbClr val="171717"/>
-                </a:solidFill>
-                <a:latin typeface="Plus Jakarta Sans Light"/>
-                <a:ea typeface="Plus Jakarta Sans Light"/>
-                <a:cs typeface="Plus Jakarta Sans Light"/>
-                <a:sym typeface="Plus Jakarta Sans Light"/>
-              </a:rPr>
-              <a:t>Resultado: Reducción de costos operativos y eficiencia energética.</a:t>
+              <a:t>"Los datos son el nuevo petróleo, pero la analítica es el motor que los procesa"</a:t>
             </a:r>
           </a:p>
         </p:txBody>
@@ -8309,8 +8241,74 @@
                 <a:cs typeface="Plus Jakarta Sans ExtraBold"/>
                 <a:sym typeface="Plus Jakarta Sans ExtraBold"/>
               </a:rPr>
-              <a:t>Análisis de Caso Real (Práctica)</a:t>
-            </a:r>
+              <a:t>El Corazón del Cambio: Datos e IoT</a:t>
+            </a:r>
+          </a:p>
+        </p:txBody>
+      </p:sp>
+      <p:pic>
+        <p:nvPicPr>
+          <p:cNvPr id="4" name="Picture 3"/>
+          <p:cNvPicPr/>
+          <p:nvPr/>
+        </p:nvPicPr>
+        <p:blipFill>
+          <a:blip r:embed="rId3"/>
+          <a:stretch>
+            <a:fillRect/>
+          </a:stretch>
+        </p:blipFill>
+        <p:spPr>
+          <a:xfrm>
+            <a:off x="2522855" y="2472055"/>
+            <a:ext cx="6427470" cy="2958465"/>
+          </a:xfrm>
+          <a:prstGeom prst="rect">
+            <a:avLst/>
+          </a:prstGeom>
+        </p:spPr>
+      </p:pic>
+      <p:sp>
+        <p:nvSpPr>
+          <p:cNvPr id="5" name="Rectangles 4"/>
+          <p:cNvSpPr/>
+          <p:nvPr/>
+        </p:nvSpPr>
+        <p:spPr>
+          <a:xfrm>
+            <a:off x="5336540" y="2534920"/>
+            <a:ext cx="1273175" cy="573405"/>
+          </a:xfrm>
+          <a:prstGeom prst="rect">
+            <a:avLst/>
+          </a:prstGeom>
+          <a:solidFill>
+            <a:schemeClr val="bg1"/>
+          </a:solidFill>
+          <a:ln>
+            <a:noFill/>
+          </a:ln>
+        </p:spPr>
+        <p:style>
+          <a:lnRef idx="2">
+            <a:schemeClr val="accent1"/>
+          </a:lnRef>
+          <a:fillRef idx="0">
+            <a:srgbClr val="FFFFFF"/>
+          </a:fillRef>
+          <a:effectRef idx="0">
+            <a:srgbClr val="FFFFFF"/>
+          </a:effectRef>
+          <a:fontRef idx="minor">
+            <a:schemeClr val="tx1"/>
+          </a:fontRef>
+        </p:style>
+        <p:txBody>
+          <a:bodyPr rtlCol="0" anchor="ctr"/>
+          <a:lstStyle/>
+          <a:p>
+            <a:pPr algn="ctr"/>
+            <a:endParaRPr lang="en-US"/>
           </a:p>
         </p:txBody>
       </p:sp>
@@ -8347,6 +8345,483 @@
         </p:nvSpPr>
         <p:spPr>
           <a:xfrm>
+            <a:off x="985520" y="2775585"/>
+            <a:ext cx="10420985" cy="1455420"/>
+          </a:xfrm>
+          <a:prstGeom prst="rect">
+            <a:avLst/>
+          </a:prstGeom>
+          <a:noFill/>
+          <a:ln>
+            <a:noFill/>
+          </a:ln>
+        </p:spPr>
+        <p:txBody>
+          <a:bodyPr spcFirstLastPara="1" wrap="square" lIns="121900" tIns="121900" rIns="121900" bIns="121900" anchor="t" anchorCtr="0">
+            <a:noAutofit/>
+          </a:bodyPr>
+          <a:lstStyle/>
+          <a:p>
+            <a:pPr marL="0" lvl="0" indent="0" algn="l" rtl="0">
+              <a:lnSpc>
+                <a:spcPct val="115000"/>
+              </a:lnSpc>
+              <a:spcBef>
+                <a:spcPts val="0"/>
+              </a:spcBef>
+              <a:spcAft>
+                <a:spcPts val="0"/>
+              </a:spcAft>
+              <a:buNone/>
+            </a:pPr>
+            <a:r>
+              <a:rPr lang="en-US" altLang="en-US" sz="2400">
+                <a:solidFill>
+                  <a:srgbClr val="171717"/>
+                </a:solidFill>
+                <a:latin typeface="Plus Jakarta Sans Light"/>
+                <a:ea typeface="Plus Jakarta Sans Light"/>
+                <a:cs typeface="Plus Jakarta Sans Light"/>
+                <a:sym typeface="Plus Jakarta Sans Light"/>
+              </a:rPr>
+              <a:t>¿Cómo impactan estas tecnologías en tu entorno laboral actual?</a:t>
+            </a:r>
+          </a:p>
+        </p:txBody>
+      </p:sp>
+      <p:sp>
+        <p:nvSpPr>
+          <p:cNvPr id="242" name="Google Shape;242;p38"/>
+          <p:cNvSpPr txBox="1"/>
+          <p:nvPr/>
+        </p:nvSpPr>
+        <p:spPr>
+          <a:xfrm>
+            <a:off x="803200" y="879467"/>
+            <a:ext cx="8617200" cy="1120400"/>
+          </a:xfrm>
+          <a:prstGeom prst="rect">
+            <a:avLst/>
+          </a:prstGeom>
+          <a:noFill/>
+          <a:ln>
+            <a:noFill/>
+          </a:ln>
+        </p:spPr>
+        <p:txBody>
+          <a:bodyPr spcFirstLastPara="1" wrap="square" lIns="121900" tIns="121900" rIns="121900" bIns="121900" anchor="t" anchorCtr="0">
+            <a:noAutofit/>
+          </a:bodyPr>
+          <a:lstStyle/>
+          <a:p>
+            <a:pPr marL="0" lvl="0" indent="0" algn="l" rtl="0">
+              <a:spcBef>
+                <a:spcPts val="0"/>
+              </a:spcBef>
+              <a:spcAft>
+                <a:spcPts val="0"/>
+              </a:spcAft>
+              <a:buNone/>
+            </a:pPr>
+            <a:r>
+              <a:rPr lang="en-US" altLang="en-US" sz="4800">
+                <a:solidFill>
+                  <a:srgbClr val="FF632B"/>
+                </a:solidFill>
+                <a:latin typeface="Plus Jakarta Sans ExtraBold"/>
+                <a:ea typeface="Plus Jakarta Sans ExtraBold"/>
+                <a:cs typeface="Plus Jakarta Sans ExtraBold"/>
+                <a:sym typeface="Plus Jakarta Sans ExtraBold"/>
+              </a:rPr>
+              <a:t>Pausa Activa y Reflexión</a:t>
+            </a:r>
+          </a:p>
+        </p:txBody>
+      </p:sp>
+      <p:pic>
+        <p:nvPicPr>
+          <p:cNvPr id="2" name="Picture 1"/>
+          <p:cNvPicPr>
+            <a:picLocks noChangeAspect="1"/>
+          </p:cNvPicPr>
+          <p:nvPr/>
+        </p:nvPicPr>
+        <p:blipFill>
+          <a:blip r:embed="rId3"/>
+          <a:stretch>
+            <a:fillRect/>
+          </a:stretch>
+        </p:blipFill>
+        <p:spPr>
+          <a:xfrm>
+            <a:off x="3925570" y="4655820"/>
+            <a:ext cx="824230" cy="824230"/>
+          </a:xfrm>
+          <a:prstGeom prst="rect">
+            <a:avLst/>
+          </a:prstGeom>
+        </p:spPr>
+      </p:pic>
+      <p:pic>
+        <p:nvPicPr>
+          <p:cNvPr id="3" name="Picture 2"/>
+          <p:cNvPicPr>
+            <a:picLocks noChangeAspect="1"/>
+          </p:cNvPicPr>
+          <p:nvPr/>
+        </p:nvPicPr>
+        <p:blipFill>
+          <a:blip r:embed="rId4"/>
+          <a:stretch>
+            <a:fillRect/>
+          </a:stretch>
+        </p:blipFill>
+        <p:spPr>
+          <a:xfrm>
+            <a:off x="6669405" y="4581525"/>
+            <a:ext cx="898525" cy="898525"/>
+          </a:xfrm>
+          <a:prstGeom prst="rect">
+            <a:avLst/>
+          </a:prstGeom>
+        </p:spPr>
+      </p:pic>
+      <p:cxnSp>
+        <p:nvCxnSpPr>
+          <p:cNvPr id="6" name="Straight Connector 5"/>
+          <p:cNvCxnSpPr/>
+          <p:nvPr/>
+        </p:nvCxnSpPr>
+        <p:spPr>
+          <a:xfrm>
+            <a:off x="5728970" y="4155440"/>
+            <a:ext cx="0" cy="1612900"/>
+          </a:xfrm>
+          <a:prstGeom prst="line">
+            <a:avLst/>
+          </a:prstGeom>
+        </p:spPr>
+        <p:style>
+          <a:lnRef idx="2">
+            <a:schemeClr val="accent1"/>
+          </a:lnRef>
+          <a:fillRef idx="0">
+            <a:srgbClr val="FFFFFF"/>
+          </a:fillRef>
+          <a:effectRef idx="0">
+            <a:srgbClr val="FFFFFF"/>
+          </a:effectRef>
+          <a:fontRef idx="minor">
+            <a:schemeClr val="tx1"/>
+          </a:fontRef>
+        </p:style>
+      </p:cxnSp>
+    </p:spTree>
+  </p:cSld>
+  <p:clrMapOvr>
+    <a:masterClrMapping/>
+  </p:clrMapOvr>
+</p:sld>
+</file>
+
+<file path=ppt/slides/slide18.xml><?xml version="1.0" encoding="utf-8"?>
+<p:sld xmlns:a="http://schemas.openxmlformats.org/drawingml/2006/main" xmlns:r="http://schemas.openxmlformats.org/officeDocument/2006/relationships" xmlns:p="http://schemas.openxmlformats.org/presentationml/2006/main">
+  <p:cSld>
+    <p:spTree>
+      <p:nvGrpSpPr>
+        <p:cNvPr id="1" name="Shape 240"/>
+        <p:cNvGrpSpPr/>
+        <p:nvPr/>
+      </p:nvGrpSpPr>
+      <p:grpSpPr>
+        <a:xfrm>
+          <a:off x="0" y="0"/>
+          <a:ext cx="0" cy="0"/>
+          <a:chOff x="0" y="0"/>
+          <a:chExt cx="0" cy="0"/>
+        </a:xfrm>
+      </p:grpSpPr>
+      <p:sp>
+        <p:nvSpPr>
+          <p:cNvPr id="241" name="Google Shape;241;p38"/>
+          <p:cNvSpPr txBox="1"/>
+          <p:nvPr/>
+        </p:nvSpPr>
+        <p:spPr>
+          <a:xfrm>
+            <a:off x="985520" y="2775585"/>
+            <a:ext cx="10420985" cy="1455420"/>
+          </a:xfrm>
+          <a:prstGeom prst="rect">
+            <a:avLst/>
+          </a:prstGeom>
+          <a:noFill/>
+          <a:ln>
+            <a:noFill/>
+          </a:ln>
+        </p:spPr>
+        <p:txBody>
+          <a:bodyPr spcFirstLastPara="1" wrap="square" lIns="121900" tIns="121900" rIns="121900" bIns="121900" anchor="t" anchorCtr="0">
+            <a:noAutofit/>
+          </a:bodyPr>
+          <a:lstStyle/>
+          <a:p>
+            <a:pPr marL="0" lvl="0" indent="0" algn="l" rtl="0">
+              <a:lnSpc>
+                <a:spcPct val="115000"/>
+              </a:lnSpc>
+              <a:spcBef>
+                <a:spcPts val="0"/>
+              </a:spcBef>
+              <a:spcAft>
+                <a:spcPts val="0"/>
+              </a:spcAft>
+              <a:buNone/>
+            </a:pPr>
+            <a:r>
+              <a:rPr lang="en-US" altLang="en-US" sz="2400">
+                <a:solidFill>
+                  <a:srgbClr val="171717"/>
+                </a:solidFill>
+                <a:latin typeface="Plus Jakarta Sans Light"/>
+                <a:ea typeface="Plus Jakarta Sans Light"/>
+                <a:cs typeface="Plus Jakarta Sans Light"/>
+                <a:sym typeface="Plus Jakarta Sans Light"/>
+              </a:rPr>
+              <a:t>Título del Caso: Optimización mediante IoT y Mantenimiento Predictivo.</a:t>
+            </a:r>
+          </a:p>
+          <a:p>
+            <a:pPr marL="0" lvl="0" indent="0" algn="l" rtl="0">
+              <a:lnSpc>
+                <a:spcPct val="115000"/>
+              </a:lnSpc>
+              <a:spcBef>
+                <a:spcPts val="0"/>
+              </a:spcBef>
+              <a:spcAft>
+                <a:spcPts val="0"/>
+              </a:spcAft>
+              <a:buNone/>
+            </a:pPr>
+            <a:endParaRPr lang="en-US" altLang="en-US" sz="2400">
+              <a:solidFill>
+                <a:srgbClr val="171717"/>
+              </a:solidFill>
+              <a:latin typeface="Plus Jakarta Sans Light"/>
+              <a:ea typeface="Plus Jakarta Sans Light"/>
+              <a:cs typeface="Plus Jakarta Sans Light"/>
+              <a:sym typeface="Plus Jakarta Sans Light"/>
+            </a:endParaRPr>
+          </a:p>
+          <a:p>
+            <a:pPr marL="0" lvl="0" indent="0" algn="l" rtl="0">
+              <a:lnSpc>
+                <a:spcPct val="115000"/>
+              </a:lnSpc>
+              <a:spcBef>
+                <a:spcPts val="0"/>
+              </a:spcBef>
+              <a:spcAft>
+                <a:spcPts val="0"/>
+              </a:spcAft>
+              <a:buNone/>
+            </a:pPr>
+            <a:r>
+              <a:rPr lang="en-US" altLang="en-US" sz="2400">
+                <a:solidFill>
+                  <a:srgbClr val="171717"/>
+                </a:solidFill>
+                <a:latin typeface="Plus Jakarta Sans Light"/>
+                <a:ea typeface="Plus Jakarta Sans Light"/>
+                <a:cs typeface="Plus Jakarta Sans Light"/>
+                <a:sym typeface="Plus Jakarta Sans Light"/>
+              </a:rPr>
+              <a:t>Problema: Tiempos muertos en producción.</a:t>
+            </a:r>
+          </a:p>
+          <a:p>
+            <a:pPr marL="0" lvl="0" indent="0" algn="l" rtl="0">
+              <a:lnSpc>
+                <a:spcPct val="115000"/>
+              </a:lnSpc>
+              <a:spcBef>
+                <a:spcPts val="0"/>
+              </a:spcBef>
+              <a:spcAft>
+                <a:spcPts val="0"/>
+              </a:spcAft>
+              <a:buNone/>
+            </a:pPr>
+            <a:endParaRPr lang="en-US" altLang="en-US" sz="2400">
+              <a:solidFill>
+                <a:srgbClr val="171717"/>
+              </a:solidFill>
+              <a:latin typeface="Plus Jakarta Sans Light"/>
+              <a:ea typeface="Plus Jakarta Sans Light"/>
+              <a:cs typeface="Plus Jakarta Sans Light"/>
+              <a:sym typeface="Plus Jakarta Sans Light"/>
+            </a:endParaRPr>
+          </a:p>
+          <a:p>
+            <a:pPr marL="0" lvl="0" indent="0" algn="l" rtl="0">
+              <a:lnSpc>
+                <a:spcPct val="115000"/>
+              </a:lnSpc>
+              <a:spcBef>
+                <a:spcPts val="0"/>
+              </a:spcBef>
+              <a:spcAft>
+                <a:spcPts val="0"/>
+              </a:spcAft>
+              <a:buNone/>
+            </a:pPr>
+            <a:r>
+              <a:rPr lang="en-US" altLang="en-US" sz="2400">
+                <a:solidFill>
+                  <a:srgbClr val="171717"/>
+                </a:solidFill>
+                <a:latin typeface="Plus Jakarta Sans Light"/>
+                <a:ea typeface="Plus Jakarta Sans Light"/>
+                <a:cs typeface="Plus Jakarta Sans Light"/>
+                <a:sym typeface="Plus Jakarta Sans Light"/>
+              </a:rPr>
+              <a:t>Solución: Sensores en tiempo real y modelos de predicción.</a:t>
+            </a:r>
+          </a:p>
+          <a:p>
+            <a:pPr marL="0" lvl="0" indent="0" algn="l" rtl="0">
+              <a:lnSpc>
+                <a:spcPct val="115000"/>
+              </a:lnSpc>
+              <a:spcBef>
+                <a:spcPts val="0"/>
+              </a:spcBef>
+              <a:spcAft>
+                <a:spcPts val="0"/>
+              </a:spcAft>
+              <a:buNone/>
+            </a:pPr>
+            <a:endParaRPr lang="en-US" altLang="en-US" sz="2400">
+              <a:solidFill>
+                <a:srgbClr val="171717"/>
+              </a:solidFill>
+              <a:latin typeface="Plus Jakarta Sans Light"/>
+              <a:ea typeface="Plus Jakarta Sans Light"/>
+              <a:cs typeface="Plus Jakarta Sans Light"/>
+              <a:sym typeface="Plus Jakarta Sans Light"/>
+            </a:endParaRPr>
+          </a:p>
+          <a:p>
+            <a:pPr marL="0" lvl="0" indent="0" algn="l" rtl="0">
+              <a:lnSpc>
+                <a:spcPct val="115000"/>
+              </a:lnSpc>
+              <a:spcBef>
+                <a:spcPts val="0"/>
+              </a:spcBef>
+              <a:spcAft>
+                <a:spcPts val="0"/>
+              </a:spcAft>
+              <a:buNone/>
+            </a:pPr>
+            <a:r>
+              <a:rPr lang="en-US" altLang="en-US" sz="2400">
+                <a:solidFill>
+                  <a:srgbClr val="171717"/>
+                </a:solidFill>
+                <a:latin typeface="Plus Jakarta Sans Light"/>
+                <a:ea typeface="Plus Jakarta Sans Light"/>
+                <a:cs typeface="Plus Jakarta Sans Light"/>
+                <a:sym typeface="Plus Jakarta Sans Light"/>
+              </a:rPr>
+              <a:t>Resultado: Reducción de costos operativos y eficiencia energética.</a:t>
+            </a:r>
+          </a:p>
+        </p:txBody>
+      </p:sp>
+      <p:sp>
+        <p:nvSpPr>
+          <p:cNvPr id="242" name="Google Shape;242;p38"/>
+          <p:cNvSpPr txBox="1"/>
+          <p:nvPr/>
+        </p:nvSpPr>
+        <p:spPr>
+          <a:xfrm>
+            <a:off x="803200" y="879467"/>
+            <a:ext cx="8617200" cy="1120400"/>
+          </a:xfrm>
+          <a:prstGeom prst="rect">
+            <a:avLst/>
+          </a:prstGeom>
+          <a:noFill/>
+          <a:ln>
+            <a:noFill/>
+          </a:ln>
+        </p:spPr>
+        <p:txBody>
+          <a:bodyPr spcFirstLastPara="1" wrap="square" lIns="121900" tIns="121900" rIns="121900" bIns="121900" anchor="t" anchorCtr="0">
+            <a:noAutofit/>
+          </a:bodyPr>
+          <a:lstStyle/>
+          <a:p>
+            <a:pPr marL="0" lvl="0" indent="0" algn="l" rtl="0">
+              <a:spcBef>
+                <a:spcPts val="0"/>
+              </a:spcBef>
+              <a:spcAft>
+                <a:spcPts val="0"/>
+              </a:spcAft>
+              <a:buNone/>
+            </a:pPr>
+            <a:r>
+              <a:rPr lang="en-US" altLang="en-US" sz="4800">
+                <a:solidFill>
+                  <a:srgbClr val="FF632B"/>
+                </a:solidFill>
+                <a:latin typeface="Plus Jakarta Sans ExtraBold"/>
+                <a:ea typeface="Plus Jakarta Sans ExtraBold"/>
+                <a:cs typeface="Plus Jakarta Sans ExtraBold"/>
+                <a:sym typeface="Plus Jakarta Sans ExtraBold"/>
+              </a:rPr>
+              <a:t>Análisis de Caso Real (Práctica)</a:t>
+            </a:r>
+          </a:p>
+        </p:txBody>
+      </p:sp>
+    </p:spTree>
+  </p:cSld>
+  <p:clrMapOvr>
+    <a:masterClrMapping/>
+  </p:clrMapOvr>
+</p:sld>
+</file>
+
+<file path=ppt/slides/slide19.xml><?xml version="1.0" encoding="utf-8"?>
+<p:sld xmlns:a="http://schemas.openxmlformats.org/drawingml/2006/main" xmlns:r="http://schemas.openxmlformats.org/officeDocument/2006/relationships" xmlns:p="http://schemas.openxmlformats.org/presentationml/2006/main">
+  <p:cSld>
+    <p:spTree>
+      <p:nvGrpSpPr>
+        <p:cNvPr id="1" name="Shape 240"/>
+        <p:cNvGrpSpPr/>
+        <p:nvPr/>
+      </p:nvGrpSpPr>
+      <p:grpSpPr>
+        <a:xfrm>
+          <a:off x="0" y="0"/>
+          <a:ext cx="0" cy="0"/>
+          <a:chOff x="0" y="0"/>
+          <a:chExt cx="0" cy="0"/>
+        </a:xfrm>
+      </p:grpSpPr>
+      <p:sp>
+        <p:nvSpPr>
+          <p:cNvPr id="241" name="Google Shape;241;p38"/>
+          <p:cNvSpPr txBox="1"/>
+          <p:nvPr/>
+        </p:nvSpPr>
+        <p:spPr>
+          <a:xfrm>
             <a:off x="985520" y="2160270"/>
             <a:ext cx="10420985" cy="1455420"/>
           </a:xfrm>
@@ -8607,7 +9082,174 @@
 </p:sld>
 </file>
 
-<file path=ppt/slides/slide18.xml><?xml version="1.0" encoding="utf-8"?>
+<file path=ppt/slides/slide2.xml><?xml version="1.0" encoding="utf-8"?>
+<p:sld xmlns:a="http://schemas.openxmlformats.org/drawingml/2006/main" xmlns:r="http://schemas.openxmlformats.org/officeDocument/2006/relationships" xmlns:p="http://schemas.openxmlformats.org/presentationml/2006/main">
+  <p:cSld>
+    <p:spTree>
+      <p:nvGrpSpPr>
+        <p:cNvPr id="1" name="Shape 471"/>
+        <p:cNvGrpSpPr/>
+        <p:nvPr/>
+      </p:nvGrpSpPr>
+      <p:grpSpPr>
+        <a:xfrm>
+          <a:off x="0" y="0"/>
+          <a:ext cx="0" cy="0"/>
+          <a:chOff x="0" y="0"/>
+          <a:chExt cx="0" cy="0"/>
+        </a:xfrm>
+      </p:grpSpPr>
+      <p:sp>
+        <p:nvSpPr>
+          <p:cNvPr id="472" name="Google Shape;472;p61"/>
+          <p:cNvSpPr txBox="1"/>
+          <p:nvPr/>
+        </p:nvSpPr>
+        <p:spPr>
+          <a:xfrm>
+            <a:off x="870033" y="1782033"/>
+            <a:ext cx="5164400" cy="2283600"/>
+          </a:xfrm>
+          <a:prstGeom prst="rect">
+            <a:avLst/>
+          </a:prstGeom>
+          <a:noFill/>
+          <a:ln>
+            <a:noFill/>
+          </a:ln>
+        </p:spPr>
+        <p:txBody>
+          <a:bodyPr spcFirstLastPara="1" wrap="square" lIns="121900" tIns="121900" rIns="121900" bIns="121900" anchor="t" anchorCtr="0">
+            <a:noAutofit/>
+          </a:bodyPr>
+          <a:lstStyle/>
+          <a:p>
+            <a:r>
+              <a:rPr lang="es" sz="6400">
+                <a:solidFill>
+                  <a:srgbClr val="260700"/>
+                </a:solidFill>
+                <a:latin typeface="Plus Jakarta Sans ExtraBold"/>
+                <a:ea typeface="Plus Jakarta Sans ExtraBold"/>
+                <a:cs typeface="Plus Jakarta Sans ExtraBold"/>
+                <a:sym typeface="Plus Jakarta Sans ExtraBold"/>
+              </a:rPr>
+              <a:t>¡Esta clase va a ser     grabada!	</a:t>
+            </a:r>
+            <a:endParaRPr sz="6400">
+              <a:solidFill>
+                <a:srgbClr val="260700"/>
+              </a:solidFill>
+              <a:latin typeface="Plus Jakarta Sans ExtraBold"/>
+              <a:ea typeface="Plus Jakarta Sans ExtraBold"/>
+              <a:cs typeface="Plus Jakarta Sans ExtraBold"/>
+              <a:sym typeface="Plus Jakarta Sans ExtraBold"/>
+            </a:endParaRPr>
+          </a:p>
+        </p:txBody>
+      </p:sp>
+      <p:sp>
+        <p:nvSpPr>
+          <p:cNvPr id="473" name="Google Shape;473;p61"/>
+          <p:cNvSpPr/>
+          <p:nvPr/>
+        </p:nvSpPr>
+        <p:spPr>
+          <a:xfrm>
+            <a:off x="5338500" y="1977667"/>
+            <a:ext cx="304400" cy="304400"/>
+          </a:xfrm>
+          <a:prstGeom prst="ellipse">
+            <a:avLst/>
+          </a:prstGeom>
+          <a:solidFill>
+            <a:srgbClr val="FDAB2E"/>
+          </a:solidFill>
+          <a:ln>
+            <a:noFill/>
+          </a:ln>
+        </p:spPr>
+        <p:txBody>
+          <a:bodyPr spcFirstLastPara="1" wrap="square" lIns="121900" tIns="121900" rIns="121900" bIns="121900" anchor="ctr" anchorCtr="0">
+            <a:noAutofit/>
+          </a:bodyPr>
+          <a:lstStyle/>
+          <a:p>
+            <a:pPr algn="ctr"/>
+            <a:endParaRPr sz="2400"/>
+          </a:p>
+        </p:txBody>
+      </p:sp>
+      <p:pic>
+        <p:nvPicPr>
+          <p:cNvPr id="4" name="Google Shape;93;p23" title="logo gradient 1.png"/>
+          <p:cNvPicPr preferRelativeResize="0"/>
+          <p:nvPr/>
+        </p:nvPicPr>
+        <p:blipFill>
+          <a:blip r:embed="rId3">
+            <a:alphaModFix/>
+          </a:blip>
+          <a:stretch>
+            <a:fillRect/>
+          </a:stretch>
+        </p:blipFill>
+        <p:spPr>
+          <a:xfrm>
+            <a:off x="5107738" y="6030867"/>
+            <a:ext cx="2063933" cy="603000"/>
+          </a:xfrm>
+          <a:prstGeom prst="rect">
+            <a:avLst/>
+          </a:prstGeom>
+          <a:noFill/>
+          <a:ln>
+            <a:noFill/>
+          </a:ln>
+        </p:spPr>
+      </p:pic>
+      <p:pic>
+        <p:nvPicPr>
+          <p:cNvPr id="7" name="Google Shape;179;p62"/>
+          <p:cNvPicPr preferRelativeResize="0"/>
+          <p:nvPr/>
+        </p:nvPicPr>
+        <p:blipFill>
+          <a:blip r:embed="rId4">
+            <a:alphaModFix/>
+          </a:blip>
+          <a:stretch>
+            <a:fillRect/>
+          </a:stretch>
+        </p:blipFill>
+        <p:spPr>
+          <a:xfrm>
+            <a:off x="6725781" y="1317567"/>
+            <a:ext cx="4234633" cy="4222800"/>
+          </a:xfrm>
+          <a:prstGeom prst="rect">
+            <a:avLst/>
+          </a:prstGeom>
+          <a:noFill/>
+          <a:ln>
+            <a:noFill/>
+          </a:ln>
+        </p:spPr>
+      </p:pic>
+    </p:spTree>
+    <p:extLst>
+      <p:ext uri="{BB962C8B-B14F-4D97-AF65-F5344CB8AC3E}">
+        <p14:creationId xmlns:p14="http://schemas.microsoft.com/office/powerpoint/2010/main" val="1450151781"/>
+      </p:ext>
+    </p:extLst>
+  </p:cSld>
+  <p:clrMapOvr>
+    <a:masterClrMapping/>
+  </p:clrMapOvr>
+</p:sld>
+</file>
+
+<file path=ppt/slides/slide20.xml><?xml version="1.0" encoding="utf-8"?>
 <p:sld xmlns:a="http://schemas.openxmlformats.org/drawingml/2006/main" xmlns:r="http://schemas.openxmlformats.org/officeDocument/2006/relationships" xmlns:p="http://schemas.openxmlformats.org/presentationml/2006/main">
   <p:cSld>
     <p:spTree>
@@ -9605,805 +10247,6 @@
 </p:sld>
 </file>
 
-<file path=ppt/slides/slide19.xml><?xml version="1.0" encoding="utf-8"?>
-<p:sld xmlns:a="http://schemas.openxmlformats.org/drawingml/2006/main" xmlns:r="http://schemas.openxmlformats.org/officeDocument/2006/relationships" xmlns:p="http://schemas.openxmlformats.org/presentationml/2006/main">
-  <p:cSld>
-    <p:spTree>
-      <p:nvGrpSpPr>
-        <p:cNvPr id="1" name="Shape 240"/>
-        <p:cNvGrpSpPr/>
-        <p:nvPr/>
-      </p:nvGrpSpPr>
-      <p:grpSpPr>
-        <a:xfrm>
-          <a:off x="0" y="0"/>
-          <a:ext cx="0" cy="0"/>
-          <a:chOff x="0" y="0"/>
-          <a:chExt cx="0" cy="0"/>
-        </a:xfrm>
-      </p:grpSpPr>
-      <p:sp>
-        <p:nvSpPr>
-          <p:cNvPr id="241" name="Google Shape;241;p38"/>
-          <p:cNvSpPr txBox="1"/>
-          <p:nvPr/>
-        </p:nvSpPr>
-        <p:spPr>
-          <a:xfrm>
-            <a:off x="985520" y="2171065"/>
-            <a:ext cx="10420985" cy="1455420"/>
-          </a:xfrm>
-          <a:prstGeom prst="rect">
-            <a:avLst/>
-          </a:prstGeom>
-          <a:noFill/>
-          <a:ln>
-            <a:noFill/>
-          </a:ln>
-        </p:spPr>
-        <p:txBody>
-          <a:bodyPr spcFirstLastPara="1" wrap="square" lIns="121900" tIns="121900" rIns="121900" bIns="121900" anchor="t" anchorCtr="0">
-            <a:noAutofit/>
-          </a:bodyPr>
-          <a:lstStyle/>
-          <a:p>
-            <a:pPr marL="0" lvl="0" indent="0" algn="l" rtl="0">
-              <a:lnSpc>
-                <a:spcPct val="115000"/>
-              </a:lnSpc>
-              <a:spcBef>
-                <a:spcPts val="0"/>
-              </a:spcBef>
-              <a:spcAft>
-                <a:spcPts val="0"/>
-              </a:spcAft>
-              <a:buNone/>
-            </a:pPr>
-            <a:r>
-              <a:rPr lang="en-US" altLang="en-US">
-                <a:solidFill>
-                  <a:srgbClr val="171717"/>
-                </a:solidFill>
-                <a:latin typeface="Plus Jakarta Sans Light"/>
-                <a:ea typeface="Plus Jakarta Sans Light"/>
-                <a:cs typeface="Plus Jakarta Sans Light"/>
-                <a:sym typeface="Plus Jakarta Sans Light"/>
-              </a:rPr>
-              <a:t>Proyecto: Control de calidad inteligente.</a:t>
-            </a:r>
-          </a:p>
-          <a:p>
-            <a:pPr marL="0" lvl="0" indent="0" algn="l" rtl="0">
-              <a:lnSpc>
-                <a:spcPct val="115000"/>
-              </a:lnSpc>
-              <a:spcBef>
-                <a:spcPts val="0"/>
-              </a:spcBef>
-              <a:spcAft>
-                <a:spcPts val="0"/>
-              </a:spcAft>
-              <a:buNone/>
-            </a:pPr>
-            <a:endParaRPr lang="en-US" altLang="en-US">
-              <a:solidFill>
-                <a:srgbClr val="171717"/>
-              </a:solidFill>
-              <a:latin typeface="Plus Jakarta Sans Light"/>
-              <a:ea typeface="Plus Jakarta Sans Light"/>
-              <a:cs typeface="Plus Jakarta Sans Light"/>
-              <a:sym typeface="Plus Jakarta Sans Light"/>
-            </a:endParaRPr>
-          </a:p>
-          <a:p>
-            <a:pPr marL="0" lvl="0" indent="0" algn="l" rtl="0">
-              <a:lnSpc>
-                <a:spcPct val="115000"/>
-              </a:lnSpc>
-              <a:spcBef>
-                <a:spcPts val="0"/>
-              </a:spcBef>
-              <a:spcAft>
-                <a:spcPts val="0"/>
-              </a:spcAft>
-              <a:buNone/>
-            </a:pPr>
-            <a:r>
-              <a:rPr lang="en-US" altLang="en-US">
-                <a:solidFill>
-                  <a:srgbClr val="171717"/>
-                </a:solidFill>
-                <a:latin typeface="Plus Jakarta Sans Light"/>
-                <a:ea typeface="Plus Jakarta Sans Light"/>
-                <a:cs typeface="Plus Jakarta Sans Light"/>
-                <a:sym typeface="Plus Jakarta Sans Light"/>
-              </a:rPr>
-              <a:t>Tecnología: Visión artificial + IA.</a:t>
-            </a:r>
-          </a:p>
-          <a:p>
-            <a:pPr marL="0" lvl="0" indent="0" algn="l" rtl="0">
-              <a:lnSpc>
-                <a:spcPct val="115000"/>
-              </a:lnSpc>
-              <a:spcBef>
-                <a:spcPts val="0"/>
-              </a:spcBef>
-              <a:spcAft>
-                <a:spcPts val="0"/>
-              </a:spcAft>
-              <a:buNone/>
-            </a:pPr>
-            <a:endParaRPr lang="en-US" altLang="en-US">
-              <a:solidFill>
-                <a:srgbClr val="171717"/>
-              </a:solidFill>
-              <a:latin typeface="Plus Jakarta Sans Light"/>
-              <a:ea typeface="Plus Jakarta Sans Light"/>
-              <a:cs typeface="Plus Jakarta Sans Light"/>
-              <a:sym typeface="Plus Jakarta Sans Light"/>
-            </a:endParaRPr>
-          </a:p>
-          <a:p>
-            <a:pPr marL="0" lvl="0" indent="0" algn="l" rtl="0">
-              <a:lnSpc>
-                <a:spcPct val="115000"/>
-              </a:lnSpc>
-              <a:spcBef>
-                <a:spcPts val="0"/>
-              </a:spcBef>
-              <a:spcAft>
-                <a:spcPts val="0"/>
-              </a:spcAft>
-              <a:buNone/>
-            </a:pPr>
-            <a:r>
-              <a:rPr lang="en-US" altLang="en-US">
-                <a:solidFill>
-                  <a:srgbClr val="171717"/>
-                </a:solidFill>
-                <a:latin typeface="Plus Jakarta Sans Light"/>
-                <a:ea typeface="Plus Jakarta Sans Light"/>
-                <a:cs typeface="Plus Jakarta Sans Light"/>
-                <a:sym typeface="Plus Jakarta Sans Light"/>
-              </a:rPr>
-              <a:t>Dato: </a:t>
-            </a:r>
-            <a:r>
-              <a:rPr lang="es-AR" altLang="en-US">
-                <a:solidFill>
-                  <a:srgbClr val="171717"/>
-                </a:solidFill>
-                <a:latin typeface="Plus Jakarta Sans Light"/>
-                <a:ea typeface="Plus Jakarta Sans Light"/>
-                <a:cs typeface="Plus Jakarta Sans Light"/>
-                <a:sym typeface="Plus Jakarta Sans Light"/>
-              </a:rPr>
-              <a:t>Precision basada en historicos aprendizaje</a:t>
-            </a:r>
-            <a:endParaRPr lang="en-US" altLang="en-US">
-              <a:solidFill>
-                <a:srgbClr val="171717"/>
-              </a:solidFill>
-              <a:latin typeface="Plus Jakarta Sans Light"/>
-              <a:ea typeface="Plus Jakarta Sans Light"/>
-              <a:cs typeface="Plus Jakarta Sans Light"/>
-              <a:sym typeface="Plus Jakarta Sans Light"/>
-            </a:endParaRPr>
-          </a:p>
-          <a:p>
-            <a:pPr marL="0" lvl="0" indent="0" algn="l" rtl="0">
-              <a:lnSpc>
-                <a:spcPct val="115000"/>
-              </a:lnSpc>
-              <a:spcBef>
-                <a:spcPts val="0"/>
-              </a:spcBef>
-              <a:spcAft>
-                <a:spcPts val="0"/>
-              </a:spcAft>
-              <a:buNone/>
-            </a:pPr>
-            <a:endParaRPr lang="en-US" altLang="en-US">
-              <a:solidFill>
-                <a:srgbClr val="171717"/>
-              </a:solidFill>
-              <a:latin typeface="Plus Jakarta Sans Light"/>
-              <a:ea typeface="Plus Jakarta Sans Light"/>
-              <a:cs typeface="Plus Jakarta Sans Light"/>
-              <a:sym typeface="Plus Jakarta Sans Light"/>
-            </a:endParaRPr>
-          </a:p>
-          <a:p>
-            <a:pPr marL="0" lvl="0" indent="0" algn="l" rtl="0">
-              <a:lnSpc>
-                <a:spcPct val="115000"/>
-              </a:lnSpc>
-              <a:spcBef>
-                <a:spcPts val="0"/>
-              </a:spcBef>
-              <a:spcAft>
-                <a:spcPts val="0"/>
-              </a:spcAft>
-              <a:buNone/>
-            </a:pPr>
-            <a:r>
-              <a:rPr lang="en-US" altLang="en-US">
-                <a:solidFill>
-                  <a:srgbClr val="171717"/>
-                </a:solidFill>
-                <a:latin typeface="Plus Jakarta Sans Light"/>
-                <a:ea typeface="Plus Jakarta Sans Light"/>
-                <a:cs typeface="Plus Jakarta Sans Light"/>
-                <a:sym typeface="Plus Jakarta Sans Light"/>
-              </a:rPr>
-              <a:t>Valor: Reducción de devoluciones en un 20%.</a:t>
-            </a:r>
-          </a:p>
-        </p:txBody>
-      </p:sp>
-      <p:sp>
-        <p:nvSpPr>
-          <p:cNvPr id="242" name="Google Shape;242;p38"/>
-          <p:cNvSpPr txBox="1"/>
-          <p:nvPr/>
-        </p:nvSpPr>
-        <p:spPr>
-          <a:xfrm>
-            <a:off x="538480" y="550545"/>
-            <a:ext cx="8881745" cy="1120140"/>
-          </a:xfrm>
-          <a:prstGeom prst="rect">
-            <a:avLst/>
-          </a:prstGeom>
-          <a:noFill/>
-          <a:ln>
-            <a:noFill/>
-          </a:ln>
-        </p:spPr>
-        <p:txBody>
-          <a:bodyPr spcFirstLastPara="1" wrap="square" lIns="121900" tIns="121900" rIns="121900" bIns="121900" anchor="t" anchorCtr="0">
-            <a:noAutofit/>
-          </a:bodyPr>
-          <a:lstStyle/>
-          <a:p>
-            <a:pPr marL="0" lvl="0" indent="0" algn="l" rtl="0">
-              <a:spcBef>
-                <a:spcPts val="0"/>
-              </a:spcBef>
-              <a:spcAft>
-                <a:spcPts val="0"/>
-              </a:spcAft>
-              <a:buNone/>
-            </a:pPr>
-            <a:r>
-              <a:rPr lang="en-US" altLang="en-US" sz="4800">
-                <a:solidFill>
-                  <a:srgbClr val="FF632B"/>
-                </a:solidFill>
-                <a:latin typeface="Plus Jakarta Sans ExtraBold"/>
-                <a:ea typeface="Plus Jakarta Sans ExtraBold"/>
-                <a:cs typeface="Plus Jakarta Sans ExtraBold"/>
-                <a:sym typeface="Plus Jakarta Sans ExtraBold"/>
-              </a:rPr>
-              <a:t>Ejemplo de Plan Data-Driven (Guía)</a:t>
-            </a:r>
-          </a:p>
-        </p:txBody>
-      </p:sp>
-    </p:spTree>
-  </p:cSld>
-  <p:clrMapOvr>
-    <a:masterClrMapping/>
-  </p:clrMapOvr>
-</p:sld>
-</file>
-
-<file path=ppt/slides/slide2.xml><?xml version="1.0" encoding="utf-8"?>
-<p:sld xmlns:a="http://schemas.openxmlformats.org/drawingml/2006/main" xmlns:r="http://schemas.openxmlformats.org/officeDocument/2006/relationships" xmlns:p="http://schemas.openxmlformats.org/presentationml/2006/main">
-  <p:cSld>
-    <p:spTree>
-      <p:nvGrpSpPr>
-        <p:cNvPr id="1" name="Shape 273"/>
-        <p:cNvGrpSpPr/>
-        <p:nvPr/>
-      </p:nvGrpSpPr>
-      <p:grpSpPr>
-        <a:xfrm>
-          <a:off x="0" y="0"/>
-          <a:ext cx="0" cy="0"/>
-          <a:chOff x="0" y="0"/>
-          <a:chExt cx="0" cy="0"/>
-        </a:xfrm>
-      </p:grpSpPr>
-      <p:sp>
-        <p:nvSpPr>
-          <p:cNvPr id="274" name="Google Shape;274;p43"/>
-          <p:cNvSpPr txBox="1"/>
-          <p:nvPr/>
-        </p:nvSpPr>
-        <p:spPr>
-          <a:xfrm>
-            <a:off x="1787400" y="875300"/>
-            <a:ext cx="8617200" cy="1120400"/>
-          </a:xfrm>
-          <a:prstGeom prst="rect">
-            <a:avLst/>
-          </a:prstGeom>
-          <a:noFill/>
-          <a:ln>
-            <a:noFill/>
-          </a:ln>
-        </p:spPr>
-        <p:txBody>
-          <a:bodyPr spcFirstLastPara="1" wrap="square" lIns="121900" tIns="121900" rIns="121900" bIns="121900" anchor="t" anchorCtr="0">
-            <a:noAutofit/>
-          </a:bodyPr>
-          <a:lstStyle/>
-          <a:p>
-            <a:pPr marL="0" lvl="0" indent="0" algn="ctr" rtl="0">
-              <a:spcBef>
-                <a:spcPts val="0"/>
-              </a:spcBef>
-              <a:spcAft>
-                <a:spcPts val="0"/>
-              </a:spcAft>
-              <a:buNone/>
-            </a:pPr>
-            <a:r>
-              <a:rPr lang="en-US" sz="3735" dirty="0" err="1">
-                <a:solidFill>
-                  <a:srgbClr val="260700"/>
-                </a:solidFill>
-                <a:latin typeface="Plus Jakarta Sans ExtraBold"/>
-                <a:ea typeface="Plus Jakarta Sans ExtraBold"/>
-                <a:cs typeface="Plus Jakarta Sans ExtraBold"/>
-                <a:sym typeface="Plus Jakarta Sans ExtraBold"/>
-              </a:rPr>
-              <a:t>Presentación</a:t>
-            </a:r>
-            <a:endParaRPr sz="3735" dirty="0">
-              <a:solidFill>
-                <a:srgbClr val="260700"/>
-              </a:solidFill>
-              <a:latin typeface="Plus Jakarta Sans ExtraBold"/>
-              <a:ea typeface="Plus Jakarta Sans ExtraBold"/>
-              <a:cs typeface="Plus Jakarta Sans ExtraBold"/>
-              <a:sym typeface="Plus Jakarta Sans ExtraBold"/>
-            </a:endParaRPr>
-          </a:p>
-          <a:p>
-            <a:pPr marL="0" lvl="0" indent="0" algn="ctr" rtl="0">
-              <a:spcBef>
-                <a:spcPts val="0"/>
-              </a:spcBef>
-              <a:spcAft>
-                <a:spcPts val="0"/>
-              </a:spcAft>
-              <a:buNone/>
-            </a:pPr>
-            <a:r>
-              <a:rPr lang="en-US" sz="3735" dirty="0">
-                <a:solidFill>
-                  <a:srgbClr val="260700"/>
-                </a:solidFill>
-                <a:latin typeface="Plus Jakarta Sans ExtraBold"/>
-                <a:ea typeface="Plus Jakarta Sans ExtraBold"/>
-                <a:cs typeface="Plus Jakarta Sans ExtraBold"/>
-                <a:sym typeface="Plus Jakarta Sans ExtraBold"/>
-              </a:rPr>
-              <a:t>del </a:t>
-            </a:r>
-            <a:r>
-              <a:rPr lang="en-US" sz="3735" dirty="0" err="1">
-                <a:solidFill>
-                  <a:srgbClr val="260700"/>
-                </a:solidFill>
-                <a:highlight>
-                  <a:srgbClr val="FDAB2E"/>
-                </a:highlight>
-                <a:latin typeface="Plus Jakarta Sans ExtraBold"/>
-                <a:ea typeface="Plus Jakarta Sans ExtraBold"/>
-                <a:cs typeface="Plus Jakarta Sans ExtraBold"/>
-                <a:sym typeface="Plus Jakarta Sans ExtraBold"/>
-              </a:rPr>
-              <a:t>equipo</a:t>
-            </a:r>
-            <a:r>
-              <a:rPr lang="en-US" sz="3735" dirty="0">
-                <a:solidFill>
-                  <a:srgbClr val="260700"/>
-                </a:solidFill>
-                <a:latin typeface="Plus Jakarta Sans ExtraBold"/>
-                <a:ea typeface="Plus Jakarta Sans ExtraBold"/>
-                <a:cs typeface="Plus Jakarta Sans ExtraBold"/>
-                <a:sym typeface="Plus Jakarta Sans ExtraBold"/>
-              </a:rPr>
-              <a:t>:</a:t>
-            </a:r>
-            <a:endParaRPr sz="3735" dirty="0">
-              <a:solidFill>
-                <a:srgbClr val="260700"/>
-              </a:solidFill>
-              <a:latin typeface="Plus Jakarta Sans"/>
-              <a:ea typeface="Plus Jakarta Sans"/>
-              <a:cs typeface="Plus Jakarta Sans"/>
-              <a:sym typeface="Plus Jakarta Sans"/>
-            </a:endParaRPr>
-          </a:p>
-        </p:txBody>
-      </p:sp>
-      <p:sp>
-        <p:nvSpPr>
-          <p:cNvPr id="277" name="Google Shape;277;p43"/>
-          <p:cNvSpPr/>
-          <p:nvPr/>
-        </p:nvSpPr>
-        <p:spPr>
-          <a:xfrm>
-            <a:off x="426720" y="3387449"/>
-            <a:ext cx="11338560" cy="984250"/>
-          </a:xfrm>
-          <a:prstGeom prst="round2SameRect">
-            <a:avLst>
-              <a:gd name="adj1" fmla="val 0"/>
-              <a:gd name="adj2" fmla="val 34038"/>
-            </a:avLst>
-          </a:prstGeom>
-          <a:solidFill>
-            <a:srgbClr val="FF632B"/>
-          </a:solidFill>
-          <a:ln>
-            <a:noFill/>
-          </a:ln>
-        </p:spPr>
-        <p:txBody>
-          <a:bodyPr spcFirstLastPara="1" wrap="square" lIns="121900" tIns="121900" rIns="121900" bIns="121900" anchor="ctr" anchorCtr="0">
-            <a:noAutofit/>
-          </a:bodyPr>
-          <a:lstStyle/>
-          <a:p>
-            <a:pPr marL="165100" lvl="0"/>
-            <a:r>
-              <a:rPr lang="en-US" sz="2800" b="1" dirty="0" err="1">
-                <a:solidFill>
-                  <a:srgbClr val="F8F2E8"/>
-                </a:solidFill>
-                <a:latin typeface="Plus Jakarta Sans"/>
-                <a:ea typeface="Plus Jakarta Sans"/>
-                <a:cs typeface="Plus Jakarta Sans"/>
-                <a:sym typeface="Plus Jakarta Sans"/>
-              </a:rPr>
-              <a:t>Profesor</a:t>
-            </a:r>
-            <a:r>
-              <a:rPr lang="en-US" sz="2800" b="1" dirty="0" smtClean="0">
-                <a:solidFill>
-                  <a:srgbClr val="F8F2E8"/>
-                </a:solidFill>
-                <a:latin typeface="Plus Jakarta Sans"/>
-                <a:ea typeface="Plus Jakarta Sans"/>
-                <a:cs typeface="Plus Jakarta Sans"/>
-                <a:sym typeface="Plus Jakarta Sans"/>
-              </a:rPr>
-              <a:t>: </a:t>
-            </a:r>
-            <a:r>
-              <a:rPr lang="es-AR" altLang="en-US" b="1" dirty="0">
-                <a:solidFill>
-                  <a:srgbClr val="F8F2E8"/>
-                </a:solidFill>
-                <a:latin typeface="Plus Jakarta Sans"/>
-                <a:ea typeface="Plus Jakarta Sans"/>
-                <a:cs typeface="Plus Jakarta Sans"/>
-                <a:sym typeface="Plus Jakarta Sans"/>
-              </a:rPr>
-              <a:t>Arturo </a:t>
-            </a:r>
-            <a:r>
-              <a:rPr lang="es-AR" altLang="en-US" b="1" dirty="0" err="1">
-                <a:solidFill>
-                  <a:srgbClr val="F8F2E8"/>
-                </a:solidFill>
-                <a:latin typeface="Plus Jakarta Sans"/>
-                <a:ea typeface="Plus Jakarta Sans"/>
-                <a:cs typeface="Plus Jakarta Sans"/>
-                <a:sym typeface="Plus Jakarta Sans"/>
-              </a:rPr>
-              <a:t>Grottoli</a:t>
-            </a:r>
-            <a:r>
-              <a:rPr lang="en-US" b="1" dirty="0">
-                <a:solidFill>
-                  <a:srgbClr val="F8F2E8"/>
-                </a:solidFill>
-                <a:latin typeface="Plus Jakarta Sans"/>
-                <a:ea typeface="Plus Jakarta Sans"/>
-                <a:cs typeface="Plus Jakarta Sans"/>
-                <a:sym typeface="Plus Jakarta Sans"/>
-              </a:rPr>
-              <a:t>  </a:t>
-            </a:r>
-            <a:endParaRPr lang="es-AR" altLang="en-US" b="1" dirty="0">
-              <a:solidFill>
-                <a:srgbClr val="F8F2E8"/>
-              </a:solidFill>
-              <a:latin typeface="Plus Jakarta Sans"/>
-              <a:ea typeface="Plus Jakarta Sans"/>
-              <a:cs typeface="Plus Jakarta Sans"/>
-              <a:sym typeface="Plus Jakarta Sans"/>
-            </a:endParaRPr>
-          </a:p>
-        </p:txBody>
-      </p:sp>
-      <p:sp>
-        <p:nvSpPr>
-          <p:cNvPr id="284" name="Google Shape;284;p43"/>
-          <p:cNvSpPr/>
-          <p:nvPr/>
-        </p:nvSpPr>
-        <p:spPr>
-          <a:xfrm>
-            <a:off x="8832733" y="1600700"/>
-            <a:ext cx="1489600" cy="565600"/>
-          </a:xfrm>
-          <a:prstGeom prst="wedgeRectCallout">
-            <a:avLst>
-              <a:gd name="adj1" fmla="val -33452"/>
-              <a:gd name="adj2" fmla="val 98680"/>
-            </a:avLst>
-          </a:prstGeom>
-          <a:solidFill>
-            <a:srgbClr val="FF632B"/>
-          </a:solidFill>
-          <a:ln>
-            <a:noFill/>
-          </a:ln>
-        </p:spPr>
-        <p:txBody>
-          <a:bodyPr spcFirstLastPara="1" wrap="square" lIns="121900" tIns="121900" rIns="121900" bIns="121900" anchor="ctr" anchorCtr="0">
-            <a:noAutofit/>
-          </a:bodyPr>
-          <a:lstStyle/>
-          <a:p>
-            <a:pPr marL="0" lvl="0" indent="0" algn="ctr" rtl="0">
-              <a:spcBef>
-                <a:spcPts val="0"/>
-              </a:spcBef>
-              <a:spcAft>
-                <a:spcPts val="0"/>
-              </a:spcAft>
-              <a:buNone/>
-            </a:pPr>
-            <a:r>
-              <a:rPr lang="en-US" sz="935">
-                <a:solidFill>
-                  <a:srgbClr val="F8F2E8"/>
-                </a:solidFill>
-                <a:latin typeface="Plus Jakarta Sans"/>
-                <a:ea typeface="Plus Jakarta Sans"/>
-                <a:cs typeface="Plus Jakarta Sans"/>
-                <a:sym typeface="Plus Jakarta Sans"/>
-              </a:rPr>
-              <a:t>COMISIÓN N° </a:t>
-            </a:r>
-            <a:r>
-              <a:rPr lang="es-AR" altLang="en-US" sz="935">
-                <a:solidFill>
-                  <a:srgbClr val="F8F2E8"/>
-                </a:solidFill>
-                <a:latin typeface="Plus Jakarta Sans"/>
-                <a:ea typeface="Plus Jakarta Sans"/>
-                <a:cs typeface="Plus Jakarta Sans"/>
-                <a:sym typeface="Plus Jakarta Sans"/>
-              </a:rPr>
-              <a:t>95315</a:t>
-            </a:r>
-          </a:p>
-        </p:txBody>
-      </p:sp>
-      <p:sp>
-        <p:nvSpPr>
-          <p:cNvPr id="2" name="Google Shape;277;p43"/>
-          <p:cNvSpPr/>
-          <p:nvPr/>
-        </p:nvSpPr>
-        <p:spPr>
-          <a:xfrm>
-            <a:off x="426720" y="4840605"/>
-            <a:ext cx="11338560" cy="984250"/>
-          </a:xfrm>
-          <a:prstGeom prst="round2SameRect">
-            <a:avLst>
-              <a:gd name="adj1" fmla="val 0"/>
-              <a:gd name="adj2" fmla="val 34038"/>
-            </a:avLst>
-          </a:prstGeom>
-          <a:solidFill>
-            <a:srgbClr val="FF632B"/>
-          </a:solidFill>
-          <a:ln>
-            <a:noFill/>
-          </a:ln>
-        </p:spPr>
-        <p:txBody>
-          <a:bodyPr spcFirstLastPara="1" wrap="square" lIns="121900" tIns="121900" rIns="121900" bIns="121900" anchor="ctr" anchorCtr="0">
-            <a:noAutofit/>
-          </a:bodyPr>
-          <a:lstStyle/>
-          <a:p>
-            <a:pPr marL="165100" lvl="0" indent="0" algn="l" rtl="0">
-              <a:spcBef>
-                <a:spcPts val="0"/>
-              </a:spcBef>
-              <a:spcAft>
-                <a:spcPts val="0"/>
-              </a:spcAft>
-              <a:buNone/>
-            </a:pPr>
-            <a:r>
-              <a:rPr lang="en-US" sz="2800" b="1" dirty="0" err="1">
-                <a:solidFill>
-                  <a:srgbClr val="F8F2E8"/>
-                </a:solidFill>
-                <a:latin typeface="Plus Jakarta Sans"/>
-                <a:ea typeface="Plus Jakarta Sans"/>
-                <a:cs typeface="Plus Jakarta Sans"/>
-                <a:sym typeface="Plus Jakarta Sans"/>
-              </a:rPr>
-              <a:t>Profesor</a:t>
-            </a:r>
-            <a:r>
-              <a:rPr lang="en-US" sz="2800" b="1" dirty="0">
-                <a:solidFill>
-                  <a:srgbClr val="F8F2E8"/>
-                </a:solidFill>
-                <a:latin typeface="Plus Jakarta Sans"/>
-                <a:ea typeface="Plus Jakarta Sans"/>
-                <a:cs typeface="Plus Jakarta Sans"/>
-                <a:sym typeface="Plus Jakarta Sans"/>
-              </a:rPr>
-              <a:t>:</a:t>
-            </a:r>
-            <a:r>
-              <a:rPr lang="es-AR" altLang="en-US" sz="2800" b="1" dirty="0">
-                <a:solidFill>
-                  <a:srgbClr val="F8F2E8"/>
-                </a:solidFill>
-                <a:latin typeface="Plus Jakarta Sans"/>
-                <a:ea typeface="Plus Jakarta Sans"/>
-                <a:cs typeface="Plus Jakarta Sans"/>
-                <a:sym typeface="Plus Jakarta Sans"/>
-              </a:rPr>
-              <a:t> </a:t>
-            </a:r>
-            <a:r>
-              <a:rPr lang="es-AR" altLang="en-US" b="1" dirty="0" smtClean="0">
-                <a:solidFill>
-                  <a:srgbClr val="F8F2E8"/>
-                </a:solidFill>
-                <a:latin typeface="Plus Jakarta Sans"/>
-                <a:ea typeface="Plus Jakarta Sans"/>
-                <a:cs typeface="Plus Jakarta Sans"/>
-                <a:sym typeface="Plus Jakarta Sans"/>
-              </a:rPr>
-              <a:t>Arturo</a:t>
-            </a:r>
-            <a:endParaRPr lang="es-AR" altLang="en-US" b="1" dirty="0">
-              <a:solidFill>
-                <a:srgbClr val="F8F2E8"/>
-              </a:solidFill>
-              <a:latin typeface="Plus Jakarta Sans"/>
-              <a:ea typeface="Plus Jakarta Sans"/>
-              <a:cs typeface="Plus Jakarta Sans"/>
-              <a:sym typeface="Plus Jakarta Sans"/>
-            </a:endParaRPr>
-          </a:p>
-        </p:txBody>
-      </p:sp>
-    </p:spTree>
-  </p:cSld>
-  <p:clrMapOvr>
-    <a:masterClrMapping/>
-  </p:clrMapOvr>
-</p:sld>
-</file>
-
-<file path=ppt/slides/slide20.xml><?xml version="1.0" encoding="utf-8"?>
-<p:sld xmlns:a="http://schemas.openxmlformats.org/drawingml/2006/main" xmlns:r="http://schemas.openxmlformats.org/officeDocument/2006/relationships" xmlns:p="http://schemas.openxmlformats.org/presentationml/2006/main">
-  <p:cSld>
-    <p:spTree>
-      <p:nvGrpSpPr>
-        <p:cNvPr id="1" name=""/>
-        <p:cNvGrpSpPr/>
-        <p:nvPr/>
-      </p:nvGrpSpPr>
-      <p:grpSpPr>
-        <a:xfrm>
-          <a:off x="0" y="0"/>
-          <a:ext cx="0" cy="0"/>
-          <a:chOff x="0" y="0"/>
-          <a:chExt cx="0" cy="0"/>
-        </a:xfrm>
-      </p:grpSpPr>
-      <p:sp>
-        <p:nvSpPr>
-          <p:cNvPr id="2" name="Text Box 1"/>
-          <p:cNvSpPr txBox="1"/>
-          <p:nvPr/>
-        </p:nvSpPr>
-        <p:spPr>
-          <a:xfrm>
-            <a:off x="1350645" y="883920"/>
-            <a:ext cx="6096000" cy="829945"/>
-          </a:xfrm>
-          <a:prstGeom prst="rect">
-            <a:avLst/>
-          </a:prstGeom>
-          <a:noFill/>
-        </p:spPr>
-        <p:txBody>
-          <a:bodyPr wrap="square" rtlCol="0" anchor="t">
-            <a:spAutoFit/>
-          </a:bodyPr>
-          <a:lstStyle/>
-          <a:p>
-            <a:pPr marL="0" lvl="0" indent="0" algn="l" rtl="0">
-              <a:spcBef>
-                <a:spcPts val="0"/>
-              </a:spcBef>
-              <a:spcAft>
-                <a:spcPts val="0"/>
-              </a:spcAft>
-              <a:buNone/>
-            </a:pPr>
-            <a:r>
-              <a:rPr lang="es-AR" sz="4800">
-                <a:solidFill>
-                  <a:srgbClr val="FF632B"/>
-                </a:solidFill>
-                <a:latin typeface="Plus Jakarta Sans ExtraBold"/>
-                <a:ea typeface="Plus Jakarta Sans ExtraBold"/>
-                <a:cs typeface="Plus Jakarta Sans ExtraBold"/>
-                <a:sym typeface="Plus Jakarta Sans ExtraBold"/>
-              </a:rPr>
-              <a:t>Fallo sensor</a:t>
-            </a:r>
-          </a:p>
-        </p:txBody>
-      </p:sp>
-      <p:pic>
-        <p:nvPicPr>
-          <p:cNvPr id="4" name="Picture 3"/>
-          <p:cNvPicPr>
-            <a:picLocks noChangeAspect="1"/>
-          </p:cNvPicPr>
-          <p:nvPr/>
-        </p:nvPicPr>
-        <p:blipFill>
-          <a:blip r:embed="rId2"/>
-          <a:stretch>
-            <a:fillRect/>
-          </a:stretch>
-        </p:blipFill>
-        <p:spPr>
-          <a:xfrm>
-            <a:off x="2397760" y="2375535"/>
-            <a:ext cx="8181975" cy="3952875"/>
-          </a:xfrm>
-          <a:prstGeom prst="rect">
-            <a:avLst/>
-          </a:prstGeom>
-        </p:spPr>
-      </p:pic>
-    </p:spTree>
-  </p:cSld>
-  <p:clrMapOvr>
-    <a:masterClrMapping/>
-  </p:clrMapOvr>
-</p:sld>
-</file>
-
 <file path=ppt/slides/slide21.xml><?xml version="1.0" encoding="utf-8"?>
 <p:sld xmlns:a="http://schemas.openxmlformats.org/drawingml/2006/main" xmlns:r="http://schemas.openxmlformats.org/officeDocument/2006/relationships" xmlns:p="http://schemas.openxmlformats.org/presentationml/2006/main">
   <p:cSld>
@@ -10458,6 +10301,395 @@
               </a:spcAft>
               <a:buNone/>
             </a:pPr>
+            <a:r>
+              <a:rPr lang="en-US" altLang="en-US">
+                <a:solidFill>
+                  <a:srgbClr val="171717"/>
+                </a:solidFill>
+                <a:latin typeface="Plus Jakarta Sans Light"/>
+                <a:ea typeface="Plus Jakarta Sans Light"/>
+                <a:cs typeface="Plus Jakarta Sans Light"/>
+                <a:sym typeface="Plus Jakarta Sans Light"/>
+              </a:rPr>
+              <a:t>Proyecto: Control de calidad inteligente.</a:t>
+            </a:r>
+          </a:p>
+          <a:p>
+            <a:pPr marL="0" lvl="0" indent="0" algn="l" rtl="0">
+              <a:lnSpc>
+                <a:spcPct val="115000"/>
+              </a:lnSpc>
+              <a:spcBef>
+                <a:spcPts val="0"/>
+              </a:spcBef>
+              <a:spcAft>
+                <a:spcPts val="0"/>
+              </a:spcAft>
+              <a:buNone/>
+            </a:pPr>
+            <a:endParaRPr lang="en-US" altLang="en-US">
+              <a:solidFill>
+                <a:srgbClr val="171717"/>
+              </a:solidFill>
+              <a:latin typeface="Plus Jakarta Sans Light"/>
+              <a:ea typeface="Plus Jakarta Sans Light"/>
+              <a:cs typeface="Plus Jakarta Sans Light"/>
+              <a:sym typeface="Plus Jakarta Sans Light"/>
+            </a:endParaRPr>
+          </a:p>
+          <a:p>
+            <a:pPr marL="0" lvl="0" indent="0" algn="l" rtl="0">
+              <a:lnSpc>
+                <a:spcPct val="115000"/>
+              </a:lnSpc>
+              <a:spcBef>
+                <a:spcPts val="0"/>
+              </a:spcBef>
+              <a:spcAft>
+                <a:spcPts val="0"/>
+              </a:spcAft>
+              <a:buNone/>
+            </a:pPr>
+            <a:r>
+              <a:rPr lang="en-US" altLang="en-US">
+                <a:solidFill>
+                  <a:srgbClr val="171717"/>
+                </a:solidFill>
+                <a:latin typeface="Plus Jakarta Sans Light"/>
+                <a:ea typeface="Plus Jakarta Sans Light"/>
+                <a:cs typeface="Plus Jakarta Sans Light"/>
+                <a:sym typeface="Plus Jakarta Sans Light"/>
+              </a:rPr>
+              <a:t>Tecnología: Visión artificial + IA.</a:t>
+            </a:r>
+          </a:p>
+          <a:p>
+            <a:pPr marL="0" lvl="0" indent="0" algn="l" rtl="0">
+              <a:lnSpc>
+                <a:spcPct val="115000"/>
+              </a:lnSpc>
+              <a:spcBef>
+                <a:spcPts val="0"/>
+              </a:spcBef>
+              <a:spcAft>
+                <a:spcPts val="0"/>
+              </a:spcAft>
+              <a:buNone/>
+            </a:pPr>
+            <a:endParaRPr lang="en-US" altLang="en-US">
+              <a:solidFill>
+                <a:srgbClr val="171717"/>
+              </a:solidFill>
+              <a:latin typeface="Plus Jakarta Sans Light"/>
+              <a:ea typeface="Plus Jakarta Sans Light"/>
+              <a:cs typeface="Plus Jakarta Sans Light"/>
+              <a:sym typeface="Plus Jakarta Sans Light"/>
+            </a:endParaRPr>
+          </a:p>
+          <a:p>
+            <a:pPr marL="0" lvl="0" indent="0" algn="l" rtl="0">
+              <a:lnSpc>
+                <a:spcPct val="115000"/>
+              </a:lnSpc>
+              <a:spcBef>
+                <a:spcPts val="0"/>
+              </a:spcBef>
+              <a:spcAft>
+                <a:spcPts val="0"/>
+              </a:spcAft>
+              <a:buNone/>
+            </a:pPr>
+            <a:r>
+              <a:rPr lang="en-US" altLang="en-US">
+                <a:solidFill>
+                  <a:srgbClr val="171717"/>
+                </a:solidFill>
+                <a:latin typeface="Plus Jakarta Sans Light"/>
+                <a:ea typeface="Plus Jakarta Sans Light"/>
+                <a:cs typeface="Plus Jakarta Sans Light"/>
+                <a:sym typeface="Plus Jakarta Sans Light"/>
+              </a:rPr>
+              <a:t>Dato: </a:t>
+            </a:r>
+            <a:r>
+              <a:rPr lang="es-AR" altLang="en-US">
+                <a:solidFill>
+                  <a:srgbClr val="171717"/>
+                </a:solidFill>
+                <a:latin typeface="Plus Jakarta Sans Light"/>
+                <a:ea typeface="Plus Jakarta Sans Light"/>
+                <a:cs typeface="Plus Jakarta Sans Light"/>
+                <a:sym typeface="Plus Jakarta Sans Light"/>
+              </a:rPr>
+              <a:t>Precision basada en historicos aprendizaje</a:t>
+            </a:r>
+            <a:endParaRPr lang="en-US" altLang="en-US">
+              <a:solidFill>
+                <a:srgbClr val="171717"/>
+              </a:solidFill>
+              <a:latin typeface="Plus Jakarta Sans Light"/>
+              <a:ea typeface="Plus Jakarta Sans Light"/>
+              <a:cs typeface="Plus Jakarta Sans Light"/>
+              <a:sym typeface="Plus Jakarta Sans Light"/>
+            </a:endParaRPr>
+          </a:p>
+          <a:p>
+            <a:pPr marL="0" lvl="0" indent="0" algn="l" rtl="0">
+              <a:lnSpc>
+                <a:spcPct val="115000"/>
+              </a:lnSpc>
+              <a:spcBef>
+                <a:spcPts val="0"/>
+              </a:spcBef>
+              <a:spcAft>
+                <a:spcPts val="0"/>
+              </a:spcAft>
+              <a:buNone/>
+            </a:pPr>
+            <a:endParaRPr lang="en-US" altLang="en-US">
+              <a:solidFill>
+                <a:srgbClr val="171717"/>
+              </a:solidFill>
+              <a:latin typeface="Plus Jakarta Sans Light"/>
+              <a:ea typeface="Plus Jakarta Sans Light"/>
+              <a:cs typeface="Plus Jakarta Sans Light"/>
+              <a:sym typeface="Plus Jakarta Sans Light"/>
+            </a:endParaRPr>
+          </a:p>
+          <a:p>
+            <a:pPr marL="0" lvl="0" indent="0" algn="l" rtl="0">
+              <a:lnSpc>
+                <a:spcPct val="115000"/>
+              </a:lnSpc>
+              <a:spcBef>
+                <a:spcPts val="0"/>
+              </a:spcBef>
+              <a:spcAft>
+                <a:spcPts val="0"/>
+              </a:spcAft>
+              <a:buNone/>
+            </a:pPr>
+            <a:r>
+              <a:rPr lang="en-US" altLang="en-US">
+                <a:solidFill>
+                  <a:srgbClr val="171717"/>
+                </a:solidFill>
+                <a:latin typeface="Plus Jakarta Sans Light"/>
+                <a:ea typeface="Plus Jakarta Sans Light"/>
+                <a:cs typeface="Plus Jakarta Sans Light"/>
+                <a:sym typeface="Plus Jakarta Sans Light"/>
+              </a:rPr>
+              <a:t>Valor: Reducción de devoluciones en un 20%.</a:t>
+            </a:r>
+          </a:p>
+        </p:txBody>
+      </p:sp>
+      <p:sp>
+        <p:nvSpPr>
+          <p:cNvPr id="242" name="Google Shape;242;p38"/>
+          <p:cNvSpPr txBox="1"/>
+          <p:nvPr/>
+        </p:nvSpPr>
+        <p:spPr>
+          <a:xfrm>
+            <a:off x="538480" y="550545"/>
+            <a:ext cx="8881745" cy="1120140"/>
+          </a:xfrm>
+          <a:prstGeom prst="rect">
+            <a:avLst/>
+          </a:prstGeom>
+          <a:noFill/>
+          <a:ln>
+            <a:noFill/>
+          </a:ln>
+        </p:spPr>
+        <p:txBody>
+          <a:bodyPr spcFirstLastPara="1" wrap="square" lIns="121900" tIns="121900" rIns="121900" bIns="121900" anchor="t" anchorCtr="0">
+            <a:noAutofit/>
+          </a:bodyPr>
+          <a:lstStyle/>
+          <a:p>
+            <a:pPr marL="0" lvl="0" indent="0" algn="l" rtl="0">
+              <a:spcBef>
+                <a:spcPts val="0"/>
+              </a:spcBef>
+              <a:spcAft>
+                <a:spcPts val="0"/>
+              </a:spcAft>
+              <a:buNone/>
+            </a:pPr>
+            <a:r>
+              <a:rPr lang="en-US" altLang="en-US" sz="4800">
+                <a:solidFill>
+                  <a:srgbClr val="FF632B"/>
+                </a:solidFill>
+                <a:latin typeface="Plus Jakarta Sans ExtraBold"/>
+                <a:ea typeface="Plus Jakarta Sans ExtraBold"/>
+                <a:cs typeface="Plus Jakarta Sans ExtraBold"/>
+                <a:sym typeface="Plus Jakarta Sans ExtraBold"/>
+              </a:rPr>
+              <a:t>Ejemplo de Plan Data-Driven (Guía)</a:t>
+            </a:r>
+          </a:p>
+        </p:txBody>
+      </p:sp>
+    </p:spTree>
+  </p:cSld>
+  <p:clrMapOvr>
+    <a:masterClrMapping/>
+  </p:clrMapOvr>
+</p:sld>
+</file>
+
+<file path=ppt/slides/slide22.xml><?xml version="1.0" encoding="utf-8"?>
+<p:sld xmlns:a="http://schemas.openxmlformats.org/drawingml/2006/main" xmlns:r="http://schemas.openxmlformats.org/officeDocument/2006/relationships" xmlns:p="http://schemas.openxmlformats.org/presentationml/2006/main">
+  <p:cSld>
+    <p:spTree>
+      <p:nvGrpSpPr>
+        <p:cNvPr id="1" name=""/>
+        <p:cNvGrpSpPr/>
+        <p:nvPr/>
+      </p:nvGrpSpPr>
+      <p:grpSpPr>
+        <a:xfrm>
+          <a:off x="0" y="0"/>
+          <a:ext cx="0" cy="0"/>
+          <a:chOff x="0" y="0"/>
+          <a:chExt cx="0" cy="0"/>
+        </a:xfrm>
+      </p:grpSpPr>
+      <p:sp>
+        <p:nvSpPr>
+          <p:cNvPr id="2" name="Text Box 1"/>
+          <p:cNvSpPr txBox="1"/>
+          <p:nvPr/>
+        </p:nvSpPr>
+        <p:spPr>
+          <a:xfrm>
+            <a:off x="1350645" y="883920"/>
+            <a:ext cx="6096000" cy="829945"/>
+          </a:xfrm>
+          <a:prstGeom prst="rect">
+            <a:avLst/>
+          </a:prstGeom>
+          <a:noFill/>
+        </p:spPr>
+        <p:txBody>
+          <a:bodyPr wrap="square" rtlCol="0" anchor="t">
+            <a:spAutoFit/>
+          </a:bodyPr>
+          <a:lstStyle/>
+          <a:p>
+            <a:pPr marL="0" lvl="0" indent="0" algn="l" rtl="0">
+              <a:spcBef>
+                <a:spcPts val="0"/>
+              </a:spcBef>
+              <a:spcAft>
+                <a:spcPts val="0"/>
+              </a:spcAft>
+              <a:buNone/>
+            </a:pPr>
+            <a:r>
+              <a:rPr lang="es-AR" sz="4800">
+                <a:solidFill>
+                  <a:srgbClr val="FF632B"/>
+                </a:solidFill>
+                <a:latin typeface="Plus Jakarta Sans ExtraBold"/>
+                <a:ea typeface="Plus Jakarta Sans ExtraBold"/>
+                <a:cs typeface="Plus Jakarta Sans ExtraBold"/>
+                <a:sym typeface="Plus Jakarta Sans ExtraBold"/>
+              </a:rPr>
+              <a:t>Fallo sensor</a:t>
+            </a:r>
+          </a:p>
+        </p:txBody>
+      </p:sp>
+      <p:pic>
+        <p:nvPicPr>
+          <p:cNvPr id="4" name="Picture 3"/>
+          <p:cNvPicPr>
+            <a:picLocks noChangeAspect="1"/>
+          </p:cNvPicPr>
+          <p:nvPr/>
+        </p:nvPicPr>
+        <p:blipFill>
+          <a:blip r:embed="rId2"/>
+          <a:stretch>
+            <a:fillRect/>
+          </a:stretch>
+        </p:blipFill>
+        <p:spPr>
+          <a:xfrm>
+            <a:off x="2397760" y="2375535"/>
+            <a:ext cx="8181975" cy="3952875"/>
+          </a:xfrm>
+          <a:prstGeom prst="rect">
+            <a:avLst/>
+          </a:prstGeom>
+        </p:spPr>
+      </p:pic>
+    </p:spTree>
+  </p:cSld>
+  <p:clrMapOvr>
+    <a:masterClrMapping/>
+  </p:clrMapOvr>
+</p:sld>
+</file>
+
+<file path=ppt/slides/slide23.xml><?xml version="1.0" encoding="utf-8"?>
+<p:sld xmlns:a="http://schemas.openxmlformats.org/drawingml/2006/main" xmlns:r="http://schemas.openxmlformats.org/officeDocument/2006/relationships" xmlns:p="http://schemas.openxmlformats.org/presentationml/2006/main">
+  <p:cSld>
+    <p:spTree>
+      <p:nvGrpSpPr>
+        <p:cNvPr id="1" name="Shape 240"/>
+        <p:cNvGrpSpPr/>
+        <p:nvPr/>
+      </p:nvGrpSpPr>
+      <p:grpSpPr>
+        <a:xfrm>
+          <a:off x="0" y="0"/>
+          <a:ext cx="0" cy="0"/>
+          <a:chOff x="0" y="0"/>
+          <a:chExt cx="0" cy="0"/>
+        </a:xfrm>
+      </p:grpSpPr>
+      <p:sp>
+        <p:nvSpPr>
+          <p:cNvPr id="241" name="Google Shape;241;p38"/>
+          <p:cNvSpPr txBox="1"/>
+          <p:nvPr/>
+        </p:nvSpPr>
+        <p:spPr>
+          <a:xfrm>
+            <a:off x="985520" y="2171065"/>
+            <a:ext cx="10420985" cy="1455420"/>
+          </a:xfrm>
+          <a:prstGeom prst="rect">
+            <a:avLst/>
+          </a:prstGeom>
+          <a:noFill/>
+          <a:ln>
+            <a:noFill/>
+          </a:ln>
+        </p:spPr>
+        <p:txBody>
+          <a:bodyPr spcFirstLastPara="1" wrap="square" lIns="121900" tIns="121900" rIns="121900" bIns="121900" anchor="t" anchorCtr="0">
+            <a:noAutofit/>
+          </a:bodyPr>
+          <a:lstStyle/>
+          <a:p>
+            <a:pPr marL="0" lvl="0" indent="0" algn="l" rtl="0">
+              <a:lnSpc>
+                <a:spcPct val="115000"/>
+              </a:lnSpc>
+              <a:spcBef>
+                <a:spcPts val="0"/>
+              </a:spcBef>
+              <a:spcAft>
+                <a:spcPts val="0"/>
+              </a:spcAft>
+              <a:buNone/>
+            </a:pPr>
             <a:endParaRPr lang="en-US" altLang="en-US">
               <a:solidFill>
                 <a:srgbClr val="171717"/>
@@ -10792,7 +11024,7 @@
 </p:sld>
 </file>
 
-<file path=ppt/slides/slide22.xml><?xml version="1.0" encoding="utf-8"?>
+<file path=ppt/slides/slide24.xml><?xml version="1.0" encoding="utf-8"?>
 <p:sld xmlns:a="http://schemas.openxmlformats.org/drawingml/2006/main" xmlns:r="http://schemas.openxmlformats.org/officeDocument/2006/relationships" xmlns:p="http://schemas.openxmlformats.org/presentationml/2006/main">
   <p:cSld>
     <p:spTree>
@@ -11054,6 +11286,581 @@
   <p:cSld>
     <p:spTree>
       <p:nvGrpSpPr>
+        <p:cNvPr id="1" name="Shape 90"/>
+        <p:cNvGrpSpPr/>
+        <p:nvPr/>
+      </p:nvGrpSpPr>
+      <p:grpSpPr>
+        <a:xfrm>
+          <a:off x="0" y="0"/>
+          <a:ext cx="0" cy="0"/>
+          <a:chOff x="0" y="0"/>
+          <a:chExt cx="0" cy="0"/>
+        </a:xfrm>
+      </p:grpSpPr>
+      <p:pic>
+        <p:nvPicPr>
+          <p:cNvPr id="93" name="Google Shape;93;p23" title="logo gradient 1.png"/>
+          <p:cNvPicPr preferRelativeResize="0"/>
+          <p:nvPr/>
+        </p:nvPicPr>
+        <p:blipFill>
+          <a:blip r:embed="rId3">
+            <a:alphaModFix/>
+          </a:blip>
+          <a:stretch>
+            <a:fillRect/>
+          </a:stretch>
+        </p:blipFill>
+        <p:spPr>
+          <a:xfrm>
+            <a:off x="5107738" y="6030867"/>
+            <a:ext cx="2063933" cy="603000"/>
+          </a:xfrm>
+          <a:prstGeom prst="rect">
+            <a:avLst/>
+          </a:prstGeom>
+          <a:noFill/>
+          <a:ln>
+            <a:noFill/>
+          </a:ln>
+        </p:spPr>
+      </p:pic>
+      <p:sp>
+        <p:nvSpPr>
+          <p:cNvPr id="7" name="Google Shape;117;p41"/>
+          <p:cNvSpPr txBox="1"/>
+          <p:nvPr/>
+        </p:nvSpPr>
+        <p:spPr>
+          <a:xfrm>
+            <a:off x="2189405" y="2091367"/>
+            <a:ext cx="8295200" cy="3200579"/>
+          </a:xfrm>
+          <a:prstGeom prst="rect">
+            <a:avLst/>
+          </a:prstGeom>
+          <a:noFill/>
+          <a:ln>
+            <a:noFill/>
+          </a:ln>
+        </p:spPr>
+        <p:txBody>
+          <a:bodyPr spcFirstLastPara="1" wrap="square" lIns="121900" tIns="121900" rIns="121900" bIns="121900" anchor="t" anchorCtr="0">
+            <a:spAutoFit/>
+          </a:bodyPr>
+          <a:lstStyle/>
+          <a:p>
+            <a:pPr lvl="0" algn="ctr">
+              <a:lnSpc>
+                <a:spcPct val="90000"/>
+              </a:lnSpc>
+              <a:buSzPts val="4000"/>
+            </a:pPr>
+            <a:r>
+              <a:rPr lang="es-MX" sz="5333" b="1" dirty="0">
+                <a:solidFill>
+                  <a:schemeClr val="bg1"/>
+                </a:solidFill>
+                <a:latin typeface="Plus Jakarta Sans"/>
+                <a:ea typeface="Plus Jakarta Sans"/>
+                <a:cs typeface="Plus Jakarta Sans"/>
+                <a:sym typeface="Plus Jakarta Sans"/>
+              </a:rPr>
+              <a:t>¿Preguntas </a:t>
+            </a:r>
+            <a:r>
+              <a:rPr lang="es-MX" sz="5333" b="1" dirty="0" smtClean="0">
+                <a:solidFill>
+                  <a:schemeClr val="bg1"/>
+                </a:solidFill>
+                <a:latin typeface="Plus Jakarta Sans"/>
+                <a:ea typeface="Plus Jakarta Sans"/>
+                <a:cs typeface="Plus Jakarta Sans"/>
+                <a:sym typeface="Plus Jakarta Sans"/>
+              </a:rPr>
+              <a:t>varias antes de comenzar?</a:t>
+            </a:r>
+            <a:endParaRPr lang="es-MX" sz="5333" b="1" dirty="0">
+              <a:solidFill>
+                <a:schemeClr val="bg1"/>
+              </a:solidFill>
+              <a:latin typeface="Plus Jakarta Sans"/>
+              <a:ea typeface="Plus Jakarta Sans"/>
+              <a:cs typeface="Plus Jakarta Sans"/>
+              <a:sym typeface="Plus Jakarta Sans"/>
+            </a:endParaRPr>
+          </a:p>
+          <a:p>
+            <a:pPr algn="ctr">
+              <a:lnSpc>
+                <a:spcPct val="90000"/>
+              </a:lnSpc>
+              <a:buClr>
+                <a:schemeClr val="dk1"/>
+              </a:buClr>
+              <a:buSzPts val="1100"/>
+            </a:pPr>
+            <a:endParaRPr sz="5333" b="1" dirty="0">
+              <a:solidFill>
+                <a:srgbClr val="FF632B"/>
+              </a:solidFill>
+              <a:latin typeface="Plus Jakarta Sans"/>
+              <a:ea typeface="Plus Jakarta Sans"/>
+              <a:cs typeface="Plus Jakarta Sans"/>
+              <a:sym typeface="Plus Jakarta Sans"/>
+            </a:endParaRPr>
+          </a:p>
+          <a:p>
+            <a:pPr algn="ctr">
+              <a:lnSpc>
+                <a:spcPct val="90000"/>
+              </a:lnSpc>
+              <a:buClr>
+                <a:srgbClr val="000000"/>
+              </a:buClr>
+              <a:buSzPts val="4000"/>
+            </a:pPr>
+            <a:endParaRPr sz="5333" b="1" dirty="0">
+              <a:solidFill>
+                <a:srgbClr val="FF632B"/>
+              </a:solidFill>
+              <a:latin typeface="Plus Jakarta Sans"/>
+              <a:ea typeface="Plus Jakarta Sans"/>
+              <a:cs typeface="Plus Jakarta Sans"/>
+              <a:sym typeface="Plus Jakarta Sans"/>
+            </a:endParaRPr>
+          </a:p>
+        </p:txBody>
+      </p:sp>
+    </p:spTree>
+    <p:extLst>
+      <p:ext uri="{BB962C8B-B14F-4D97-AF65-F5344CB8AC3E}">
+        <p14:creationId xmlns:p14="http://schemas.microsoft.com/office/powerpoint/2010/main" val="8015761"/>
+      </p:ext>
+    </p:extLst>
+  </p:cSld>
+  <p:clrMapOvr>
+    <a:masterClrMapping/>
+  </p:clrMapOvr>
+</p:sld>
+</file>
+
+<file path=ppt/slides/slide4.xml><?xml version="1.0" encoding="utf-8"?>
+<p:sld xmlns:a="http://schemas.openxmlformats.org/drawingml/2006/main" xmlns:r="http://schemas.openxmlformats.org/officeDocument/2006/relationships" xmlns:p="http://schemas.openxmlformats.org/presentationml/2006/main">
+  <p:cSld>
+    <p:spTree>
+      <p:nvGrpSpPr>
+        <p:cNvPr id="1" name="Shape 273"/>
+        <p:cNvGrpSpPr/>
+        <p:nvPr/>
+      </p:nvGrpSpPr>
+      <p:grpSpPr>
+        <a:xfrm>
+          <a:off x="0" y="0"/>
+          <a:ext cx="0" cy="0"/>
+          <a:chOff x="0" y="0"/>
+          <a:chExt cx="0" cy="0"/>
+        </a:xfrm>
+      </p:grpSpPr>
+      <p:sp>
+        <p:nvSpPr>
+          <p:cNvPr id="274" name="Google Shape;274;p43"/>
+          <p:cNvSpPr txBox="1"/>
+          <p:nvPr/>
+        </p:nvSpPr>
+        <p:spPr>
+          <a:xfrm>
+            <a:off x="1787400" y="875300"/>
+            <a:ext cx="8617200" cy="1120400"/>
+          </a:xfrm>
+          <a:prstGeom prst="rect">
+            <a:avLst/>
+          </a:prstGeom>
+          <a:noFill/>
+          <a:ln>
+            <a:noFill/>
+          </a:ln>
+        </p:spPr>
+        <p:txBody>
+          <a:bodyPr spcFirstLastPara="1" wrap="square" lIns="121900" tIns="121900" rIns="121900" bIns="121900" anchor="t" anchorCtr="0">
+            <a:noAutofit/>
+          </a:bodyPr>
+          <a:lstStyle/>
+          <a:p>
+            <a:pPr marL="0" lvl="0" indent="0" algn="ctr" rtl="0">
+              <a:spcBef>
+                <a:spcPts val="0"/>
+              </a:spcBef>
+              <a:spcAft>
+                <a:spcPts val="0"/>
+              </a:spcAft>
+              <a:buNone/>
+            </a:pPr>
+            <a:r>
+              <a:rPr lang="en-US" sz="3735" dirty="0" err="1">
+                <a:solidFill>
+                  <a:srgbClr val="260700"/>
+                </a:solidFill>
+                <a:latin typeface="Plus Jakarta Sans ExtraBold"/>
+                <a:ea typeface="Plus Jakarta Sans ExtraBold"/>
+                <a:cs typeface="Plus Jakarta Sans ExtraBold"/>
+                <a:sym typeface="Plus Jakarta Sans ExtraBold"/>
+              </a:rPr>
+              <a:t>Presentación</a:t>
+            </a:r>
+            <a:endParaRPr sz="3735" dirty="0">
+              <a:solidFill>
+                <a:srgbClr val="260700"/>
+              </a:solidFill>
+              <a:latin typeface="Plus Jakarta Sans ExtraBold"/>
+              <a:ea typeface="Plus Jakarta Sans ExtraBold"/>
+              <a:cs typeface="Plus Jakarta Sans ExtraBold"/>
+              <a:sym typeface="Plus Jakarta Sans ExtraBold"/>
+            </a:endParaRPr>
+          </a:p>
+          <a:p>
+            <a:pPr marL="0" lvl="0" indent="0" algn="ctr" rtl="0">
+              <a:spcBef>
+                <a:spcPts val="0"/>
+              </a:spcBef>
+              <a:spcAft>
+                <a:spcPts val="0"/>
+              </a:spcAft>
+              <a:buNone/>
+            </a:pPr>
+            <a:r>
+              <a:rPr lang="en-US" sz="3735" dirty="0">
+                <a:solidFill>
+                  <a:srgbClr val="260700"/>
+                </a:solidFill>
+                <a:latin typeface="Plus Jakarta Sans ExtraBold"/>
+                <a:ea typeface="Plus Jakarta Sans ExtraBold"/>
+                <a:cs typeface="Plus Jakarta Sans ExtraBold"/>
+                <a:sym typeface="Plus Jakarta Sans ExtraBold"/>
+              </a:rPr>
+              <a:t>del </a:t>
+            </a:r>
+            <a:r>
+              <a:rPr lang="en-US" sz="3735" dirty="0" err="1">
+                <a:solidFill>
+                  <a:srgbClr val="260700"/>
+                </a:solidFill>
+                <a:highlight>
+                  <a:srgbClr val="FDAB2E"/>
+                </a:highlight>
+                <a:latin typeface="Plus Jakarta Sans ExtraBold"/>
+                <a:ea typeface="Plus Jakarta Sans ExtraBold"/>
+                <a:cs typeface="Plus Jakarta Sans ExtraBold"/>
+                <a:sym typeface="Plus Jakarta Sans ExtraBold"/>
+              </a:rPr>
+              <a:t>equipo</a:t>
+            </a:r>
+            <a:r>
+              <a:rPr lang="en-US" sz="3735" dirty="0">
+                <a:solidFill>
+                  <a:srgbClr val="260700"/>
+                </a:solidFill>
+                <a:latin typeface="Plus Jakarta Sans ExtraBold"/>
+                <a:ea typeface="Plus Jakarta Sans ExtraBold"/>
+                <a:cs typeface="Plus Jakarta Sans ExtraBold"/>
+                <a:sym typeface="Plus Jakarta Sans ExtraBold"/>
+              </a:rPr>
+              <a:t>:</a:t>
+            </a:r>
+            <a:endParaRPr sz="3735" dirty="0">
+              <a:solidFill>
+                <a:srgbClr val="260700"/>
+              </a:solidFill>
+              <a:latin typeface="Plus Jakarta Sans"/>
+              <a:ea typeface="Plus Jakarta Sans"/>
+              <a:cs typeface="Plus Jakarta Sans"/>
+              <a:sym typeface="Plus Jakarta Sans"/>
+            </a:endParaRPr>
+          </a:p>
+        </p:txBody>
+      </p:sp>
+      <p:sp>
+        <p:nvSpPr>
+          <p:cNvPr id="277" name="Google Shape;277;p43"/>
+          <p:cNvSpPr/>
+          <p:nvPr/>
+        </p:nvSpPr>
+        <p:spPr>
+          <a:xfrm>
+            <a:off x="426720" y="3387449"/>
+            <a:ext cx="11338560" cy="984250"/>
+          </a:xfrm>
+          <a:prstGeom prst="round2SameRect">
+            <a:avLst>
+              <a:gd name="adj1" fmla="val 0"/>
+              <a:gd name="adj2" fmla="val 34038"/>
+            </a:avLst>
+          </a:prstGeom>
+          <a:solidFill>
+            <a:srgbClr val="FF632B"/>
+          </a:solidFill>
+          <a:ln>
+            <a:noFill/>
+          </a:ln>
+        </p:spPr>
+        <p:txBody>
+          <a:bodyPr spcFirstLastPara="1" wrap="square" lIns="121900" tIns="121900" rIns="121900" bIns="121900" anchor="ctr" anchorCtr="0">
+            <a:noAutofit/>
+          </a:bodyPr>
+          <a:lstStyle/>
+          <a:p>
+            <a:pPr marL="165100" lvl="0"/>
+            <a:r>
+              <a:rPr lang="en-US" sz="2800" b="1" dirty="0" err="1">
+                <a:solidFill>
+                  <a:srgbClr val="F8F2E8"/>
+                </a:solidFill>
+                <a:latin typeface="Plus Jakarta Sans"/>
+                <a:ea typeface="Plus Jakarta Sans"/>
+                <a:cs typeface="Plus Jakarta Sans"/>
+                <a:sym typeface="Plus Jakarta Sans"/>
+              </a:rPr>
+              <a:t>Profesor</a:t>
+            </a:r>
+            <a:r>
+              <a:rPr lang="en-US" sz="2800" b="1" dirty="0" smtClean="0">
+                <a:solidFill>
+                  <a:srgbClr val="F8F2E8"/>
+                </a:solidFill>
+                <a:latin typeface="Plus Jakarta Sans"/>
+                <a:ea typeface="Plus Jakarta Sans"/>
+                <a:cs typeface="Plus Jakarta Sans"/>
+                <a:sym typeface="Plus Jakarta Sans"/>
+              </a:rPr>
+              <a:t>: </a:t>
+            </a:r>
+            <a:r>
+              <a:rPr lang="es-AR" altLang="en-US" b="1" dirty="0">
+                <a:solidFill>
+                  <a:srgbClr val="F8F2E8"/>
+                </a:solidFill>
+                <a:latin typeface="Plus Jakarta Sans"/>
+                <a:ea typeface="Plus Jakarta Sans"/>
+                <a:cs typeface="Plus Jakarta Sans"/>
+                <a:sym typeface="Plus Jakarta Sans"/>
+              </a:rPr>
+              <a:t>Arturo </a:t>
+            </a:r>
+            <a:r>
+              <a:rPr lang="es-AR" altLang="en-US" b="1" dirty="0" err="1">
+                <a:solidFill>
+                  <a:srgbClr val="F8F2E8"/>
+                </a:solidFill>
+                <a:latin typeface="Plus Jakarta Sans"/>
+                <a:ea typeface="Plus Jakarta Sans"/>
+                <a:cs typeface="Plus Jakarta Sans"/>
+                <a:sym typeface="Plus Jakarta Sans"/>
+              </a:rPr>
+              <a:t>Grottoli</a:t>
+            </a:r>
+            <a:r>
+              <a:rPr lang="en-US" b="1" dirty="0">
+                <a:solidFill>
+                  <a:srgbClr val="F8F2E8"/>
+                </a:solidFill>
+                <a:latin typeface="Plus Jakarta Sans"/>
+                <a:ea typeface="Plus Jakarta Sans"/>
+                <a:cs typeface="Plus Jakarta Sans"/>
+                <a:sym typeface="Plus Jakarta Sans"/>
+              </a:rPr>
+              <a:t>  </a:t>
+            </a:r>
+            <a:endParaRPr lang="es-AR" altLang="en-US" b="1" dirty="0">
+              <a:solidFill>
+                <a:srgbClr val="F8F2E8"/>
+              </a:solidFill>
+              <a:latin typeface="Plus Jakarta Sans"/>
+              <a:ea typeface="Plus Jakarta Sans"/>
+              <a:cs typeface="Plus Jakarta Sans"/>
+              <a:sym typeface="Plus Jakarta Sans"/>
+            </a:endParaRPr>
+          </a:p>
+        </p:txBody>
+      </p:sp>
+      <p:sp>
+        <p:nvSpPr>
+          <p:cNvPr id="284" name="Google Shape;284;p43"/>
+          <p:cNvSpPr/>
+          <p:nvPr/>
+        </p:nvSpPr>
+        <p:spPr>
+          <a:xfrm>
+            <a:off x="8832733" y="1600700"/>
+            <a:ext cx="1489600" cy="565600"/>
+          </a:xfrm>
+          <a:prstGeom prst="wedgeRectCallout">
+            <a:avLst>
+              <a:gd name="adj1" fmla="val -33452"/>
+              <a:gd name="adj2" fmla="val 98680"/>
+            </a:avLst>
+          </a:prstGeom>
+          <a:solidFill>
+            <a:srgbClr val="FF632B"/>
+          </a:solidFill>
+          <a:ln>
+            <a:noFill/>
+          </a:ln>
+        </p:spPr>
+        <p:txBody>
+          <a:bodyPr spcFirstLastPara="1" wrap="square" lIns="121900" tIns="121900" rIns="121900" bIns="121900" anchor="ctr" anchorCtr="0">
+            <a:noAutofit/>
+          </a:bodyPr>
+          <a:lstStyle/>
+          <a:p>
+            <a:pPr marL="0" lvl="0" indent="0" algn="ctr" rtl="0">
+              <a:spcBef>
+                <a:spcPts val="0"/>
+              </a:spcBef>
+              <a:spcAft>
+                <a:spcPts val="0"/>
+              </a:spcAft>
+              <a:buNone/>
+            </a:pPr>
+            <a:r>
+              <a:rPr lang="en-US" sz="935">
+                <a:solidFill>
+                  <a:srgbClr val="F8F2E8"/>
+                </a:solidFill>
+                <a:latin typeface="Plus Jakarta Sans"/>
+                <a:ea typeface="Plus Jakarta Sans"/>
+                <a:cs typeface="Plus Jakarta Sans"/>
+                <a:sym typeface="Plus Jakarta Sans"/>
+              </a:rPr>
+              <a:t>COMISIÓN N° </a:t>
+            </a:r>
+            <a:r>
+              <a:rPr lang="es-AR" altLang="en-US" sz="935">
+                <a:solidFill>
+                  <a:srgbClr val="F8F2E8"/>
+                </a:solidFill>
+                <a:latin typeface="Plus Jakarta Sans"/>
+                <a:ea typeface="Plus Jakarta Sans"/>
+                <a:cs typeface="Plus Jakarta Sans"/>
+                <a:sym typeface="Plus Jakarta Sans"/>
+              </a:rPr>
+              <a:t>95315</a:t>
+            </a:r>
+          </a:p>
+        </p:txBody>
+      </p:sp>
+      <p:sp>
+        <p:nvSpPr>
+          <p:cNvPr id="2" name="Google Shape;277;p43"/>
+          <p:cNvSpPr/>
+          <p:nvPr/>
+        </p:nvSpPr>
+        <p:spPr>
+          <a:xfrm>
+            <a:off x="426720" y="4840605"/>
+            <a:ext cx="11338560" cy="984250"/>
+          </a:xfrm>
+          <a:prstGeom prst="round2SameRect">
+            <a:avLst>
+              <a:gd name="adj1" fmla="val 0"/>
+              <a:gd name="adj2" fmla="val 34038"/>
+            </a:avLst>
+          </a:prstGeom>
+          <a:solidFill>
+            <a:srgbClr val="FF632B"/>
+          </a:solidFill>
+          <a:ln>
+            <a:noFill/>
+          </a:ln>
+        </p:spPr>
+        <p:txBody>
+          <a:bodyPr spcFirstLastPara="1" wrap="square" lIns="121900" tIns="121900" rIns="121900" bIns="121900" anchor="ctr" anchorCtr="0">
+            <a:noAutofit/>
+          </a:bodyPr>
+          <a:lstStyle/>
+          <a:p>
+            <a:pPr marL="165100" lvl="0" indent="0" algn="l" rtl="0">
+              <a:spcBef>
+                <a:spcPts val="0"/>
+              </a:spcBef>
+              <a:spcAft>
+                <a:spcPts val="0"/>
+              </a:spcAft>
+              <a:buNone/>
+            </a:pPr>
+            <a:r>
+              <a:rPr lang="en-US" sz="2800" b="1" dirty="0" err="1">
+                <a:solidFill>
+                  <a:srgbClr val="F8F2E8"/>
+                </a:solidFill>
+                <a:latin typeface="Plus Jakarta Sans"/>
+                <a:ea typeface="Plus Jakarta Sans"/>
+                <a:cs typeface="Plus Jakarta Sans"/>
+                <a:sym typeface="Plus Jakarta Sans"/>
+              </a:rPr>
+              <a:t>Profesor</a:t>
+            </a:r>
+            <a:r>
+              <a:rPr lang="en-US" sz="2800" b="1" dirty="0">
+                <a:solidFill>
+                  <a:srgbClr val="F8F2E8"/>
+                </a:solidFill>
+                <a:latin typeface="Plus Jakarta Sans"/>
+                <a:ea typeface="Plus Jakarta Sans"/>
+                <a:cs typeface="Plus Jakarta Sans"/>
+                <a:sym typeface="Plus Jakarta Sans"/>
+              </a:rPr>
+              <a:t>:</a:t>
+            </a:r>
+            <a:r>
+              <a:rPr lang="es-AR" altLang="en-US" sz="2800" b="1" dirty="0">
+                <a:solidFill>
+                  <a:srgbClr val="F8F2E8"/>
+                </a:solidFill>
+                <a:latin typeface="Plus Jakarta Sans"/>
+                <a:ea typeface="Plus Jakarta Sans"/>
+                <a:cs typeface="Plus Jakarta Sans"/>
+                <a:sym typeface="Plus Jakarta Sans"/>
+              </a:rPr>
+              <a:t> </a:t>
+            </a:r>
+            <a:r>
+              <a:rPr lang="es-AR" altLang="en-US" b="1" dirty="0" smtClean="0">
+                <a:solidFill>
+                  <a:srgbClr val="F8F2E8"/>
+                </a:solidFill>
+                <a:latin typeface="Plus Jakarta Sans"/>
+                <a:ea typeface="Plus Jakarta Sans"/>
+                <a:cs typeface="Plus Jakarta Sans"/>
+                <a:sym typeface="Plus Jakarta Sans"/>
+              </a:rPr>
+              <a:t>Arturo</a:t>
+            </a:r>
+            <a:endParaRPr lang="es-AR" altLang="en-US" b="1" dirty="0">
+              <a:solidFill>
+                <a:srgbClr val="F8F2E8"/>
+              </a:solidFill>
+              <a:latin typeface="Plus Jakarta Sans"/>
+              <a:ea typeface="Plus Jakarta Sans"/>
+              <a:cs typeface="Plus Jakarta Sans"/>
+              <a:sym typeface="Plus Jakarta Sans"/>
+            </a:endParaRPr>
+          </a:p>
+        </p:txBody>
+      </p:sp>
+    </p:spTree>
+  </p:cSld>
+  <p:clrMapOvr>
+    <a:masterClrMapping/>
+  </p:clrMapOvr>
+</p:sld>
+</file>
+
+<file path=ppt/slides/slide5.xml><?xml version="1.0" encoding="utf-8"?>
+<p:sld xmlns:a="http://schemas.openxmlformats.org/drawingml/2006/main" xmlns:r="http://schemas.openxmlformats.org/officeDocument/2006/relationships" xmlns:p="http://schemas.openxmlformats.org/presentationml/2006/main">
+  <p:cSld>
+    <p:spTree>
+      <p:nvGrpSpPr>
         <p:cNvPr id="1" name="Shape 191"/>
         <p:cNvGrpSpPr/>
         <p:nvPr/>
@@ -11499,7 +12306,7 @@
 </p:sld>
 </file>
 
-<file path=ppt/slides/slide4.xml><?xml version="1.0" encoding="utf-8"?>
+<file path=ppt/slides/slide6.xml><?xml version="1.0" encoding="utf-8"?>
 <p:sld xmlns:a="http://schemas.openxmlformats.org/drawingml/2006/main" xmlns:r="http://schemas.openxmlformats.org/officeDocument/2006/relationships" xmlns:p="http://schemas.openxmlformats.org/presentationml/2006/main">
   <p:cSld>
     <p:spTree>
@@ -11636,460 +12443,6 @@
           </a:prstGeom>
         </p:spPr>
       </p:pic>
-    </p:spTree>
-  </p:cSld>
-  <p:clrMapOvr>
-    <a:masterClrMapping/>
-  </p:clrMapOvr>
-</p:sld>
-</file>
-
-<file path=ppt/slides/slide5.xml><?xml version="1.0" encoding="utf-8"?>
-<p:sld xmlns:a="http://schemas.openxmlformats.org/drawingml/2006/main" xmlns:r="http://schemas.openxmlformats.org/officeDocument/2006/relationships" xmlns:p="http://schemas.openxmlformats.org/presentationml/2006/main">
-  <p:cSld>
-    <p:spTree>
-      <p:nvGrpSpPr>
-        <p:cNvPr id="1" name="Shape 240"/>
-        <p:cNvGrpSpPr/>
-        <p:nvPr/>
-      </p:nvGrpSpPr>
-      <p:grpSpPr>
-        <a:xfrm>
-          <a:off x="0" y="0"/>
-          <a:ext cx="0" cy="0"/>
-          <a:chOff x="0" y="0"/>
-          <a:chExt cx="0" cy="0"/>
-        </a:xfrm>
-      </p:grpSpPr>
-      <p:sp>
-        <p:nvSpPr>
-          <p:cNvPr id="241" name="Google Shape;241;p38"/>
-          <p:cNvSpPr txBox="1"/>
-          <p:nvPr/>
-        </p:nvSpPr>
-        <p:spPr>
-          <a:xfrm>
-            <a:off x="985433" y="2565617"/>
-            <a:ext cx="10420800" cy="3026000"/>
-          </a:xfrm>
-          <a:prstGeom prst="rect">
-            <a:avLst/>
-          </a:prstGeom>
-          <a:noFill/>
-          <a:ln>
-            <a:noFill/>
-          </a:ln>
-        </p:spPr>
-        <p:txBody>
-          <a:bodyPr spcFirstLastPara="1" wrap="square" lIns="121900" tIns="121900" rIns="121900" bIns="121900" anchor="t" anchorCtr="0">
-            <a:noAutofit/>
-          </a:bodyPr>
-          <a:lstStyle/>
-          <a:p>
-            <a:pPr marL="0" lvl="0" indent="0" algn="l" rtl="0">
-              <a:lnSpc>
-                <a:spcPct val="115000"/>
-              </a:lnSpc>
-              <a:spcBef>
-                <a:spcPts val="0"/>
-              </a:spcBef>
-              <a:spcAft>
-                <a:spcPts val="0"/>
-              </a:spcAft>
-              <a:buNone/>
-            </a:pPr>
-            <a:r>
-              <a:rPr lang="en-US" altLang="en-US" sz="2400">
-                <a:solidFill>
-                  <a:srgbClr val="171717"/>
-                </a:solidFill>
-                <a:latin typeface="Plus Jakarta Sans Light"/>
-                <a:ea typeface="Plus Jakarta Sans Light"/>
-                <a:cs typeface="Plus Jakarta Sans Light"/>
-                <a:sym typeface="Plus Jakarta Sans Light"/>
-              </a:rPr>
-              <a:t>Puntos clave:</a:t>
-            </a:r>
-          </a:p>
-          <a:p>
-            <a:pPr marL="0" lvl="0" indent="0" algn="l" rtl="0">
-              <a:lnSpc>
-                <a:spcPct val="115000"/>
-              </a:lnSpc>
-              <a:spcBef>
-                <a:spcPts val="0"/>
-              </a:spcBef>
-              <a:spcAft>
-                <a:spcPts val="0"/>
-              </a:spcAft>
-              <a:buNone/>
-            </a:pPr>
-            <a:endParaRPr lang="en-US" altLang="en-US" sz="2400">
-              <a:solidFill>
-                <a:srgbClr val="171717"/>
-              </a:solidFill>
-              <a:latin typeface="Plus Jakarta Sans Light"/>
-              <a:ea typeface="Plus Jakarta Sans Light"/>
-              <a:cs typeface="Plus Jakarta Sans Light"/>
-              <a:sym typeface="Plus Jakarta Sans Light"/>
-            </a:endParaRPr>
-          </a:p>
-          <a:p>
-            <a:pPr marL="285750" lvl="0" indent="-285750" algn="l" rtl="0">
-              <a:lnSpc>
-                <a:spcPct val="115000"/>
-              </a:lnSpc>
-              <a:spcBef>
-                <a:spcPts val="0"/>
-              </a:spcBef>
-              <a:spcAft>
-                <a:spcPts val="0"/>
-              </a:spcAft>
-              <a:buFont typeface="Arial" panose="020B0604020202020204" pitchFamily="34" charset="0"/>
-              <a:buChar char="•"/>
-            </a:pPr>
-            <a:r>
-              <a:rPr lang="en-US" altLang="en-US" sz="1600">
-                <a:solidFill>
-                  <a:srgbClr val="171717"/>
-                </a:solidFill>
-                <a:latin typeface="Plus Jakarta Sans Light"/>
-                <a:ea typeface="Plus Jakarta Sans Light"/>
-                <a:cs typeface="Plus Jakarta Sans Light"/>
-                <a:sym typeface="Plus Jakarta Sans Light"/>
-              </a:rPr>
-              <a:t>Comprender la evolución de las revoluciones industriales.</a:t>
-            </a:r>
-          </a:p>
-          <a:p>
-            <a:pPr marL="285750" lvl="0" indent="-285750" algn="l" rtl="0">
-              <a:lnSpc>
-                <a:spcPct val="115000"/>
-              </a:lnSpc>
-              <a:spcBef>
-                <a:spcPts val="0"/>
-              </a:spcBef>
-              <a:spcAft>
-                <a:spcPts val="0"/>
-              </a:spcAft>
-              <a:buFont typeface="Arial" panose="020B0604020202020204" pitchFamily="34" charset="0"/>
-              <a:buChar char="•"/>
-            </a:pPr>
-            <a:endParaRPr lang="en-US" altLang="en-US" sz="1600">
-              <a:solidFill>
-                <a:srgbClr val="171717"/>
-              </a:solidFill>
-              <a:latin typeface="Plus Jakarta Sans Light"/>
-              <a:ea typeface="Plus Jakarta Sans Light"/>
-              <a:cs typeface="Plus Jakarta Sans Light"/>
-              <a:sym typeface="Plus Jakarta Sans Light"/>
-            </a:endParaRPr>
-          </a:p>
-          <a:p>
-            <a:pPr marL="285750" lvl="0" indent="-285750" algn="l" rtl="0">
-              <a:lnSpc>
-                <a:spcPct val="115000"/>
-              </a:lnSpc>
-              <a:spcBef>
-                <a:spcPts val="0"/>
-              </a:spcBef>
-              <a:spcAft>
-                <a:spcPts val="0"/>
-              </a:spcAft>
-              <a:buFont typeface="Arial" panose="020B0604020202020204" pitchFamily="34" charset="0"/>
-              <a:buChar char="•"/>
-            </a:pPr>
-            <a:r>
-              <a:rPr lang="en-US" altLang="en-US" sz="1600">
-                <a:solidFill>
-                  <a:srgbClr val="171717"/>
-                </a:solidFill>
-                <a:latin typeface="Plus Jakarta Sans Light"/>
-                <a:ea typeface="Plus Jakarta Sans Light"/>
-                <a:cs typeface="Plus Jakarta Sans Light"/>
-                <a:sym typeface="Plus Jakarta Sans Light"/>
-              </a:rPr>
-              <a:t>Identificar los 9 pilares de la Industria 4.0.</a:t>
-            </a:r>
-          </a:p>
-          <a:p>
-            <a:pPr marL="285750" lvl="0" indent="-285750" algn="l" rtl="0">
-              <a:lnSpc>
-                <a:spcPct val="115000"/>
-              </a:lnSpc>
-              <a:spcBef>
-                <a:spcPts val="0"/>
-              </a:spcBef>
-              <a:spcAft>
-                <a:spcPts val="0"/>
-              </a:spcAft>
-              <a:buFont typeface="Arial" panose="020B0604020202020204" pitchFamily="34" charset="0"/>
-              <a:buChar char="•"/>
-            </a:pPr>
-            <a:endParaRPr lang="en-US" altLang="en-US" sz="1600">
-              <a:solidFill>
-                <a:srgbClr val="171717"/>
-              </a:solidFill>
-              <a:latin typeface="Plus Jakarta Sans Light"/>
-              <a:ea typeface="Plus Jakarta Sans Light"/>
-              <a:cs typeface="Plus Jakarta Sans Light"/>
-              <a:sym typeface="Plus Jakarta Sans Light"/>
-            </a:endParaRPr>
-          </a:p>
-          <a:p>
-            <a:pPr marL="285750" lvl="0" indent="-285750" algn="l" rtl="0">
-              <a:lnSpc>
-                <a:spcPct val="115000"/>
-              </a:lnSpc>
-              <a:spcBef>
-                <a:spcPts val="0"/>
-              </a:spcBef>
-              <a:spcAft>
-                <a:spcPts val="0"/>
-              </a:spcAft>
-              <a:buFont typeface="Arial" panose="020B0604020202020204" pitchFamily="34" charset="0"/>
-              <a:buChar char="•"/>
-            </a:pPr>
-            <a:r>
-              <a:rPr lang="en-US" altLang="en-US" sz="1600">
-                <a:solidFill>
-                  <a:srgbClr val="171717"/>
-                </a:solidFill>
-                <a:latin typeface="Plus Jakarta Sans Light"/>
-                <a:ea typeface="Plus Jakarta Sans Light"/>
-                <a:cs typeface="Plus Jakarta Sans Light"/>
-                <a:sym typeface="Plus Jakarta Sans Light"/>
-              </a:rPr>
-              <a:t>Analizar el impacto de IoT y Big Data.</a:t>
-            </a:r>
-          </a:p>
-          <a:p>
-            <a:pPr marL="285750" lvl="0" indent="-285750" algn="l" rtl="0">
-              <a:lnSpc>
-                <a:spcPct val="115000"/>
-              </a:lnSpc>
-              <a:spcBef>
-                <a:spcPts val="0"/>
-              </a:spcBef>
-              <a:spcAft>
-                <a:spcPts val="0"/>
-              </a:spcAft>
-              <a:buFont typeface="Arial" panose="020B0604020202020204" pitchFamily="34" charset="0"/>
-              <a:buChar char="•"/>
-            </a:pPr>
-            <a:endParaRPr lang="en-US" altLang="en-US" sz="1600">
-              <a:solidFill>
-                <a:srgbClr val="171717"/>
-              </a:solidFill>
-              <a:latin typeface="Plus Jakarta Sans Light"/>
-              <a:ea typeface="Plus Jakarta Sans Light"/>
-              <a:cs typeface="Plus Jakarta Sans Light"/>
-              <a:sym typeface="Plus Jakarta Sans Light"/>
-            </a:endParaRPr>
-          </a:p>
-          <a:p>
-            <a:pPr marL="285750" lvl="0" indent="-285750" algn="l" rtl="0">
-              <a:lnSpc>
-                <a:spcPct val="115000"/>
-              </a:lnSpc>
-              <a:spcBef>
-                <a:spcPts val="0"/>
-              </a:spcBef>
-              <a:spcAft>
-                <a:spcPts val="0"/>
-              </a:spcAft>
-              <a:buFont typeface="Arial" panose="020B0604020202020204" pitchFamily="34" charset="0"/>
-              <a:buChar char="•"/>
-            </a:pPr>
-            <a:r>
-              <a:rPr lang="en-US" altLang="en-US" sz="1600">
-                <a:solidFill>
-                  <a:srgbClr val="171717"/>
-                </a:solidFill>
-                <a:latin typeface="Plus Jakarta Sans Light"/>
-                <a:ea typeface="Plus Jakarta Sans Light"/>
-                <a:cs typeface="Plus Jakarta Sans Light"/>
-                <a:sym typeface="Plus Jakarta Sans Light"/>
-              </a:rPr>
-              <a:t>Diseñar un plan ejecutivo data-driven.</a:t>
-            </a:r>
-          </a:p>
-          <a:p>
-            <a:pPr marL="285750" lvl="0" indent="-285750" algn="l" rtl="0">
-              <a:lnSpc>
-                <a:spcPct val="115000"/>
-              </a:lnSpc>
-              <a:spcBef>
-                <a:spcPts val="0"/>
-              </a:spcBef>
-              <a:spcAft>
-                <a:spcPts val="0"/>
-              </a:spcAft>
-              <a:buFont typeface="Arial" panose="020B0604020202020204" pitchFamily="34" charset="0"/>
-              <a:buChar char="•"/>
-            </a:pPr>
-            <a:endParaRPr lang="es-AR" altLang="en-US" sz="1600">
-              <a:solidFill>
-                <a:srgbClr val="171717"/>
-              </a:solidFill>
-              <a:latin typeface="Plus Jakarta Sans Light"/>
-              <a:ea typeface="Plus Jakarta Sans Light"/>
-              <a:cs typeface="Plus Jakarta Sans Light"/>
-              <a:sym typeface="Plus Jakarta Sans Light"/>
-            </a:endParaRPr>
-          </a:p>
-          <a:p>
-            <a:pPr marL="285750" lvl="0" indent="-285750" algn="l" rtl="0">
-              <a:lnSpc>
-                <a:spcPct val="115000"/>
-              </a:lnSpc>
-              <a:spcBef>
-                <a:spcPts val="0"/>
-              </a:spcBef>
-              <a:spcAft>
-                <a:spcPts val="0"/>
-              </a:spcAft>
-              <a:buFont typeface="Arial" panose="020B0604020202020204" pitchFamily="34" charset="0"/>
-              <a:buChar char="•"/>
-            </a:pPr>
-            <a:r>
-              <a:rPr lang="es-AR" altLang="en-US" sz="1600">
-                <a:solidFill>
-                  <a:srgbClr val="171717"/>
-                </a:solidFill>
-                <a:latin typeface="Plus Jakarta Sans Light"/>
-                <a:ea typeface="Plus Jakarta Sans Light"/>
-                <a:cs typeface="Plus Jakarta Sans Light"/>
-                <a:sym typeface="Plus Jakarta Sans Light"/>
-              </a:rPr>
-              <a:t>Desarrollar algunas actividades grupales</a:t>
-            </a:r>
-          </a:p>
-        </p:txBody>
-      </p:sp>
-      <p:sp>
-        <p:nvSpPr>
-          <p:cNvPr id="242" name="Google Shape;242;p38"/>
-          <p:cNvSpPr txBox="1"/>
-          <p:nvPr/>
-        </p:nvSpPr>
-        <p:spPr>
-          <a:xfrm>
-            <a:off x="803275" y="879475"/>
-            <a:ext cx="9618980" cy="1120140"/>
-          </a:xfrm>
-          <a:prstGeom prst="rect">
-            <a:avLst/>
-          </a:prstGeom>
-          <a:noFill/>
-          <a:ln>
-            <a:noFill/>
-          </a:ln>
-        </p:spPr>
-        <p:txBody>
-          <a:bodyPr spcFirstLastPara="1" wrap="square" lIns="121900" tIns="121900" rIns="121900" bIns="121900" anchor="t" anchorCtr="0">
-            <a:noAutofit/>
-          </a:bodyPr>
-          <a:lstStyle/>
-          <a:p>
-            <a:pPr marL="0" lvl="0" indent="0" algn="l" rtl="0">
-              <a:spcBef>
-                <a:spcPts val="0"/>
-              </a:spcBef>
-              <a:spcAft>
-                <a:spcPts val="0"/>
-              </a:spcAft>
-              <a:buNone/>
-            </a:pPr>
-            <a:r>
-              <a:rPr lang="en-US" altLang="en-US" sz="6400">
-                <a:solidFill>
-                  <a:srgbClr val="FF632B"/>
-                </a:solidFill>
-                <a:latin typeface="Plus Jakarta Sans ExtraBold"/>
-                <a:ea typeface="Plus Jakarta Sans ExtraBold"/>
-                <a:cs typeface="Plus Jakarta Sans ExtraBold"/>
-                <a:sym typeface="Plus Jakarta Sans ExtraBold"/>
-              </a:rPr>
-              <a:t>Objetivos de la Sesión</a:t>
-            </a:r>
-          </a:p>
-        </p:txBody>
-      </p:sp>
-    </p:spTree>
-  </p:cSld>
-  <p:clrMapOvr>
-    <a:masterClrMapping/>
-  </p:clrMapOvr>
-</p:sld>
-</file>
-
-<file path=ppt/slides/slide6.xml><?xml version="1.0" encoding="utf-8"?>
-<p:sld xmlns:a="http://schemas.openxmlformats.org/drawingml/2006/main" xmlns:r="http://schemas.openxmlformats.org/officeDocument/2006/relationships" xmlns:p="http://schemas.openxmlformats.org/presentationml/2006/main">
-  <p:cSld>
-    <p:spTree>
-      <p:nvGrpSpPr>
-        <p:cNvPr id="1" name="Shape 228"/>
-        <p:cNvGrpSpPr/>
-        <p:nvPr/>
-      </p:nvGrpSpPr>
-      <p:grpSpPr>
-        <a:xfrm>
-          <a:off x="0" y="0"/>
-          <a:ext cx="0" cy="0"/>
-          <a:chOff x="0" y="0"/>
-          <a:chExt cx="0" cy="0"/>
-        </a:xfrm>
-      </p:grpSpPr>
-      <p:sp>
-        <p:nvSpPr>
-          <p:cNvPr id="230" name="Google Shape;230;p36"/>
-          <p:cNvSpPr txBox="1"/>
-          <p:nvPr/>
-        </p:nvSpPr>
-        <p:spPr>
-          <a:xfrm>
-            <a:off x="855345" y="4450080"/>
-            <a:ext cx="10272395" cy="1120140"/>
-          </a:xfrm>
-          <a:prstGeom prst="rect">
-            <a:avLst/>
-          </a:prstGeom>
-          <a:noFill/>
-          <a:ln>
-            <a:noFill/>
-          </a:ln>
-        </p:spPr>
-        <p:txBody>
-          <a:bodyPr spcFirstLastPara="1" wrap="square" lIns="121900" tIns="121900" rIns="121900" bIns="121900" anchor="t" anchorCtr="0">
-            <a:noAutofit/>
-          </a:bodyPr>
-          <a:lstStyle/>
-          <a:p>
-            <a:pPr marL="0" lvl="0" indent="0" algn="l" rtl="0">
-              <a:spcBef>
-                <a:spcPts val="0"/>
-              </a:spcBef>
-              <a:spcAft>
-                <a:spcPts val="0"/>
-              </a:spcAft>
-              <a:buNone/>
-            </a:pPr>
-            <a:r>
-              <a:rPr lang="en-US" altLang="en-US" sz="4800">
-                <a:solidFill>
-                  <a:srgbClr val="F8F2E8"/>
-                </a:solidFill>
-                <a:latin typeface="Plus Jakarta Sans ExtraBold"/>
-                <a:ea typeface="Plus Jakarta Sans ExtraBold"/>
-                <a:cs typeface="Plus Jakarta Sans ExtraBold"/>
-                <a:sym typeface="Plus Jakarta Sans ExtraBold"/>
-              </a:rPr>
-              <a:t>La Línea del Tiempo (Evolución)</a:t>
-            </a:r>
-          </a:p>
-        </p:txBody>
-      </p:sp>
     </p:spTree>
   </p:cSld>
   <p:clrMapOvr>
@@ -12117,14 +12470,14 @@
       </p:grpSpPr>
       <p:sp>
         <p:nvSpPr>
-          <p:cNvPr id="242" name="Google Shape;242;p38"/>
+          <p:cNvPr id="241" name="Google Shape;241;p38"/>
           <p:cNvSpPr txBox="1"/>
           <p:nvPr/>
         </p:nvSpPr>
         <p:spPr>
           <a:xfrm>
-            <a:off x="803200" y="614037"/>
-            <a:ext cx="8617200" cy="1120400"/>
+            <a:off x="985433" y="2565617"/>
+            <a:ext cx="10420800" cy="3026000"/>
           </a:xfrm>
           <a:prstGeom prst="rect">
             <a:avLst/>
@@ -12141,16 +12494,322 @@
           <a:lstStyle/>
           <a:p>
             <a:pPr marL="0" lvl="0" indent="0" algn="l" rtl="0">
-              <a:spcBef>
-                <a:spcPts val="0"/>
-              </a:spcBef>
-              <a:spcAft>
-                <a:spcPts val="0"/>
-              </a:spcAft>
-              <a:buNone/>
-            </a:pPr>
-            <a:r>
-              <a:rPr lang="es-AR" altLang="en-US" sz="6400">
+              <a:lnSpc>
+                <a:spcPct val="115000"/>
+              </a:lnSpc>
+              <a:spcBef>
+                <a:spcPts val="0"/>
+              </a:spcBef>
+              <a:spcAft>
+                <a:spcPts val="0"/>
+              </a:spcAft>
+              <a:buNone/>
+            </a:pPr>
+            <a:r>
+              <a:rPr lang="en-US" altLang="en-US" sz="2400">
+                <a:solidFill>
+                  <a:srgbClr val="171717"/>
+                </a:solidFill>
+                <a:latin typeface="Plus Jakarta Sans Light"/>
+                <a:ea typeface="Plus Jakarta Sans Light"/>
+                <a:cs typeface="Plus Jakarta Sans Light"/>
+                <a:sym typeface="Plus Jakarta Sans Light"/>
+              </a:rPr>
+              <a:t>Puntos clave:</a:t>
+            </a:r>
+          </a:p>
+          <a:p>
+            <a:pPr marL="0" lvl="0" indent="0" algn="l" rtl="0">
+              <a:lnSpc>
+                <a:spcPct val="115000"/>
+              </a:lnSpc>
+              <a:spcBef>
+                <a:spcPts val="0"/>
+              </a:spcBef>
+              <a:spcAft>
+                <a:spcPts val="0"/>
+              </a:spcAft>
+              <a:buNone/>
+            </a:pPr>
+            <a:endParaRPr lang="en-US" altLang="en-US" sz="2400">
+              <a:solidFill>
+                <a:srgbClr val="171717"/>
+              </a:solidFill>
+              <a:latin typeface="Plus Jakarta Sans Light"/>
+              <a:ea typeface="Plus Jakarta Sans Light"/>
+              <a:cs typeface="Plus Jakarta Sans Light"/>
+              <a:sym typeface="Plus Jakarta Sans Light"/>
+            </a:endParaRPr>
+          </a:p>
+          <a:p>
+            <a:pPr marL="285750" lvl="0" indent="-285750" algn="l" rtl="0">
+              <a:lnSpc>
+                <a:spcPct val="115000"/>
+              </a:lnSpc>
+              <a:spcBef>
+                <a:spcPts val="0"/>
+              </a:spcBef>
+              <a:spcAft>
+                <a:spcPts val="0"/>
+              </a:spcAft>
+              <a:buFont typeface="Arial" panose="020B0604020202020204" pitchFamily="34" charset="0"/>
+              <a:buChar char="•"/>
+            </a:pPr>
+            <a:r>
+              <a:rPr lang="en-US" altLang="en-US" sz="1600">
+                <a:solidFill>
+                  <a:srgbClr val="171717"/>
+                </a:solidFill>
+                <a:latin typeface="Plus Jakarta Sans Light"/>
+                <a:ea typeface="Plus Jakarta Sans Light"/>
+                <a:cs typeface="Plus Jakarta Sans Light"/>
+                <a:sym typeface="Plus Jakarta Sans Light"/>
+              </a:rPr>
+              <a:t>Comprender la evolución de las revoluciones industriales.</a:t>
+            </a:r>
+          </a:p>
+          <a:p>
+            <a:pPr marL="285750" lvl="0" indent="-285750" algn="l" rtl="0">
+              <a:lnSpc>
+                <a:spcPct val="115000"/>
+              </a:lnSpc>
+              <a:spcBef>
+                <a:spcPts val="0"/>
+              </a:spcBef>
+              <a:spcAft>
+                <a:spcPts val="0"/>
+              </a:spcAft>
+              <a:buFont typeface="Arial" panose="020B0604020202020204" pitchFamily="34" charset="0"/>
+              <a:buChar char="•"/>
+            </a:pPr>
+            <a:endParaRPr lang="en-US" altLang="en-US" sz="1600">
+              <a:solidFill>
+                <a:srgbClr val="171717"/>
+              </a:solidFill>
+              <a:latin typeface="Plus Jakarta Sans Light"/>
+              <a:ea typeface="Plus Jakarta Sans Light"/>
+              <a:cs typeface="Plus Jakarta Sans Light"/>
+              <a:sym typeface="Plus Jakarta Sans Light"/>
+            </a:endParaRPr>
+          </a:p>
+          <a:p>
+            <a:pPr marL="285750" lvl="0" indent="-285750" algn="l" rtl="0">
+              <a:lnSpc>
+                <a:spcPct val="115000"/>
+              </a:lnSpc>
+              <a:spcBef>
+                <a:spcPts val="0"/>
+              </a:spcBef>
+              <a:spcAft>
+                <a:spcPts val="0"/>
+              </a:spcAft>
+              <a:buFont typeface="Arial" panose="020B0604020202020204" pitchFamily="34" charset="0"/>
+              <a:buChar char="•"/>
+            </a:pPr>
+            <a:r>
+              <a:rPr lang="en-US" altLang="en-US" sz="1600">
+                <a:solidFill>
+                  <a:srgbClr val="171717"/>
+                </a:solidFill>
+                <a:latin typeface="Plus Jakarta Sans Light"/>
+                <a:ea typeface="Plus Jakarta Sans Light"/>
+                <a:cs typeface="Plus Jakarta Sans Light"/>
+                <a:sym typeface="Plus Jakarta Sans Light"/>
+              </a:rPr>
+              <a:t>Identificar los 9 pilares de la Industria 4.0.</a:t>
+            </a:r>
+          </a:p>
+          <a:p>
+            <a:pPr marL="285750" lvl="0" indent="-285750" algn="l" rtl="0">
+              <a:lnSpc>
+                <a:spcPct val="115000"/>
+              </a:lnSpc>
+              <a:spcBef>
+                <a:spcPts val="0"/>
+              </a:spcBef>
+              <a:spcAft>
+                <a:spcPts val="0"/>
+              </a:spcAft>
+              <a:buFont typeface="Arial" panose="020B0604020202020204" pitchFamily="34" charset="0"/>
+              <a:buChar char="•"/>
+            </a:pPr>
+            <a:endParaRPr lang="en-US" altLang="en-US" sz="1600">
+              <a:solidFill>
+                <a:srgbClr val="171717"/>
+              </a:solidFill>
+              <a:latin typeface="Plus Jakarta Sans Light"/>
+              <a:ea typeface="Plus Jakarta Sans Light"/>
+              <a:cs typeface="Plus Jakarta Sans Light"/>
+              <a:sym typeface="Plus Jakarta Sans Light"/>
+            </a:endParaRPr>
+          </a:p>
+          <a:p>
+            <a:pPr marL="285750" lvl="0" indent="-285750" algn="l" rtl="0">
+              <a:lnSpc>
+                <a:spcPct val="115000"/>
+              </a:lnSpc>
+              <a:spcBef>
+                <a:spcPts val="0"/>
+              </a:spcBef>
+              <a:spcAft>
+                <a:spcPts val="0"/>
+              </a:spcAft>
+              <a:buFont typeface="Arial" panose="020B0604020202020204" pitchFamily="34" charset="0"/>
+              <a:buChar char="•"/>
+            </a:pPr>
+            <a:r>
+              <a:rPr lang="en-US" altLang="en-US" sz="1600">
+                <a:solidFill>
+                  <a:srgbClr val="171717"/>
+                </a:solidFill>
+                <a:latin typeface="Plus Jakarta Sans Light"/>
+                <a:ea typeface="Plus Jakarta Sans Light"/>
+                <a:cs typeface="Plus Jakarta Sans Light"/>
+                <a:sym typeface="Plus Jakarta Sans Light"/>
+              </a:rPr>
+              <a:t>Analizar el impacto de IoT y Big Data.</a:t>
+            </a:r>
+          </a:p>
+          <a:p>
+            <a:pPr marL="285750" lvl="0" indent="-285750" algn="l" rtl="0">
+              <a:lnSpc>
+                <a:spcPct val="115000"/>
+              </a:lnSpc>
+              <a:spcBef>
+                <a:spcPts val="0"/>
+              </a:spcBef>
+              <a:spcAft>
+                <a:spcPts val="0"/>
+              </a:spcAft>
+              <a:buFont typeface="Arial" panose="020B0604020202020204" pitchFamily="34" charset="0"/>
+              <a:buChar char="•"/>
+            </a:pPr>
+            <a:endParaRPr lang="en-US" altLang="en-US" sz="1600">
+              <a:solidFill>
+                <a:srgbClr val="171717"/>
+              </a:solidFill>
+              <a:latin typeface="Plus Jakarta Sans Light"/>
+              <a:ea typeface="Plus Jakarta Sans Light"/>
+              <a:cs typeface="Plus Jakarta Sans Light"/>
+              <a:sym typeface="Plus Jakarta Sans Light"/>
+            </a:endParaRPr>
+          </a:p>
+          <a:p>
+            <a:pPr marL="285750" lvl="0" indent="-285750" algn="l" rtl="0">
+              <a:lnSpc>
+                <a:spcPct val="115000"/>
+              </a:lnSpc>
+              <a:spcBef>
+                <a:spcPts val="0"/>
+              </a:spcBef>
+              <a:spcAft>
+                <a:spcPts val="0"/>
+              </a:spcAft>
+              <a:buFont typeface="Arial" panose="020B0604020202020204" pitchFamily="34" charset="0"/>
+              <a:buChar char="•"/>
+            </a:pPr>
+            <a:r>
+              <a:rPr lang="en-US" altLang="en-US" sz="1600">
+                <a:solidFill>
+                  <a:srgbClr val="171717"/>
+                </a:solidFill>
+                <a:latin typeface="Plus Jakarta Sans Light"/>
+                <a:ea typeface="Plus Jakarta Sans Light"/>
+                <a:cs typeface="Plus Jakarta Sans Light"/>
+                <a:sym typeface="Plus Jakarta Sans Light"/>
+              </a:rPr>
+              <a:t>Diseñar un plan ejecutivo data-driven.</a:t>
+            </a:r>
+          </a:p>
+          <a:p>
+            <a:pPr marL="285750" lvl="0" indent="-285750" algn="l" rtl="0">
+              <a:lnSpc>
+                <a:spcPct val="115000"/>
+              </a:lnSpc>
+              <a:spcBef>
+                <a:spcPts val="0"/>
+              </a:spcBef>
+              <a:spcAft>
+                <a:spcPts val="0"/>
+              </a:spcAft>
+              <a:buFont typeface="Arial" panose="020B0604020202020204" pitchFamily="34" charset="0"/>
+              <a:buChar char="•"/>
+            </a:pPr>
+            <a:endParaRPr lang="es-AR" altLang="en-US" sz="1600">
+              <a:solidFill>
+                <a:srgbClr val="171717"/>
+              </a:solidFill>
+              <a:latin typeface="Plus Jakarta Sans Light"/>
+              <a:ea typeface="Plus Jakarta Sans Light"/>
+              <a:cs typeface="Plus Jakarta Sans Light"/>
+              <a:sym typeface="Plus Jakarta Sans Light"/>
+            </a:endParaRPr>
+          </a:p>
+          <a:p>
+            <a:pPr marL="285750" lvl="0" indent="-285750" algn="l" rtl="0">
+              <a:lnSpc>
+                <a:spcPct val="115000"/>
+              </a:lnSpc>
+              <a:spcBef>
+                <a:spcPts val="0"/>
+              </a:spcBef>
+              <a:spcAft>
+                <a:spcPts val="0"/>
+              </a:spcAft>
+              <a:buFont typeface="Arial" panose="020B0604020202020204" pitchFamily="34" charset="0"/>
+              <a:buChar char="•"/>
+            </a:pPr>
+            <a:r>
+              <a:rPr lang="es-AR" altLang="en-US" sz="1600">
+                <a:solidFill>
+                  <a:srgbClr val="171717"/>
+                </a:solidFill>
+                <a:latin typeface="Plus Jakarta Sans Light"/>
+                <a:ea typeface="Plus Jakarta Sans Light"/>
+                <a:cs typeface="Plus Jakarta Sans Light"/>
+                <a:sym typeface="Plus Jakarta Sans Light"/>
+              </a:rPr>
+              <a:t>Desarrollar algunas actividades grupales</a:t>
+            </a:r>
+          </a:p>
+        </p:txBody>
+      </p:sp>
+      <p:sp>
+        <p:nvSpPr>
+          <p:cNvPr id="242" name="Google Shape;242;p38"/>
+          <p:cNvSpPr txBox="1"/>
+          <p:nvPr/>
+        </p:nvSpPr>
+        <p:spPr>
+          <a:xfrm>
+            <a:off x="803275" y="879475"/>
+            <a:ext cx="9618980" cy="1120140"/>
+          </a:xfrm>
+          <a:prstGeom prst="rect">
+            <a:avLst/>
+          </a:prstGeom>
+          <a:noFill/>
+          <a:ln>
+            <a:noFill/>
+          </a:ln>
+        </p:spPr>
+        <p:txBody>
+          <a:bodyPr spcFirstLastPara="1" wrap="square" lIns="121900" tIns="121900" rIns="121900" bIns="121900" anchor="t" anchorCtr="0">
+            <a:noAutofit/>
+          </a:bodyPr>
+          <a:lstStyle/>
+          <a:p>
+            <a:pPr marL="0" lvl="0" indent="0" algn="l" rtl="0">
+              <a:spcBef>
+                <a:spcPts val="0"/>
+              </a:spcBef>
+              <a:spcAft>
+                <a:spcPts val="0"/>
+              </a:spcAft>
+              <a:buNone/>
+            </a:pPr>
+            <a:r>
+              <a:rPr lang="en-US" altLang="en-US" sz="6400">
                 <a:solidFill>
                   <a:srgbClr val="FF632B"/>
                 </a:solidFill>
@@ -12159,60 +12818,8 @@
                 <a:cs typeface="Plus Jakarta Sans ExtraBold"/>
                 <a:sym typeface="Plus Jakarta Sans ExtraBold"/>
               </a:rPr>
-              <a:t>Linea del tiempo</a:t>
-            </a:r>
-          </a:p>
-        </p:txBody>
-      </p:sp>
-      <p:pic>
-        <p:nvPicPr>
-          <p:cNvPr id="2" name="Picture 1"/>
-          <p:cNvPicPr/>
-          <p:nvPr/>
-        </p:nvPicPr>
-        <p:blipFill>
-          <a:blip r:embed="rId3"/>
-          <a:stretch>
-            <a:fillRect/>
-          </a:stretch>
-        </p:blipFill>
-        <p:spPr>
-          <a:xfrm>
-            <a:off x="1506855" y="1734185"/>
-            <a:ext cx="9178290" cy="4661535"/>
-          </a:xfrm>
-          <a:prstGeom prst="rect">
-            <a:avLst/>
-          </a:prstGeom>
-        </p:spPr>
-      </p:pic>
-      <p:sp>
-        <p:nvSpPr>
-          <p:cNvPr id="3" name="Text Box 0"/>
-          <p:cNvSpPr txBox="1"/>
-          <p:nvPr/>
-        </p:nvSpPr>
-        <p:spPr>
-          <a:xfrm>
-            <a:off x="3048000" y="6395720"/>
-            <a:ext cx="6096000" cy="368300"/>
-          </a:xfrm>
-          <a:prstGeom prst="rect">
-            <a:avLst/>
-          </a:prstGeom>
-          <a:noFill/>
-        </p:spPr>
-        <p:txBody>
-          <a:bodyPr wrap="square" rtlCol="0" anchor="t">
-            <a:spAutoFit/>
-          </a:bodyPr>
-          <a:lstStyle/>
-          <a:p>
-            <a:r>
-              <a:rPr lang="en-US" altLang="en-US"/>
-              <a:t>https://www.youtube.com/watch?v=iMHQZPXLbyg</a:t>
-            </a:r>
-            <a:endParaRPr lang="en-US"/>
+              <a:t>Objetivos de la Sesión</a:t>
+            </a:r>
           </a:p>
         </p:txBody>
       </p:sp>
@@ -12225,6 +12832,80 @@
 </file>
 
 <file path=ppt/slides/slide8.xml><?xml version="1.0" encoding="utf-8"?>
+<p:sld xmlns:a="http://schemas.openxmlformats.org/drawingml/2006/main" xmlns:r="http://schemas.openxmlformats.org/officeDocument/2006/relationships" xmlns:p="http://schemas.openxmlformats.org/presentationml/2006/main">
+  <p:cSld>
+    <p:spTree>
+      <p:nvGrpSpPr>
+        <p:cNvPr id="1" name="Shape 228"/>
+        <p:cNvGrpSpPr/>
+        <p:nvPr/>
+      </p:nvGrpSpPr>
+      <p:grpSpPr>
+        <a:xfrm>
+          <a:off x="0" y="0"/>
+          <a:ext cx="0" cy="0"/>
+          <a:chOff x="0" y="0"/>
+          <a:chExt cx="0" cy="0"/>
+        </a:xfrm>
+      </p:grpSpPr>
+      <p:sp>
+        <p:nvSpPr>
+          <p:cNvPr id="230" name="Google Shape;230;p36"/>
+          <p:cNvSpPr txBox="1"/>
+          <p:nvPr/>
+        </p:nvSpPr>
+        <p:spPr>
+          <a:xfrm>
+            <a:off x="855345" y="4450080"/>
+            <a:ext cx="10272395" cy="1120140"/>
+          </a:xfrm>
+          <a:prstGeom prst="rect">
+            <a:avLst/>
+          </a:prstGeom>
+          <a:noFill/>
+          <a:ln>
+            <a:noFill/>
+          </a:ln>
+        </p:spPr>
+        <p:txBody>
+          <a:bodyPr spcFirstLastPara="1" wrap="square" lIns="121900" tIns="121900" rIns="121900" bIns="121900" anchor="t" anchorCtr="0">
+            <a:noAutofit/>
+          </a:bodyPr>
+          <a:lstStyle/>
+          <a:p>
+            <a:pPr marL="0" lvl="0" indent="0" algn="l" rtl="0">
+              <a:spcBef>
+                <a:spcPts val="0"/>
+              </a:spcBef>
+              <a:spcAft>
+                <a:spcPts val="0"/>
+              </a:spcAft>
+              <a:buNone/>
+            </a:pPr>
+            <a:r>
+              <a:rPr lang="en-US" altLang="en-US" sz="4800">
+                <a:solidFill>
+                  <a:srgbClr val="F8F2E8"/>
+                </a:solidFill>
+                <a:latin typeface="Plus Jakarta Sans ExtraBold"/>
+                <a:ea typeface="Plus Jakarta Sans ExtraBold"/>
+                <a:cs typeface="Plus Jakarta Sans ExtraBold"/>
+                <a:sym typeface="Plus Jakarta Sans ExtraBold"/>
+              </a:rPr>
+              <a:t>La Línea del Tiempo (Evolución)</a:t>
+            </a:r>
+          </a:p>
+        </p:txBody>
+      </p:sp>
+    </p:spTree>
+  </p:cSld>
+  <p:clrMapOvr>
+    <a:masterClrMapping/>
+  </p:clrMapOvr>
+</p:sld>
+</file>
+
+<file path=ppt/slides/slide9.xml><?xml version="1.0" encoding="utf-8"?>
 <p:sld xmlns:a="http://schemas.openxmlformats.org/drawingml/2006/main" xmlns:r="http://schemas.openxmlformats.org/officeDocument/2006/relationships" xmlns:p="http://schemas.openxmlformats.org/presentationml/2006/main">
   <p:cSld>
     <p:spTree>
@@ -12276,7 +12957,7 @@
               <a:buNone/>
             </a:pPr>
             <a:r>
-              <a:rPr lang="en-US" altLang="en-US" sz="6400">
+              <a:rPr lang="es-AR" altLang="en-US" sz="6400">
                 <a:solidFill>
                   <a:srgbClr val="FF632B"/>
                 </a:solidFill>
@@ -12285,160 +12966,7 @@
                 <a:cs typeface="Plus Jakarta Sans ExtraBold"/>
                 <a:sym typeface="Plus Jakarta Sans ExtraBold"/>
               </a:rPr>
-              <a:t>¿Qué es realmente Industria 4.0?</a:t>
-            </a:r>
-          </a:p>
-        </p:txBody>
-      </p:sp>
-      <p:sp>
-        <p:nvSpPr>
-          <p:cNvPr id="241" name="Google Shape;241;p38"/>
-          <p:cNvSpPr txBox="1"/>
-          <p:nvPr/>
-        </p:nvSpPr>
-        <p:spPr>
-          <a:xfrm>
-            <a:off x="985433" y="3308567"/>
-            <a:ext cx="10420800" cy="3026000"/>
-          </a:xfrm>
-          <a:prstGeom prst="rect">
-            <a:avLst/>
-          </a:prstGeom>
-          <a:noFill/>
-          <a:ln>
-            <a:noFill/>
-          </a:ln>
-        </p:spPr>
-        <p:txBody>
-          <a:bodyPr spcFirstLastPara="1" wrap="square" lIns="121900" tIns="121900" rIns="121900" bIns="121900" anchor="t" anchorCtr="0">
-            <a:noAutofit/>
-          </a:bodyPr>
-          <a:lstStyle/>
-          <a:p>
-            <a:pPr marL="0" lvl="0" indent="0" algn="l" rtl="0">
-              <a:lnSpc>
-                <a:spcPct val="115000"/>
-              </a:lnSpc>
-              <a:spcBef>
-                <a:spcPts val="0"/>
-              </a:spcBef>
-              <a:spcAft>
-                <a:spcPts val="0"/>
-              </a:spcAft>
-              <a:buNone/>
-            </a:pPr>
-            <a:r>
-              <a:rPr lang="en-US" altLang="en-US" sz="1600" b="1">
-                <a:solidFill>
-                  <a:srgbClr val="171717"/>
-                </a:solidFill>
-                <a:latin typeface="Plus Jakarta Sans Light"/>
-                <a:ea typeface="Plus Jakarta Sans Light"/>
-                <a:cs typeface="Plus Jakarta Sans Light"/>
-                <a:sym typeface="Plus Jakarta Sans Light"/>
-              </a:rPr>
-              <a:t>Concepto Central:</a:t>
-            </a:r>
-          </a:p>
-          <a:p>
-            <a:pPr marL="0" lvl="0" indent="0" algn="l" rtl="0">
-              <a:lnSpc>
-                <a:spcPct val="115000"/>
-              </a:lnSpc>
-              <a:spcBef>
-                <a:spcPts val="0"/>
-              </a:spcBef>
-              <a:spcAft>
-                <a:spcPts val="0"/>
-              </a:spcAft>
-              <a:buNone/>
-            </a:pPr>
-            <a:r>
-              <a:rPr lang="en-US" altLang="en-US" sz="1600">
-                <a:solidFill>
-                  <a:srgbClr val="171717"/>
-                </a:solidFill>
-                <a:latin typeface="Plus Jakarta Sans Light"/>
-                <a:ea typeface="Plus Jakarta Sans Light"/>
-                <a:cs typeface="Plus Jakarta Sans Light"/>
-                <a:sym typeface="Plus Jakarta Sans Light"/>
-              </a:rPr>
-              <a:t>No es solo tecnología, es la integración de datos para crear valor.</a:t>
-            </a:r>
-          </a:p>
-          <a:p>
-            <a:pPr marL="0" lvl="0" indent="0" algn="l" rtl="0">
-              <a:lnSpc>
-                <a:spcPct val="115000"/>
-              </a:lnSpc>
-              <a:spcBef>
-                <a:spcPts val="0"/>
-              </a:spcBef>
-              <a:spcAft>
-                <a:spcPts val="0"/>
-              </a:spcAft>
-              <a:buNone/>
-            </a:pPr>
-            <a:endParaRPr lang="en-US" altLang="en-US" sz="1600">
-              <a:solidFill>
-                <a:srgbClr val="171717"/>
-              </a:solidFill>
-              <a:latin typeface="Plus Jakarta Sans Light"/>
-              <a:ea typeface="Plus Jakarta Sans Light"/>
-              <a:cs typeface="Plus Jakarta Sans Light"/>
-              <a:sym typeface="Plus Jakarta Sans Light"/>
-            </a:endParaRPr>
-          </a:p>
-          <a:p>
-            <a:pPr marL="0" lvl="0" indent="0" algn="l" rtl="0">
-              <a:lnSpc>
-                <a:spcPct val="115000"/>
-              </a:lnSpc>
-              <a:spcBef>
-                <a:spcPts val="0"/>
-              </a:spcBef>
-              <a:spcAft>
-                <a:spcPts val="0"/>
-              </a:spcAft>
-              <a:buNone/>
-            </a:pPr>
-            <a:r>
-              <a:rPr lang="en-US" altLang="en-US" sz="1600" b="1">
-                <a:solidFill>
-                  <a:srgbClr val="171717"/>
-                </a:solidFill>
-                <a:latin typeface="Plus Jakarta Sans Light"/>
-                <a:ea typeface="Plus Jakarta Sans Light"/>
-                <a:cs typeface="Plus Jakarta Sans Light"/>
-                <a:sym typeface="Plus Jakarta Sans Light"/>
-              </a:rPr>
-              <a:t>Definición: </a:t>
-            </a:r>
-          </a:p>
-          <a:p>
-            <a:pPr marL="0" lvl="0" indent="0" algn="l" rtl="0">
-              <a:lnSpc>
-                <a:spcPct val="115000"/>
-              </a:lnSpc>
-              <a:spcBef>
-                <a:spcPts val="0"/>
-              </a:spcBef>
-              <a:spcAft>
-                <a:spcPts val="0"/>
-              </a:spcAft>
-              <a:buNone/>
-            </a:pPr>
-            <a:r>
-              <a:rPr lang="en-US" altLang="en-US" sz="1600">
-                <a:solidFill>
-                  <a:srgbClr val="171717"/>
-                </a:solidFill>
-                <a:latin typeface="Plus Jakarta Sans Light"/>
-                <a:ea typeface="Plus Jakarta Sans Light"/>
-                <a:cs typeface="Plus Jakarta Sans Light"/>
-                <a:sym typeface="Plus Jakarta Sans Light"/>
-              </a:rPr>
-              <a:t>Sistemas donde el mundo físico y el digital convergen (Sistemas Ciberfísicos).</a:t>
+              <a:t>Linea del tiempo</a:t>
             </a:r>
           </a:p>
         </p:txBody>
@@ -12457,176 +12985,44 @@
         </p:blipFill>
         <p:spPr>
           <a:xfrm>
-            <a:off x="9051925" y="4335780"/>
-            <a:ext cx="2354580" cy="1242060"/>
+            <a:off x="1506855" y="1734185"/>
+            <a:ext cx="9178290" cy="4661535"/>
           </a:xfrm>
           <a:prstGeom prst="rect">
             <a:avLst/>
           </a:prstGeom>
         </p:spPr>
       </p:pic>
-      <p:pic>
-        <p:nvPicPr>
-          <p:cNvPr id="3" name="Picture 2"/>
-          <p:cNvPicPr/>
-          <p:nvPr/>
-        </p:nvPicPr>
-        <p:blipFill>
-          <a:blip r:embed="rId4"/>
-          <a:stretch>
-            <a:fillRect/>
-          </a:stretch>
-        </p:blipFill>
-        <p:spPr>
-          <a:xfrm>
-            <a:off x="4623435" y="5172710"/>
-            <a:ext cx="2095499" cy="1394460"/>
-          </a:xfrm>
-          <a:prstGeom prst="rect">
-            <a:avLst/>
-          </a:prstGeom>
-        </p:spPr>
-      </p:pic>
-      <p:pic>
-        <p:nvPicPr>
-          <p:cNvPr id="4" name="Picture 3"/>
-          <p:cNvPicPr/>
-          <p:nvPr/>
-        </p:nvPicPr>
-        <p:blipFill>
-          <a:blip r:embed="rId5"/>
-          <a:stretch>
-            <a:fillRect/>
-          </a:stretch>
-        </p:blipFill>
-        <p:spPr>
-          <a:xfrm>
-            <a:off x="8899525" y="1965960"/>
-            <a:ext cx="2658745" cy="2160270"/>
-          </a:xfrm>
-          <a:prstGeom prst="rect">
-            <a:avLst/>
-          </a:prstGeom>
-        </p:spPr>
-      </p:pic>
-    </p:spTree>
-  </p:cSld>
-  <p:clrMapOvr>
-    <a:masterClrMapping/>
-  </p:clrMapOvr>
-</p:sld>
-</file>
-
-<file path=ppt/slides/slide9.xml><?xml version="1.0" encoding="utf-8"?>
-<p:sld xmlns:a="http://schemas.openxmlformats.org/drawingml/2006/main" xmlns:r="http://schemas.openxmlformats.org/officeDocument/2006/relationships" xmlns:p="http://schemas.openxmlformats.org/presentationml/2006/main">
-  <p:cSld>
-    <p:spTree>
-      <p:nvGrpSpPr>
-        <p:cNvPr id="1" name=""/>
-        <p:cNvGrpSpPr/>
-        <p:nvPr/>
-      </p:nvGrpSpPr>
-      <p:grpSpPr>
-        <a:xfrm>
-          <a:off x="0" y="0"/>
-          <a:ext cx="0" cy="0"/>
-          <a:chOff x="0" y="0"/>
-          <a:chExt cx="0" cy="0"/>
-        </a:xfrm>
-      </p:grpSpPr>
-      <p:pic>
-        <p:nvPicPr>
-          <p:cNvPr id="2" name="Picture 1"/>
-          <p:cNvPicPr/>
-          <p:nvPr/>
-        </p:nvPicPr>
-        <p:blipFill>
-          <a:blip r:embed="rId2"/>
-          <a:stretch>
-            <a:fillRect/>
-          </a:stretch>
-        </p:blipFill>
-        <p:spPr>
-          <a:xfrm>
-            <a:off x="378460" y="1927225"/>
-            <a:ext cx="4148455" cy="3003550"/>
-          </a:xfrm>
-          <a:prstGeom prst="rect">
-            <a:avLst/>
-          </a:prstGeom>
-        </p:spPr>
-      </p:pic>
-      <p:sp>
-        <p:nvSpPr>
-          <p:cNvPr id="242" name="Google Shape;242;p38"/>
+      <p:sp>
+        <p:nvSpPr>
+          <p:cNvPr id="3" name="Text Box 0"/>
           <p:cNvSpPr txBox="1"/>
           <p:nvPr/>
         </p:nvSpPr>
         <p:spPr>
           <a:xfrm>
-            <a:off x="803200" y="614037"/>
-            <a:ext cx="8617200" cy="1120400"/>
+            <a:off x="3048000" y="6395720"/>
+            <a:ext cx="6096000" cy="368300"/>
           </a:xfrm>
           <a:prstGeom prst="rect">
             <a:avLst/>
           </a:prstGeom>
           <a:noFill/>
-          <a:ln>
-            <a:noFill/>
-          </a:ln>
-        </p:spPr>
-        <p:txBody>
-          <a:bodyPr spcFirstLastPara="1" wrap="square" lIns="121900" tIns="121900" rIns="121900" bIns="121900" anchor="t" anchorCtr="0">
-            <a:noAutofit/>
+        </p:spPr>
+        <p:txBody>
+          <a:bodyPr wrap="square" rtlCol="0" anchor="t">
+            <a:spAutoFit/>
           </a:bodyPr>
           <a:lstStyle/>
           <a:p>
-            <a:pPr marL="0" lvl="0" indent="0" algn="l" rtl="0">
-              <a:spcBef>
-                <a:spcPts val="0"/>
-              </a:spcBef>
-              <a:spcAft>
-                <a:spcPts val="0"/>
-              </a:spcAft>
-              <a:buNone/>
-            </a:pPr>
-            <a:r>
-              <a:rPr lang="es-AR" altLang="en-US" sz="6400">
-                <a:solidFill>
-                  <a:srgbClr val="FF632B"/>
-                </a:solidFill>
-                <a:latin typeface="Plus Jakarta Sans ExtraBold"/>
-                <a:ea typeface="Plus Jakarta Sans ExtraBold"/>
-                <a:cs typeface="Plus Jakarta Sans ExtraBold"/>
-                <a:sym typeface="Plus Jakarta Sans ExtraBold"/>
-              </a:rPr>
-              <a:t>Ejemplos Peajes </a:t>
-            </a:r>
-          </a:p>
-        </p:txBody>
-      </p:sp>
-      <p:pic>
-        <p:nvPicPr>
-          <p:cNvPr id="3" name="Picture 2"/>
-          <p:cNvPicPr/>
-          <p:nvPr/>
-        </p:nvPicPr>
-        <p:blipFill>
-          <a:blip r:embed="rId3"/>
-          <a:stretch>
-            <a:fillRect/>
-          </a:stretch>
-        </p:blipFill>
-        <p:spPr>
-          <a:xfrm>
-            <a:off x="5893435" y="1864995"/>
-            <a:ext cx="4728845" cy="3065780"/>
-          </a:xfrm>
-          <a:prstGeom prst="rect">
-            <a:avLst/>
-          </a:prstGeom>
-        </p:spPr>
-      </p:pic>
+            <a:r>
+              <a:rPr lang="en-US" altLang="en-US"/>
+              <a:t>https://www.youtube.com/watch?v=iMHQZPXLbyg</a:t>
+            </a:r>
+            <a:endParaRPr lang="en-US"/>
+          </a:p>
+        </p:txBody>
+      </p:sp>
     </p:spTree>
   </p:cSld>
   <p:clrMapOvr>
